--- a/docs/public/course-assets/course-pptx/in-006.pptx
+++ b/docs/public/course-assets/course-pptx/in-006.pptx
@@ -2,25 +2,25 @@
 <file path=ppt/presentation.xml><?xml version="1.0" encoding="utf-8"?>
 <p:presentation xmlns:p="http://schemas.openxmlformats.org/presentationml/2006/main">
   <p:sldMasterIdLst>
-    <p:sldMasterId xmlns:r="http://schemas.openxmlformats.org/officeDocument/2006/relationships" id="2147483648" r:id="Rc434396dcd6541ab"/>
+    <p:sldMasterId xmlns:r="http://schemas.openxmlformats.org/officeDocument/2006/relationships" id="2147483648" r:id="Rb16fddf697f84b03"/>
   </p:sldMasterIdLst>
   <p:notesMasterIdLst>
-    <p:notesMasterId xmlns:r="http://schemas.openxmlformats.org/officeDocument/2006/relationships" r:id="R48af32dc50c24312"/>
+    <p:notesMasterId xmlns:r="http://schemas.openxmlformats.org/officeDocument/2006/relationships" r:id="R45c581676d1b4f42"/>
   </p:notesMasterIdLst>
   <p:sldIdLst>
-    <p:sldId xmlns:r="http://schemas.openxmlformats.org/officeDocument/2006/relationships" id="256" r:id="Rd92d2c7598fd4d8b"/>
-    <p:sldId xmlns:r="http://schemas.openxmlformats.org/officeDocument/2006/relationships" id="257" r:id="R4025d137aa324958"/>
-    <p:sldId xmlns:r="http://schemas.openxmlformats.org/officeDocument/2006/relationships" id="258" r:id="R4e9ab158d6534aee"/>
-    <p:sldId xmlns:r="http://schemas.openxmlformats.org/officeDocument/2006/relationships" id="259" r:id="R7451bc7565804e4c"/>
-    <p:sldId xmlns:r="http://schemas.openxmlformats.org/officeDocument/2006/relationships" id="260" r:id="Rfcd1ebc6a1d7457f"/>
-    <p:sldId xmlns:r="http://schemas.openxmlformats.org/officeDocument/2006/relationships" id="261" r:id="R4489880486684093"/>
-    <p:sldId xmlns:r="http://schemas.openxmlformats.org/officeDocument/2006/relationships" id="262" r:id="Rbbf4bab679a243d9"/>
-    <p:sldId xmlns:r="http://schemas.openxmlformats.org/officeDocument/2006/relationships" id="263" r:id="R5a9c97b6e8ec4dea"/>
-    <p:sldId xmlns:r="http://schemas.openxmlformats.org/officeDocument/2006/relationships" id="264" r:id="R60b753f9a9344478"/>
-    <p:sldId xmlns:r="http://schemas.openxmlformats.org/officeDocument/2006/relationships" id="265" r:id="Rce050e504e184582"/>
-    <p:sldId xmlns:r="http://schemas.openxmlformats.org/officeDocument/2006/relationships" id="266" r:id="Rbe989af2ca48426d"/>
-    <p:sldId xmlns:r="http://schemas.openxmlformats.org/officeDocument/2006/relationships" id="267" r:id="R49c0f5dd56f84e8b"/>
-    <p:sldId xmlns:r="http://schemas.openxmlformats.org/officeDocument/2006/relationships" id="268" r:id="R2f0c0ac6b9bc4495"/>
+    <p:sldId xmlns:r="http://schemas.openxmlformats.org/officeDocument/2006/relationships" id="256" r:id="Rbaaeee02fb074d93"/>
+    <p:sldId xmlns:r="http://schemas.openxmlformats.org/officeDocument/2006/relationships" id="257" r:id="R502efbb59b9046af"/>
+    <p:sldId xmlns:r="http://schemas.openxmlformats.org/officeDocument/2006/relationships" id="258" r:id="Rd6de269821a34058"/>
+    <p:sldId xmlns:r="http://schemas.openxmlformats.org/officeDocument/2006/relationships" id="259" r:id="R7b8c5feeec974585"/>
+    <p:sldId xmlns:r="http://schemas.openxmlformats.org/officeDocument/2006/relationships" id="260" r:id="R97dba9ebf0794a74"/>
+    <p:sldId xmlns:r="http://schemas.openxmlformats.org/officeDocument/2006/relationships" id="261" r:id="R9ba4b00145254de4"/>
+    <p:sldId xmlns:r="http://schemas.openxmlformats.org/officeDocument/2006/relationships" id="262" r:id="R74dc08c8568b417f"/>
+    <p:sldId xmlns:r="http://schemas.openxmlformats.org/officeDocument/2006/relationships" id="263" r:id="R0f8904db130f4bc0"/>
+    <p:sldId xmlns:r="http://schemas.openxmlformats.org/officeDocument/2006/relationships" id="264" r:id="R2398abe82d7643bb"/>
+    <p:sldId xmlns:r="http://schemas.openxmlformats.org/officeDocument/2006/relationships" id="265" r:id="R4c583fa232074435"/>
+    <p:sldId xmlns:r="http://schemas.openxmlformats.org/officeDocument/2006/relationships" id="266" r:id="Ra78adb5bbf7f4524"/>
+    <p:sldId xmlns:r="http://schemas.openxmlformats.org/officeDocument/2006/relationships" id="267" r:id="Ra961618c9ca9484f"/>
+    <p:sldId xmlns:r="http://schemas.openxmlformats.org/officeDocument/2006/relationships" id="268" r:id="R3aa7377db165469e"/>
   </p:sldIdLst>
   <p:sldSz cx="12192000" cy="6858000"/>
   <p:notesSz cx="6858000" cy="9144000"/>
@@ -1405,7 +1405,7 @@
   </p:cSld>
   <p:clrMap bg1="lt1" tx1="dk1" bg2="lt2" tx2="dk2" accent1="accent1" accent2="accent2" accent3="accent3" accent4="accent4" accent5="accent5" accent6="accent6" hlink="hlink" folHlink="folHlink"/>
   <p:sldLayoutIdLst>
-    <p:sldLayoutId xmlns:r="http://schemas.openxmlformats.org/officeDocument/2006/relationships" id="2147483649" r:id="Rb135c29f50874d9a"/>
+    <p:sldLayoutId xmlns:r="http://schemas.openxmlformats.org/officeDocument/2006/relationships" id="2147483649" r:id="R7fd44df6a74e4104"/>
   </p:sldLayoutIdLst>
   <p:txStyles>
     <p:titleStyle>
@@ -1956,7 +1956,7 @@
           <p:cNvPr id="1" name="cover-rule">
             <a:extLst xmlns:a="http://schemas.openxmlformats.org/drawingml/2006/main">
               <a:ext uri="{FF2B5EF4-FFF2-40B4-BE49-F238E27FC236}">
-                <a16:creationId xmlns:a16="http://schemas.microsoft.com/office/drawing/2014/main" id="{C7496106-8102-4C74-AB7B-ED4F23DAD6C5}"/>
+                <a16:creationId xmlns:a16="http://schemas.microsoft.com/office/drawing/2014/main" id="{214936D8-77C9-4BDE-AA90-223427EB1F02}"/>
               </a:ext>
             </a:extLst>
           </p:cNvPr>
@@ -1989,7 +1989,7 @@
           <p:cNvPr id="2" name="cover-ring-1">
             <a:extLst xmlns:a="http://schemas.openxmlformats.org/drawingml/2006/main">
               <a:ext uri="{FF2B5EF4-FFF2-40B4-BE49-F238E27FC236}">
-                <a16:creationId xmlns:a16="http://schemas.microsoft.com/office/drawing/2014/main" id="{78BD84BD-FA7B-45DF-B98B-C1FFD1A489FD}"/>
+                <a16:creationId xmlns:a16="http://schemas.microsoft.com/office/drawing/2014/main" id="{D147EA4F-1951-48C1-86C0-9387121C5A85}"/>
               </a:ext>
             </a:extLst>
           </p:cNvPr>
@@ -2020,7 +2020,7 @@
           <p:cNvPr id="3" name="cover-ring-2">
             <a:extLst xmlns:a="http://schemas.openxmlformats.org/drawingml/2006/main">
               <a:ext uri="{FF2B5EF4-FFF2-40B4-BE49-F238E27FC236}">
-                <a16:creationId xmlns:a16="http://schemas.microsoft.com/office/drawing/2014/main" id="{868B382E-E61F-473D-9271-2E43862830D8}"/>
+                <a16:creationId xmlns:a16="http://schemas.microsoft.com/office/drawing/2014/main" id="{7450EC62-6BDC-40E7-B25A-7188656C4F19}"/>
               </a:ext>
             </a:extLst>
           </p:cNvPr>
@@ -2051,7 +2051,7 @@
           <p:cNvPr id="4" name="cover-core">
             <a:extLst xmlns:a="http://schemas.openxmlformats.org/drawingml/2006/main">
               <a:ext uri="{FF2B5EF4-FFF2-40B4-BE49-F238E27FC236}">
-                <a16:creationId xmlns:a16="http://schemas.microsoft.com/office/drawing/2014/main" id="{55E34D99-7551-4BAA-BC74-CC1EE5C4EF93}"/>
+                <a16:creationId xmlns:a16="http://schemas.microsoft.com/office/drawing/2014/main" id="{7FA2174D-56CE-4486-9AF9-7E9EC22B8883}"/>
               </a:ext>
             </a:extLst>
           </p:cNvPr>
@@ -2084,7 +2084,7 @@
           <p:cNvPr id="5" name="cover-line-1">
             <a:extLst xmlns:a="http://schemas.openxmlformats.org/drawingml/2006/main">
               <a:ext uri="{FF2B5EF4-FFF2-40B4-BE49-F238E27FC236}">
-                <a16:creationId xmlns:a16="http://schemas.microsoft.com/office/drawing/2014/main" id="{8311B451-6920-46F9-84A9-B224877B4762}"/>
+                <a16:creationId xmlns:a16="http://schemas.microsoft.com/office/drawing/2014/main" id="{AF92AC2C-1A89-494B-A030-C2B45B5116E3}"/>
               </a:ext>
             </a:extLst>
           </p:cNvPr>
@@ -2115,7 +2115,7 @@
           <p:cNvPr id="6" name="cover-line-2">
             <a:extLst xmlns:a="http://schemas.openxmlformats.org/drawingml/2006/main">
               <a:ext uri="{FF2B5EF4-FFF2-40B4-BE49-F238E27FC236}">
-                <a16:creationId xmlns:a16="http://schemas.microsoft.com/office/drawing/2014/main" id="{808C90C6-88AB-4F47-A5F4-F0CF9860A982}"/>
+                <a16:creationId xmlns:a16="http://schemas.microsoft.com/office/drawing/2014/main" id="{55DFB58B-F245-4515-B55B-A25D9DE336E8}"/>
               </a:ext>
             </a:extLst>
           </p:cNvPr>
@@ -2146,7 +2146,7 @@
           <p:cNvPr id="7" name="cover-eyebrow">
             <a:extLst xmlns:a="http://schemas.openxmlformats.org/drawingml/2006/main">
               <a:ext uri="{FF2B5EF4-FFF2-40B4-BE49-F238E27FC236}">
-                <a16:creationId xmlns:a16="http://schemas.microsoft.com/office/drawing/2014/main" id="{4C8123B3-267D-42A7-A692-97A09309DB4A}"/>
+                <a16:creationId xmlns:a16="http://schemas.microsoft.com/office/drawing/2014/main" id="{91F36BCA-7922-47E3-BD98-BC93CFCEF224}"/>
               </a:ext>
             </a:extLst>
           </p:cNvPr>
@@ -2204,7 +2204,7 @@
           <p:cNvPr id="8" name="cover-title">
             <a:extLst xmlns:a="http://schemas.openxmlformats.org/drawingml/2006/main">
               <a:ext uri="{FF2B5EF4-FFF2-40B4-BE49-F238E27FC236}">
-                <a16:creationId xmlns:a16="http://schemas.microsoft.com/office/drawing/2014/main" id="{91733D56-B424-41B4-86F5-74206FA9C998}"/>
+                <a16:creationId xmlns:a16="http://schemas.microsoft.com/office/drawing/2014/main" id="{08BA0120-341C-4DD3-BE62-1CFEC354CD99}"/>
               </a:ext>
             </a:extLst>
           </p:cNvPr>
@@ -2262,7 +2262,7 @@
           <p:cNvPr id="9" name="cover-subtitle">
             <a:extLst xmlns:a="http://schemas.openxmlformats.org/drawingml/2006/main">
               <a:ext uri="{FF2B5EF4-FFF2-40B4-BE49-F238E27FC236}">
-                <a16:creationId xmlns:a16="http://schemas.microsoft.com/office/drawing/2014/main" id="{173D0669-BDB2-4F54-9972-2170C32C893E}"/>
+                <a16:creationId xmlns:a16="http://schemas.microsoft.com/office/drawing/2014/main" id="{18B18695-5918-4269-BB24-AC17F80A7E2E}"/>
               </a:ext>
             </a:extLst>
           </p:cNvPr>
@@ -2324,7 +2324,7 @@
           <p:cNvPr id="10" name="cover-lead">
             <a:extLst xmlns:a="http://schemas.openxmlformats.org/drawingml/2006/main">
               <a:ext uri="{FF2B5EF4-FFF2-40B4-BE49-F238E27FC236}">
-                <a16:creationId xmlns:a16="http://schemas.microsoft.com/office/drawing/2014/main" id="{6A623853-6F13-41AF-8DCD-BA5A66F20C00}"/>
+                <a16:creationId xmlns:a16="http://schemas.microsoft.com/office/drawing/2014/main" id="{D3E1E9A3-BB26-4B4B-A8E0-E160E22072F7}"/>
               </a:ext>
             </a:extLst>
           </p:cNvPr>
@@ -2372,7 +2372,7 @@
                 <a:ea typeface="PingFang SC"/>
                 <a:cs typeface="PingFang SC"/>
               </a:rPr>
-              <a:t>机场是一套持续运行的交通系统。航班计划、实时状态、气象、机位、行李、设备工单、道路接驳和旅客服务彼此关联，任何一个系统延迟或对象编码不一致，都可能让看似合理的模型回答失去意义…</a:t>
+              <a:t>机场是一套持续运行的交通系统；航班计划、实时状态、气象、机位、行李、设备工单、道路接驳和旅客服务彼此关联；任何一个系统延迟或对象编码不一致；都可能让看似合理的模型回答失去意义</a:t>
             </a:r>
           </a:p>
         </p:txBody>
@@ -2382,7 +2382,7 @@
           <p:cNvPr id="11" name="cover-course">
             <a:extLst xmlns:a="http://schemas.openxmlformats.org/drawingml/2006/main">
               <a:ext uri="{FF2B5EF4-FFF2-40B4-BE49-F238E27FC236}">
-                <a16:creationId xmlns:a16="http://schemas.microsoft.com/office/drawing/2014/main" id="{8612ED5A-03D4-45D1-8B4F-F691F508A5B3}"/>
+                <a16:creationId xmlns:a16="http://schemas.microsoft.com/office/drawing/2014/main" id="{D31E840F-9C23-4C43-96BC-8BCBC5840825}"/>
               </a:ext>
             </a:extLst>
           </p:cNvPr>
@@ -2440,7 +2440,7 @@
           <p:cNvPr id="12" name="cover-id">
             <a:extLst xmlns:a="http://schemas.openxmlformats.org/drawingml/2006/main">
               <a:ext uri="{FF2B5EF4-FFF2-40B4-BE49-F238E27FC236}">
-                <a16:creationId xmlns:a16="http://schemas.microsoft.com/office/drawing/2014/main" id="{7259083C-3945-4E78-8D6F-BF03E435C268}"/>
+                <a16:creationId xmlns:a16="http://schemas.microsoft.com/office/drawing/2014/main" id="{30AEE29F-07BC-4A8B-8D9C-7F1522228D14}"/>
               </a:ext>
             </a:extLst>
           </p:cNvPr>
@@ -2496,7 +2496,7 @@
     </p:spTree>
     <p:extLst>
       <p:ext uri="{BB962C8B-B14F-4D97-AF65-F5344CB8AC3E}">
-        <p14:creationId xmlns:p14="http://schemas.microsoft.com/office/powerpoint/2010/main" val="298085448"/>
+        <p14:creationId xmlns:p14="http://schemas.microsoft.com/office/powerpoint/2010/main" val="1012311407"/>
       </p:ext>
     </p:extLst>
   </p:cSld>
@@ -2527,7 +2527,7 @@
           <p:cNvPr id="1" name="s10-rule">
             <a:extLst xmlns:a="http://schemas.openxmlformats.org/drawingml/2006/main">
               <a:ext uri="{FF2B5EF4-FFF2-40B4-BE49-F238E27FC236}">
-                <a16:creationId xmlns:a16="http://schemas.microsoft.com/office/drawing/2014/main" id="{DD155DE8-D7A4-45E5-B0CB-7C274CACE281}"/>
+                <a16:creationId xmlns:a16="http://schemas.microsoft.com/office/drawing/2014/main" id="{B51F5E16-8420-46B9-A469-C6452F878746}"/>
               </a:ext>
             </a:extLst>
           </p:cNvPr>
@@ -2560,7 +2560,7 @@
           <p:cNvPr id="2" name="s10-eyebrow">
             <a:extLst xmlns:a="http://schemas.openxmlformats.org/drawingml/2006/main">
               <a:ext uri="{FF2B5EF4-FFF2-40B4-BE49-F238E27FC236}">
-                <a16:creationId xmlns:a16="http://schemas.microsoft.com/office/drawing/2014/main" id="{250E2BBA-8095-4AC8-A44D-5AF4DF45DA85}"/>
+                <a16:creationId xmlns:a16="http://schemas.microsoft.com/office/drawing/2014/main" id="{2A49907B-BCF5-466D-8294-FB5B34A97747}"/>
               </a:ext>
             </a:extLst>
           </p:cNvPr>
@@ -2618,7 +2618,7 @@
           <p:cNvPr id="3" name="s10-title">
             <a:extLst xmlns:a="http://schemas.openxmlformats.org/drawingml/2006/main">
               <a:ext uri="{FF2B5EF4-FFF2-40B4-BE49-F238E27FC236}">
-                <a16:creationId xmlns:a16="http://schemas.microsoft.com/office/drawing/2014/main" id="{8975E302-2C83-45E9-852B-07D018875336}"/>
+                <a16:creationId xmlns:a16="http://schemas.microsoft.com/office/drawing/2014/main" id="{B92BEB6E-E10C-4D33-B3FB-39C2DE008998}"/>
               </a:ext>
             </a:extLst>
           </p:cNvPr>
@@ -2676,7 +2676,7 @@
           <p:cNvPr id="4" name="s10-footer">
             <a:extLst xmlns:a="http://schemas.openxmlformats.org/drawingml/2006/main">
               <a:ext uri="{FF2B5EF4-FFF2-40B4-BE49-F238E27FC236}">
-                <a16:creationId xmlns:a16="http://schemas.microsoft.com/office/drawing/2014/main" id="{9F342E04-8292-4D64-9209-1DDA74E43748}"/>
+                <a16:creationId xmlns:a16="http://schemas.microsoft.com/office/drawing/2014/main" id="{A3A945BE-6397-4A2A-9B0C-02D385659531}"/>
               </a:ext>
             </a:extLst>
           </p:cNvPr>
@@ -2707,7 +2707,7 @@
           <p:cNvPr id="5" name="s10-identity">
             <a:extLst xmlns:a="http://schemas.openxmlformats.org/drawingml/2006/main">
               <a:ext uri="{FF2B5EF4-FFF2-40B4-BE49-F238E27FC236}">
-                <a16:creationId xmlns:a16="http://schemas.microsoft.com/office/drawing/2014/main" id="{ACEAC862-9759-4790-A7A5-1D8191333B75}"/>
+                <a16:creationId xmlns:a16="http://schemas.microsoft.com/office/drawing/2014/main" id="{805AACCA-EFB3-46B3-B3AB-24C897B4B16C}"/>
               </a:ext>
             </a:extLst>
           </p:cNvPr>
@@ -2765,7 +2765,7 @@
           <p:cNvPr id="6" name="case-title">
             <a:extLst xmlns:a="http://schemas.openxmlformats.org/drawingml/2006/main">
               <a:ext uri="{FF2B5EF4-FFF2-40B4-BE49-F238E27FC236}">
-                <a16:creationId xmlns:a16="http://schemas.microsoft.com/office/drawing/2014/main" id="{80A39694-8332-4B2C-8146-5F3D76DA3D7F}"/>
+                <a16:creationId xmlns:a16="http://schemas.microsoft.com/office/drawing/2014/main" id="{8110D063-08B9-4460-8641-C5AE5316D366}"/>
               </a:ext>
             </a:extLst>
           </p:cNvPr>
@@ -2829,7 +2829,7 @@
           <p:cNvPr id="7" name="case-row-0">
             <a:extLst xmlns:a="http://schemas.openxmlformats.org/drawingml/2006/main">
               <a:ext uri="{FF2B5EF4-FFF2-40B4-BE49-F238E27FC236}">
-                <a16:creationId xmlns:a16="http://schemas.microsoft.com/office/drawing/2014/main" id="{DE36A23F-D6CF-4F09-BDF7-388F03BFBB93}"/>
+                <a16:creationId xmlns:a16="http://schemas.microsoft.com/office/drawing/2014/main" id="{F380E222-ED1A-4986-BD0A-CDA7B4F5A6B3}"/>
               </a:ext>
             </a:extLst>
           </p:cNvPr>
@@ -2893,7 +2893,7 @@
           <p:cNvPr id="8" name="case-row-1">
             <a:extLst xmlns:a="http://schemas.openxmlformats.org/drawingml/2006/main">
               <a:ext uri="{FF2B5EF4-FFF2-40B4-BE49-F238E27FC236}">
-                <a16:creationId xmlns:a16="http://schemas.microsoft.com/office/drawing/2014/main" id="{B36467F8-29D0-4FEB-846B-FB9BFB63B7EE}"/>
+                <a16:creationId xmlns:a16="http://schemas.microsoft.com/office/drawing/2014/main" id="{3454AAF8-042B-4B4D-BF10-B8F1F631E6B6}"/>
               </a:ext>
             </a:extLst>
           </p:cNvPr>
@@ -2957,7 +2957,7 @@
           <p:cNvPr id="9" name="case-row-2">
             <a:extLst xmlns:a="http://schemas.openxmlformats.org/drawingml/2006/main">
               <a:ext uri="{FF2B5EF4-FFF2-40B4-BE49-F238E27FC236}">
-                <a16:creationId xmlns:a16="http://schemas.microsoft.com/office/drawing/2014/main" id="{FFA6F4D3-BBAE-45F2-8F64-D06913EA0EB4}"/>
+                <a16:creationId xmlns:a16="http://schemas.microsoft.com/office/drawing/2014/main" id="{7FE030F6-2FA2-427B-9C0E-F460890991EA}"/>
               </a:ext>
             </a:extLst>
           </p:cNvPr>
@@ -2981,7 +2981,7 @@
           </a:solidFill>
           <a:ln xmlns:a="http://schemas.openxmlformats.org/drawingml/2006/main" w="9525">
             <a:solidFill>
-              <a:srgbClr val="E5783F"/>
+              <a:srgbClr val="9A3F16"/>
             </a:solidFill>
             <a:prstDash val="solid"/>
           </a:ln>
@@ -3011,7 +3011,7 @@
                 <a:ea typeface="PingFang SC"/>
                 <a:cs typeface="PingFang SC"/>
               </a:rPr>
-              <a:t>边界｜达到预设门槛后也只逐步开放工单草稿等低风险能力，设备动作继续由现有系统和岗位控制</a:t>
+              <a:t>决策｜达到预设门槛后也只逐步开放工单草稿等低风险能力，设备动作继续由现有系统和岗位控制</a:t>
             </a:r>
           </a:p>
         </p:txBody>
@@ -3021,7 +3021,7 @@
           <p:cNvPr id="10" name="s10-takeaway-rule">
             <a:extLst xmlns:a="http://schemas.openxmlformats.org/drawingml/2006/main">
               <a:ext uri="{FF2B5EF4-FFF2-40B4-BE49-F238E27FC236}">
-                <a16:creationId xmlns:a16="http://schemas.microsoft.com/office/drawing/2014/main" id="{EB69303F-E318-467F-9B85-514021A42536}"/>
+                <a16:creationId xmlns:a16="http://schemas.microsoft.com/office/drawing/2014/main" id="{20810205-72D5-47EB-A395-867431B2551B}"/>
               </a:ext>
             </a:extLst>
           </p:cNvPr>
@@ -3054,7 +3054,7 @@
           <p:cNvPr id="11" name="s10-takeaway">
             <a:extLst xmlns:a="http://schemas.openxmlformats.org/drawingml/2006/main">
               <a:ext uri="{FF2B5EF4-FFF2-40B4-BE49-F238E27FC236}">
-                <a16:creationId xmlns:a16="http://schemas.microsoft.com/office/drawing/2014/main" id="{C264526A-408B-46D7-8584-05DC40A7C829}"/>
+                <a16:creationId xmlns:a16="http://schemas.microsoft.com/office/drawing/2014/main" id="{39B31787-F8CF-4E6A-BDA2-E8305CEFB17F}"/>
               </a:ext>
             </a:extLst>
           </p:cNvPr>
@@ -3110,7 +3110,7 @@
     </p:spTree>
     <p:extLst>
       <p:ext uri="{BB962C8B-B14F-4D97-AF65-F5344CB8AC3E}">
-        <p14:creationId xmlns:p14="http://schemas.microsoft.com/office/powerpoint/2010/main" val="771319104"/>
+        <p14:creationId xmlns:p14="http://schemas.microsoft.com/office/powerpoint/2010/main" val="1788407375"/>
       </p:ext>
     </p:extLst>
   </p:cSld>
@@ -3141,7 +3141,7 @@
           <p:cNvPr id="1" name="s11-rule">
             <a:extLst xmlns:a="http://schemas.openxmlformats.org/drawingml/2006/main">
               <a:ext uri="{FF2B5EF4-FFF2-40B4-BE49-F238E27FC236}">
-                <a16:creationId xmlns:a16="http://schemas.microsoft.com/office/drawing/2014/main" id="{BFACFA43-AB03-4C4E-9B2E-CB1A87278947}"/>
+                <a16:creationId xmlns:a16="http://schemas.microsoft.com/office/drawing/2014/main" id="{A208066F-88E3-498B-8DFD-11375B791DA1}"/>
               </a:ext>
             </a:extLst>
           </p:cNvPr>
@@ -3174,7 +3174,7 @@
           <p:cNvPr id="2" name="s11-eyebrow">
             <a:extLst xmlns:a="http://schemas.openxmlformats.org/drawingml/2006/main">
               <a:ext uri="{FF2B5EF4-FFF2-40B4-BE49-F238E27FC236}">
-                <a16:creationId xmlns:a16="http://schemas.microsoft.com/office/drawing/2014/main" id="{A69EFA9F-774F-4687-A6B3-C19B69A89BD5}"/>
+                <a16:creationId xmlns:a16="http://schemas.microsoft.com/office/drawing/2014/main" id="{52C92858-7E10-4860-B711-4E9CD62CE4DD}"/>
               </a:ext>
             </a:extLst>
           </p:cNvPr>
@@ -3232,7 +3232,7 @@
           <p:cNvPr id="3" name="s11-title">
             <a:extLst xmlns:a="http://schemas.openxmlformats.org/drawingml/2006/main">
               <a:ext uri="{FF2B5EF4-FFF2-40B4-BE49-F238E27FC236}">
-                <a16:creationId xmlns:a16="http://schemas.microsoft.com/office/drawing/2014/main" id="{F46A2A79-F3B6-4E25-9866-F8B8EE864FD6}"/>
+                <a16:creationId xmlns:a16="http://schemas.microsoft.com/office/drawing/2014/main" id="{AB76451B-AFA5-4EA7-AD2A-5926A176C1D4}"/>
               </a:ext>
             </a:extLst>
           </p:cNvPr>
@@ -3280,7 +3280,7 @@
                 <a:ea typeface="PingFang SC"/>
                 <a:cs typeface="PingFang SC"/>
               </a:rPr>
-              <a:t>把方法落实为可验证的行动</a:t>
+              <a:t>交通与智慧机场：一次可验收练习</a:t>
             </a:r>
           </a:p>
         </p:txBody>
@@ -3290,7 +3290,7 @@
           <p:cNvPr id="4" name="s11-footer">
             <a:extLst xmlns:a="http://schemas.openxmlformats.org/drawingml/2006/main">
               <a:ext uri="{FF2B5EF4-FFF2-40B4-BE49-F238E27FC236}">
-                <a16:creationId xmlns:a16="http://schemas.microsoft.com/office/drawing/2014/main" id="{9A159657-4005-47B9-B390-7032DF78CF98}"/>
+                <a16:creationId xmlns:a16="http://schemas.microsoft.com/office/drawing/2014/main" id="{A31F6EAA-D643-40F1-8EC4-0FA00104BE74}"/>
               </a:ext>
             </a:extLst>
           </p:cNvPr>
@@ -3321,7 +3321,7 @@
           <p:cNvPr id="5" name="s11-identity">
             <a:extLst xmlns:a="http://schemas.openxmlformats.org/drawingml/2006/main">
               <a:ext uri="{FF2B5EF4-FFF2-40B4-BE49-F238E27FC236}">
-                <a16:creationId xmlns:a16="http://schemas.microsoft.com/office/drawing/2014/main" id="{A70C701E-DC79-4813-86B3-C91FA8B71F59}"/>
+                <a16:creationId xmlns:a16="http://schemas.microsoft.com/office/drawing/2014/main" id="{5FBDA6F7-30E8-434C-84C2-54C15C0C7F94}"/>
               </a:ext>
             </a:extLst>
           </p:cNvPr>
@@ -3379,7 +3379,7 @@
           <p:cNvPr id="6" name="practice-circle-0">
             <a:extLst xmlns:a="http://schemas.openxmlformats.org/drawingml/2006/main">
               <a:ext uri="{FF2B5EF4-FFF2-40B4-BE49-F238E27FC236}">
-                <a16:creationId xmlns:a16="http://schemas.microsoft.com/office/drawing/2014/main" id="{766574DE-BAD6-4744-8FEF-4AE43C612AEC}"/>
+                <a16:creationId xmlns:a16="http://schemas.microsoft.com/office/drawing/2014/main" id="{F964B557-CFF7-4459-805B-986FCBB9C880}"/>
               </a:ext>
             </a:extLst>
           </p:cNvPr>
@@ -3412,7 +3412,7 @@
           <p:cNvPr id="7" name="practice-number-0">
             <a:extLst xmlns:a="http://schemas.openxmlformats.org/drawingml/2006/main">
               <a:ext uri="{FF2B5EF4-FFF2-40B4-BE49-F238E27FC236}">
-                <a16:creationId xmlns:a16="http://schemas.microsoft.com/office/drawing/2014/main" id="{4D63C836-17A2-4E40-8F9F-3C357DDEE522}"/>
+                <a16:creationId xmlns:a16="http://schemas.microsoft.com/office/drawing/2014/main" id="{F890FBA8-A73E-447C-AAA0-3076101576CD}"/>
               </a:ext>
             </a:extLst>
           </p:cNvPr>
@@ -3470,7 +3470,7 @@
           <p:cNvPr id="8" name="practice-item-0">
             <a:extLst xmlns:a="http://schemas.openxmlformats.org/drawingml/2006/main">
               <a:ext uri="{FF2B5EF4-FFF2-40B4-BE49-F238E27FC236}">
-                <a16:creationId xmlns:a16="http://schemas.microsoft.com/office/drawing/2014/main" id="{6FC8CA84-88D0-4831-966D-04F2BA34D693}"/>
+                <a16:creationId xmlns:a16="http://schemas.microsoft.com/office/drawing/2014/main" id="{F78AB768-2F59-41E1-BFE6-6CF92BBB1FAB}"/>
               </a:ext>
             </a:extLst>
           </p:cNvPr>
@@ -3534,7 +3534,7 @@
           <p:cNvPr id="9" name="practice-connector-0">
             <a:extLst xmlns:a="http://schemas.openxmlformats.org/drawingml/2006/main">
               <a:ext uri="{FF2B5EF4-FFF2-40B4-BE49-F238E27FC236}">
-                <a16:creationId xmlns:a16="http://schemas.microsoft.com/office/drawing/2014/main" id="{E433B7DF-5EA1-4E60-AA39-5009FA33763B}"/>
+                <a16:creationId xmlns:a16="http://schemas.microsoft.com/office/drawing/2014/main" id="{C926F9A5-BD4C-4FF0-ACFE-887F443D94D5}"/>
               </a:ext>
             </a:extLst>
           </p:cNvPr>
@@ -3554,7 +3554,7 @@
           <a:noFill xmlns:a="http://schemas.openxmlformats.org/drawingml/2006/main"/>
           <a:ln xmlns:a="http://schemas.openxmlformats.org/drawingml/2006/main" w="28575">
             <a:solidFill>
-              <a:srgbClr val="E5783F"/>
+              <a:srgbClr val="9A3F16"/>
             </a:solidFill>
             <a:prstDash val="solid"/>
           </a:ln>
@@ -3565,7 +3565,7 @@
           <p:cNvPr id="10" name="practice-circle-1">
             <a:extLst xmlns:a="http://schemas.openxmlformats.org/drawingml/2006/main">
               <a:ext uri="{FF2B5EF4-FFF2-40B4-BE49-F238E27FC236}">
-                <a16:creationId xmlns:a16="http://schemas.microsoft.com/office/drawing/2014/main" id="{DEFA9673-1B03-49BB-A9AB-65A4C896ACD6}"/>
+                <a16:creationId xmlns:a16="http://schemas.microsoft.com/office/drawing/2014/main" id="{FEEF98A1-2090-4DDA-BDAA-1CE4B28C0567}"/>
               </a:ext>
             </a:extLst>
           </p:cNvPr>
@@ -3598,7 +3598,7 @@
           <p:cNvPr id="11" name="practice-number-1">
             <a:extLst xmlns:a="http://schemas.openxmlformats.org/drawingml/2006/main">
               <a:ext uri="{FF2B5EF4-FFF2-40B4-BE49-F238E27FC236}">
-                <a16:creationId xmlns:a16="http://schemas.microsoft.com/office/drawing/2014/main" id="{25013A59-3D46-4EE3-9B24-0BC9D504206B}"/>
+                <a16:creationId xmlns:a16="http://schemas.microsoft.com/office/drawing/2014/main" id="{0CB5B5DD-E086-4C17-BB2C-342D94C5EFBF}"/>
               </a:ext>
             </a:extLst>
           </p:cNvPr>
@@ -3656,7 +3656,7 @@
           <p:cNvPr id="12" name="practice-item-1">
             <a:extLst xmlns:a="http://schemas.openxmlformats.org/drawingml/2006/main">
               <a:ext uri="{FF2B5EF4-FFF2-40B4-BE49-F238E27FC236}">
-                <a16:creationId xmlns:a16="http://schemas.microsoft.com/office/drawing/2014/main" id="{53F1108E-3A83-4F20-AB15-930C0C4FA30B}"/>
+                <a16:creationId xmlns:a16="http://schemas.microsoft.com/office/drawing/2014/main" id="{639C6E97-209D-4F84-B8FF-F545AEFBF688}"/>
               </a:ext>
             </a:extLst>
           </p:cNvPr>
@@ -3720,7 +3720,7 @@
           <p:cNvPr id="13" name="practice-connector-1">
             <a:extLst xmlns:a="http://schemas.openxmlformats.org/drawingml/2006/main">
               <a:ext uri="{FF2B5EF4-FFF2-40B4-BE49-F238E27FC236}">
-                <a16:creationId xmlns:a16="http://schemas.microsoft.com/office/drawing/2014/main" id="{12D9CBB4-D1A7-4521-8126-8BCEF94B9089}"/>
+                <a16:creationId xmlns:a16="http://schemas.microsoft.com/office/drawing/2014/main" id="{262CC23B-1FCE-402D-89B2-B5B1C56A9239}"/>
               </a:ext>
             </a:extLst>
           </p:cNvPr>
@@ -3740,7 +3740,7 @@
           <a:noFill xmlns:a="http://schemas.openxmlformats.org/drawingml/2006/main"/>
           <a:ln xmlns:a="http://schemas.openxmlformats.org/drawingml/2006/main" w="28575">
             <a:solidFill>
-              <a:srgbClr val="E5783F"/>
+              <a:srgbClr val="9A3F16"/>
             </a:solidFill>
             <a:prstDash val="solid"/>
           </a:ln>
@@ -3751,7 +3751,7 @@
           <p:cNvPr id="14" name="practice-circle-2">
             <a:extLst xmlns:a="http://schemas.openxmlformats.org/drawingml/2006/main">
               <a:ext uri="{FF2B5EF4-FFF2-40B4-BE49-F238E27FC236}">
-                <a16:creationId xmlns:a16="http://schemas.microsoft.com/office/drawing/2014/main" id="{4F34A87E-9B49-47ED-BDCC-CB1881169B26}"/>
+                <a16:creationId xmlns:a16="http://schemas.microsoft.com/office/drawing/2014/main" id="{6A19297C-1A42-4534-8BFE-B4C5B048F0D6}"/>
               </a:ext>
             </a:extLst>
           </p:cNvPr>
@@ -3769,7 +3769,7 @@
             <a:avLst/>
           </a:prstGeom>
           <a:solidFill xmlns:a="http://schemas.openxmlformats.org/drawingml/2006/main">
-            <a:srgbClr val="E5783F"/>
+            <a:srgbClr val="9A3F16"/>
           </a:solidFill>
           <a:ln xmlns:a="http://schemas.openxmlformats.org/drawingml/2006/main" w="28575">
             <a:solidFill>
@@ -3784,7 +3784,7 @@
           <p:cNvPr id="15" name="practice-number-2">
             <a:extLst xmlns:a="http://schemas.openxmlformats.org/drawingml/2006/main">
               <a:ext uri="{FF2B5EF4-FFF2-40B4-BE49-F238E27FC236}">
-                <a16:creationId xmlns:a16="http://schemas.microsoft.com/office/drawing/2014/main" id="{0803ECD7-BBB3-4278-9FF8-931F16338DBE}"/>
+                <a16:creationId xmlns:a16="http://schemas.microsoft.com/office/drawing/2014/main" id="{BA62939B-BA2D-49AB-9B23-9405DAB7006A}"/>
               </a:ext>
             </a:extLst>
           </p:cNvPr>
@@ -3842,7 +3842,7 @@
           <p:cNvPr id="16" name="practice-item-2">
             <a:extLst xmlns:a="http://schemas.openxmlformats.org/drawingml/2006/main">
               <a:ext uri="{FF2B5EF4-FFF2-40B4-BE49-F238E27FC236}">
-                <a16:creationId xmlns:a16="http://schemas.microsoft.com/office/drawing/2014/main" id="{33F53514-E8F9-4B2C-AC43-649207728A44}"/>
+                <a16:creationId xmlns:a16="http://schemas.microsoft.com/office/drawing/2014/main" id="{C84CA9B1-CF04-4255-BEEF-FEEBE9707D23}"/>
               </a:ext>
             </a:extLst>
           </p:cNvPr>
@@ -3866,7 +3866,7 @@
           </a:solidFill>
           <a:ln xmlns:a="http://schemas.openxmlformats.org/drawingml/2006/main" w="19050">
             <a:solidFill>
-              <a:srgbClr val="E5783F"/>
+              <a:srgbClr val="9A3F16"/>
             </a:solidFill>
             <a:prstDash val="solid"/>
           </a:ln>
@@ -3904,7 +3904,7 @@
     </p:spTree>
     <p:extLst>
       <p:ext uri="{BB962C8B-B14F-4D97-AF65-F5344CB8AC3E}">
-        <p14:creationId xmlns:p14="http://schemas.microsoft.com/office/powerpoint/2010/main" val="1072507182"/>
+        <p14:creationId xmlns:p14="http://schemas.microsoft.com/office/powerpoint/2010/main" val="1449419758"/>
       </p:ext>
     </p:extLst>
   </p:cSld>
@@ -3935,7 +3935,7 @@
           <p:cNvPr id="1" name="s12-rule">
             <a:extLst xmlns:a="http://schemas.openxmlformats.org/drawingml/2006/main">
               <a:ext uri="{FF2B5EF4-FFF2-40B4-BE49-F238E27FC236}">
-                <a16:creationId xmlns:a16="http://schemas.microsoft.com/office/drawing/2014/main" id="{1CD55ED3-A9A4-4D16-AA48-A8BD417CD267}"/>
+                <a16:creationId xmlns:a16="http://schemas.microsoft.com/office/drawing/2014/main" id="{56AB9D05-66D2-4931-998C-B5043DD2C1AF}"/>
               </a:ext>
             </a:extLst>
           </p:cNvPr>
@@ -3968,7 +3968,7 @@
           <p:cNvPr id="2" name="s12-eyebrow">
             <a:extLst xmlns:a="http://schemas.openxmlformats.org/drawingml/2006/main">
               <a:ext uri="{FF2B5EF4-FFF2-40B4-BE49-F238E27FC236}">
-                <a16:creationId xmlns:a16="http://schemas.microsoft.com/office/drawing/2014/main" id="{EE65F5F4-0E25-49BF-BA80-4163AE3DBFBB}"/>
+                <a16:creationId xmlns:a16="http://schemas.microsoft.com/office/drawing/2014/main" id="{53185130-1BB7-4863-88BF-25BA15C8F852}"/>
               </a:ext>
             </a:extLst>
           </p:cNvPr>
@@ -4026,7 +4026,7 @@
           <p:cNvPr id="3" name="s12-title">
             <a:extLst xmlns:a="http://schemas.openxmlformats.org/drawingml/2006/main">
               <a:ext uri="{FF2B5EF4-FFF2-40B4-BE49-F238E27FC236}">
-                <a16:creationId xmlns:a16="http://schemas.microsoft.com/office/drawing/2014/main" id="{F9AA9846-7E12-4216-9D9D-B6244AE0270C}"/>
+                <a16:creationId xmlns:a16="http://schemas.microsoft.com/office/drawing/2014/main" id="{44952964-884A-4361-B10E-7BDD02D27AA7}"/>
               </a:ext>
             </a:extLst>
           </p:cNvPr>
@@ -4074,7 +4074,7 @@
                 <a:ea typeface="PingFang SC"/>
                 <a:cs typeface="PingFang SC"/>
               </a:rPr>
-              <a:t>带走三条可复用的判断原则</a:t>
+              <a:t>交通与智慧机场：判断时先抓住三点</a:t>
             </a:r>
           </a:p>
         </p:txBody>
@@ -4084,7 +4084,7 @@
           <p:cNvPr id="4" name="s12-footer">
             <a:extLst xmlns:a="http://schemas.openxmlformats.org/drawingml/2006/main">
               <a:ext uri="{FF2B5EF4-FFF2-40B4-BE49-F238E27FC236}">
-                <a16:creationId xmlns:a16="http://schemas.microsoft.com/office/drawing/2014/main" id="{E35F061E-9A4A-4385-9A6E-6FAEF0FEDB3F}"/>
+                <a16:creationId xmlns:a16="http://schemas.microsoft.com/office/drawing/2014/main" id="{E950DFC7-526F-4260-8972-789360130360}"/>
               </a:ext>
             </a:extLst>
           </p:cNvPr>
@@ -4115,7 +4115,7 @@
           <p:cNvPr id="5" name="s12-identity">
             <a:extLst xmlns:a="http://schemas.openxmlformats.org/drawingml/2006/main">
               <a:ext uri="{FF2B5EF4-FFF2-40B4-BE49-F238E27FC236}">
-                <a16:creationId xmlns:a16="http://schemas.microsoft.com/office/drawing/2014/main" id="{BD37B82D-56FA-4899-BB6E-1C6744CB4933}"/>
+                <a16:creationId xmlns:a16="http://schemas.microsoft.com/office/drawing/2014/main" id="{365D0BCC-6B54-4579-AD4F-0704A1213252}"/>
               </a:ext>
             </a:extLst>
           </p:cNvPr>
@@ -4173,7 +4173,7 @@
           <p:cNvPr id="6" name="recap-circle-0">
             <a:extLst xmlns:a="http://schemas.openxmlformats.org/drawingml/2006/main">
               <a:ext uri="{FF2B5EF4-FFF2-40B4-BE49-F238E27FC236}">
-                <a16:creationId xmlns:a16="http://schemas.microsoft.com/office/drawing/2014/main" id="{0DB7F4F7-ECDA-442B-ACCC-DA49EB85E8CD}"/>
+                <a16:creationId xmlns:a16="http://schemas.microsoft.com/office/drawing/2014/main" id="{7D0321EC-B106-4961-B79C-1E8D1AA3B628}"/>
               </a:ext>
             </a:extLst>
           </p:cNvPr>
@@ -4206,7 +4206,7 @@
           <p:cNvPr id="7" name="recap-number-0">
             <a:extLst xmlns:a="http://schemas.openxmlformats.org/drawingml/2006/main">
               <a:ext uri="{FF2B5EF4-FFF2-40B4-BE49-F238E27FC236}">
-                <a16:creationId xmlns:a16="http://schemas.microsoft.com/office/drawing/2014/main" id="{E9D0329F-3560-4615-BDD4-1DDDE446C82E}"/>
+                <a16:creationId xmlns:a16="http://schemas.microsoft.com/office/drawing/2014/main" id="{91AEB373-E13C-44DC-8C8D-816CF03C67DC}"/>
               </a:ext>
             </a:extLst>
           </p:cNvPr>
@@ -4264,7 +4264,7 @@
           <p:cNvPr id="8" name="recap-item-0">
             <a:extLst xmlns:a="http://schemas.openxmlformats.org/drawingml/2006/main">
               <a:ext uri="{FF2B5EF4-FFF2-40B4-BE49-F238E27FC236}">
-                <a16:creationId xmlns:a16="http://schemas.microsoft.com/office/drawing/2014/main" id="{7A80BC6C-19DE-4E63-B4F6-CDF391DEDDB4}"/>
+                <a16:creationId xmlns:a16="http://schemas.microsoft.com/office/drawing/2014/main" id="{A910898F-FEB9-4AEA-B18B-B3DE0DCB53EC}"/>
               </a:ext>
             </a:extLst>
           </p:cNvPr>
@@ -4328,7 +4328,7 @@
           <p:cNvPr id="9" name="recap-connector-0">
             <a:extLst xmlns:a="http://schemas.openxmlformats.org/drawingml/2006/main">
               <a:ext uri="{FF2B5EF4-FFF2-40B4-BE49-F238E27FC236}">
-                <a16:creationId xmlns:a16="http://schemas.microsoft.com/office/drawing/2014/main" id="{45F2D84B-6AA4-410B-8EB4-C26EA3CD1C87}"/>
+                <a16:creationId xmlns:a16="http://schemas.microsoft.com/office/drawing/2014/main" id="{F19AED8C-1A59-4AFC-A9E4-B95E6FF23A7E}"/>
               </a:ext>
             </a:extLst>
           </p:cNvPr>
@@ -4348,7 +4348,7 @@
           <a:noFill xmlns:a="http://schemas.openxmlformats.org/drawingml/2006/main"/>
           <a:ln xmlns:a="http://schemas.openxmlformats.org/drawingml/2006/main" w="28575">
             <a:solidFill>
-              <a:srgbClr val="E5783F"/>
+              <a:srgbClr val="9A3F16"/>
             </a:solidFill>
             <a:prstDash val="solid"/>
           </a:ln>
@@ -4359,7 +4359,7 @@
           <p:cNvPr id="10" name="recap-circle-1">
             <a:extLst xmlns:a="http://schemas.openxmlformats.org/drawingml/2006/main">
               <a:ext uri="{FF2B5EF4-FFF2-40B4-BE49-F238E27FC236}">
-                <a16:creationId xmlns:a16="http://schemas.microsoft.com/office/drawing/2014/main" id="{2C61BED5-AFC5-448B-A1E1-7B547EB2548A}"/>
+                <a16:creationId xmlns:a16="http://schemas.microsoft.com/office/drawing/2014/main" id="{197E6188-ED9A-4478-9D91-6BFBF86D1A30}"/>
               </a:ext>
             </a:extLst>
           </p:cNvPr>
@@ -4392,7 +4392,7 @@
           <p:cNvPr id="11" name="recap-number-1">
             <a:extLst xmlns:a="http://schemas.openxmlformats.org/drawingml/2006/main">
               <a:ext uri="{FF2B5EF4-FFF2-40B4-BE49-F238E27FC236}">
-                <a16:creationId xmlns:a16="http://schemas.microsoft.com/office/drawing/2014/main" id="{8697BBC8-39F9-40FA-B17B-9CD3C94311E3}"/>
+                <a16:creationId xmlns:a16="http://schemas.microsoft.com/office/drawing/2014/main" id="{29DDAF3B-A5B9-4662-BA73-809885539EBB}"/>
               </a:ext>
             </a:extLst>
           </p:cNvPr>
@@ -4450,7 +4450,7 @@
           <p:cNvPr id="12" name="recap-item-1">
             <a:extLst xmlns:a="http://schemas.openxmlformats.org/drawingml/2006/main">
               <a:ext uri="{FF2B5EF4-FFF2-40B4-BE49-F238E27FC236}">
-                <a16:creationId xmlns:a16="http://schemas.microsoft.com/office/drawing/2014/main" id="{F439C917-1938-49A6-A3A9-E9AFC3A13305}"/>
+                <a16:creationId xmlns:a16="http://schemas.microsoft.com/office/drawing/2014/main" id="{7216F3AF-0D37-4B49-A25A-D928E4307713}"/>
               </a:ext>
             </a:extLst>
           </p:cNvPr>
@@ -4514,7 +4514,7 @@
           <p:cNvPr id="13" name="recap-connector-1">
             <a:extLst xmlns:a="http://schemas.openxmlformats.org/drawingml/2006/main">
               <a:ext uri="{FF2B5EF4-FFF2-40B4-BE49-F238E27FC236}">
-                <a16:creationId xmlns:a16="http://schemas.microsoft.com/office/drawing/2014/main" id="{32B12EAC-02B6-4120-A539-423E8FE8C622}"/>
+                <a16:creationId xmlns:a16="http://schemas.microsoft.com/office/drawing/2014/main" id="{2054D4D0-5EA9-41F5-B528-95DCB00A3717}"/>
               </a:ext>
             </a:extLst>
           </p:cNvPr>
@@ -4534,7 +4534,7 @@
           <a:noFill xmlns:a="http://schemas.openxmlformats.org/drawingml/2006/main"/>
           <a:ln xmlns:a="http://schemas.openxmlformats.org/drawingml/2006/main" w="28575">
             <a:solidFill>
-              <a:srgbClr val="E5783F"/>
+              <a:srgbClr val="9A3F16"/>
             </a:solidFill>
             <a:prstDash val="solid"/>
           </a:ln>
@@ -4545,7 +4545,7 @@
           <p:cNvPr id="14" name="recap-circle-2">
             <a:extLst xmlns:a="http://schemas.openxmlformats.org/drawingml/2006/main">
               <a:ext uri="{FF2B5EF4-FFF2-40B4-BE49-F238E27FC236}">
-                <a16:creationId xmlns:a16="http://schemas.microsoft.com/office/drawing/2014/main" id="{EEA8EE71-9BD9-42E1-9CD7-2D68DEEBEFF2}"/>
+                <a16:creationId xmlns:a16="http://schemas.microsoft.com/office/drawing/2014/main" id="{EBAF074C-A595-45F6-95C1-50B3119F8513}"/>
               </a:ext>
             </a:extLst>
           </p:cNvPr>
@@ -4563,7 +4563,7 @@
             <a:avLst/>
           </a:prstGeom>
           <a:solidFill xmlns:a="http://schemas.openxmlformats.org/drawingml/2006/main">
-            <a:srgbClr val="E5783F"/>
+            <a:srgbClr val="9A3F16"/>
           </a:solidFill>
           <a:ln xmlns:a="http://schemas.openxmlformats.org/drawingml/2006/main" w="28575">
             <a:solidFill>
@@ -4578,7 +4578,7 @@
           <p:cNvPr id="15" name="recap-number-2">
             <a:extLst xmlns:a="http://schemas.openxmlformats.org/drawingml/2006/main">
               <a:ext uri="{FF2B5EF4-FFF2-40B4-BE49-F238E27FC236}">
-                <a16:creationId xmlns:a16="http://schemas.microsoft.com/office/drawing/2014/main" id="{D451E0B1-86D9-4543-A9B1-4B0533FAA1FD}"/>
+                <a16:creationId xmlns:a16="http://schemas.microsoft.com/office/drawing/2014/main" id="{8082C78C-C089-4F66-A6A7-ABA03B60E49A}"/>
               </a:ext>
             </a:extLst>
           </p:cNvPr>
@@ -4636,7 +4636,7 @@
           <p:cNvPr id="16" name="recap-item-2">
             <a:extLst xmlns:a="http://schemas.openxmlformats.org/drawingml/2006/main">
               <a:ext uri="{FF2B5EF4-FFF2-40B4-BE49-F238E27FC236}">
-                <a16:creationId xmlns:a16="http://schemas.microsoft.com/office/drawing/2014/main" id="{DE14D5FE-574D-4B21-BCC5-DBD6CE5A3C98}"/>
+                <a16:creationId xmlns:a16="http://schemas.microsoft.com/office/drawing/2014/main" id="{A2FE3967-2B24-4BD5-9AB8-B67D4BA8198D}"/>
               </a:ext>
             </a:extLst>
           </p:cNvPr>
@@ -4660,7 +4660,7 @@
           </a:solidFill>
           <a:ln xmlns:a="http://schemas.openxmlformats.org/drawingml/2006/main" w="19050">
             <a:solidFill>
-              <a:srgbClr val="E5783F"/>
+              <a:srgbClr val="9A3F16"/>
             </a:solidFill>
             <a:prstDash val="solid"/>
           </a:ln>
@@ -4690,7 +4690,7 @@
                 <a:ea typeface="PingFang SC"/>
                 <a:cs typeface="PingFang SC"/>
               </a:rPr>
-              <a:t>确认人员必须具备对应岗位权限，并能查看原始数据、引用、冲突和模型版本</a:t>
+              <a:t>人工确认必须具备权限并能回看原始证据</a:t>
             </a:r>
           </a:p>
         </p:txBody>
@@ -4698,7 +4698,7 @@
     </p:spTree>
     <p:extLst>
       <p:ext uri="{BB962C8B-B14F-4D97-AF65-F5344CB8AC3E}">
-        <p14:creationId xmlns:p14="http://schemas.microsoft.com/office/powerpoint/2010/main" val="167872016"/>
+        <p14:creationId xmlns:p14="http://schemas.microsoft.com/office/powerpoint/2010/main" val="1378768330"/>
       </p:ext>
     </p:extLst>
   </p:cSld>
@@ -4729,7 +4729,7 @@
           <p:cNvPr id="1" name="s13-rule">
             <a:extLst xmlns:a="http://schemas.openxmlformats.org/drawingml/2006/main">
               <a:ext uri="{FF2B5EF4-FFF2-40B4-BE49-F238E27FC236}">
-                <a16:creationId xmlns:a16="http://schemas.microsoft.com/office/drawing/2014/main" id="{F757B744-E69A-4E2A-AD81-53FAD06C5132}"/>
+                <a16:creationId xmlns:a16="http://schemas.microsoft.com/office/drawing/2014/main" id="{D212439A-1F1E-45CE-801E-4957CE441C4D}"/>
               </a:ext>
             </a:extLst>
           </p:cNvPr>
@@ -4762,7 +4762,7 @@
           <p:cNvPr id="2" name="s13-eyebrow">
             <a:extLst xmlns:a="http://schemas.openxmlformats.org/drawingml/2006/main">
               <a:ext uri="{FF2B5EF4-FFF2-40B4-BE49-F238E27FC236}">
-                <a16:creationId xmlns:a16="http://schemas.microsoft.com/office/drawing/2014/main" id="{28859C2B-C996-46E1-AFAD-A275C5178FC5}"/>
+                <a16:creationId xmlns:a16="http://schemas.microsoft.com/office/drawing/2014/main" id="{44A57381-39AC-40DE-9A02-D18C2B72566D}"/>
               </a:ext>
             </a:extLst>
           </p:cNvPr>
@@ -4820,7 +4820,7 @@
           <p:cNvPr id="3" name="s13-title">
             <a:extLst xmlns:a="http://schemas.openxmlformats.org/drawingml/2006/main">
               <a:ext uri="{FF2B5EF4-FFF2-40B4-BE49-F238E27FC236}">
-                <a16:creationId xmlns:a16="http://schemas.microsoft.com/office/drawing/2014/main" id="{B2726B0E-3185-4D48-AEA4-83BCB575D4AB}"/>
+                <a16:creationId xmlns:a16="http://schemas.microsoft.com/office/drawing/2014/main" id="{43759C3D-A9FF-4CB8-B620-9CB2ADD7C79B}"/>
               </a:ext>
             </a:extLst>
           </p:cNvPr>
@@ -4868,7 +4868,7 @@
                 <a:ea typeface="PingFang SC"/>
                 <a:cs typeface="PingFang SC"/>
               </a:rPr>
-              <a:t>从公开重制课件回到可核对的学习资料</a:t>
+              <a:t>交通与智慧机场：依据、边界与延伸</a:t>
             </a:r>
           </a:p>
         </p:txBody>
@@ -4878,7 +4878,7 @@
           <p:cNvPr id="4" name="s13-footer">
             <a:extLst xmlns:a="http://schemas.openxmlformats.org/drawingml/2006/main">
               <a:ext uri="{FF2B5EF4-FFF2-40B4-BE49-F238E27FC236}">
-                <a16:creationId xmlns:a16="http://schemas.microsoft.com/office/drawing/2014/main" id="{6BC1BFBB-1249-48BD-8660-C19EFFD63E23}"/>
+                <a16:creationId xmlns:a16="http://schemas.microsoft.com/office/drawing/2014/main" id="{B3CA5EFA-0715-4954-8CBD-A8A367FC0D2E}"/>
               </a:ext>
             </a:extLst>
           </p:cNvPr>
@@ -4909,7 +4909,7 @@
           <p:cNvPr id="5" name="s13-identity">
             <a:extLst xmlns:a="http://schemas.openxmlformats.org/drawingml/2006/main">
               <a:ext uri="{FF2B5EF4-FFF2-40B4-BE49-F238E27FC236}">
-                <a16:creationId xmlns:a16="http://schemas.microsoft.com/office/drawing/2014/main" id="{E08A97A1-6B9F-4E42-9CC8-6BB050F52F92}"/>
+                <a16:creationId xmlns:a16="http://schemas.microsoft.com/office/drawing/2014/main" id="{7992B0AE-1DB7-4698-B438-4DFCC02A0A05}"/>
               </a:ext>
             </a:extLst>
           </p:cNvPr>
@@ -4967,7 +4967,7 @@
           <p:cNvPr id="6" name="source-0">
             <a:extLst xmlns:a="http://schemas.openxmlformats.org/drawingml/2006/main">
               <a:ext uri="{FF2B5EF4-FFF2-40B4-BE49-F238E27FC236}">
-                <a16:creationId xmlns:a16="http://schemas.microsoft.com/office/drawing/2014/main" id="{8EC6C284-164C-4BE4-9AC6-FED3F4C7DD4F}"/>
+                <a16:creationId xmlns:a16="http://schemas.microsoft.com/office/drawing/2014/main" id="{6879186A-BF0B-45C1-BD30-AF542757434B}"/>
               </a:ext>
             </a:extLst>
           </p:cNvPr>
@@ -4991,7 +4991,7 @@
           </a:solidFill>
           <a:ln xmlns:a="http://schemas.openxmlformats.org/drawingml/2006/main" w="9525">
             <a:solidFill>
-              <a:srgbClr val="E5783F"/>
+              <a:srgbClr val="9A3F16"/>
             </a:solidFill>
             <a:prstDash val="solid"/>
           </a:ln>
@@ -5031,7 +5031,7 @@
           <p:cNvPr id="7" name="source-1">
             <a:extLst xmlns:a="http://schemas.openxmlformats.org/drawingml/2006/main">
               <a:ext uri="{FF2B5EF4-FFF2-40B4-BE49-F238E27FC236}">
-                <a16:creationId xmlns:a16="http://schemas.microsoft.com/office/drawing/2014/main" id="{3394F8AF-F93B-4B9C-81C4-F4109F630AB8}"/>
+                <a16:creationId xmlns:a16="http://schemas.microsoft.com/office/drawing/2014/main" id="{3E8A0479-778B-47AC-8EDA-74088501D1E2}"/>
               </a:ext>
             </a:extLst>
           </p:cNvPr>
@@ -5095,7 +5095,7 @@
           <p:cNvPr id="8" name="source-2">
             <a:extLst xmlns:a="http://schemas.openxmlformats.org/drawingml/2006/main">
               <a:ext uri="{FF2B5EF4-FFF2-40B4-BE49-F238E27FC236}">
-                <a16:creationId xmlns:a16="http://schemas.microsoft.com/office/drawing/2014/main" id="{D2D86FB5-C8DB-4ECE-AACC-5DE4D95B3F2E}"/>
+                <a16:creationId xmlns:a16="http://schemas.microsoft.com/office/drawing/2014/main" id="{25F989D6-DA21-4811-A0B9-AB0D1880841D}"/>
               </a:ext>
             </a:extLst>
           </p:cNvPr>
@@ -5159,7 +5159,7 @@
           <p:cNvPr id="9" name="source-3">
             <a:extLst xmlns:a="http://schemas.openxmlformats.org/drawingml/2006/main">
               <a:ext uri="{FF2B5EF4-FFF2-40B4-BE49-F238E27FC236}">
-                <a16:creationId xmlns:a16="http://schemas.microsoft.com/office/drawing/2014/main" id="{B3F05DCF-7503-41BB-9708-2A70C7370891}"/>
+                <a16:creationId xmlns:a16="http://schemas.microsoft.com/office/drawing/2014/main" id="{BD4F8DAF-0CB2-44F9-9B5F-A3654A64BA03}"/>
               </a:ext>
             </a:extLst>
           </p:cNvPr>
@@ -5223,7 +5223,7 @@
           <p:cNvPr id="10" name="s13-takeaway-rule">
             <a:extLst xmlns:a="http://schemas.openxmlformats.org/drawingml/2006/main">
               <a:ext uri="{FF2B5EF4-FFF2-40B4-BE49-F238E27FC236}">
-                <a16:creationId xmlns:a16="http://schemas.microsoft.com/office/drawing/2014/main" id="{4F5AE1A7-3E78-4C38-BE03-7E15FA60FB00}"/>
+                <a16:creationId xmlns:a16="http://schemas.microsoft.com/office/drawing/2014/main" id="{3A1786E5-1405-4F80-B205-D657D9B06140}"/>
               </a:ext>
             </a:extLst>
           </p:cNvPr>
@@ -5256,7 +5256,7 @@
           <p:cNvPr id="11" name="s13-takeaway">
             <a:extLst xmlns:a="http://schemas.openxmlformats.org/drawingml/2006/main">
               <a:ext uri="{FF2B5EF4-FFF2-40B4-BE49-F238E27FC236}">
-                <a16:creationId xmlns:a16="http://schemas.microsoft.com/office/drawing/2014/main" id="{4DD5F844-8D21-463A-A0C3-38065A5CA9E3}"/>
+                <a16:creationId xmlns:a16="http://schemas.microsoft.com/office/drawing/2014/main" id="{ADF32638-F56E-48F6-B5F0-E7043EE159AC}"/>
               </a:ext>
             </a:extLst>
           </p:cNvPr>
@@ -5312,7 +5312,7 @@
     </p:spTree>
     <p:extLst>
       <p:ext uri="{BB962C8B-B14F-4D97-AF65-F5344CB8AC3E}">
-        <p14:creationId xmlns:p14="http://schemas.microsoft.com/office/powerpoint/2010/main" val="1475305787"/>
+        <p14:creationId xmlns:p14="http://schemas.microsoft.com/office/powerpoint/2010/main" val="814897046"/>
       </p:ext>
     </p:extLst>
   </p:cSld>
@@ -5343,7 +5343,7 @@
           <p:cNvPr id="1" name="s2-rule">
             <a:extLst xmlns:a="http://schemas.openxmlformats.org/drawingml/2006/main">
               <a:ext uri="{FF2B5EF4-FFF2-40B4-BE49-F238E27FC236}">
-                <a16:creationId xmlns:a16="http://schemas.microsoft.com/office/drawing/2014/main" id="{465282D3-EAD8-4A5F-B5F3-267277DBEB59}"/>
+                <a16:creationId xmlns:a16="http://schemas.microsoft.com/office/drawing/2014/main" id="{FB83870A-3D5C-41F1-8283-26FA7BECDA6C}"/>
               </a:ext>
             </a:extLst>
           </p:cNvPr>
@@ -5376,7 +5376,7 @@
           <p:cNvPr id="2" name="s2-eyebrow">
             <a:extLst xmlns:a="http://schemas.openxmlformats.org/drawingml/2006/main">
               <a:ext uri="{FF2B5EF4-FFF2-40B4-BE49-F238E27FC236}">
-                <a16:creationId xmlns:a16="http://schemas.microsoft.com/office/drawing/2014/main" id="{D2FCE843-F33C-4B48-8E9C-A695BD1E005E}"/>
+                <a16:creationId xmlns:a16="http://schemas.microsoft.com/office/drawing/2014/main" id="{7BC41F74-A4E8-475A-A7C5-3DFA74CAEA16}"/>
               </a:ext>
             </a:extLst>
           </p:cNvPr>
@@ -5434,7 +5434,7 @@
           <p:cNvPr id="3" name="s2-title">
             <a:extLst xmlns:a="http://schemas.openxmlformats.org/drawingml/2006/main">
               <a:ext uri="{FF2B5EF4-FFF2-40B4-BE49-F238E27FC236}">
-                <a16:creationId xmlns:a16="http://schemas.microsoft.com/office/drawing/2014/main" id="{049AD0FB-30F6-4240-BDB4-08D572AF1402}"/>
+                <a16:creationId xmlns:a16="http://schemas.microsoft.com/office/drawing/2014/main" id="{5A0F5D07-622F-4C3F-9913-4481C944CF8A}"/>
               </a:ext>
             </a:extLst>
           </p:cNvPr>
@@ -5482,7 +5482,7 @@
                 <a:ea typeface="PingFang SC"/>
                 <a:cs typeface="PingFang SC"/>
               </a:rPr>
-              <a:t>学完这一节，你能完成这些判断与行动</a:t>
+              <a:t>交通与智慧机场：4项学习结果</a:t>
             </a:r>
           </a:p>
         </p:txBody>
@@ -5492,7 +5492,7 @@
           <p:cNvPr id="4" name="s2-footer">
             <a:extLst xmlns:a="http://schemas.openxmlformats.org/drawingml/2006/main">
               <a:ext uri="{FF2B5EF4-FFF2-40B4-BE49-F238E27FC236}">
-                <a16:creationId xmlns:a16="http://schemas.microsoft.com/office/drawing/2014/main" id="{84A5C900-63CC-4B64-A922-5C29FBF27D62}"/>
+                <a16:creationId xmlns:a16="http://schemas.microsoft.com/office/drawing/2014/main" id="{77CB7A1C-D2AA-47A5-BFDA-C068412CB9CE}"/>
               </a:ext>
             </a:extLst>
           </p:cNvPr>
@@ -5523,7 +5523,7 @@
           <p:cNvPr id="5" name="s2-identity">
             <a:extLst xmlns:a="http://schemas.openxmlformats.org/drawingml/2006/main">
               <a:ext uri="{FF2B5EF4-FFF2-40B4-BE49-F238E27FC236}">
-                <a16:creationId xmlns:a16="http://schemas.microsoft.com/office/drawing/2014/main" id="{B9DEB9CE-E328-4560-B892-9EB2EEB602CF}"/>
+                <a16:creationId xmlns:a16="http://schemas.microsoft.com/office/drawing/2014/main" id="{CEB954C7-7438-45FF-800A-0A4274BED562}"/>
               </a:ext>
             </a:extLst>
           </p:cNvPr>
@@ -5581,7 +5581,7 @@
           <p:cNvPr id="6" name="objective-1">
             <a:extLst xmlns:a="http://schemas.openxmlformats.org/drawingml/2006/main">
               <a:ext uri="{FF2B5EF4-FFF2-40B4-BE49-F238E27FC236}">
-                <a16:creationId xmlns:a16="http://schemas.microsoft.com/office/drawing/2014/main" id="{8D38D033-5B77-4B36-A55E-8F3ABB53BB3E}"/>
+                <a16:creationId xmlns:a16="http://schemas.microsoft.com/office/drawing/2014/main" id="{D9ECEBED-ED66-4B1B-A2AD-362926406D88}"/>
               </a:ext>
             </a:extLst>
           </p:cNvPr>
@@ -5668,7 +5668,7 @@
           <p:cNvPr id="7" name="objective-2">
             <a:extLst xmlns:a="http://schemas.openxmlformats.org/drawingml/2006/main">
               <a:ext uri="{FF2B5EF4-FFF2-40B4-BE49-F238E27FC236}">
-                <a16:creationId xmlns:a16="http://schemas.microsoft.com/office/drawing/2014/main" id="{92C02E4C-A567-44FC-A356-F2E559A114D1}"/>
+                <a16:creationId xmlns:a16="http://schemas.microsoft.com/office/drawing/2014/main" id="{4D03DF19-60F6-4E9C-BCEB-51C18F522F97}"/>
               </a:ext>
             </a:extLst>
           </p:cNvPr>
@@ -5755,7 +5755,7 @@
           <p:cNvPr id="8" name="objective-3">
             <a:extLst xmlns:a="http://schemas.openxmlformats.org/drawingml/2006/main">
               <a:ext uri="{FF2B5EF4-FFF2-40B4-BE49-F238E27FC236}">
-                <a16:creationId xmlns:a16="http://schemas.microsoft.com/office/drawing/2014/main" id="{8D878E6D-6959-494D-AD2D-EFBAF0A1DDF7}"/>
+                <a16:creationId xmlns:a16="http://schemas.microsoft.com/office/drawing/2014/main" id="{E6821743-AC26-4F03-B04E-DFEDFF95C0A3}"/>
               </a:ext>
             </a:extLst>
           </p:cNvPr>
@@ -5842,7 +5842,7 @@
           <p:cNvPr id="9" name="objective-4">
             <a:extLst xmlns:a="http://schemas.openxmlformats.org/drawingml/2006/main">
               <a:ext uri="{FF2B5EF4-FFF2-40B4-BE49-F238E27FC236}">
-                <a16:creationId xmlns:a16="http://schemas.microsoft.com/office/drawing/2014/main" id="{73269B52-5902-449C-AB5A-4F15CB1783BF}"/>
+                <a16:creationId xmlns:a16="http://schemas.microsoft.com/office/drawing/2014/main" id="{6F901DFF-868F-4D99-B2EB-B71FAE68D908}"/>
               </a:ext>
             </a:extLst>
           </p:cNvPr>
@@ -5866,7 +5866,7 @@
           </a:solidFill>
           <a:ln xmlns:a="http://schemas.openxmlformats.org/drawingml/2006/main" w="19050">
             <a:solidFill>
-              <a:srgbClr val="E5783F"/>
+              <a:srgbClr val="9A3F16"/>
             </a:solidFill>
             <a:prstDash val="solid"/>
           </a:ln>
@@ -5927,7 +5927,7 @@
     </p:spTree>
     <p:extLst>
       <p:ext uri="{BB962C8B-B14F-4D97-AF65-F5344CB8AC3E}">
-        <p14:creationId xmlns:p14="http://schemas.microsoft.com/office/powerpoint/2010/main" val="1800670722"/>
+        <p14:creationId xmlns:p14="http://schemas.microsoft.com/office/powerpoint/2010/main" val="2032967450"/>
       </p:ext>
     </p:extLst>
   </p:cSld>
@@ -5958,7 +5958,7 @@
           <p:cNvPr id="1" name="s3-rule">
             <a:extLst xmlns:a="http://schemas.openxmlformats.org/drawingml/2006/main">
               <a:ext uri="{FF2B5EF4-FFF2-40B4-BE49-F238E27FC236}">
-                <a16:creationId xmlns:a16="http://schemas.microsoft.com/office/drawing/2014/main" id="{4D4D43A8-F754-4D29-AC8B-47DC6498BAA1}"/>
+                <a16:creationId xmlns:a16="http://schemas.microsoft.com/office/drawing/2014/main" id="{19F74C99-9073-490F-BE44-283B4FBEACFD}"/>
               </a:ext>
             </a:extLst>
           </p:cNvPr>
@@ -5991,7 +5991,7 @@
           <p:cNvPr id="2" name="s3-eyebrow">
             <a:extLst xmlns:a="http://schemas.openxmlformats.org/drawingml/2006/main">
               <a:ext uri="{FF2B5EF4-FFF2-40B4-BE49-F238E27FC236}">
-                <a16:creationId xmlns:a16="http://schemas.microsoft.com/office/drawing/2014/main" id="{32CC56E9-93F9-4E38-8DBC-639094D75C75}"/>
+                <a16:creationId xmlns:a16="http://schemas.microsoft.com/office/drawing/2014/main" id="{8A80C7F8-F579-454E-B2BB-538D7F04F674}"/>
               </a:ext>
             </a:extLst>
           </p:cNvPr>
@@ -6049,7 +6049,7 @@
           <p:cNvPr id="3" name="s3-title">
             <a:extLst xmlns:a="http://schemas.openxmlformats.org/drawingml/2006/main">
               <a:ext uri="{FF2B5EF4-FFF2-40B4-BE49-F238E27FC236}">
-                <a16:creationId xmlns:a16="http://schemas.microsoft.com/office/drawing/2014/main" id="{659CCDA7-30CA-41BA-870A-533ECBFEE5D7}"/>
+                <a16:creationId xmlns:a16="http://schemas.microsoft.com/office/drawing/2014/main" id="{C28865FC-84DD-4B4A-AF96-5F77D71AF28E}"/>
               </a:ext>
             </a:extLst>
           </p:cNvPr>
@@ -6107,7 +6107,7 @@
           <p:cNvPr id="4" name="s3-footer">
             <a:extLst xmlns:a="http://schemas.openxmlformats.org/drawingml/2006/main">
               <a:ext uri="{FF2B5EF4-FFF2-40B4-BE49-F238E27FC236}">
-                <a16:creationId xmlns:a16="http://schemas.microsoft.com/office/drawing/2014/main" id="{CA72AFAC-36D1-46D7-91D8-5FDCE604CAC4}"/>
+                <a16:creationId xmlns:a16="http://schemas.microsoft.com/office/drawing/2014/main" id="{0E546E73-935E-4020-8D9E-B138AC5D9D44}"/>
               </a:ext>
             </a:extLst>
           </p:cNvPr>
@@ -6138,7 +6138,7 @@
           <p:cNvPr id="5" name="s3-identity">
             <a:extLst xmlns:a="http://schemas.openxmlformats.org/drawingml/2006/main">
               <a:ext uri="{FF2B5EF4-FFF2-40B4-BE49-F238E27FC236}">
-                <a16:creationId xmlns:a16="http://schemas.microsoft.com/office/drawing/2014/main" id="{094F0A86-1100-4C4E-9EBF-45178FDB32B0}"/>
+                <a16:creationId xmlns:a16="http://schemas.microsoft.com/office/drawing/2014/main" id="{A1D3BEE0-1FC7-458D-A49C-29EC374BEC22}"/>
               </a:ext>
             </a:extLst>
           </p:cNvPr>
@@ -6196,7 +6196,7 @@
           <p:cNvPr id="6" name="core-no-0">
             <a:extLst xmlns:a="http://schemas.openxmlformats.org/drawingml/2006/main">
               <a:ext uri="{FF2B5EF4-FFF2-40B4-BE49-F238E27FC236}">
-                <a16:creationId xmlns:a16="http://schemas.microsoft.com/office/drawing/2014/main" id="{FBBB4A93-FE2B-40F9-8A93-63CBB68C7046}"/>
+                <a16:creationId xmlns:a16="http://schemas.microsoft.com/office/drawing/2014/main" id="{E19942C6-31DF-482C-838C-387E68C1E6CD}"/>
               </a:ext>
             </a:extLst>
           </p:cNvPr>
@@ -6228,7 +6228,7 @@
             <a:pPr algn="l">
               <a:defRPr sz="2250" b="1">
                 <a:solidFill>
-                  <a:srgbClr val="E5783F"/>
+                  <a:srgbClr val="9A3F16"/>
                 </a:solidFill>
                 <a:latin typeface="PingFang SC"/>
                 <a:ea typeface="PingFang SC"/>
@@ -6238,7 +6238,7 @@
             <a:r>
               <a:rPr sz="2250" b="1">
                 <a:solidFill>
-                  <a:srgbClr val="E5783F"/>
+                  <a:srgbClr val="9A3F16"/>
                 </a:solidFill>
                 <a:latin typeface="PingFang SC"/>
                 <a:ea typeface="PingFang SC"/>
@@ -6254,7 +6254,7 @@
           <p:cNvPr id="7" name="core-label-0">
             <a:extLst xmlns:a="http://schemas.openxmlformats.org/drawingml/2006/main">
               <a:ext uri="{FF2B5EF4-FFF2-40B4-BE49-F238E27FC236}">
-                <a16:creationId xmlns:a16="http://schemas.microsoft.com/office/drawing/2014/main" id="{BE94C17F-0CE3-49A8-B0FB-494E0DD533C6}"/>
+                <a16:creationId xmlns:a16="http://schemas.microsoft.com/office/drawing/2014/main" id="{65835A1E-9FB0-4893-9048-9EC557488142}"/>
               </a:ext>
             </a:extLst>
           </p:cNvPr>
@@ -6312,7 +6312,7 @@
           <p:cNvPr id="8" name="core-body-0">
             <a:extLst xmlns:a="http://schemas.openxmlformats.org/drawingml/2006/main">
               <a:ext uri="{FF2B5EF4-FFF2-40B4-BE49-F238E27FC236}">
-                <a16:creationId xmlns:a16="http://schemas.microsoft.com/office/drawing/2014/main" id="{1D3654C4-54CF-46CB-84B7-9CD40B38308D}"/>
+                <a16:creationId xmlns:a16="http://schemas.microsoft.com/office/drawing/2014/main" id="{4EEE25EA-39D4-4273-ACDF-4AFCEBC1BABF}"/>
               </a:ext>
             </a:extLst>
           </p:cNvPr>
@@ -6336,14 +6336,14 @@
           </a:solidFill>
           <a:ln xmlns:a="http://schemas.openxmlformats.org/drawingml/2006/main" w="19050">
             <a:solidFill>
-              <a:srgbClr val="E5783F"/>
+              <a:srgbClr val="9A3F16"/>
             </a:solidFill>
             <a:prstDash val="solid"/>
           </a:ln>
         </p:spPr>
         <p:txBody>
           <a:bodyPr xmlns:a="http://schemas.openxmlformats.org/drawingml/2006/main" lIns="152400" tIns="133350" rIns="152400" bIns="133350" anchor="ctr">
-            <a:normAutofit fontScale="80239"/>
+            <a:normAutofit fontScale="85261"/>
           </a:bodyPr>
           <a:lstStyle xmlns:a="http://schemas.openxmlformats.org/drawingml/2006/main"/>
           <a:p xmlns:a="http://schemas.openxmlformats.org/drawingml/2006/main">
@@ -6366,7 +6366,7 @@
                 <a:ea typeface="PingFang SC"/>
                 <a:cs typeface="PingFang SC"/>
               </a:rPr>
-              <a:t>机场数据来自不同系统，更新节奏也不同。航班计划描述预期，运行状态描述当前变化，气象给出观测与预报，设备系统记录告警和维修，视频与门禁反映局部现场。融合前要统一航班、区域、设备、车辆和事件的标识…</a:t>
+              <a:t>机场数据来自不同系统；更新节奏也不同，航班计划描述预期；运行状态描述当前变化；气象给出观测与预报；设备系统记录告警和维修；视频与门禁反映局部现场；融合前要统一航班、区域、设备、车辆和事件的标识</a:t>
             </a:r>
           </a:p>
         </p:txBody>
@@ -6376,7 +6376,7 @@
           <p:cNvPr id="9" name="core-no-1">
             <a:extLst xmlns:a="http://schemas.openxmlformats.org/drawingml/2006/main">
               <a:ext uri="{FF2B5EF4-FFF2-40B4-BE49-F238E27FC236}">
-                <a16:creationId xmlns:a16="http://schemas.microsoft.com/office/drawing/2014/main" id="{C492E94D-9CD0-4ED0-A2C7-F6A36ED7F141}"/>
+                <a16:creationId xmlns:a16="http://schemas.microsoft.com/office/drawing/2014/main" id="{8D625329-FC7B-4956-AD10-3DD8EE9E53F5}"/>
               </a:ext>
             </a:extLst>
           </p:cNvPr>
@@ -6408,7 +6408,7 @@
             <a:pPr algn="l">
               <a:defRPr sz="2250" b="1">
                 <a:solidFill>
-                  <a:srgbClr val="E5783F"/>
+                  <a:srgbClr val="9A3F16"/>
                 </a:solidFill>
                 <a:latin typeface="PingFang SC"/>
                 <a:ea typeface="PingFang SC"/>
@@ -6418,7 +6418,7 @@
             <a:r>
               <a:rPr sz="2250" b="1">
                 <a:solidFill>
-                  <a:srgbClr val="E5783F"/>
+                  <a:srgbClr val="9A3F16"/>
                 </a:solidFill>
                 <a:latin typeface="PingFang SC"/>
                 <a:ea typeface="PingFang SC"/>
@@ -6434,7 +6434,7 @@
           <p:cNvPr id="10" name="core-body-1">
             <a:extLst xmlns:a="http://schemas.openxmlformats.org/drawingml/2006/main">
               <a:ext uri="{FF2B5EF4-FFF2-40B4-BE49-F238E27FC236}">
-                <a16:creationId xmlns:a16="http://schemas.microsoft.com/office/drawing/2014/main" id="{2DECA204-C1FD-43B4-8A48-A13FB820849A}"/>
+                <a16:creationId xmlns:a16="http://schemas.microsoft.com/office/drawing/2014/main" id="{AF66E008-C647-44A8-B716-6A23850D091C}"/>
               </a:ext>
             </a:extLst>
           </p:cNvPr>
@@ -6488,7 +6488,7 @@
                 <a:ea typeface="PingFang SC"/>
                 <a:cs typeface="PingFang SC"/>
               </a:rPr>
-              <a:t>“接入成功”不等于“可以使用”。系统应记录每条数据的来源、更新时间、质量等级、缺失情况和访问范围。时钟偏差、重复事件、设备离线与人工补录都要显式标记。对于视频、人员轨迹等敏感数据…</a:t>
+              <a:t>“接入成功”不等于“可以使用”；系统应记录每条数据的来源、更新时间、质量等级、缺失情况和访问范围；时钟偏差、重复事件、设备离线与人工补录都要显式标记；对于视频、人员轨迹等敏感数据</a:t>
             </a:r>
           </a:p>
         </p:txBody>
@@ -6498,7 +6498,7 @@
           <p:cNvPr id="11" name="core-no-2">
             <a:extLst xmlns:a="http://schemas.openxmlformats.org/drawingml/2006/main">
               <a:ext uri="{FF2B5EF4-FFF2-40B4-BE49-F238E27FC236}">
-                <a16:creationId xmlns:a16="http://schemas.microsoft.com/office/drawing/2014/main" id="{57237525-EC5B-402B-8C61-917ABE4F2C14}"/>
+                <a16:creationId xmlns:a16="http://schemas.microsoft.com/office/drawing/2014/main" id="{AD4713C8-44AD-4B6D-8EB4-49A794009AA0}"/>
               </a:ext>
             </a:extLst>
           </p:cNvPr>
@@ -6530,7 +6530,7 @@
             <a:pPr algn="l">
               <a:defRPr sz="2250" b="1">
                 <a:solidFill>
-                  <a:srgbClr val="E5783F"/>
+                  <a:srgbClr val="9A3F16"/>
                 </a:solidFill>
                 <a:latin typeface="PingFang SC"/>
                 <a:ea typeface="PingFang SC"/>
@@ -6540,7 +6540,7 @@
             <a:r>
               <a:rPr sz="2250" b="1">
                 <a:solidFill>
-                  <a:srgbClr val="E5783F"/>
+                  <a:srgbClr val="9A3F16"/>
                 </a:solidFill>
                 <a:latin typeface="PingFang SC"/>
                 <a:ea typeface="PingFang SC"/>
@@ -6556,7 +6556,7 @@
           <p:cNvPr id="12" name="core-body-2">
             <a:extLst xmlns:a="http://schemas.openxmlformats.org/drawingml/2006/main">
               <a:ext uri="{FF2B5EF4-FFF2-40B4-BE49-F238E27FC236}">
-                <a16:creationId xmlns:a16="http://schemas.microsoft.com/office/drawing/2014/main" id="{A4234554-271E-48D6-B3E9-851C49CF8820}"/>
+                <a16:creationId xmlns:a16="http://schemas.microsoft.com/office/drawing/2014/main" id="{6E3051E5-A16A-4E3F-A25E-C7CB1208CDE9}"/>
               </a:ext>
             </a:extLst>
           </p:cNvPr>
@@ -6610,7 +6610,7 @@
                 <a:ea typeface="PingFang SC"/>
                 <a:cs typeface="PingFang SC"/>
               </a:rPr>
-              <a:t>语义层把不同系统的对象关系连接起来，例如航班使用哪个机位、机位关联哪些保障设备、告警发生在哪个区域、对应哪份规程。关系图可以帮助检索，但不能覆盖原始记录…</a:t>
+              <a:t>语义层把不同系统的对象关系连接起来；例如航班使用哪个机位、机位关联哪些保障设备、告警发生在哪个区域、对应哪份规程；关系图可以帮助检索；但不能覆盖原始记录</a:t>
             </a:r>
           </a:p>
         </p:txBody>
@@ -6620,7 +6620,7 @@
           <p:cNvPr id="13" name="s3-takeaway-rule">
             <a:extLst xmlns:a="http://schemas.openxmlformats.org/drawingml/2006/main">
               <a:ext uri="{FF2B5EF4-FFF2-40B4-BE49-F238E27FC236}">
-                <a16:creationId xmlns:a16="http://schemas.microsoft.com/office/drawing/2014/main" id="{A1D76FF7-1C4F-4C77-81D7-F6C642F0FBCB}"/>
+                <a16:creationId xmlns:a16="http://schemas.microsoft.com/office/drawing/2014/main" id="{9E679DE7-99BE-49D4-838D-C310ED7A2596}"/>
               </a:ext>
             </a:extLst>
           </p:cNvPr>
@@ -6653,7 +6653,7 @@
           <p:cNvPr id="14" name="s3-takeaway">
             <a:extLst xmlns:a="http://schemas.openxmlformats.org/drawingml/2006/main">
               <a:ext uri="{FF2B5EF4-FFF2-40B4-BE49-F238E27FC236}">
-                <a16:creationId xmlns:a16="http://schemas.microsoft.com/office/drawing/2014/main" id="{D3CB6279-EBE3-46B6-BE17-384ED143D4D2}"/>
+                <a16:creationId xmlns:a16="http://schemas.microsoft.com/office/drawing/2014/main" id="{9A003ECF-FB2A-46F1-B425-D29A8D5FDB8B}"/>
               </a:ext>
             </a:extLst>
           </p:cNvPr>
@@ -6709,7 +6709,7 @@
     </p:spTree>
     <p:extLst>
       <p:ext uri="{BB962C8B-B14F-4D97-AF65-F5344CB8AC3E}">
-        <p14:creationId xmlns:p14="http://schemas.microsoft.com/office/powerpoint/2010/main" val="250021218"/>
+        <p14:creationId xmlns:p14="http://schemas.microsoft.com/office/powerpoint/2010/main" val="1351419894"/>
       </p:ext>
     </p:extLst>
   </p:cSld>
@@ -6740,7 +6740,7 @@
           <p:cNvPr id="1" name="s4-rule">
             <a:extLst xmlns:a="http://schemas.openxmlformats.org/drawingml/2006/main">
               <a:ext uri="{FF2B5EF4-FFF2-40B4-BE49-F238E27FC236}">
-                <a16:creationId xmlns:a16="http://schemas.microsoft.com/office/drawing/2014/main" id="{B32243F2-052A-4FCD-8D1C-E7545A3FFC4B}"/>
+                <a16:creationId xmlns:a16="http://schemas.microsoft.com/office/drawing/2014/main" id="{E596D58A-7855-4545-BD5E-594BD1A27FB2}"/>
               </a:ext>
             </a:extLst>
           </p:cNvPr>
@@ -6773,7 +6773,7 @@
           <p:cNvPr id="2" name="s4-eyebrow">
             <a:extLst xmlns:a="http://schemas.openxmlformats.org/drawingml/2006/main">
               <a:ext uri="{FF2B5EF4-FFF2-40B4-BE49-F238E27FC236}">
-                <a16:creationId xmlns:a16="http://schemas.microsoft.com/office/drawing/2014/main" id="{F02C3A5F-4E3C-4552-B118-A1932E1EC076}"/>
+                <a16:creationId xmlns:a16="http://schemas.microsoft.com/office/drawing/2014/main" id="{D4917261-A809-4192-BED2-FAC7710C8982}"/>
               </a:ext>
             </a:extLst>
           </p:cNvPr>
@@ -6831,7 +6831,7 @@
           <p:cNvPr id="3" name="s4-title">
             <a:extLst xmlns:a="http://schemas.openxmlformats.org/drawingml/2006/main">
               <a:ext uri="{FF2B5EF4-FFF2-40B4-BE49-F238E27FC236}">
-                <a16:creationId xmlns:a16="http://schemas.microsoft.com/office/drawing/2014/main" id="{28267CE9-9395-4092-8435-D3986971EEB6}"/>
+                <a16:creationId xmlns:a16="http://schemas.microsoft.com/office/drawing/2014/main" id="{5122FBA8-016E-43AC-86A0-FCA9FCEF5DCB}"/>
               </a:ext>
             </a:extLst>
           </p:cNvPr>
@@ -6856,7 +6856,7 @@
         </p:spPr>
         <p:txBody>
           <a:bodyPr xmlns:a="http://schemas.openxmlformats.org/drawingml/2006/main" lIns="0" tIns="0" rIns="0" bIns="0" anchor="ctr">
-            <a:normAutofit fontScale="86983"/>
+            <a:normAutofit fontScale="100000"/>
           </a:bodyPr>
           <a:lstStyle xmlns:a="http://schemas.openxmlformats.org/drawingml/2006/main"/>
           <a:p xmlns:a="http://schemas.openxmlformats.org/drawingml/2006/main">
@@ -6879,7 +6879,7 @@
                 <a:ea typeface="PingFang SC"/>
                 <a:cs typeface="PingFang SC"/>
               </a:rPr>
-              <a:t>知识服务可以覆盖运行规程、设备手册、岗位问答和旅客服务信息</a:t>
+              <a:t>知识服务必须返回仍然有效的依据</a:t>
             </a:r>
           </a:p>
         </p:txBody>
@@ -6889,7 +6889,7 @@
           <p:cNvPr id="4" name="s4-footer">
             <a:extLst xmlns:a="http://schemas.openxmlformats.org/drawingml/2006/main">
               <a:ext uri="{FF2B5EF4-FFF2-40B4-BE49-F238E27FC236}">
-                <a16:creationId xmlns:a16="http://schemas.microsoft.com/office/drawing/2014/main" id="{997F11B6-4E1E-45F7-A7D3-F050F55E39D5}"/>
+                <a16:creationId xmlns:a16="http://schemas.microsoft.com/office/drawing/2014/main" id="{91F1E9DD-906C-48FA-9869-9567C266E32B}"/>
               </a:ext>
             </a:extLst>
           </p:cNvPr>
@@ -6920,7 +6920,7 @@
           <p:cNvPr id="5" name="s4-identity">
             <a:extLst xmlns:a="http://schemas.openxmlformats.org/drawingml/2006/main">
               <a:ext uri="{FF2B5EF4-FFF2-40B4-BE49-F238E27FC236}">
-                <a16:creationId xmlns:a16="http://schemas.microsoft.com/office/drawing/2014/main" id="{FDF3BA62-2EB9-4530-84A7-3EFC49CDE2FF}"/>
+                <a16:creationId xmlns:a16="http://schemas.microsoft.com/office/drawing/2014/main" id="{B56A98E0-2698-4FD3-8E05-2A52E0947270}"/>
               </a:ext>
             </a:extLst>
           </p:cNvPr>
@@ -6978,7 +6978,7 @@
           <p:cNvPr id="6" name="core-no-0">
             <a:extLst xmlns:a="http://schemas.openxmlformats.org/drawingml/2006/main">
               <a:ext uri="{FF2B5EF4-FFF2-40B4-BE49-F238E27FC236}">
-                <a16:creationId xmlns:a16="http://schemas.microsoft.com/office/drawing/2014/main" id="{7386AC1A-666F-4BC4-B2DB-7F14102FEE57}"/>
+                <a16:creationId xmlns:a16="http://schemas.microsoft.com/office/drawing/2014/main" id="{68094261-7758-4588-B97C-6B20F1D6203F}"/>
               </a:ext>
             </a:extLst>
           </p:cNvPr>
@@ -7010,7 +7010,7 @@
             <a:pPr algn="l">
               <a:defRPr sz="2250" b="1">
                 <a:solidFill>
-                  <a:srgbClr val="E5783F"/>
+                  <a:srgbClr val="9A3F16"/>
                 </a:solidFill>
                 <a:latin typeface="PingFang SC"/>
                 <a:ea typeface="PingFang SC"/>
@@ -7020,7 +7020,7 @@
             <a:r>
               <a:rPr sz="2250" b="1">
                 <a:solidFill>
-                  <a:srgbClr val="E5783F"/>
+                  <a:srgbClr val="9A3F16"/>
                 </a:solidFill>
                 <a:latin typeface="PingFang SC"/>
                 <a:ea typeface="PingFang SC"/>
@@ -7036,7 +7036,7 @@
           <p:cNvPr id="7" name="core-label-0">
             <a:extLst xmlns:a="http://schemas.openxmlformats.org/drawingml/2006/main">
               <a:ext uri="{FF2B5EF4-FFF2-40B4-BE49-F238E27FC236}">
-                <a16:creationId xmlns:a16="http://schemas.microsoft.com/office/drawing/2014/main" id="{FE7B7ED6-4048-4271-A0AB-C0A7578733B0}"/>
+                <a16:creationId xmlns:a16="http://schemas.microsoft.com/office/drawing/2014/main" id="{5069C6CD-17CF-40DB-BD06-74FA3E46CA20}"/>
               </a:ext>
             </a:extLst>
           </p:cNvPr>
@@ -7094,7 +7094,7 @@
           <p:cNvPr id="8" name="core-body-0">
             <a:extLst xmlns:a="http://schemas.openxmlformats.org/drawingml/2006/main">
               <a:ext uri="{FF2B5EF4-FFF2-40B4-BE49-F238E27FC236}">
-                <a16:creationId xmlns:a16="http://schemas.microsoft.com/office/drawing/2014/main" id="{CACF5C14-4211-44CA-B700-DA2A67CA0EBF}"/>
+                <a16:creationId xmlns:a16="http://schemas.microsoft.com/office/drawing/2014/main" id="{20AE46E5-7D43-4F4A-BA50-4076E930A5F5}"/>
               </a:ext>
             </a:extLst>
           </p:cNvPr>
@@ -7118,7 +7118,7 @@
           </a:solidFill>
           <a:ln xmlns:a="http://schemas.openxmlformats.org/drawingml/2006/main" w="19050">
             <a:solidFill>
-              <a:srgbClr val="E5783F"/>
+              <a:srgbClr val="9A3F16"/>
             </a:solidFill>
             <a:prstDash val="solid"/>
           </a:ln>
@@ -7148,7 +7148,7 @@
                 <a:ea typeface="PingFang SC"/>
                 <a:cs typeface="PingFang SC"/>
               </a:rPr>
-              <a:t>知识服务可以覆盖运行规程、设备手册、岗位问答和旅客服务信息。入库资料应标明责任部门、版本、生效时间、适用区域和替代关系。用户提问后，系统先识别角色与任务，再从其有权访问的有效资料中检索…</a:t>
+              <a:t>知识服务可以覆盖运行规程、设备手册、岗位问答和旅客服务信息；入库资料应标明责任部门、版本、生效时间、适用区域和替代关系；用户提问后，系统先识别角色与任务；再从其有权访问的有效资料中检索</a:t>
             </a:r>
           </a:p>
         </p:txBody>
@@ -7158,7 +7158,7 @@
           <p:cNvPr id="9" name="core-no-1">
             <a:extLst xmlns:a="http://schemas.openxmlformats.org/drawingml/2006/main">
               <a:ext uri="{FF2B5EF4-FFF2-40B4-BE49-F238E27FC236}">
-                <a16:creationId xmlns:a16="http://schemas.microsoft.com/office/drawing/2014/main" id="{CACF73BF-C864-4D92-B850-4063B380C747}"/>
+                <a16:creationId xmlns:a16="http://schemas.microsoft.com/office/drawing/2014/main" id="{BDA565F2-AD50-4D23-A9C9-C1F3254B4DF1}"/>
               </a:ext>
             </a:extLst>
           </p:cNvPr>
@@ -7190,7 +7190,7 @@
             <a:pPr algn="l">
               <a:defRPr sz="2250" b="1">
                 <a:solidFill>
-                  <a:srgbClr val="E5783F"/>
+                  <a:srgbClr val="9A3F16"/>
                 </a:solidFill>
                 <a:latin typeface="PingFang SC"/>
                 <a:ea typeface="PingFang SC"/>
@@ -7200,7 +7200,7 @@
             <a:r>
               <a:rPr sz="2250" b="1">
                 <a:solidFill>
-                  <a:srgbClr val="E5783F"/>
+                  <a:srgbClr val="9A3F16"/>
                 </a:solidFill>
                 <a:latin typeface="PingFang SC"/>
                 <a:ea typeface="PingFang SC"/>
@@ -7216,7 +7216,7 @@
           <p:cNvPr id="10" name="core-body-1">
             <a:extLst xmlns:a="http://schemas.openxmlformats.org/drawingml/2006/main">
               <a:ext uri="{FF2B5EF4-FFF2-40B4-BE49-F238E27FC236}">
-                <a16:creationId xmlns:a16="http://schemas.microsoft.com/office/drawing/2014/main" id="{DD6F5B8D-11E5-4A55-ABD0-000E33D0FE34}"/>
+                <a16:creationId xmlns:a16="http://schemas.microsoft.com/office/drawing/2014/main" id="{2D4BD1E7-F0E0-47A4-A49B-43BCD38C7C05}"/>
               </a:ext>
             </a:extLst>
           </p:cNvPr>
@@ -7270,7 +7270,7 @@
                 <a:ea typeface="PingFang SC"/>
                 <a:cs typeface="PingFang SC"/>
               </a:rPr>
-              <a:t>评测不能只看关键词命中。应检查引用是否真实存在、原文是否支持答案、是否使用当前版本、该拒答的问题有没有拒答、需要转岗的问题有没有正确转交。遇到资料冲突、状态数据过期或超出知识范围时…</a:t>
+              <a:t>评测不能只看关键词命中；应检查引用是否真实存在、原文是否支持答案、是否使用当前版本、该拒答的问题有没有拒答、需要转岗的问题有没有正确转交；遇到资料冲突、状态数据过期或超出知识范围时</a:t>
             </a:r>
           </a:p>
         </p:txBody>
@@ -7280,7 +7280,7 @@
           <p:cNvPr id="11" name="s4-takeaway-rule">
             <a:extLst xmlns:a="http://schemas.openxmlformats.org/drawingml/2006/main">
               <a:ext uri="{FF2B5EF4-FFF2-40B4-BE49-F238E27FC236}">
-                <a16:creationId xmlns:a16="http://schemas.microsoft.com/office/drawing/2014/main" id="{A0F9E8C9-DC31-412E-B8A4-C43D8C3D5794}"/>
+                <a16:creationId xmlns:a16="http://schemas.microsoft.com/office/drawing/2014/main" id="{5980DA1B-FE0A-4433-86A7-0943BA26CBE3}"/>
               </a:ext>
             </a:extLst>
           </p:cNvPr>
@@ -7313,7 +7313,7 @@
           <p:cNvPr id="12" name="s4-takeaway">
             <a:extLst xmlns:a="http://schemas.openxmlformats.org/drawingml/2006/main">
               <a:ext uri="{FF2B5EF4-FFF2-40B4-BE49-F238E27FC236}">
-                <a16:creationId xmlns:a16="http://schemas.microsoft.com/office/drawing/2014/main" id="{53A5B9B2-1CFA-4587-96B3-A1310684C27A}"/>
+                <a16:creationId xmlns:a16="http://schemas.microsoft.com/office/drawing/2014/main" id="{8323BA16-9606-4D88-A1E6-15EBE0756A61}"/>
               </a:ext>
             </a:extLst>
           </p:cNvPr>
@@ -7361,7 +7361,7 @@
                 <a:ea typeface="PingFang SC"/>
                 <a:cs typeface="PingFang SC"/>
               </a:rPr>
-              <a:t>知识服务可以覆盖运行规程、设备手册、岗位问答和旅客服务信息</a:t>
+              <a:t>知识服务必须返回仍然有效的依据</a:t>
             </a:r>
           </a:p>
         </p:txBody>
@@ -7369,7 +7369,7 @@
     </p:spTree>
     <p:extLst>
       <p:ext uri="{BB962C8B-B14F-4D97-AF65-F5344CB8AC3E}">
-        <p14:creationId xmlns:p14="http://schemas.microsoft.com/office/powerpoint/2010/main" val="1832279208"/>
+        <p14:creationId xmlns:p14="http://schemas.microsoft.com/office/powerpoint/2010/main" val="148800352"/>
       </p:ext>
     </p:extLst>
   </p:cSld>
@@ -7400,7 +7400,7 @@
           <p:cNvPr id="1" name="s5-rule">
             <a:extLst xmlns:a="http://schemas.openxmlformats.org/drawingml/2006/main">
               <a:ext uri="{FF2B5EF4-FFF2-40B4-BE49-F238E27FC236}">
-                <a16:creationId xmlns:a16="http://schemas.microsoft.com/office/drawing/2014/main" id="{6DDDA1BB-83B9-490A-A11F-93A8A6723D70}"/>
+                <a16:creationId xmlns:a16="http://schemas.microsoft.com/office/drawing/2014/main" id="{CEC6B62A-C971-41B0-BB36-6C77CECAA00A}"/>
               </a:ext>
             </a:extLst>
           </p:cNvPr>
@@ -7433,7 +7433,7 @@
           <p:cNvPr id="2" name="s5-eyebrow">
             <a:extLst xmlns:a="http://schemas.openxmlformats.org/drawingml/2006/main">
               <a:ext uri="{FF2B5EF4-FFF2-40B4-BE49-F238E27FC236}">
-                <a16:creationId xmlns:a16="http://schemas.microsoft.com/office/drawing/2014/main" id="{44A9ABD3-C6B2-45A4-95D6-18EA28E1F555}"/>
+                <a16:creationId xmlns:a16="http://schemas.microsoft.com/office/drawing/2014/main" id="{50A6A415-4B34-42AF-B6FE-E10710DBCFD6}"/>
               </a:ext>
             </a:extLst>
           </p:cNvPr>
@@ -7491,7 +7491,7 @@
           <p:cNvPr id="3" name="s5-title">
             <a:extLst xmlns:a="http://schemas.openxmlformats.org/drawingml/2006/main">
               <a:ext uri="{FF2B5EF4-FFF2-40B4-BE49-F238E27FC236}">
-                <a16:creationId xmlns:a16="http://schemas.microsoft.com/office/drawing/2014/main" id="{3855A1C8-072D-4208-96F7-C5FA7FEC1689}"/>
+                <a16:creationId xmlns:a16="http://schemas.microsoft.com/office/drawing/2014/main" id="{3F16E317-F5CE-410F-93B0-EA02BD15380F}"/>
               </a:ext>
             </a:extLst>
           </p:cNvPr>
@@ -7549,7 +7549,7 @@
           <p:cNvPr id="4" name="s5-footer">
             <a:extLst xmlns:a="http://schemas.openxmlformats.org/drawingml/2006/main">
               <a:ext uri="{FF2B5EF4-FFF2-40B4-BE49-F238E27FC236}">
-                <a16:creationId xmlns:a16="http://schemas.microsoft.com/office/drawing/2014/main" id="{BD9F9760-19FA-4AAC-B368-2FDD1FF83368}"/>
+                <a16:creationId xmlns:a16="http://schemas.microsoft.com/office/drawing/2014/main" id="{6B55950D-4A53-4E67-BE51-C13C6DD84BF2}"/>
               </a:ext>
             </a:extLst>
           </p:cNvPr>
@@ -7580,7 +7580,7 @@
           <p:cNvPr id="5" name="s5-identity">
             <a:extLst xmlns:a="http://schemas.openxmlformats.org/drawingml/2006/main">
               <a:ext uri="{FF2B5EF4-FFF2-40B4-BE49-F238E27FC236}">
-                <a16:creationId xmlns:a16="http://schemas.microsoft.com/office/drawing/2014/main" id="{832FCBE2-F639-4E7A-BE92-8D769217C766}"/>
+                <a16:creationId xmlns:a16="http://schemas.microsoft.com/office/drawing/2014/main" id="{4ACBC7CD-231B-4C08-9E05-3AFD7C13D093}"/>
               </a:ext>
             </a:extLst>
           </p:cNvPr>
@@ -7638,7 +7638,7 @@
           <p:cNvPr id="6" name="core-no-0">
             <a:extLst xmlns:a="http://schemas.openxmlformats.org/drawingml/2006/main">
               <a:ext uri="{FF2B5EF4-FFF2-40B4-BE49-F238E27FC236}">
-                <a16:creationId xmlns:a16="http://schemas.microsoft.com/office/drawing/2014/main" id="{B99A5BA8-CFBD-4E19-92E6-91FD6C5B5AA5}"/>
+                <a16:creationId xmlns:a16="http://schemas.microsoft.com/office/drawing/2014/main" id="{6C0A4ED5-3FB6-4041-B90B-54266BEED740}"/>
               </a:ext>
             </a:extLst>
           </p:cNvPr>
@@ -7670,7 +7670,7 @@
             <a:pPr algn="l">
               <a:defRPr sz="2250" b="1">
                 <a:solidFill>
-                  <a:srgbClr val="E5783F"/>
+                  <a:srgbClr val="9A3F16"/>
                 </a:solidFill>
                 <a:latin typeface="PingFang SC"/>
                 <a:ea typeface="PingFang SC"/>
@@ -7680,7 +7680,7 @@
             <a:r>
               <a:rPr sz="2250" b="1">
                 <a:solidFill>
-                  <a:srgbClr val="E5783F"/>
+                  <a:srgbClr val="9A3F16"/>
                 </a:solidFill>
                 <a:latin typeface="PingFang SC"/>
                 <a:ea typeface="PingFang SC"/>
@@ -7696,7 +7696,7 @@
           <p:cNvPr id="7" name="core-label-0">
             <a:extLst xmlns:a="http://schemas.openxmlformats.org/drawingml/2006/main">
               <a:ext uri="{FF2B5EF4-FFF2-40B4-BE49-F238E27FC236}">
-                <a16:creationId xmlns:a16="http://schemas.microsoft.com/office/drawing/2014/main" id="{5E52BF9F-B1FC-4159-A2EA-6B48EAC791AD}"/>
+                <a16:creationId xmlns:a16="http://schemas.microsoft.com/office/drawing/2014/main" id="{6E3916B6-C29D-438B-A839-A0FA3BDB1533}"/>
               </a:ext>
             </a:extLst>
           </p:cNvPr>
@@ -7754,7 +7754,7 @@
           <p:cNvPr id="8" name="core-body-0">
             <a:extLst xmlns:a="http://schemas.openxmlformats.org/drawingml/2006/main">
               <a:ext uri="{FF2B5EF4-FFF2-40B4-BE49-F238E27FC236}">
-                <a16:creationId xmlns:a16="http://schemas.microsoft.com/office/drawing/2014/main" id="{4BDC1FFE-4C0F-45EE-AD4A-ED376EA46AF4}"/>
+                <a16:creationId xmlns:a16="http://schemas.microsoft.com/office/drawing/2014/main" id="{6A7F5640-1D95-47BC-8C84-6E6C996B19D5}"/>
               </a:ext>
             </a:extLst>
           </p:cNvPr>
@@ -7778,7 +7778,7 @@
           </a:solidFill>
           <a:ln xmlns:a="http://schemas.openxmlformats.org/drawingml/2006/main" w="19050">
             <a:solidFill>
-              <a:srgbClr val="E5783F"/>
+              <a:srgbClr val="9A3F16"/>
             </a:solidFill>
             <a:prstDash val="solid"/>
           </a:ln>
@@ -7818,7 +7818,7 @@
           <p:cNvPr id="9" name="core-no-1">
             <a:extLst xmlns:a="http://schemas.openxmlformats.org/drawingml/2006/main">
               <a:ext uri="{FF2B5EF4-FFF2-40B4-BE49-F238E27FC236}">
-                <a16:creationId xmlns:a16="http://schemas.microsoft.com/office/drawing/2014/main" id="{F85CC434-4924-45BA-B8CA-8FB5596535F1}"/>
+                <a16:creationId xmlns:a16="http://schemas.microsoft.com/office/drawing/2014/main" id="{E1DC8B6F-68E7-4ADB-AF9D-1420A10977DA}"/>
               </a:ext>
             </a:extLst>
           </p:cNvPr>
@@ -7850,7 +7850,7 @@
             <a:pPr algn="l">
               <a:defRPr sz="2250" b="1">
                 <a:solidFill>
-                  <a:srgbClr val="E5783F"/>
+                  <a:srgbClr val="9A3F16"/>
                 </a:solidFill>
                 <a:latin typeface="PingFang SC"/>
                 <a:ea typeface="PingFang SC"/>
@@ -7860,7 +7860,7 @@
             <a:r>
               <a:rPr sz="2250" b="1">
                 <a:solidFill>
-                  <a:srgbClr val="E5783F"/>
+                  <a:srgbClr val="9A3F16"/>
                 </a:solidFill>
                 <a:latin typeface="PingFang SC"/>
                 <a:ea typeface="PingFang SC"/>
@@ -7876,7 +7876,7 @@
           <p:cNvPr id="10" name="core-body-1">
             <a:extLst xmlns:a="http://schemas.openxmlformats.org/drawingml/2006/main">
               <a:ext uri="{FF2B5EF4-FFF2-40B4-BE49-F238E27FC236}">
-                <a16:creationId xmlns:a16="http://schemas.microsoft.com/office/drawing/2014/main" id="{34DEF49E-4EA8-47BA-A2A8-54E5E305BB88}"/>
+                <a16:creationId xmlns:a16="http://schemas.microsoft.com/office/drawing/2014/main" id="{116A8414-51EB-43BC-B6FB-36ED61F4C266}"/>
               </a:ext>
             </a:extLst>
           </p:cNvPr>
@@ -7930,7 +7930,7 @@
                 <a:ea typeface="PingFang SC"/>
                 <a:cs typeface="PingFang SC"/>
               </a:rPr>
-              <a:t>一条可执行建议应包含设备身份、当前工况、相关信号、可能影响、依据、建议检查和不确定性。值班人员需要现场复测，工程师结合运行窗口和安全要求决定是否处理。处置结果回写后，团队才能区分真实预警…</a:t>
+              <a:t>一条可执行建议应包含设备身份、当前工况、相关信号、可能影响、依据、建议检查和不确定性；值班人员需要现场复测；工程师结合运行窗口和安全要求决定是否处理</a:t>
             </a:r>
           </a:p>
         </p:txBody>
@@ -7940,7 +7940,7 @@
           <p:cNvPr id="11" name="core-no-2">
             <a:extLst xmlns:a="http://schemas.openxmlformats.org/drawingml/2006/main">
               <a:ext uri="{FF2B5EF4-FFF2-40B4-BE49-F238E27FC236}">
-                <a16:creationId xmlns:a16="http://schemas.microsoft.com/office/drawing/2014/main" id="{AB3A4FD3-FA88-442D-997B-36A11142A6D1}"/>
+                <a16:creationId xmlns:a16="http://schemas.microsoft.com/office/drawing/2014/main" id="{9E47A2DC-51FD-4C7C-8932-946C3DF30F50}"/>
               </a:ext>
             </a:extLst>
           </p:cNvPr>
@@ -7972,7 +7972,7 @@
             <a:pPr algn="l">
               <a:defRPr sz="2250" b="1">
                 <a:solidFill>
-                  <a:srgbClr val="E5783F"/>
+                  <a:srgbClr val="9A3F16"/>
                 </a:solidFill>
                 <a:latin typeface="PingFang SC"/>
                 <a:ea typeface="PingFang SC"/>
@@ -7982,7 +7982,7 @@
             <a:r>
               <a:rPr sz="2250" b="1">
                 <a:solidFill>
-                  <a:srgbClr val="E5783F"/>
+                  <a:srgbClr val="9A3F16"/>
                 </a:solidFill>
                 <a:latin typeface="PingFang SC"/>
                 <a:ea typeface="PingFang SC"/>
@@ -7998,7 +7998,7 @@
           <p:cNvPr id="12" name="core-body-2">
             <a:extLst xmlns:a="http://schemas.openxmlformats.org/drawingml/2006/main">
               <a:ext uri="{FF2B5EF4-FFF2-40B4-BE49-F238E27FC236}">
-                <a16:creationId xmlns:a16="http://schemas.microsoft.com/office/drawing/2014/main" id="{EF22B778-02D3-4D8D-8CCB-8AF1044720DE}"/>
+                <a16:creationId xmlns:a16="http://schemas.microsoft.com/office/drawing/2014/main" id="{74AB2009-7BCF-40CF-AAB2-1E129E57778B}"/>
               </a:ext>
             </a:extLst>
           </p:cNvPr>
@@ -8062,7 +8062,7 @@
           <p:cNvPr id="13" name="s5-takeaway-rule">
             <a:extLst xmlns:a="http://schemas.openxmlformats.org/drawingml/2006/main">
               <a:ext uri="{FF2B5EF4-FFF2-40B4-BE49-F238E27FC236}">
-                <a16:creationId xmlns:a16="http://schemas.microsoft.com/office/drawing/2014/main" id="{D9FBDB0F-97A1-4C62-A1F8-D5746DA517E8}"/>
+                <a16:creationId xmlns:a16="http://schemas.microsoft.com/office/drawing/2014/main" id="{F7D9F826-1E25-47E9-B6C2-D9E3920FA9B4}"/>
               </a:ext>
             </a:extLst>
           </p:cNvPr>
@@ -8095,7 +8095,7 @@
           <p:cNvPr id="14" name="s5-takeaway">
             <a:extLst xmlns:a="http://schemas.openxmlformats.org/drawingml/2006/main">
               <a:ext uri="{FF2B5EF4-FFF2-40B4-BE49-F238E27FC236}">
-                <a16:creationId xmlns:a16="http://schemas.microsoft.com/office/drawing/2014/main" id="{EFE2DBEB-4A73-45A6-9455-6A9C7204A975}"/>
+                <a16:creationId xmlns:a16="http://schemas.microsoft.com/office/drawing/2014/main" id="{70C3C438-3907-41C4-864D-8C1B8F479916}"/>
               </a:ext>
             </a:extLst>
           </p:cNvPr>
@@ -8151,7 +8151,7 @@
     </p:spTree>
     <p:extLst>
       <p:ext uri="{BB962C8B-B14F-4D97-AF65-F5344CB8AC3E}">
-        <p14:creationId xmlns:p14="http://schemas.microsoft.com/office/powerpoint/2010/main" val="956794837"/>
+        <p14:creationId xmlns:p14="http://schemas.microsoft.com/office/powerpoint/2010/main" val="1008556791"/>
       </p:ext>
     </p:extLst>
   </p:cSld>
@@ -8182,7 +8182,7 @@
           <p:cNvPr id="1" name="s6-rule">
             <a:extLst xmlns:a="http://schemas.openxmlformats.org/drawingml/2006/main">
               <a:ext uri="{FF2B5EF4-FFF2-40B4-BE49-F238E27FC236}">
-                <a16:creationId xmlns:a16="http://schemas.microsoft.com/office/drawing/2014/main" id="{F9BC23B0-A085-4CD0-A8F4-0C280D702874}"/>
+                <a16:creationId xmlns:a16="http://schemas.microsoft.com/office/drawing/2014/main" id="{5729C341-5D03-4D9B-96AE-B40CA170FC83}"/>
               </a:ext>
             </a:extLst>
           </p:cNvPr>
@@ -8215,7 +8215,7 @@
           <p:cNvPr id="2" name="s6-eyebrow">
             <a:extLst xmlns:a="http://schemas.openxmlformats.org/drawingml/2006/main">
               <a:ext uri="{FF2B5EF4-FFF2-40B4-BE49-F238E27FC236}">
-                <a16:creationId xmlns:a16="http://schemas.microsoft.com/office/drawing/2014/main" id="{342460A0-3C5D-4867-9294-88BA20612A0D}"/>
+                <a16:creationId xmlns:a16="http://schemas.microsoft.com/office/drawing/2014/main" id="{C78E5132-A81F-4681-B060-7B39A8FB1724}"/>
               </a:ext>
             </a:extLst>
           </p:cNvPr>
@@ -8273,7 +8273,7 @@
           <p:cNvPr id="3" name="s6-title">
             <a:extLst xmlns:a="http://schemas.openxmlformats.org/drawingml/2006/main">
               <a:ext uri="{FF2B5EF4-FFF2-40B4-BE49-F238E27FC236}">
-                <a16:creationId xmlns:a16="http://schemas.microsoft.com/office/drawing/2014/main" id="{4B4B94B6-6011-42E8-86FA-4D16027BE4D4}"/>
+                <a16:creationId xmlns:a16="http://schemas.microsoft.com/office/drawing/2014/main" id="{FC2332DD-74CE-46EB-9B9A-F9EA9111675D}"/>
               </a:ext>
             </a:extLst>
           </p:cNvPr>
@@ -8321,7 +8321,7 @@
                 <a:ea typeface="PingFang SC"/>
                 <a:cs typeface="PingFang SC"/>
               </a:rPr>
-              <a:t>极端天气、系统故障或地面交通中断发生时</a:t>
+              <a:t>应急协同先统一态势，再由授权岗位决策</a:t>
             </a:r>
           </a:p>
         </p:txBody>
@@ -8331,7 +8331,7 @@
           <p:cNvPr id="4" name="s6-footer">
             <a:extLst xmlns:a="http://schemas.openxmlformats.org/drawingml/2006/main">
               <a:ext uri="{FF2B5EF4-FFF2-40B4-BE49-F238E27FC236}">
-                <a16:creationId xmlns:a16="http://schemas.microsoft.com/office/drawing/2014/main" id="{BA3110DD-0D87-43E2-8D26-DD38044E418D}"/>
+                <a16:creationId xmlns:a16="http://schemas.microsoft.com/office/drawing/2014/main" id="{F8617FD4-9BBF-4A18-BC51-B837B47CF4ED}"/>
               </a:ext>
             </a:extLst>
           </p:cNvPr>
@@ -8362,7 +8362,7 @@
           <p:cNvPr id="5" name="s6-identity">
             <a:extLst xmlns:a="http://schemas.openxmlformats.org/drawingml/2006/main">
               <a:ext uri="{FF2B5EF4-FFF2-40B4-BE49-F238E27FC236}">
-                <a16:creationId xmlns:a16="http://schemas.microsoft.com/office/drawing/2014/main" id="{DE53855D-2F15-49F9-AA85-C8EDB3699605}"/>
+                <a16:creationId xmlns:a16="http://schemas.microsoft.com/office/drawing/2014/main" id="{73ABFE86-B61E-4F33-BB1B-70E64DBE3463}"/>
               </a:ext>
             </a:extLst>
           </p:cNvPr>
@@ -8420,7 +8420,7 @@
           <p:cNvPr id="6" name="core-no-0">
             <a:extLst xmlns:a="http://schemas.openxmlformats.org/drawingml/2006/main">
               <a:ext uri="{FF2B5EF4-FFF2-40B4-BE49-F238E27FC236}">
-                <a16:creationId xmlns:a16="http://schemas.microsoft.com/office/drawing/2014/main" id="{43CF6BFE-16A1-4B7B-8312-90B30BF1D591}"/>
+                <a16:creationId xmlns:a16="http://schemas.microsoft.com/office/drawing/2014/main" id="{0C9AE244-6810-4883-A101-78D050617B94}"/>
               </a:ext>
             </a:extLst>
           </p:cNvPr>
@@ -8452,7 +8452,7 @@
             <a:pPr algn="l">
               <a:defRPr sz="2250" b="1">
                 <a:solidFill>
-                  <a:srgbClr val="E5783F"/>
+                  <a:srgbClr val="9A3F16"/>
                 </a:solidFill>
                 <a:latin typeface="PingFang SC"/>
                 <a:ea typeface="PingFang SC"/>
@@ -8462,7 +8462,7 @@
             <a:r>
               <a:rPr sz="2250" b="1">
                 <a:solidFill>
-                  <a:srgbClr val="E5783F"/>
+                  <a:srgbClr val="9A3F16"/>
                 </a:solidFill>
                 <a:latin typeface="PingFang SC"/>
                 <a:ea typeface="PingFang SC"/>
@@ -8478,7 +8478,7 @@
           <p:cNvPr id="7" name="core-label-0">
             <a:extLst xmlns:a="http://schemas.openxmlformats.org/drawingml/2006/main">
               <a:ext uri="{FF2B5EF4-FFF2-40B4-BE49-F238E27FC236}">
-                <a16:creationId xmlns:a16="http://schemas.microsoft.com/office/drawing/2014/main" id="{D26C8526-E47D-45C4-981B-C447F773BA3C}"/>
+                <a16:creationId xmlns:a16="http://schemas.microsoft.com/office/drawing/2014/main" id="{240CFC56-AC94-4B60-A2D9-87CC92A490CF}"/>
               </a:ext>
             </a:extLst>
           </p:cNvPr>
@@ -8536,7 +8536,7 @@
           <p:cNvPr id="8" name="core-body-0">
             <a:extLst xmlns:a="http://schemas.openxmlformats.org/drawingml/2006/main">
               <a:ext uri="{FF2B5EF4-FFF2-40B4-BE49-F238E27FC236}">
-                <a16:creationId xmlns:a16="http://schemas.microsoft.com/office/drawing/2014/main" id="{96128E30-99C1-4F53-8DF6-3C371D1D6F79}"/>
+                <a16:creationId xmlns:a16="http://schemas.microsoft.com/office/drawing/2014/main" id="{30514369-2CC3-4285-92A1-9E64C36D983C}"/>
               </a:ext>
             </a:extLst>
           </p:cNvPr>
@@ -8560,7 +8560,7 @@
           </a:solidFill>
           <a:ln xmlns:a="http://schemas.openxmlformats.org/drawingml/2006/main" w="19050">
             <a:solidFill>
-              <a:srgbClr val="E5783F"/>
+              <a:srgbClr val="9A3F16"/>
             </a:solidFill>
             <a:prstDash val="solid"/>
           </a:ln>
@@ -8590,7 +8590,7 @@
                 <a:ea typeface="PingFang SC"/>
                 <a:cs typeface="PingFang SC"/>
               </a:rPr>
-              <a:t>极端天气、系统故障或地面交通中断发生时，AI 可以汇总事件时间线、受影响对象、有效预案、可用资源和待确认信息。不同岗位看到的内容应符合职责范围；来自传感器…</a:t>
+              <a:t>极端天气、系统故障或地面交通中断发生时；AI 可以汇总事件时间线、受影响对象、有效预案、可用资源和待确认信息；不同岗位看到的内容应符合职责范围</a:t>
             </a:r>
           </a:p>
         </p:txBody>
@@ -8600,7 +8600,7 @@
           <p:cNvPr id="9" name="core-no-1">
             <a:extLst xmlns:a="http://schemas.openxmlformats.org/drawingml/2006/main">
               <a:ext uri="{FF2B5EF4-FFF2-40B4-BE49-F238E27FC236}">
-                <a16:creationId xmlns:a16="http://schemas.microsoft.com/office/drawing/2014/main" id="{79813874-A885-4D00-BD47-DF28D65AFC21}"/>
+                <a16:creationId xmlns:a16="http://schemas.microsoft.com/office/drawing/2014/main" id="{FC652317-F42D-4C6A-A872-708BDDEF710A}"/>
               </a:ext>
             </a:extLst>
           </p:cNvPr>
@@ -8632,7 +8632,7 @@
             <a:pPr algn="l">
               <a:defRPr sz="2250" b="1">
                 <a:solidFill>
-                  <a:srgbClr val="E5783F"/>
+                  <a:srgbClr val="9A3F16"/>
                 </a:solidFill>
                 <a:latin typeface="PingFang SC"/>
                 <a:ea typeface="PingFang SC"/>
@@ -8642,7 +8642,7 @@
             <a:r>
               <a:rPr sz="2250" b="1">
                 <a:solidFill>
-                  <a:srgbClr val="E5783F"/>
+                  <a:srgbClr val="9A3F16"/>
                 </a:solidFill>
                 <a:latin typeface="PingFang SC"/>
                 <a:ea typeface="PingFang SC"/>
@@ -8658,7 +8658,7 @@
           <p:cNvPr id="10" name="core-body-1">
             <a:extLst xmlns:a="http://schemas.openxmlformats.org/drawingml/2006/main">
               <a:ext uri="{FF2B5EF4-FFF2-40B4-BE49-F238E27FC236}">
-                <a16:creationId xmlns:a16="http://schemas.microsoft.com/office/drawing/2014/main" id="{D9FAA8B4-29C0-4FEA-83C3-0E83D8316D43}"/>
+                <a16:creationId xmlns:a16="http://schemas.microsoft.com/office/drawing/2014/main" id="{A9F8286A-E7AE-4F1C-88EA-C2E1464464D8}"/>
               </a:ext>
             </a:extLst>
           </p:cNvPr>
@@ -8712,7 +8712,7 @@
                 <a:ea typeface="PingFang SC"/>
                 <a:cs typeface="PingFang SC"/>
               </a:rPr>
-              <a:t>应急输出要区分已确认事实、未确认报告、模型推断和建议行动。启动预案、改变运行方式、调配关键资源等决定由授权岗位按照现行程序作出。系统应保留每次引用、修改、批准和交接记录…</a:t>
+              <a:t>应急输出要区分已确认事实、未确认报告、模型推断和建议行动；启动预案、改变运行方式、调配关键资源等决定由授权岗位按照现行程序作出；系统应保留每次引用、修改、批准和交接记录</a:t>
             </a:r>
           </a:p>
         </p:txBody>
@@ -8722,7 +8722,7 @@
           <p:cNvPr id="11" name="s6-takeaway-rule">
             <a:extLst xmlns:a="http://schemas.openxmlformats.org/drawingml/2006/main">
               <a:ext uri="{FF2B5EF4-FFF2-40B4-BE49-F238E27FC236}">
-                <a16:creationId xmlns:a16="http://schemas.microsoft.com/office/drawing/2014/main" id="{A6820EDC-2980-4395-B856-526E365452AC}"/>
+                <a16:creationId xmlns:a16="http://schemas.microsoft.com/office/drawing/2014/main" id="{85C9AE2B-C09B-430E-9688-9FBFE7DD9A04}"/>
               </a:ext>
             </a:extLst>
           </p:cNvPr>
@@ -8755,7 +8755,7 @@
           <p:cNvPr id="12" name="s6-takeaway">
             <a:extLst xmlns:a="http://schemas.openxmlformats.org/drawingml/2006/main">
               <a:ext uri="{FF2B5EF4-FFF2-40B4-BE49-F238E27FC236}">
-                <a16:creationId xmlns:a16="http://schemas.microsoft.com/office/drawing/2014/main" id="{B4FB0E8A-FCF8-4AE8-8D7B-70532D1A99EF}"/>
+                <a16:creationId xmlns:a16="http://schemas.microsoft.com/office/drawing/2014/main" id="{A5D181C1-7E4B-491C-9CCB-DF3CBF6909FE}"/>
               </a:ext>
             </a:extLst>
           </p:cNvPr>
@@ -8803,7 +8803,7 @@
                 <a:ea typeface="PingFang SC"/>
                 <a:cs typeface="PingFang SC"/>
               </a:rPr>
-              <a:t>极端天气、系统故障或地面交通中断发生时</a:t>
+              <a:t>应急协同先统一态势，再由授权岗位决策</a:t>
             </a:r>
           </a:p>
         </p:txBody>
@@ -8811,7 +8811,7 @@
     </p:spTree>
     <p:extLst>
       <p:ext uri="{BB962C8B-B14F-4D97-AF65-F5344CB8AC3E}">
-        <p14:creationId xmlns:p14="http://schemas.microsoft.com/office/powerpoint/2010/main" val="758414660"/>
+        <p14:creationId xmlns:p14="http://schemas.microsoft.com/office/powerpoint/2010/main" val="2108936842"/>
       </p:ext>
     </p:extLst>
   </p:cSld>
@@ -8842,7 +8842,7 @@
           <p:cNvPr id="1" name="s7-rule">
             <a:extLst xmlns:a="http://schemas.openxmlformats.org/drawingml/2006/main">
               <a:ext uri="{FF2B5EF4-FFF2-40B4-BE49-F238E27FC236}">
-                <a16:creationId xmlns:a16="http://schemas.microsoft.com/office/drawing/2014/main" id="{53385AB2-108D-4E33-9531-379D8E420793}"/>
+                <a16:creationId xmlns:a16="http://schemas.microsoft.com/office/drawing/2014/main" id="{0C5BFF56-39A5-42E4-8C7C-811A8BD1C444}"/>
               </a:ext>
             </a:extLst>
           </p:cNvPr>
@@ -8875,7 +8875,7 @@
           <p:cNvPr id="2" name="s7-eyebrow">
             <a:extLst xmlns:a="http://schemas.openxmlformats.org/drawingml/2006/main">
               <a:ext uri="{FF2B5EF4-FFF2-40B4-BE49-F238E27FC236}">
-                <a16:creationId xmlns:a16="http://schemas.microsoft.com/office/drawing/2014/main" id="{3AEEF706-8943-4F56-81DE-89AB008984BB}"/>
+                <a16:creationId xmlns:a16="http://schemas.microsoft.com/office/drawing/2014/main" id="{C0457159-5E75-40A6-B744-4CAA7254BB5E}"/>
               </a:ext>
             </a:extLst>
           </p:cNvPr>
@@ -8933,7 +8933,7 @@
           <p:cNvPr id="3" name="s7-title">
             <a:extLst xmlns:a="http://schemas.openxmlformats.org/drawingml/2006/main">
               <a:ext uri="{FF2B5EF4-FFF2-40B4-BE49-F238E27FC236}">
-                <a16:creationId xmlns:a16="http://schemas.microsoft.com/office/drawing/2014/main" id="{0B8469FF-EF29-4853-8DA7-1E7A0892D12B}"/>
+                <a16:creationId xmlns:a16="http://schemas.microsoft.com/office/drawing/2014/main" id="{A4072C93-23B8-4BB2-8A34-C2F47BF0A41A}"/>
               </a:ext>
             </a:extLst>
           </p:cNvPr>
@@ -8991,7 +8991,7 @@
           <p:cNvPr id="4" name="s7-footer">
             <a:extLst xmlns:a="http://schemas.openxmlformats.org/drawingml/2006/main">
               <a:ext uri="{FF2B5EF4-FFF2-40B4-BE49-F238E27FC236}">
-                <a16:creationId xmlns:a16="http://schemas.microsoft.com/office/drawing/2014/main" id="{8FE7E2F3-D409-4F54-8522-305BE350D152}"/>
+                <a16:creationId xmlns:a16="http://schemas.microsoft.com/office/drawing/2014/main" id="{DCEE30B4-775D-40AE-AD14-B6266BBECBCC}"/>
               </a:ext>
             </a:extLst>
           </p:cNvPr>
@@ -9022,7 +9022,7 @@
           <p:cNvPr id="5" name="s7-identity">
             <a:extLst xmlns:a="http://schemas.openxmlformats.org/drawingml/2006/main">
               <a:ext uri="{FF2B5EF4-FFF2-40B4-BE49-F238E27FC236}">
-                <a16:creationId xmlns:a16="http://schemas.microsoft.com/office/drawing/2014/main" id="{24200A1F-72AD-4301-AE75-FB2BD7BEF07D}"/>
+                <a16:creationId xmlns:a16="http://schemas.microsoft.com/office/drawing/2014/main" id="{8B480999-4DE2-4BDC-9631-DD3F26ABEB7E}"/>
               </a:ext>
             </a:extLst>
           </p:cNvPr>
@@ -9080,7 +9080,7 @@
           <p:cNvPr id="6" name="core-no-0">
             <a:extLst xmlns:a="http://schemas.openxmlformats.org/drawingml/2006/main">
               <a:ext uri="{FF2B5EF4-FFF2-40B4-BE49-F238E27FC236}">
-                <a16:creationId xmlns:a16="http://schemas.microsoft.com/office/drawing/2014/main" id="{FDD071A1-39F9-4AE0-B27F-2285718CEE3A}"/>
+                <a16:creationId xmlns:a16="http://schemas.microsoft.com/office/drawing/2014/main" id="{D92561E0-AB18-4B74-9235-37E1479F22CA}"/>
               </a:ext>
             </a:extLst>
           </p:cNvPr>
@@ -9112,7 +9112,7 @@
             <a:pPr algn="l">
               <a:defRPr sz="2250" b="1">
                 <a:solidFill>
-                  <a:srgbClr val="E5783F"/>
+                  <a:srgbClr val="9A3F16"/>
                 </a:solidFill>
                 <a:latin typeface="PingFang SC"/>
                 <a:ea typeface="PingFang SC"/>
@@ -9122,7 +9122,7 @@
             <a:r>
               <a:rPr sz="2250" b="1">
                 <a:solidFill>
-                  <a:srgbClr val="E5783F"/>
+                  <a:srgbClr val="9A3F16"/>
                 </a:solidFill>
                 <a:latin typeface="PingFang SC"/>
                 <a:ea typeface="PingFang SC"/>
@@ -9138,7 +9138,7 @@
           <p:cNvPr id="7" name="core-label-0">
             <a:extLst xmlns:a="http://schemas.openxmlformats.org/drawingml/2006/main">
               <a:ext uri="{FF2B5EF4-FFF2-40B4-BE49-F238E27FC236}">
-                <a16:creationId xmlns:a16="http://schemas.microsoft.com/office/drawing/2014/main" id="{EC1086D1-2C7F-453A-A880-ABB49E998C5F}"/>
+                <a16:creationId xmlns:a16="http://schemas.microsoft.com/office/drawing/2014/main" id="{2FF356DE-7987-4870-A156-ADB78D5828C3}"/>
               </a:ext>
             </a:extLst>
           </p:cNvPr>
@@ -9196,7 +9196,7 @@
           <p:cNvPr id="8" name="core-body-0">
             <a:extLst xmlns:a="http://schemas.openxmlformats.org/drawingml/2006/main">
               <a:ext uri="{FF2B5EF4-FFF2-40B4-BE49-F238E27FC236}">
-                <a16:creationId xmlns:a16="http://schemas.microsoft.com/office/drawing/2014/main" id="{81076E88-EF6D-4C5B-865C-1DE11EBE2725}"/>
+                <a16:creationId xmlns:a16="http://schemas.microsoft.com/office/drawing/2014/main" id="{748D5AD7-2745-491B-AF37-C05EA42C6DE9}"/>
               </a:ext>
             </a:extLst>
           </p:cNvPr>
@@ -9220,14 +9220,14 @@
           </a:solidFill>
           <a:ln xmlns:a="http://schemas.openxmlformats.org/drawingml/2006/main" w="19050">
             <a:solidFill>
-              <a:srgbClr val="E5783F"/>
+              <a:srgbClr val="9A3F16"/>
             </a:solidFill>
             <a:prstDash val="solid"/>
           </a:ln>
         </p:spPr>
         <p:txBody>
           <a:bodyPr xmlns:a="http://schemas.openxmlformats.org/drawingml/2006/main" lIns="152400" tIns="133350" rIns="152400" bIns="133350" anchor="ctr">
-            <a:normAutofit fontScale="85261"/>
+            <a:normAutofit fontScale="97443"/>
           </a:bodyPr>
           <a:lstStyle xmlns:a="http://schemas.openxmlformats.org/drawingml/2006/main"/>
           <a:p xmlns:a="http://schemas.openxmlformats.org/drawingml/2006/main">
@@ -9250,7 +9250,7 @@
                 <a:ea typeface="PingFang SC"/>
                 <a:cs typeface="PingFang SC"/>
               </a:rPr>
-              <a:t>知识、运维和应急是三类不同任务，不能用同一个综合分数判断。知识服务重视事实、引用、版本与拒答；运维重视异常发现、误报漏报、提前量和可执行性；应急协同重视信息完整、冲突提示、预案匹配…</a:t>
+              <a:t>知识、运维和应急是三类不同任务；不能用同一个综合分数判断；知识服务重视事实、引用、版本与拒答；运维重视异常发现、误报漏报、提前量和可执行性</a:t>
             </a:r>
           </a:p>
         </p:txBody>
@@ -9260,7 +9260,7 @@
           <p:cNvPr id="9" name="core-no-1">
             <a:extLst xmlns:a="http://schemas.openxmlformats.org/drawingml/2006/main">
               <a:ext uri="{FF2B5EF4-FFF2-40B4-BE49-F238E27FC236}">
-                <a16:creationId xmlns:a16="http://schemas.microsoft.com/office/drawing/2014/main" id="{6299AA98-3F01-434F-9842-3A8152A7F79D}"/>
+                <a16:creationId xmlns:a16="http://schemas.microsoft.com/office/drawing/2014/main" id="{3F0C7C71-B260-4CDB-84CF-3970A6617382}"/>
               </a:ext>
             </a:extLst>
           </p:cNvPr>
@@ -9292,7 +9292,7 @@
             <a:pPr algn="l">
               <a:defRPr sz="2250" b="1">
                 <a:solidFill>
-                  <a:srgbClr val="E5783F"/>
+                  <a:srgbClr val="9A3F16"/>
                 </a:solidFill>
                 <a:latin typeface="PingFang SC"/>
                 <a:ea typeface="PingFang SC"/>
@@ -9302,7 +9302,7 @@
             <a:r>
               <a:rPr sz="2250" b="1">
                 <a:solidFill>
-                  <a:srgbClr val="E5783F"/>
+                  <a:srgbClr val="9A3F16"/>
                 </a:solidFill>
                 <a:latin typeface="PingFang SC"/>
                 <a:ea typeface="PingFang SC"/>
@@ -9318,7 +9318,7 @@
           <p:cNvPr id="10" name="core-body-1">
             <a:extLst xmlns:a="http://schemas.openxmlformats.org/drawingml/2006/main">
               <a:ext uri="{FF2B5EF4-FFF2-40B4-BE49-F238E27FC236}">
-                <a16:creationId xmlns:a16="http://schemas.microsoft.com/office/drawing/2014/main" id="{54B95628-D2E0-45E8-9508-8D9C8797E28F}"/>
+                <a16:creationId xmlns:a16="http://schemas.microsoft.com/office/drawing/2014/main" id="{56516B46-006B-4834-A8F6-307CBDD7CA0F}"/>
               </a:ext>
             </a:extLst>
           </p:cNvPr>
@@ -9372,7 +9372,7 @@
                 <a:ea typeface="PingFang SC"/>
                 <a:cs typeface="PingFang SC"/>
               </a:rPr>
-              <a:t>上线前可使用历史事件回放、仿真数据和桌面演练。随后进入影子运行：系统在真实数据上生成建议，但不写回控制系统，也不改变岗位决定；业务人员将其与实际处置比较。只有在不同天气、流量…</a:t>
+              <a:t>上线前可使用历史事件回放、仿真数据和桌面演练；随后进入影子运行，系统在真实数据上生成建议；但不写回控制系统，也不改变岗位决定；业务人员将其与实际处置比较</a:t>
             </a:r>
           </a:p>
         </p:txBody>
@@ -9382,7 +9382,7 @@
           <p:cNvPr id="11" name="core-no-2">
             <a:extLst xmlns:a="http://schemas.openxmlformats.org/drawingml/2006/main">
               <a:ext uri="{FF2B5EF4-FFF2-40B4-BE49-F238E27FC236}">
-                <a16:creationId xmlns:a16="http://schemas.microsoft.com/office/drawing/2014/main" id="{50B1C609-3DD7-4ED6-AE84-70FD94FF5863}"/>
+                <a16:creationId xmlns:a16="http://schemas.microsoft.com/office/drawing/2014/main" id="{CEE0A134-FD0F-40BA-AB21-B55244200BD3}"/>
               </a:ext>
             </a:extLst>
           </p:cNvPr>
@@ -9414,7 +9414,7 @@
             <a:pPr algn="l">
               <a:defRPr sz="2250" b="1">
                 <a:solidFill>
-                  <a:srgbClr val="E5783F"/>
+                  <a:srgbClr val="9A3F16"/>
                 </a:solidFill>
                 <a:latin typeface="PingFang SC"/>
                 <a:ea typeface="PingFang SC"/>
@@ -9424,7 +9424,7 @@
             <a:r>
               <a:rPr sz="2250" b="1">
                 <a:solidFill>
-                  <a:srgbClr val="E5783F"/>
+                  <a:srgbClr val="9A3F16"/>
                 </a:solidFill>
                 <a:latin typeface="PingFang SC"/>
                 <a:ea typeface="PingFang SC"/>
@@ -9440,7 +9440,7 @@
           <p:cNvPr id="12" name="core-body-2">
             <a:extLst xmlns:a="http://schemas.openxmlformats.org/drawingml/2006/main">
               <a:ext uri="{FF2B5EF4-FFF2-40B4-BE49-F238E27FC236}">
-                <a16:creationId xmlns:a16="http://schemas.microsoft.com/office/drawing/2014/main" id="{5FA4C09D-1E82-4D10-A78F-029CEAA8AA6B}"/>
+                <a16:creationId xmlns:a16="http://schemas.microsoft.com/office/drawing/2014/main" id="{CCF22DBE-6216-4B7E-8F4B-7C3A65A2721C}"/>
               </a:ext>
             </a:extLst>
           </p:cNvPr>
@@ -9494,7 +9494,7 @@
                 <a:ea typeface="PingFang SC"/>
                 <a:cs typeface="PingFang SC"/>
               </a:rPr>
-              <a:t>影子运行也要设置停止条件。出现越权访问、关键事实无来源、应转人工却自动输出、严重延迟或无法回退时，应暂停测试并调查。模型、知识资料、数据接口或业务程序变更后，原有结论不能自动沿用，必须重新验证…</a:t>
+              <a:t>影子运行也要设置停止条件；出现越权访问、关键事实无来源、应转人工却自动输出、严重延迟或无法回退时；应暂停测试并调查，模型、知识资料、数据接口或业务程序变更后；原有结论不能自动沿用；必须重新验证</a:t>
             </a:r>
           </a:p>
         </p:txBody>
@@ -9504,7 +9504,7 @@
           <p:cNvPr id="13" name="s7-takeaway-rule">
             <a:extLst xmlns:a="http://schemas.openxmlformats.org/drawingml/2006/main">
               <a:ext uri="{FF2B5EF4-FFF2-40B4-BE49-F238E27FC236}">
-                <a16:creationId xmlns:a16="http://schemas.microsoft.com/office/drawing/2014/main" id="{33117A93-3B95-46CA-9BCA-546002F2B7BC}"/>
+                <a16:creationId xmlns:a16="http://schemas.microsoft.com/office/drawing/2014/main" id="{FD47A27E-4953-4375-A073-BB2CBBD6335E}"/>
               </a:ext>
             </a:extLst>
           </p:cNvPr>
@@ -9537,7 +9537,7 @@
           <p:cNvPr id="14" name="s7-takeaway">
             <a:extLst xmlns:a="http://schemas.openxmlformats.org/drawingml/2006/main">
               <a:ext uri="{FF2B5EF4-FFF2-40B4-BE49-F238E27FC236}">
-                <a16:creationId xmlns:a16="http://schemas.microsoft.com/office/drawing/2014/main" id="{CB65A634-A20A-4205-9DA3-2CD74EC4F1C8}"/>
+                <a16:creationId xmlns:a16="http://schemas.microsoft.com/office/drawing/2014/main" id="{6E4936BD-D9EA-40AB-B42D-88F8D6EACF38}"/>
               </a:ext>
             </a:extLst>
           </p:cNvPr>
@@ -9593,7 +9593,7 @@
     </p:spTree>
     <p:extLst>
       <p:ext uri="{BB962C8B-B14F-4D97-AF65-F5344CB8AC3E}">
-        <p14:creationId xmlns:p14="http://schemas.microsoft.com/office/powerpoint/2010/main" val="1867392760"/>
+        <p14:creationId xmlns:p14="http://schemas.microsoft.com/office/powerpoint/2010/main" val="618051266"/>
       </p:ext>
     </p:extLst>
   </p:cSld>
@@ -9624,7 +9624,7 @@
           <p:cNvPr id="1" name="s8-rule">
             <a:extLst xmlns:a="http://schemas.openxmlformats.org/drawingml/2006/main">
               <a:ext uri="{FF2B5EF4-FFF2-40B4-BE49-F238E27FC236}">
-                <a16:creationId xmlns:a16="http://schemas.microsoft.com/office/drawing/2014/main" id="{A59FFFBB-25FF-4C6E-9179-1557DEC034F1}"/>
+                <a16:creationId xmlns:a16="http://schemas.microsoft.com/office/drawing/2014/main" id="{0048D017-08F3-46DB-918A-0EF9244CA90D}"/>
               </a:ext>
             </a:extLst>
           </p:cNvPr>
@@ -9657,7 +9657,7 @@
           <p:cNvPr id="2" name="s8-eyebrow">
             <a:extLst xmlns:a="http://schemas.openxmlformats.org/drawingml/2006/main">
               <a:ext uri="{FF2B5EF4-FFF2-40B4-BE49-F238E27FC236}">
-                <a16:creationId xmlns:a16="http://schemas.microsoft.com/office/drawing/2014/main" id="{527C111B-9478-4176-8A4D-9F909D2EE91C}"/>
+                <a16:creationId xmlns:a16="http://schemas.microsoft.com/office/drawing/2014/main" id="{A983EADB-A3AF-4104-8735-F6B9A41D1600}"/>
               </a:ext>
             </a:extLst>
           </p:cNvPr>
@@ -9715,7 +9715,7 @@
           <p:cNvPr id="3" name="s8-title">
             <a:extLst xmlns:a="http://schemas.openxmlformats.org/drawingml/2006/main">
               <a:ext uri="{FF2B5EF4-FFF2-40B4-BE49-F238E27FC236}">
-                <a16:creationId xmlns:a16="http://schemas.microsoft.com/office/drawing/2014/main" id="{7D1A319F-85D9-47CB-AE27-D5C635526FB3}"/>
+                <a16:creationId xmlns:a16="http://schemas.microsoft.com/office/drawing/2014/main" id="{5DB52E53-8F60-4611-98D9-8D753E57F58C}"/>
               </a:ext>
             </a:extLst>
           </p:cNvPr>
@@ -9740,7 +9740,7 @@
         </p:spPr>
         <p:txBody>
           <a:bodyPr xmlns:a="http://schemas.openxmlformats.org/drawingml/2006/main" lIns="0" tIns="0" rIns="0" bIns="0" anchor="ctr">
-            <a:normAutofit fontScale="74187"/>
+            <a:normAutofit fontScale="100000"/>
           </a:bodyPr>
           <a:lstStyle xmlns:a="http://schemas.openxmlformats.org/drawingml/2006/main"/>
           <a:p xmlns:a="http://schemas.openxmlformats.org/drawingml/2006/main">
@@ -9763,7 +9763,7 @@
                 <a:ea typeface="PingFang SC"/>
                 <a:cs typeface="PingFang SC"/>
               </a:rPr>
-              <a:t>确认人员必须具备对应岗位权限，并能查看原始数据、引用、冲突和模型版本</a:t>
+              <a:t>人工确认必须具备权限并能回看原始证据</a:t>
             </a:r>
           </a:p>
         </p:txBody>
@@ -9773,7 +9773,7 @@
           <p:cNvPr id="4" name="s8-footer">
             <a:extLst xmlns:a="http://schemas.openxmlformats.org/drawingml/2006/main">
               <a:ext uri="{FF2B5EF4-FFF2-40B4-BE49-F238E27FC236}">
-                <a16:creationId xmlns:a16="http://schemas.microsoft.com/office/drawing/2014/main" id="{1862E2EB-F528-4D69-B771-B3D258C4A86A}"/>
+                <a16:creationId xmlns:a16="http://schemas.microsoft.com/office/drawing/2014/main" id="{41F9D108-75A7-4B1B-A4D7-9F565FAE9BC5}"/>
               </a:ext>
             </a:extLst>
           </p:cNvPr>
@@ -9804,7 +9804,7 @@
           <p:cNvPr id="5" name="s8-identity">
             <a:extLst xmlns:a="http://schemas.openxmlformats.org/drawingml/2006/main">
               <a:ext uri="{FF2B5EF4-FFF2-40B4-BE49-F238E27FC236}">
-                <a16:creationId xmlns:a16="http://schemas.microsoft.com/office/drawing/2014/main" id="{D633CD6C-5B78-454E-8D72-F148622E3FED}"/>
+                <a16:creationId xmlns:a16="http://schemas.microsoft.com/office/drawing/2014/main" id="{FCCA7941-9433-48F3-AE17-2EDEDD94B77E}"/>
               </a:ext>
             </a:extLst>
           </p:cNvPr>
@@ -9862,7 +9862,7 @@
           <p:cNvPr id="6" name="core-no-0">
             <a:extLst xmlns:a="http://schemas.openxmlformats.org/drawingml/2006/main">
               <a:ext uri="{FF2B5EF4-FFF2-40B4-BE49-F238E27FC236}">
-                <a16:creationId xmlns:a16="http://schemas.microsoft.com/office/drawing/2014/main" id="{09BB2D88-FAAE-4102-B595-0A34365F9DE7}"/>
+                <a16:creationId xmlns:a16="http://schemas.microsoft.com/office/drawing/2014/main" id="{8E2B9972-228A-41E1-9B17-FE66A7923F2E}"/>
               </a:ext>
             </a:extLst>
           </p:cNvPr>
@@ -9894,7 +9894,7 @@
             <a:pPr algn="l">
               <a:defRPr sz="2250" b="1">
                 <a:solidFill>
-                  <a:srgbClr val="E5783F"/>
+                  <a:srgbClr val="9A3F16"/>
                 </a:solidFill>
                 <a:latin typeface="PingFang SC"/>
                 <a:ea typeface="PingFang SC"/>
@@ -9904,7 +9904,7 @@
             <a:r>
               <a:rPr sz="2250" b="1">
                 <a:solidFill>
-                  <a:srgbClr val="E5783F"/>
+                  <a:srgbClr val="9A3F16"/>
                 </a:solidFill>
                 <a:latin typeface="PingFang SC"/>
                 <a:ea typeface="PingFang SC"/>
@@ -9920,7 +9920,7 @@
           <p:cNvPr id="7" name="core-label-0">
             <a:extLst xmlns:a="http://schemas.openxmlformats.org/drawingml/2006/main">
               <a:ext uri="{FF2B5EF4-FFF2-40B4-BE49-F238E27FC236}">
-                <a16:creationId xmlns:a16="http://schemas.microsoft.com/office/drawing/2014/main" id="{788B3F40-0D25-46E7-B5AA-7D59EDF55640}"/>
+                <a16:creationId xmlns:a16="http://schemas.microsoft.com/office/drawing/2014/main" id="{97258BD7-BE89-4455-AB59-E5EEA93454FE}"/>
               </a:ext>
             </a:extLst>
           </p:cNvPr>
@@ -9978,7 +9978,7 @@
           <p:cNvPr id="8" name="core-body-0">
             <a:extLst xmlns:a="http://schemas.openxmlformats.org/drawingml/2006/main">
               <a:ext uri="{FF2B5EF4-FFF2-40B4-BE49-F238E27FC236}">
-                <a16:creationId xmlns:a16="http://schemas.microsoft.com/office/drawing/2014/main" id="{A4F8C402-BAF5-463E-8A2A-5621124304B4}"/>
+                <a16:creationId xmlns:a16="http://schemas.microsoft.com/office/drawing/2014/main" id="{62AC601A-EFC2-48E8-B059-CAAD15446250}"/>
               </a:ext>
             </a:extLst>
           </p:cNvPr>
@@ -10002,7 +10002,7 @@
           </a:solidFill>
           <a:ln xmlns:a="http://schemas.openxmlformats.org/drawingml/2006/main" w="19050">
             <a:solidFill>
-              <a:srgbClr val="E5783F"/>
+              <a:srgbClr val="9A3F16"/>
             </a:solidFill>
             <a:prstDash val="solid"/>
           </a:ln>
@@ -10032,7 +10032,7 @@
                 <a:ea typeface="PingFang SC"/>
                 <a:cs typeface="PingFang SC"/>
               </a:rPr>
-              <a:t>确认人员必须具备对应岗位权限，并能查看原始数据、引用、冲突和模型版本。界面应允许修改、拒绝、说明理由和转交，而不是只提供“同意”。高风险动作还应执行既有双人确认、联锁或指挥程序…</a:t>
+              <a:t>确认人员必须具备对应岗位权限；并能查看原始数据、引用、冲突和模型版本；界面应允许修改、拒绝、说明理由和转交；而不是只提供“同意”；高风险动作还应执行既有双人确认、联锁或指挥程序</a:t>
             </a:r>
           </a:p>
         </p:txBody>
@@ -10042,7 +10042,7 @@
           <p:cNvPr id="9" name="core-no-1">
             <a:extLst xmlns:a="http://schemas.openxmlformats.org/drawingml/2006/main">
               <a:ext uri="{FF2B5EF4-FFF2-40B4-BE49-F238E27FC236}">
-                <a16:creationId xmlns:a16="http://schemas.microsoft.com/office/drawing/2014/main" id="{6A2B50A2-DD6F-4899-BF41-A1C870372E13}"/>
+                <a16:creationId xmlns:a16="http://schemas.microsoft.com/office/drawing/2014/main" id="{94AD5CE2-BFA4-43EE-B912-8548C5070709}"/>
               </a:ext>
             </a:extLst>
           </p:cNvPr>
@@ -10074,7 +10074,7 @@
             <a:pPr algn="l">
               <a:defRPr sz="2250" b="1">
                 <a:solidFill>
-                  <a:srgbClr val="E5783F"/>
+                  <a:srgbClr val="9A3F16"/>
                 </a:solidFill>
                 <a:latin typeface="PingFang SC"/>
                 <a:ea typeface="PingFang SC"/>
@@ -10084,7 +10084,7 @@
             <a:r>
               <a:rPr sz="2250" b="1">
                 <a:solidFill>
-                  <a:srgbClr val="E5783F"/>
+                  <a:srgbClr val="9A3F16"/>
                 </a:solidFill>
                 <a:latin typeface="PingFang SC"/>
                 <a:ea typeface="PingFang SC"/>
@@ -10100,7 +10100,7 @@
           <p:cNvPr id="10" name="core-body-1">
             <a:extLst xmlns:a="http://schemas.openxmlformats.org/drawingml/2006/main">
               <a:ext uri="{FF2B5EF4-FFF2-40B4-BE49-F238E27FC236}">
-                <a16:creationId xmlns:a16="http://schemas.microsoft.com/office/drawing/2014/main" id="{E2D4E981-58C0-47BC-9F86-1788DD0230DD}"/>
+                <a16:creationId xmlns:a16="http://schemas.microsoft.com/office/drawing/2014/main" id="{ABE64C86-712F-4285-A40E-12F80DD56D8C}"/>
               </a:ext>
             </a:extLst>
           </p:cNvPr>
@@ -10164,7 +10164,7 @@
           <p:cNvPr id="11" name="s8-takeaway-rule">
             <a:extLst xmlns:a="http://schemas.openxmlformats.org/drawingml/2006/main">
               <a:ext uri="{FF2B5EF4-FFF2-40B4-BE49-F238E27FC236}">
-                <a16:creationId xmlns:a16="http://schemas.microsoft.com/office/drawing/2014/main" id="{E27271A6-C3EB-4EE2-A4E3-CB66844A34B9}"/>
+                <a16:creationId xmlns:a16="http://schemas.microsoft.com/office/drawing/2014/main" id="{5962ADAC-AA31-4D1D-A819-AA4988D43155}"/>
               </a:ext>
             </a:extLst>
           </p:cNvPr>
@@ -10197,7 +10197,7 @@
           <p:cNvPr id="12" name="s8-takeaway">
             <a:extLst xmlns:a="http://schemas.openxmlformats.org/drawingml/2006/main">
               <a:ext uri="{FF2B5EF4-FFF2-40B4-BE49-F238E27FC236}">
-                <a16:creationId xmlns:a16="http://schemas.microsoft.com/office/drawing/2014/main" id="{5D6DA963-D89B-4158-AA27-E881F015AEC1}"/>
+                <a16:creationId xmlns:a16="http://schemas.microsoft.com/office/drawing/2014/main" id="{770AB4D8-3B58-4464-B188-1910DC284FEC}"/>
               </a:ext>
             </a:extLst>
           </p:cNvPr>
@@ -10245,7 +10245,7 @@
                 <a:ea typeface="PingFang SC"/>
                 <a:cs typeface="PingFang SC"/>
               </a:rPr>
-              <a:t>确认人员必须具备对应岗位权限，并能查看原始数据、引用、冲突和模型版本</a:t>
+              <a:t>人工确认必须具备权限并能回看原始证据</a:t>
             </a:r>
           </a:p>
         </p:txBody>
@@ -10253,7 +10253,7 @@
     </p:spTree>
     <p:extLst>
       <p:ext uri="{BB962C8B-B14F-4D97-AF65-F5344CB8AC3E}">
-        <p14:creationId xmlns:p14="http://schemas.microsoft.com/office/powerpoint/2010/main" val="921394901"/>
+        <p14:creationId xmlns:p14="http://schemas.microsoft.com/office/powerpoint/2010/main" val="1231606340"/>
       </p:ext>
     </p:extLst>
   </p:cSld>
@@ -10284,7 +10284,7 @@
           <p:cNvPr id="1" name="s9-rule">
             <a:extLst xmlns:a="http://schemas.openxmlformats.org/drawingml/2006/main">
               <a:ext uri="{FF2B5EF4-FFF2-40B4-BE49-F238E27FC236}">
-                <a16:creationId xmlns:a16="http://schemas.microsoft.com/office/drawing/2014/main" id="{299B0A61-A81E-40B4-BFC3-819650A65C92}"/>
+                <a16:creationId xmlns:a16="http://schemas.microsoft.com/office/drawing/2014/main" id="{61B14E39-E83F-46C1-A068-EF1794BFBFFA}"/>
               </a:ext>
             </a:extLst>
           </p:cNvPr>
@@ -10317,7 +10317,7 @@
           <p:cNvPr id="2" name="s9-eyebrow">
             <a:extLst xmlns:a="http://schemas.openxmlformats.org/drawingml/2006/main">
               <a:ext uri="{FF2B5EF4-FFF2-40B4-BE49-F238E27FC236}">
-                <a16:creationId xmlns:a16="http://schemas.microsoft.com/office/drawing/2014/main" id="{F5CB299B-CAF6-4328-8442-B36824CA7EBE}"/>
+                <a16:creationId xmlns:a16="http://schemas.microsoft.com/office/drawing/2014/main" id="{1CE6359D-5EDA-4F13-9194-806F9A8FE026}"/>
               </a:ext>
             </a:extLst>
           </p:cNvPr>
@@ -10375,7 +10375,7 @@
           <p:cNvPr id="3" name="s9-title">
             <a:extLst xmlns:a="http://schemas.openxmlformats.org/drawingml/2006/main">
               <a:ext uri="{FF2B5EF4-FFF2-40B4-BE49-F238E27FC236}">
-                <a16:creationId xmlns:a16="http://schemas.microsoft.com/office/drawing/2014/main" id="{E40A7982-0AF3-4C1A-B92C-07F879DFC8FC}"/>
+                <a16:creationId xmlns:a16="http://schemas.microsoft.com/office/drawing/2014/main" id="{B3A76B93-ED2D-4D91-8BD7-98345A81CE2B}"/>
               </a:ext>
             </a:extLst>
           </p:cNvPr>
@@ -10433,7 +10433,7 @@
           <p:cNvPr id="4" name="s9-footer">
             <a:extLst xmlns:a="http://schemas.openxmlformats.org/drawingml/2006/main">
               <a:ext uri="{FF2B5EF4-FFF2-40B4-BE49-F238E27FC236}">
-                <a16:creationId xmlns:a16="http://schemas.microsoft.com/office/drawing/2014/main" id="{ACE95514-693C-446B-A40F-FB1CC781D577}"/>
+                <a16:creationId xmlns:a16="http://schemas.microsoft.com/office/drawing/2014/main" id="{1855806C-C52B-4DC5-A7F4-A061B375B060}"/>
               </a:ext>
             </a:extLst>
           </p:cNvPr>
@@ -10464,7 +10464,7 @@
           <p:cNvPr id="5" name="s9-identity">
             <a:extLst xmlns:a="http://schemas.openxmlformats.org/drawingml/2006/main">
               <a:ext uri="{FF2B5EF4-FFF2-40B4-BE49-F238E27FC236}">
-                <a16:creationId xmlns:a16="http://schemas.microsoft.com/office/drawing/2014/main" id="{34F8E722-94D8-437A-BC7C-2E44D33A1B85}"/>
+                <a16:creationId xmlns:a16="http://schemas.microsoft.com/office/drawing/2014/main" id="{F435687E-22EA-4A6D-9352-89F78AE65830}"/>
               </a:ext>
             </a:extLst>
           </p:cNvPr>
@@ -10522,7 +10522,7 @@
           <p:cNvPr id="6" name="case-title">
             <a:extLst xmlns:a="http://schemas.openxmlformats.org/drawingml/2006/main">
               <a:ext uri="{FF2B5EF4-FFF2-40B4-BE49-F238E27FC236}">
-                <a16:creationId xmlns:a16="http://schemas.microsoft.com/office/drawing/2014/main" id="{7353C2F8-2D2B-49DF-8AD3-58CFD0760A30}"/>
+                <a16:creationId xmlns:a16="http://schemas.microsoft.com/office/drawing/2014/main" id="{53888B83-6EF9-4BA9-B8FB-274935259123}"/>
               </a:ext>
             </a:extLst>
           </p:cNvPr>
@@ -10586,7 +10586,7 @@
           <p:cNvPr id="7" name="case-row-0">
             <a:extLst xmlns:a="http://schemas.openxmlformats.org/drawingml/2006/main">
               <a:ext uri="{FF2B5EF4-FFF2-40B4-BE49-F238E27FC236}">
-                <a16:creationId xmlns:a16="http://schemas.microsoft.com/office/drawing/2014/main" id="{C58B5E67-C0D0-417C-BF68-C2951ABBA17B}"/>
+                <a16:creationId xmlns:a16="http://schemas.microsoft.com/office/drawing/2014/main" id="{CB9E9E6C-E124-4C10-A654-7C8B719C30A4}"/>
               </a:ext>
             </a:extLst>
           </p:cNvPr>
@@ -10650,7 +10650,7 @@
           <p:cNvPr id="8" name="case-row-1">
             <a:extLst xmlns:a="http://schemas.openxmlformats.org/drawingml/2006/main">
               <a:ext uri="{FF2B5EF4-FFF2-40B4-BE49-F238E27FC236}">
-                <a16:creationId xmlns:a16="http://schemas.microsoft.com/office/drawing/2014/main" id="{9D6E1554-D4DC-4444-91F5-A9811D9C2F85}"/>
+                <a16:creationId xmlns:a16="http://schemas.microsoft.com/office/drawing/2014/main" id="{ECA267DB-9C78-4DE8-8848-5BD42BB1F520}"/>
               </a:ext>
             </a:extLst>
           </p:cNvPr>
@@ -10714,7 +10714,7 @@
           <p:cNvPr id="9" name="case-row-2">
             <a:extLst xmlns:a="http://schemas.openxmlformats.org/drawingml/2006/main">
               <a:ext uri="{FF2B5EF4-FFF2-40B4-BE49-F238E27FC236}">
-                <a16:creationId xmlns:a16="http://schemas.microsoft.com/office/drawing/2014/main" id="{7E9DA7F8-BFAF-476F-82C5-9A7CA84A42D9}"/>
+                <a16:creationId xmlns:a16="http://schemas.microsoft.com/office/drawing/2014/main" id="{0EE10FE9-1BAF-4A8E-8011-6D0807999A58}"/>
               </a:ext>
             </a:extLst>
           </p:cNvPr>
@@ -10778,7 +10778,7 @@
           <p:cNvPr id="10" name="case-row-3">
             <a:extLst xmlns:a="http://schemas.openxmlformats.org/drawingml/2006/main">
               <a:ext uri="{FF2B5EF4-FFF2-40B4-BE49-F238E27FC236}">
-                <a16:creationId xmlns:a16="http://schemas.microsoft.com/office/drawing/2014/main" id="{91A9218F-6922-475C-AC6E-5CF84025B43E}"/>
+                <a16:creationId xmlns:a16="http://schemas.microsoft.com/office/drawing/2014/main" id="{437C5D69-761E-4CFE-93D1-2F4E72D0EE5B}"/>
               </a:ext>
             </a:extLst>
           </p:cNvPr>
@@ -10802,7 +10802,7 @@
           </a:solidFill>
           <a:ln xmlns:a="http://schemas.openxmlformats.org/drawingml/2006/main" w="9525">
             <a:solidFill>
-              <a:srgbClr val="E5783F"/>
+              <a:srgbClr val="9A3F16"/>
             </a:solidFill>
             <a:prstDash val="solid"/>
           </a:ln>
@@ -10842,7 +10842,7 @@
           <p:cNvPr id="11" name="s9-takeaway-rule">
             <a:extLst xmlns:a="http://schemas.openxmlformats.org/drawingml/2006/main">
               <a:ext uri="{FF2B5EF4-FFF2-40B4-BE49-F238E27FC236}">
-                <a16:creationId xmlns:a16="http://schemas.microsoft.com/office/drawing/2014/main" id="{357DC9C8-D740-40E8-8A51-9B657B519638}"/>
+                <a16:creationId xmlns:a16="http://schemas.microsoft.com/office/drawing/2014/main" id="{950C16D5-95AB-4C10-98B3-CFABA2AF5671}"/>
               </a:ext>
             </a:extLst>
           </p:cNvPr>
@@ -10875,7 +10875,7 @@
           <p:cNvPr id="12" name="s9-takeaway">
             <a:extLst xmlns:a="http://schemas.openxmlformats.org/drawingml/2006/main">
               <a:ext uri="{FF2B5EF4-FFF2-40B4-BE49-F238E27FC236}">
-                <a16:creationId xmlns:a16="http://schemas.microsoft.com/office/drawing/2014/main" id="{7A9F4103-EAC6-439C-B4A9-1D42FE844411}"/>
+                <a16:creationId xmlns:a16="http://schemas.microsoft.com/office/drawing/2014/main" id="{BE0C22B0-6CFB-4CF7-92CE-2A86613D2B58}"/>
               </a:ext>
             </a:extLst>
           </p:cNvPr>
@@ -10931,7 +10931,7 @@
     </p:spTree>
     <p:extLst>
       <p:ext uri="{BB962C8B-B14F-4D97-AF65-F5344CB8AC3E}">
-        <p14:creationId xmlns:p14="http://schemas.microsoft.com/office/powerpoint/2010/main" val="109269093"/>
+        <p14:creationId xmlns:p14="http://schemas.microsoft.com/office/powerpoint/2010/main" val="196161225"/>
       </p:ext>
     </p:extLst>
   </p:cSld>

--- a/docs/public/course-assets/course-pptx/in-006.pptx
+++ b/docs/public/course-assets/course-pptx/in-006.pptx
@@ -2,25 +2,25 @@
 <file path=ppt/presentation.xml><?xml version="1.0" encoding="utf-8"?>
 <p:presentation xmlns:p="http://schemas.openxmlformats.org/presentationml/2006/main">
   <p:sldMasterIdLst>
-    <p:sldMasterId xmlns:r="http://schemas.openxmlformats.org/officeDocument/2006/relationships" id="2147483648" r:id="Rb16fddf697f84b03"/>
+    <p:sldMasterId xmlns:r="http://schemas.openxmlformats.org/officeDocument/2006/relationships" id="2147483648" r:id="R1b9131e241394d11"/>
   </p:sldMasterIdLst>
   <p:notesMasterIdLst>
-    <p:notesMasterId xmlns:r="http://schemas.openxmlformats.org/officeDocument/2006/relationships" r:id="R45c581676d1b4f42"/>
+    <p:notesMasterId xmlns:r="http://schemas.openxmlformats.org/officeDocument/2006/relationships" r:id="R9edecd2d0e5c4634"/>
   </p:notesMasterIdLst>
   <p:sldIdLst>
-    <p:sldId xmlns:r="http://schemas.openxmlformats.org/officeDocument/2006/relationships" id="256" r:id="Rbaaeee02fb074d93"/>
-    <p:sldId xmlns:r="http://schemas.openxmlformats.org/officeDocument/2006/relationships" id="257" r:id="R502efbb59b9046af"/>
-    <p:sldId xmlns:r="http://schemas.openxmlformats.org/officeDocument/2006/relationships" id="258" r:id="Rd6de269821a34058"/>
-    <p:sldId xmlns:r="http://schemas.openxmlformats.org/officeDocument/2006/relationships" id="259" r:id="R7b8c5feeec974585"/>
-    <p:sldId xmlns:r="http://schemas.openxmlformats.org/officeDocument/2006/relationships" id="260" r:id="R97dba9ebf0794a74"/>
-    <p:sldId xmlns:r="http://schemas.openxmlformats.org/officeDocument/2006/relationships" id="261" r:id="R9ba4b00145254de4"/>
-    <p:sldId xmlns:r="http://schemas.openxmlformats.org/officeDocument/2006/relationships" id="262" r:id="R74dc08c8568b417f"/>
-    <p:sldId xmlns:r="http://schemas.openxmlformats.org/officeDocument/2006/relationships" id="263" r:id="R0f8904db130f4bc0"/>
-    <p:sldId xmlns:r="http://schemas.openxmlformats.org/officeDocument/2006/relationships" id="264" r:id="R2398abe82d7643bb"/>
-    <p:sldId xmlns:r="http://schemas.openxmlformats.org/officeDocument/2006/relationships" id="265" r:id="R4c583fa232074435"/>
-    <p:sldId xmlns:r="http://schemas.openxmlformats.org/officeDocument/2006/relationships" id="266" r:id="Ra78adb5bbf7f4524"/>
-    <p:sldId xmlns:r="http://schemas.openxmlformats.org/officeDocument/2006/relationships" id="267" r:id="Ra961618c9ca9484f"/>
-    <p:sldId xmlns:r="http://schemas.openxmlformats.org/officeDocument/2006/relationships" id="268" r:id="R3aa7377db165469e"/>
+    <p:sldId xmlns:r="http://schemas.openxmlformats.org/officeDocument/2006/relationships" id="256" r:id="R5a0fdf60aebd4e2c"/>
+    <p:sldId xmlns:r="http://schemas.openxmlformats.org/officeDocument/2006/relationships" id="257" r:id="R51c2bac42ad94338"/>
+    <p:sldId xmlns:r="http://schemas.openxmlformats.org/officeDocument/2006/relationships" id="258" r:id="R0539a66426cf4445"/>
+    <p:sldId xmlns:r="http://schemas.openxmlformats.org/officeDocument/2006/relationships" id="259" r:id="R9335822de3e34214"/>
+    <p:sldId xmlns:r="http://schemas.openxmlformats.org/officeDocument/2006/relationships" id="260" r:id="R8d6639f90ef5459a"/>
+    <p:sldId xmlns:r="http://schemas.openxmlformats.org/officeDocument/2006/relationships" id="261" r:id="R169915af83c44883"/>
+    <p:sldId xmlns:r="http://schemas.openxmlformats.org/officeDocument/2006/relationships" id="262" r:id="Ra8fe2e26dcd84d80"/>
+    <p:sldId xmlns:r="http://schemas.openxmlformats.org/officeDocument/2006/relationships" id="263" r:id="R0fcf2ee172c647f5"/>
+    <p:sldId xmlns:r="http://schemas.openxmlformats.org/officeDocument/2006/relationships" id="264" r:id="R8a8f42faedbe4c8a"/>
+    <p:sldId xmlns:r="http://schemas.openxmlformats.org/officeDocument/2006/relationships" id="265" r:id="R8c712f1d63054581"/>
+    <p:sldId xmlns:r="http://schemas.openxmlformats.org/officeDocument/2006/relationships" id="266" r:id="R4a79271009bc4a4c"/>
+    <p:sldId xmlns:r="http://schemas.openxmlformats.org/officeDocument/2006/relationships" id="267" r:id="R965d1d576285447d"/>
+    <p:sldId xmlns:r="http://schemas.openxmlformats.org/officeDocument/2006/relationships" id="268" r:id="R86d9d77a087644b1"/>
   </p:sldIdLst>
   <p:sldSz cx="12192000" cy="6858000"/>
   <p:notesSz cx="6858000" cy="9144000"/>
@@ -1405,7 +1405,7 @@
   </p:cSld>
   <p:clrMap bg1="lt1" tx1="dk1" bg2="lt2" tx2="dk2" accent1="accent1" accent2="accent2" accent3="accent3" accent4="accent4" accent5="accent5" accent6="accent6" hlink="hlink" folHlink="folHlink"/>
   <p:sldLayoutIdLst>
-    <p:sldLayoutId xmlns:r="http://schemas.openxmlformats.org/officeDocument/2006/relationships" id="2147483649" r:id="R7fd44df6a74e4104"/>
+    <p:sldLayoutId xmlns:r="http://schemas.openxmlformats.org/officeDocument/2006/relationships" id="2147483649" r:id="Re3c48aa722984e96"/>
   </p:sldLayoutIdLst>
   <p:txStyles>
     <p:titleStyle>
@@ -1956,7 +1956,7 @@
           <p:cNvPr id="1" name="cover-rule">
             <a:extLst xmlns:a="http://schemas.openxmlformats.org/drawingml/2006/main">
               <a:ext uri="{FF2B5EF4-FFF2-40B4-BE49-F238E27FC236}">
-                <a16:creationId xmlns:a16="http://schemas.microsoft.com/office/drawing/2014/main" id="{214936D8-77C9-4BDE-AA90-223427EB1F02}"/>
+                <a16:creationId xmlns:a16="http://schemas.microsoft.com/office/drawing/2014/main" id="{F1B1CB71-B682-4F77-961D-F3FE4DCCB355}"/>
               </a:ext>
             </a:extLst>
           </p:cNvPr>
@@ -1989,7 +1989,7 @@
           <p:cNvPr id="2" name="cover-ring-1">
             <a:extLst xmlns:a="http://schemas.openxmlformats.org/drawingml/2006/main">
               <a:ext uri="{FF2B5EF4-FFF2-40B4-BE49-F238E27FC236}">
-                <a16:creationId xmlns:a16="http://schemas.microsoft.com/office/drawing/2014/main" id="{D147EA4F-1951-48C1-86C0-9387121C5A85}"/>
+                <a16:creationId xmlns:a16="http://schemas.microsoft.com/office/drawing/2014/main" id="{22F0AF25-65F0-4834-A34D-68424DF56F53}"/>
               </a:ext>
             </a:extLst>
           </p:cNvPr>
@@ -2020,7 +2020,7 @@
           <p:cNvPr id="3" name="cover-ring-2">
             <a:extLst xmlns:a="http://schemas.openxmlformats.org/drawingml/2006/main">
               <a:ext uri="{FF2B5EF4-FFF2-40B4-BE49-F238E27FC236}">
-                <a16:creationId xmlns:a16="http://schemas.microsoft.com/office/drawing/2014/main" id="{7450EC62-6BDC-40E7-B25A-7188656C4F19}"/>
+                <a16:creationId xmlns:a16="http://schemas.microsoft.com/office/drawing/2014/main" id="{6CE8EEDE-B553-4445-B2FE-E366C288C0F8}"/>
               </a:ext>
             </a:extLst>
           </p:cNvPr>
@@ -2051,7 +2051,7 @@
           <p:cNvPr id="4" name="cover-core">
             <a:extLst xmlns:a="http://schemas.openxmlformats.org/drawingml/2006/main">
               <a:ext uri="{FF2B5EF4-FFF2-40B4-BE49-F238E27FC236}">
-                <a16:creationId xmlns:a16="http://schemas.microsoft.com/office/drawing/2014/main" id="{7FA2174D-56CE-4486-9AF9-7E9EC22B8883}"/>
+                <a16:creationId xmlns:a16="http://schemas.microsoft.com/office/drawing/2014/main" id="{2AE8187E-C071-4D5B-8053-5AAFFDBAEEAC}"/>
               </a:ext>
             </a:extLst>
           </p:cNvPr>
@@ -2084,7 +2084,7 @@
           <p:cNvPr id="5" name="cover-line-1">
             <a:extLst xmlns:a="http://schemas.openxmlformats.org/drawingml/2006/main">
               <a:ext uri="{FF2B5EF4-FFF2-40B4-BE49-F238E27FC236}">
-                <a16:creationId xmlns:a16="http://schemas.microsoft.com/office/drawing/2014/main" id="{AF92AC2C-1A89-494B-A030-C2B45B5116E3}"/>
+                <a16:creationId xmlns:a16="http://schemas.microsoft.com/office/drawing/2014/main" id="{4D462971-FA6B-40A5-9963-3AE0BA295ECC}"/>
               </a:ext>
             </a:extLst>
           </p:cNvPr>
@@ -2115,7 +2115,7 @@
           <p:cNvPr id="6" name="cover-line-2">
             <a:extLst xmlns:a="http://schemas.openxmlformats.org/drawingml/2006/main">
               <a:ext uri="{FF2B5EF4-FFF2-40B4-BE49-F238E27FC236}">
-                <a16:creationId xmlns:a16="http://schemas.microsoft.com/office/drawing/2014/main" id="{55DFB58B-F245-4515-B55B-A25D9DE336E8}"/>
+                <a16:creationId xmlns:a16="http://schemas.microsoft.com/office/drawing/2014/main" id="{0C0A3E4B-9A52-481A-951E-93F70111AAA5}"/>
               </a:ext>
             </a:extLst>
           </p:cNvPr>
@@ -2146,7 +2146,7 @@
           <p:cNvPr id="7" name="cover-eyebrow">
             <a:extLst xmlns:a="http://schemas.openxmlformats.org/drawingml/2006/main">
               <a:ext uri="{FF2B5EF4-FFF2-40B4-BE49-F238E27FC236}">
-                <a16:creationId xmlns:a16="http://schemas.microsoft.com/office/drawing/2014/main" id="{91F36BCA-7922-47E3-BD98-BC93CFCEF224}"/>
+                <a16:creationId xmlns:a16="http://schemas.microsoft.com/office/drawing/2014/main" id="{6121ACE5-35E1-499B-A705-8219AD59372C}"/>
               </a:ext>
             </a:extLst>
           </p:cNvPr>
@@ -2204,7 +2204,7 @@
           <p:cNvPr id="8" name="cover-title">
             <a:extLst xmlns:a="http://schemas.openxmlformats.org/drawingml/2006/main">
               <a:ext uri="{FF2B5EF4-FFF2-40B4-BE49-F238E27FC236}">
-                <a16:creationId xmlns:a16="http://schemas.microsoft.com/office/drawing/2014/main" id="{08BA0120-341C-4DD3-BE62-1CFEC354CD99}"/>
+                <a16:creationId xmlns:a16="http://schemas.microsoft.com/office/drawing/2014/main" id="{3215006B-28A3-48B2-8650-17F0F90B3945}"/>
               </a:ext>
             </a:extLst>
           </p:cNvPr>
@@ -2262,7 +2262,7 @@
           <p:cNvPr id="9" name="cover-subtitle">
             <a:extLst xmlns:a="http://schemas.openxmlformats.org/drawingml/2006/main">
               <a:ext uri="{FF2B5EF4-FFF2-40B4-BE49-F238E27FC236}">
-                <a16:creationId xmlns:a16="http://schemas.microsoft.com/office/drawing/2014/main" id="{18B18695-5918-4269-BB24-AC17F80A7E2E}"/>
+                <a16:creationId xmlns:a16="http://schemas.microsoft.com/office/drawing/2014/main" id="{03A1B38F-E842-44A6-B97B-BD748EB87B56}"/>
               </a:ext>
             </a:extLst>
           </p:cNvPr>
@@ -2324,7 +2324,7 @@
           <p:cNvPr id="10" name="cover-lead">
             <a:extLst xmlns:a="http://schemas.openxmlformats.org/drawingml/2006/main">
               <a:ext uri="{FF2B5EF4-FFF2-40B4-BE49-F238E27FC236}">
-                <a16:creationId xmlns:a16="http://schemas.microsoft.com/office/drawing/2014/main" id="{D3E1E9A3-BB26-4B4B-A8E0-E160E22072F7}"/>
+                <a16:creationId xmlns:a16="http://schemas.microsoft.com/office/drawing/2014/main" id="{9F9A10EC-BFCD-4979-924F-C8DE8F04863D}"/>
               </a:ext>
             </a:extLst>
           </p:cNvPr>
@@ -2382,7 +2382,7 @@
           <p:cNvPr id="11" name="cover-course">
             <a:extLst xmlns:a="http://schemas.openxmlformats.org/drawingml/2006/main">
               <a:ext uri="{FF2B5EF4-FFF2-40B4-BE49-F238E27FC236}">
-                <a16:creationId xmlns:a16="http://schemas.microsoft.com/office/drawing/2014/main" id="{D31E840F-9C23-4C43-96BC-8BCBC5840825}"/>
+                <a16:creationId xmlns:a16="http://schemas.microsoft.com/office/drawing/2014/main" id="{7AD46D7A-BD4C-4367-8BB8-D911B2289CB4}"/>
               </a:ext>
             </a:extLst>
           </p:cNvPr>
@@ -2440,7 +2440,7 @@
           <p:cNvPr id="12" name="cover-id">
             <a:extLst xmlns:a="http://schemas.openxmlformats.org/drawingml/2006/main">
               <a:ext uri="{FF2B5EF4-FFF2-40B4-BE49-F238E27FC236}">
-                <a16:creationId xmlns:a16="http://schemas.microsoft.com/office/drawing/2014/main" id="{30AEE29F-07BC-4A8B-8D9C-7F1522228D14}"/>
+                <a16:creationId xmlns:a16="http://schemas.microsoft.com/office/drawing/2014/main" id="{598F3062-B2E2-4967-BEED-A17CCD6CDDD1}"/>
               </a:ext>
             </a:extLst>
           </p:cNvPr>
@@ -2496,7 +2496,7 @@
     </p:spTree>
     <p:extLst>
       <p:ext uri="{BB962C8B-B14F-4D97-AF65-F5344CB8AC3E}">
-        <p14:creationId xmlns:p14="http://schemas.microsoft.com/office/powerpoint/2010/main" val="1012311407"/>
+        <p14:creationId xmlns:p14="http://schemas.microsoft.com/office/powerpoint/2010/main" val="689596403"/>
       </p:ext>
     </p:extLst>
   </p:cSld>
@@ -2527,7 +2527,7 @@
           <p:cNvPr id="1" name="s10-rule">
             <a:extLst xmlns:a="http://schemas.openxmlformats.org/drawingml/2006/main">
               <a:ext uri="{FF2B5EF4-FFF2-40B4-BE49-F238E27FC236}">
-                <a16:creationId xmlns:a16="http://schemas.microsoft.com/office/drawing/2014/main" id="{B51F5E16-8420-46B9-A469-C6452F878746}"/>
+                <a16:creationId xmlns:a16="http://schemas.microsoft.com/office/drawing/2014/main" id="{9750A47E-84A0-47AB-AF8C-9B572A4C1DE9}"/>
               </a:ext>
             </a:extLst>
           </p:cNvPr>
@@ -2560,7 +2560,7 @@
           <p:cNvPr id="2" name="s10-eyebrow">
             <a:extLst xmlns:a="http://schemas.openxmlformats.org/drawingml/2006/main">
               <a:ext uri="{FF2B5EF4-FFF2-40B4-BE49-F238E27FC236}">
-                <a16:creationId xmlns:a16="http://schemas.microsoft.com/office/drawing/2014/main" id="{2A49907B-BCF5-466D-8294-FB5B34A97747}"/>
+                <a16:creationId xmlns:a16="http://schemas.microsoft.com/office/drawing/2014/main" id="{44E3E5FE-9464-4523-B210-ADAB0D5A4356}"/>
               </a:ext>
             </a:extLst>
           </p:cNvPr>
@@ -2618,7 +2618,7 @@
           <p:cNvPr id="3" name="s10-title">
             <a:extLst xmlns:a="http://schemas.openxmlformats.org/drawingml/2006/main">
               <a:ext uri="{FF2B5EF4-FFF2-40B4-BE49-F238E27FC236}">
-                <a16:creationId xmlns:a16="http://schemas.microsoft.com/office/drawing/2014/main" id="{B92BEB6E-E10C-4D33-B3FB-39C2DE008998}"/>
+                <a16:creationId xmlns:a16="http://schemas.microsoft.com/office/drawing/2014/main" id="{2B812C94-07AC-434B-BF55-F7DEACEEE6B1}"/>
               </a:ext>
             </a:extLst>
           </p:cNvPr>
@@ -2676,7 +2676,7 @@
           <p:cNvPr id="4" name="s10-footer">
             <a:extLst xmlns:a="http://schemas.openxmlformats.org/drawingml/2006/main">
               <a:ext uri="{FF2B5EF4-FFF2-40B4-BE49-F238E27FC236}">
-                <a16:creationId xmlns:a16="http://schemas.microsoft.com/office/drawing/2014/main" id="{A3A945BE-6397-4A2A-9B0C-02D385659531}"/>
+                <a16:creationId xmlns:a16="http://schemas.microsoft.com/office/drawing/2014/main" id="{0BD0E964-ECCB-4497-B73A-EC9185E95F95}"/>
               </a:ext>
             </a:extLst>
           </p:cNvPr>
@@ -2707,7 +2707,7 @@
           <p:cNvPr id="5" name="s10-identity">
             <a:extLst xmlns:a="http://schemas.openxmlformats.org/drawingml/2006/main">
               <a:ext uri="{FF2B5EF4-FFF2-40B4-BE49-F238E27FC236}">
-                <a16:creationId xmlns:a16="http://schemas.microsoft.com/office/drawing/2014/main" id="{805AACCA-EFB3-46B3-B3AB-24C897B4B16C}"/>
+                <a16:creationId xmlns:a16="http://schemas.microsoft.com/office/drawing/2014/main" id="{17EC7FB6-281A-45C7-AA6C-CBADB68D1219}"/>
               </a:ext>
             </a:extLst>
           </p:cNvPr>
@@ -2765,7 +2765,7 @@
           <p:cNvPr id="6" name="case-title">
             <a:extLst xmlns:a="http://schemas.openxmlformats.org/drawingml/2006/main">
               <a:ext uri="{FF2B5EF4-FFF2-40B4-BE49-F238E27FC236}">
-                <a16:creationId xmlns:a16="http://schemas.microsoft.com/office/drawing/2014/main" id="{8110D063-08B9-4460-8641-C5AE5316D366}"/>
+                <a16:creationId xmlns:a16="http://schemas.microsoft.com/office/drawing/2014/main" id="{25A26337-9208-43D4-A3C0-8CEFD5174A8E}"/>
               </a:ext>
             </a:extLst>
           </p:cNvPr>
@@ -2829,7 +2829,7 @@
           <p:cNvPr id="7" name="case-row-0">
             <a:extLst xmlns:a="http://schemas.openxmlformats.org/drawingml/2006/main">
               <a:ext uri="{FF2B5EF4-FFF2-40B4-BE49-F238E27FC236}">
-                <a16:creationId xmlns:a16="http://schemas.microsoft.com/office/drawing/2014/main" id="{F380E222-ED1A-4986-BD0A-CDA7B4F5A6B3}"/>
+                <a16:creationId xmlns:a16="http://schemas.microsoft.com/office/drawing/2014/main" id="{E19BD01A-DA30-4F90-824D-A65C119F4E2D}"/>
               </a:ext>
             </a:extLst>
           </p:cNvPr>
@@ -2893,7 +2893,7 @@
           <p:cNvPr id="8" name="case-row-1">
             <a:extLst xmlns:a="http://schemas.openxmlformats.org/drawingml/2006/main">
               <a:ext uri="{FF2B5EF4-FFF2-40B4-BE49-F238E27FC236}">
-                <a16:creationId xmlns:a16="http://schemas.microsoft.com/office/drawing/2014/main" id="{3454AAF8-042B-4B4D-BF10-B8F1F631E6B6}"/>
+                <a16:creationId xmlns:a16="http://schemas.microsoft.com/office/drawing/2014/main" id="{E6B85A21-2461-48CC-B399-B9955E863B2B}"/>
               </a:ext>
             </a:extLst>
           </p:cNvPr>
@@ -2957,7 +2957,7 @@
           <p:cNvPr id="9" name="case-row-2">
             <a:extLst xmlns:a="http://schemas.openxmlformats.org/drawingml/2006/main">
               <a:ext uri="{FF2B5EF4-FFF2-40B4-BE49-F238E27FC236}">
-                <a16:creationId xmlns:a16="http://schemas.microsoft.com/office/drawing/2014/main" id="{7FE030F6-2FA2-427B-9C0E-F460890991EA}"/>
+                <a16:creationId xmlns:a16="http://schemas.microsoft.com/office/drawing/2014/main" id="{3AC181D3-B477-4772-BB55-10363ECD7AEF}"/>
               </a:ext>
             </a:extLst>
           </p:cNvPr>
@@ -3021,7 +3021,7 @@
           <p:cNvPr id="10" name="s10-takeaway-rule">
             <a:extLst xmlns:a="http://schemas.openxmlformats.org/drawingml/2006/main">
               <a:ext uri="{FF2B5EF4-FFF2-40B4-BE49-F238E27FC236}">
-                <a16:creationId xmlns:a16="http://schemas.microsoft.com/office/drawing/2014/main" id="{20810205-72D5-47EB-A395-867431B2551B}"/>
+                <a16:creationId xmlns:a16="http://schemas.microsoft.com/office/drawing/2014/main" id="{65380A53-DC4D-440C-BA19-57BC6795E9E5}"/>
               </a:ext>
             </a:extLst>
           </p:cNvPr>
@@ -3054,7 +3054,7 @@
           <p:cNvPr id="11" name="s10-takeaway">
             <a:extLst xmlns:a="http://schemas.openxmlformats.org/drawingml/2006/main">
               <a:ext uri="{FF2B5EF4-FFF2-40B4-BE49-F238E27FC236}">
-                <a16:creationId xmlns:a16="http://schemas.microsoft.com/office/drawing/2014/main" id="{39B31787-F8CF-4E6A-BDA2-E8305CEFB17F}"/>
+                <a16:creationId xmlns:a16="http://schemas.microsoft.com/office/drawing/2014/main" id="{8C5160A8-FF42-4596-8741-E536FDA8988E}"/>
               </a:ext>
             </a:extLst>
           </p:cNvPr>
@@ -3110,7 +3110,7 @@
     </p:spTree>
     <p:extLst>
       <p:ext uri="{BB962C8B-B14F-4D97-AF65-F5344CB8AC3E}">
-        <p14:creationId xmlns:p14="http://schemas.microsoft.com/office/powerpoint/2010/main" val="1788407375"/>
+        <p14:creationId xmlns:p14="http://schemas.microsoft.com/office/powerpoint/2010/main" val="672971089"/>
       </p:ext>
     </p:extLst>
   </p:cSld>
@@ -3141,7 +3141,7 @@
           <p:cNvPr id="1" name="s11-rule">
             <a:extLst xmlns:a="http://schemas.openxmlformats.org/drawingml/2006/main">
               <a:ext uri="{FF2B5EF4-FFF2-40B4-BE49-F238E27FC236}">
-                <a16:creationId xmlns:a16="http://schemas.microsoft.com/office/drawing/2014/main" id="{A208066F-88E3-498B-8DFD-11375B791DA1}"/>
+                <a16:creationId xmlns:a16="http://schemas.microsoft.com/office/drawing/2014/main" id="{86E68EC0-4CB5-4607-9A37-C6988E6AEE48}"/>
               </a:ext>
             </a:extLst>
           </p:cNvPr>
@@ -3174,7 +3174,7 @@
           <p:cNvPr id="2" name="s11-eyebrow">
             <a:extLst xmlns:a="http://schemas.openxmlformats.org/drawingml/2006/main">
               <a:ext uri="{FF2B5EF4-FFF2-40B4-BE49-F238E27FC236}">
-                <a16:creationId xmlns:a16="http://schemas.microsoft.com/office/drawing/2014/main" id="{52C92858-7E10-4860-B711-4E9CD62CE4DD}"/>
+                <a16:creationId xmlns:a16="http://schemas.microsoft.com/office/drawing/2014/main" id="{5E0E36F8-110B-4FD8-A9B8-84015C354094}"/>
               </a:ext>
             </a:extLst>
           </p:cNvPr>
@@ -3232,7 +3232,7 @@
           <p:cNvPr id="3" name="s11-title">
             <a:extLst xmlns:a="http://schemas.openxmlformats.org/drawingml/2006/main">
               <a:ext uri="{FF2B5EF4-FFF2-40B4-BE49-F238E27FC236}">
-                <a16:creationId xmlns:a16="http://schemas.microsoft.com/office/drawing/2014/main" id="{AB76451B-AFA5-4EA7-AD2A-5926A176C1D4}"/>
+                <a16:creationId xmlns:a16="http://schemas.microsoft.com/office/drawing/2014/main" id="{D4D70EE7-BFDF-4938-9535-B322FB9CF868}"/>
               </a:ext>
             </a:extLst>
           </p:cNvPr>
@@ -3290,7 +3290,7 @@
           <p:cNvPr id="4" name="s11-footer">
             <a:extLst xmlns:a="http://schemas.openxmlformats.org/drawingml/2006/main">
               <a:ext uri="{FF2B5EF4-FFF2-40B4-BE49-F238E27FC236}">
-                <a16:creationId xmlns:a16="http://schemas.microsoft.com/office/drawing/2014/main" id="{A31F6EAA-D643-40F1-8EC4-0FA00104BE74}"/>
+                <a16:creationId xmlns:a16="http://schemas.microsoft.com/office/drawing/2014/main" id="{5D0CF7CF-167B-4A81-A5E1-496CB8348946}"/>
               </a:ext>
             </a:extLst>
           </p:cNvPr>
@@ -3321,7 +3321,7 @@
           <p:cNvPr id="5" name="s11-identity">
             <a:extLst xmlns:a="http://schemas.openxmlformats.org/drawingml/2006/main">
               <a:ext uri="{FF2B5EF4-FFF2-40B4-BE49-F238E27FC236}">
-                <a16:creationId xmlns:a16="http://schemas.microsoft.com/office/drawing/2014/main" id="{5FBDA6F7-30E8-434C-84C2-54C15C0C7F94}"/>
+                <a16:creationId xmlns:a16="http://schemas.microsoft.com/office/drawing/2014/main" id="{0C44754E-4763-435E-810B-071B03C74906}"/>
               </a:ext>
             </a:extLst>
           </p:cNvPr>
@@ -3379,7 +3379,7 @@
           <p:cNvPr id="6" name="practice-circle-0">
             <a:extLst xmlns:a="http://schemas.openxmlformats.org/drawingml/2006/main">
               <a:ext uri="{FF2B5EF4-FFF2-40B4-BE49-F238E27FC236}">
-                <a16:creationId xmlns:a16="http://schemas.microsoft.com/office/drawing/2014/main" id="{F964B557-CFF7-4459-805B-986FCBB9C880}"/>
+                <a16:creationId xmlns:a16="http://schemas.microsoft.com/office/drawing/2014/main" id="{841BAB7E-4500-40D0-9365-3DDA7DA0EEB8}"/>
               </a:ext>
             </a:extLst>
           </p:cNvPr>
@@ -3412,7 +3412,7 @@
           <p:cNvPr id="7" name="practice-number-0">
             <a:extLst xmlns:a="http://schemas.openxmlformats.org/drawingml/2006/main">
               <a:ext uri="{FF2B5EF4-FFF2-40B4-BE49-F238E27FC236}">
-                <a16:creationId xmlns:a16="http://schemas.microsoft.com/office/drawing/2014/main" id="{F890FBA8-A73E-447C-AAA0-3076101576CD}"/>
+                <a16:creationId xmlns:a16="http://schemas.microsoft.com/office/drawing/2014/main" id="{29656366-5390-4BCE-A660-3A0AE58F75AF}"/>
               </a:ext>
             </a:extLst>
           </p:cNvPr>
@@ -3470,7 +3470,7 @@
           <p:cNvPr id="8" name="practice-item-0">
             <a:extLst xmlns:a="http://schemas.openxmlformats.org/drawingml/2006/main">
               <a:ext uri="{FF2B5EF4-FFF2-40B4-BE49-F238E27FC236}">
-                <a16:creationId xmlns:a16="http://schemas.microsoft.com/office/drawing/2014/main" id="{F78AB768-2F59-41E1-BFE6-6CF92BBB1FAB}"/>
+                <a16:creationId xmlns:a16="http://schemas.microsoft.com/office/drawing/2014/main" id="{11721469-E687-43D6-BE01-0A0CCDEB9FFB}"/>
               </a:ext>
             </a:extLst>
           </p:cNvPr>
@@ -3534,7 +3534,7 @@
           <p:cNvPr id="9" name="practice-connector-0">
             <a:extLst xmlns:a="http://schemas.openxmlformats.org/drawingml/2006/main">
               <a:ext uri="{FF2B5EF4-FFF2-40B4-BE49-F238E27FC236}">
-                <a16:creationId xmlns:a16="http://schemas.microsoft.com/office/drawing/2014/main" id="{C926F9A5-BD4C-4FF0-ACFE-887F443D94D5}"/>
+                <a16:creationId xmlns:a16="http://schemas.microsoft.com/office/drawing/2014/main" id="{A5BE8F39-6AC4-476E-9B81-6BD89B0F656E}"/>
               </a:ext>
             </a:extLst>
           </p:cNvPr>
@@ -3565,7 +3565,7 @@
           <p:cNvPr id="10" name="practice-circle-1">
             <a:extLst xmlns:a="http://schemas.openxmlformats.org/drawingml/2006/main">
               <a:ext uri="{FF2B5EF4-FFF2-40B4-BE49-F238E27FC236}">
-                <a16:creationId xmlns:a16="http://schemas.microsoft.com/office/drawing/2014/main" id="{FEEF98A1-2090-4DDA-BDAA-1CE4B28C0567}"/>
+                <a16:creationId xmlns:a16="http://schemas.microsoft.com/office/drawing/2014/main" id="{03319074-7A9A-4CE8-A007-B555532D943C}"/>
               </a:ext>
             </a:extLst>
           </p:cNvPr>
@@ -3598,7 +3598,7 @@
           <p:cNvPr id="11" name="practice-number-1">
             <a:extLst xmlns:a="http://schemas.openxmlformats.org/drawingml/2006/main">
               <a:ext uri="{FF2B5EF4-FFF2-40B4-BE49-F238E27FC236}">
-                <a16:creationId xmlns:a16="http://schemas.microsoft.com/office/drawing/2014/main" id="{0CB5B5DD-E086-4C17-BB2C-342D94C5EFBF}"/>
+                <a16:creationId xmlns:a16="http://schemas.microsoft.com/office/drawing/2014/main" id="{BEBA5B97-752A-4C96-8F31-1C95B774B841}"/>
               </a:ext>
             </a:extLst>
           </p:cNvPr>
@@ -3656,7 +3656,7 @@
           <p:cNvPr id="12" name="practice-item-1">
             <a:extLst xmlns:a="http://schemas.openxmlformats.org/drawingml/2006/main">
               <a:ext uri="{FF2B5EF4-FFF2-40B4-BE49-F238E27FC236}">
-                <a16:creationId xmlns:a16="http://schemas.microsoft.com/office/drawing/2014/main" id="{639C6E97-209D-4F84-B8FF-F545AEFBF688}"/>
+                <a16:creationId xmlns:a16="http://schemas.microsoft.com/office/drawing/2014/main" id="{7F298CD0-A412-4E25-96AC-5914FD34105E}"/>
               </a:ext>
             </a:extLst>
           </p:cNvPr>
@@ -3720,7 +3720,7 @@
           <p:cNvPr id="13" name="practice-connector-1">
             <a:extLst xmlns:a="http://schemas.openxmlformats.org/drawingml/2006/main">
               <a:ext uri="{FF2B5EF4-FFF2-40B4-BE49-F238E27FC236}">
-                <a16:creationId xmlns:a16="http://schemas.microsoft.com/office/drawing/2014/main" id="{262CC23B-1FCE-402D-89B2-B5B1C56A9239}"/>
+                <a16:creationId xmlns:a16="http://schemas.microsoft.com/office/drawing/2014/main" id="{FB2D2001-056E-4FF5-BA59-3362656D9AC6}"/>
               </a:ext>
             </a:extLst>
           </p:cNvPr>
@@ -3751,7 +3751,7 @@
           <p:cNvPr id="14" name="practice-circle-2">
             <a:extLst xmlns:a="http://schemas.openxmlformats.org/drawingml/2006/main">
               <a:ext uri="{FF2B5EF4-FFF2-40B4-BE49-F238E27FC236}">
-                <a16:creationId xmlns:a16="http://schemas.microsoft.com/office/drawing/2014/main" id="{6A19297C-1A42-4534-8BFE-B4C5B048F0D6}"/>
+                <a16:creationId xmlns:a16="http://schemas.microsoft.com/office/drawing/2014/main" id="{D193140F-F0F0-46F7-8218-5BC18C3D2727}"/>
               </a:ext>
             </a:extLst>
           </p:cNvPr>
@@ -3784,7 +3784,7 @@
           <p:cNvPr id="15" name="practice-number-2">
             <a:extLst xmlns:a="http://schemas.openxmlformats.org/drawingml/2006/main">
               <a:ext uri="{FF2B5EF4-FFF2-40B4-BE49-F238E27FC236}">
-                <a16:creationId xmlns:a16="http://schemas.microsoft.com/office/drawing/2014/main" id="{BA62939B-BA2D-49AB-9B23-9405DAB7006A}"/>
+                <a16:creationId xmlns:a16="http://schemas.microsoft.com/office/drawing/2014/main" id="{CC2628B4-5F10-493A-BCDB-8BF69A5A1AFF}"/>
               </a:ext>
             </a:extLst>
           </p:cNvPr>
@@ -3842,7 +3842,7 @@
           <p:cNvPr id="16" name="practice-item-2">
             <a:extLst xmlns:a="http://schemas.openxmlformats.org/drawingml/2006/main">
               <a:ext uri="{FF2B5EF4-FFF2-40B4-BE49-F238E27FC236}">
-                <a16:creationId xmlns:a16="http://schemas.microsoft.com/office/drawing/2014/main" id="{C84CA9B1-CF04-4255-BEEF-FEEBE9707D23}"/>
+                <a16:creationId xmlns:a16="http://schemas.microsoft.com/office/drawing/2014/main" id="{EF2ADF84-CE05-42A9-975D-7A7080991CAE}"/>
               </a:ext>
             </a:extLst>
           </p:cNvPr>
@@ -3904,7 +3904,7 @@
     </p:spTree>
     <p:extLst>
       <p:ext uri="{BB962C8B-B14F-4D97-AF65-F5344CB8AC3E}">
-        <p14:creationId xmlns:p14="http://schemas.microsoft.com/office/powerpoint/2010/main" val="1449419758"/>
+        <p14:creationId xmlns:p14="http://schemas.microsoft.com/office/powerpoint/2010/main" val="424212148"/>
       </p:ext>
     </p:extLst>
   </p:cSld>
@@ -3935,7 +3935,7 @@
           <p:cNvPr id="1" name="s12-rule">
             <a:extLst xmlns:a="http://schemas.openxmlformats.org/drawingml/2006/main">
               <a:ext uri="{FF2B5EF4-FFF2-40B4-BE49-F238E27FC236}">
-                <a16:creationId xmlns:a16="http://schemas.microsoft.com/office/drawing/2014/main" id="{56AB9D05-66D2-4931-998C-B5043DD2C1AF}"/>
+                <a16:creationId xmlns:a16="http://schemas.microsoft.com/office/drawing/2014/main" id="{27792E20-7BC9-417A-A17B-6C32626542A5}"/>
               </a:ext>
             </a:extLst>
           </p:cNvPr>
@@ -3968,7 +3968,7 @@
           <p:cNvPr id="2" name="s12-eyebrow">
             <a:extLst xmlns:a="http://schemas.openxmlformats.org/drawingml/2006/main">
               <a:ext uri="{FF2B5EF4-FFF2-40B4-BE49-F238E27FC236}">
-                <a16:creationId xmlns:a16="http://schemas.microsoft.com/office/drawing/2014/main" id="{53185130-1BB7-4863-88BF-25BA15C8F852}"/>
+                <a16:creationId xmlns:a16="http://schemas.microsoft.com/office/drawing/2014/main" id="{A08E69E0-49AD-4F0C-92D6-0090226A8514}"/>
               </a:ext>
             </a:extLst>
           </p:cNvPr>
@@ -4026,7 +4026,7 @@
           <p:cNvPr id="3" name="s12-title">
             <a:extLst xmlns:a="http://schemas.openxmlformats.org/drawingml/2006/main">
               <a:ext uri="{FF2B5EF4-FFF2-40B4-BE49-F238E27FC236}">
-                <a16:creationId xmlns:a16="http://schemas.microsoft.com/office/drawing/2014/main" id="{44952964-884A-4361-B10E-7BDD02D27AA7}"/>
+                <a16:creationId xmlns:a16="http://schemas.microsoft.com/office/drawing/2014/main" id="{8F16346D-76CD-48A3-A366-63AC2FE3600A}"/>
               </a:ext>
             </a:extLst>
           </p:cNvPr>
@@ -4084,7 +4084,7 @@
           <p:cNvPr id="4" name="s12-footer">
             <a:extLst xmlns:a="http://schemas.openxmlformats.org/drawingml/2006/main">
               <a:ext uri="{FF2B5EF4-FFF2-40B4-BE49-F238E27FC236}">
-                <a16:creationId xmlns:a16="http://schemas.microsoft.com/office/drawing/2014/main" id="{E950DFC7-526F-4260-8972-789360130360}"/>
+                <a16:creationId xmlns:a16="http://schemas.microsoft.com/office/drawing/2014/main" id="{A627B716-DC71-43C5-AA67-F7B475751D80}"/>
               </a:ext>
             </a:extLst>
           </p:cNvPr>
@@ -4115,7 +4115,7 @@
           <p:cNvPr id="5" name="s12-identity">
             <a:extLst xmlns:a="http://schemas.openxmlformats.org/drawingml/2006/main">
               <a:ext uri="{FF2B5EF4-FFF2-40B4-BE49-F238E27FC236}">
-                <a16:creationId xmlns:a16="http://schemas.microsoft.com/office/drawing/2014/main" id="{365D0BCC-6B54-4579-AD4F-0704A1213252}"/>
+                <a16:creationId xmlns:a16="http://schemas.microsoft.com/office/drawing/2014/main" id="{452E2BAB-A456-4F54-B07A-547F7F192C5C}"/>
               </a:ext>
             </a:extLst>
           </p:cNvPr>
@@ -4173,7 +4173,7 @@
           <p:cNvPr id="6" name="recap-circle-0">
             <a:extLst xmlns:a="http://schemas.openxmlformats.org/drawingml/2006/main">
               <a:ext uri="{FF2B5EF4-FFF2-40B4-BE49-F238E27FC236}">
-                <a16:creationId xmlns:a16="http://schemas.microsoft.com/office/drawing/2014/main" id="{7D0321EC-B106-4961-B79C-1E8D1AA3B628}"/>
+                <a16:creationId xmlns:a16="http://schemas.microsoft.com/office/drawing/2014/main" id="{7C7E889B-4333-40B9-A0A8-841F916844CD}"/>
               </a:ext>
             </a:extLst>
           </p:cNvPr>
@@ -4206,7 +4206,7 @@
           <p:cNvPr id="7" name="recap-number-0">
             <a:extLst xmlns:a="http://schemas.openxmlformats.org/drawingml/2006/main">
               <a:ext uri="{FF2B5EF4-FFF2-40B4-BE49-F238E27FC236}">
-                <a16:creationId xmlns:a16="http://schemas.microsoft.com/office/drawing/2014/main" id="{91AEB373-E13C-44DC-8C8D-816CF03C67DC}"/>
+                <a16:creationId xmlns:a16="http://schemas.microsoft.com/office/drawing/2014/main" id="{CEA6D75C-D3DD-4D97-B91B-7D73558960A7}"/>
               </a:ext>
             </a:extLst>
           </p:cNvPr>
@@ -4264,7 +4264,7 @@
           <p:cNvPr id="8" name="recap-item-0">
             <a:extLst xmlns:a="http://schemas.openxmlformats.org/drawingml/2006/main">
               <a:ext uri="{FF2B5EF4-FFF2-40B4-BE49-F238E27FC236}">
-                <a16:creationId xmlns:a16="http://schemas.microsoft.com/office/drawing/2014/main" id="{A910898F-FEB9-4AEA-B18B-B3DE0DCB53EC}"/>
+                <a16:creationId xmlns:a16="http://schemas.microsoft.com/office/drawing/2014/main" id="{A22B0E6F-390D-40F3-9AA6-F216DE8FF027}"/>
               </a:ext>
             </a:extLst>
           </p:cNvPr>
@@ -4328,7 +4328,7 @@
           <p:cNvPr id="9" name="recap-connector-0">
             <a:extLst xmlns:a="http://schemas.openxmlformats.org/drawingml/2006/main">
               <a:ext uri="{FF2B5EF4-FFF2-40B4-BE49-F238E27FC236}">
-                <a16:creationId xmlns:a16="http://schemas.microsoft.com/office/drawing/2014/main" id="{F19AED8C-1A59-4AFC-A9E4-B95E6FF23A7E}"/>
+                <a16:creationId xmlns:a16="http://schemas.microsoft.com/office/drawing/2014/main" id="{AF63747F-3F69-49A3-889E-C97AB8AE8207}"/>
               </a:ext>
             </a:extLst>
           </p:cNvPr>
@@ -4359,7 +4359,7 @@
           <p:cNvPr id="10" name="recap-circle-1">
             <a:extLst xmlns:a="http://schemas.openxmlformats.org/drawingml/2006/main">
               <a:ext uri="{FF2B5EF4-FFF2-40B4-BE49-F238E27FC236}">
-                <a16:creationId xmlns:a16="http://schemas.microsoft.com/office/drawing/2014/main" id="{197E6188-ED9A-4478-9D91-6BFBF86D1A30}"/>
+                <a16:creationId xmlns:a16="http://schemas.microsoft.com/office/drawing/2014/main" id="{6B127904-42A5-4E37-8C94-8DEE8469E198}"/>
               </a:ext>
             </a:extLst>
           </p:cNvPr>
@@ -4392,7 +4392,7 @@
           <p:cNvPr id="11" name="recap-number-1">
             <a:extLst xmlns:a="http://schemas.openxmlformats.org/drawingml/2006/main">
               <a:ext uri="{FF2B5EF4-FFF2-40B4-BE49-F238E27FC236}">
-                <a16:creationId xmlns:a16="http://schemas.microsoft.com/office/drawing/2014/main" id="{29DDAF3B-A5B9-4662-BA73-809885539EBB}"/>
+                <a16:creationId xmlns:a16="http://schemas.microsoft.com/office/drawing/2014/main" id="{8506588B-7FD5-4282-9519-AF95AC62577A}"/>
               </a:ext>
             </a:extLst>
           </p:cNvPr>
@@ -4450,7 +4450,7 @@
           <p:cNvPr id="12" name="recap-item-1">
             <a:extLst xmlns:a="http://schemas.openxmlformats.org/drawingml/2006/main">
               <a:ext uri="{FF2B5EF4-FFF2-40B4-BE49-F238E27FC236}">
-                <a16:creationId xmlns:a16="http://schemas.microsoft.com/office/drawing/2014/main" id="{7216F3AF-0D37-4B49-A25A-D928E4307713}"/>
+                <a16:creationId xmlns:a16="http://schemas.microsoft.com/office/drawing/2014/main" id="{D43742B5-2020-4185-9C29-F5A830CF1907}"/>
               </a:ext>
             </a:extLst>
           </p:cNvPr>
@@ -4514,7 +4514,7 @@
           <p:cNvPr id="13" name="recap-connector-1">
             <a:extLst xmlns:a="http://schemas.openxmlformats.org/drawingml/2006/main">
               <a:ext uri="{FF2B5EF4-FFF2-40B4-BE49-F238E27FC236}">
-                <a16:creationId xmlns:a16="http://schemas.microsoft.com/office/drawing/2014/main" id="{2054D4D0-5EA9-41F5-B528-95DCB00A3717}"/>
+                <a16:creationId xmlns:a16="http://schemas.microsoft.com/office/drawing/2014/main" id="{37A281EE-1E07-440E-BEBA-704EAA29D328}"/>
               </a:ext>
             </a:extLst>
           </p:cNvPr>
@@ -4545,7 +4545,7 @@
           <p:cNvPr id="14" name="recap-circle-2">
             <a:extLst xmlns:a="http://schemas.openxmlformats.org/drawingml/2006/main">
               <a:ext uri="{FF2B5EF4-FFF2-40B4-BE49-F238E27FC236}">
-                <a16:creationId xmlns:a16="http://schemas.microsoft.com/office/drawing/2014/main" id="{EBAF074C-A595-45F6-95C1-50B3119F8513}"/>
+                <a16:creationId xmlns:a16="http://schemas.microsoft.com/office/drawing/2014/main" id="{B6AB8450-6729-478E-B34D-5C4CC95C04F4}"/>
               </a:ext>
             </a:extLst>
           </p:cNvPr>
@@ -4578,7 +4578,7 @@
           <p:cNvPr id="15" name="recap-number-2">
             <a:extLst xmlns:a="http://schemas.openxmlformats.org/drawingml/2006/main">
               <a:ext uri="{FF2B5EF4-FFF2-40B4-BE49-F238E27FC236}">
-                <a16:creationId xmlns:a16="http://schemas.microsoft.com/office/drawing/2014/main" id="{8082C78C-C089-4F66-A6A7-ABA03B60E49A}"/>
+                <a16:creationId xmlns:a16="http://schemas.microsoft.com/office/drawing/2014/main" id="{87C40B26-4585-4FFB-976C-BE7DF2AB0111}"/>
               </a:ext>
             </a:extLst>
           </p:cNvPr>
@@ -4636,7 +4636,7 @@
           <p:cNvPr id="16" name="recap-item-2">
             <a:extLst xmlns:a="http://schemas.openxmlformats.org/drawingml/2006/main">
               <a:ext uri="{FF2B5EF4-FFF2-40B4-BE49-F238E27FC236}">
-                <a16:creationId xmlns:a16="http://schemas.microsoft.com/office/drawing/2014/main" id="{A2FE3967-2B24-4BD5-9AB8-B67D4BA8198D}"/>
+                <a16:creationId xmlns:a16="http://schemas.microsoft.com/office/drawing/2014/main" id="{425E925C-EB34-4137-86E0-BB443D39893A}"/>
               </a:ext>
             </a:extLst>
           </p:cNvPr>
@@ -4698,7 +4698,7 @@
     </p:spTree>
     <p:extLst>
       <p:ext uri="{BB962C8B-B14F-4D97-AF65-F5344CB8AC3E}">
-        <p14:creationId xmlns:p14="http://schemas.microsoft.com/office/powerpoint/2010/main" val="1378768330"/>
+        <p14:creationId xmlns:p14="http://schemas.microsoft.com/office/powerpoint/2010/main" val="1794097666"/>
       </p:ext>
     </p:extLst>
   </p:cSld>
@@ -4729,7 +4729,7 @@
           <p:cNvPr id="1" name="s13-rule">
             <a:extLst xmlns:a="http://schemas.openxmlformats.org/drawingml/2006/main">
               <a:ext uri="{FF2B5EF4-FFF2-40B4-BE49-F238E27FC236}">
-                <a16:creationId xmlns:a16="http://schemas.microsoft.com/office/drawing/2014/main" id="{D212439A-1F1E-45CE-801E-4957CE441C4D}"/>
+                <a16:creationId xmlns:a16="http://schemas.microsoft.com/office/drawing/2014/main" id="{6C2886D7-1189-42F9-8884-2DB7F128EBC0}"/>
               </a:ext>
             </a:extLst>
           </p:cNvPr>
@@ -4762,7 +4762,7 @@
           <p:cNvPr id="2" name="s13-eyebrow">
             <a:extLst xmlns:a="http://schemas.openxmlformats.org/drawingml/2006/main">
               <a:ext uri="{FF2B5EF4-FFF2-40B4-BE49-F238E27FC236}">
-                <a16:creationId xmlns:a16="http://schemas.microsoft.com/office/drawing/2014/main" id="{44A57381-39AC-40DE-9A02-D18C2B72566D}"/>
+                <a16:creationId xmlns:a16="http://schemas.microsoft.com/office/drawing/2014/main" id="{F94690EB-4EBE-4681-AEF6-EC93560BC127}"/>
               </a:ext>
             </a:extLst>
           </p:cNvPr>
@@ -4820,7 +4820,7 @@
           <p:cNvPr id="3" name="s13-title">
             <a:extLst xmlns:a="http://schemas.openxmlformats.org/drawingml/2006/main">
               <a:ext uri="{FF2B5EF4-FFF2-40B4-BE49-F238E27FC236}">
-                <a16:creationId xmlns:a16="http://schemas.microsoft.com/office/drawing/2014/main" id="{43759C3D-A9FF-4CB8-B620-9CB2ADD7C79B}"/>
+                <a16:creationId xmlns:a16="http://schemas.microsoft.com/office/drawing/2014/main" id="{128C7CA8-CB36-4B21-BB87-25409AFC86A2}"/>
               </a:ext>
             </a:extLst>
           </p:cNvPr>
@@ -4878,7 +4878,7 @@
           <p:cNvPr id="4" name="s13-footer">
             <a:extLst xmlns:a="http://schemas.openxmlformats.org/drawingml/2006/main">
               <a:ext uri="{FF2B5EF4-FFF2-40B4-BE49-F238E27FC236}">
-                <a16:creationId xmlns:a16="http://schemas.microsoft.com/office/drawing/2014/main" id="{B3CA5EFA-0715-4954-8CBD-A8A367FC0D2E}"/>
+                <a16:creationId xmlns:a16="http://schemas.microsoft.com/office/drawing/2014/main" id="{9C14B9D2-76EE-4552-8E11-645591B573E6}"/>
               </a:ext>
             </a:extLst>
           </p:cNvPr>
@@ -4909,7 +4909,7 @@
           <p:cNvPr id="5" name="s13-identity">
             <a:extLst xmlns:a="http://schemas.openxmlformats.org/drawingml/2006/main">
               <a:ext uri="{FF2B5EF4-FFF2-40B4-BE49-F238E27FC236}">
-                <a16:creationId xmlns:a16="http://schemas.microsoft.com/office/drawing/2014/main" id="{7992B0AE-1DB7-4698-B438-4DFCC02A0A05}"/>
+                <a16:creationId xmlns:a16="http://schemas.microsoft.com/office/drawing/2014/main" id="{59C18636-F5D1-43EA-82F3-8620DB7655E0}"/>
               </a:ext>
             </a:extLst>
           </p:cNvPr>
@@ -4967,7 +4967,7 @@
           <p:cNvPr id="6" name="source-0">
             <a:extLst xmlns:a="http://schemas.openxmlformats.org/drawingml/2006/main">
               <a:ext uri="{FF2B5EF4-FFF2-40B4-BE49-F238E27FC236}">
-                <a16:creationId xmlns:a16="http://schemas.microsoft.com/office/drawing/2014/main" id="{6879186A-BF0B-45C1-BD30-AF542757434B}"/>
+                <a16:creationId xmlns:a16="http://schemas.microsoft.com/office/drawing/2014/main" id="{94E20F4B-EFEE-45F2-94D9-41F08805DA6B}"/>
               </a:ext>
             </a:extLst>
           </p:cNvPr>
@@ -5031,7 +5031,7 @@
           <p:cNvPr id="7" name="source-1">
             <a:extLst xmlns:a="http://schemas.openxmlformats.org/drawingml/2006/main">
               <a:ext uri="{FF2B5EF4-FFF2-40B4-BE49-F238E27FC236}">
-                <a16:creationId xmlns:a16="http://schemas.microsoft.com/office/drawing/2014/main" id="{3E8A0479-778B-47AC-8EDA-74088501D1E2}"/>
+                <a16:creationId xmlns:a16="http://schemas.microsoft.com/office/drawing/2014/main" id="{73F52420-D2EE-4B4E-8045-1A27E92DF533}"/>
               </a:ext>
             </a:extLst>
           </p:cNvPr>
@@ -5095,7 +5095,7 @@
           <p:cNvPr id="8" name="source-2">
             <a:extLst xmlns:a="http://schemas.openxmlformats.org/drawingml/2006/main">
               <a:ext uri="{FF2B5EF4-FFF2-40B4-BE49-F238E27FC236}">
-                <a16:creationId xmlns:a16="http://schemas.microsoft.com/office/drawing/2014/main" id="{25F989D6-DA21-4811-A0B9-AB0D1880841D}"/>
+                <a16:creationId xmlns:a16="http://schemas.microsoft.com/office/drawing/2014/main" id="{315F84EE-CE14-438B-9ECA-16E079DA75D7}"/>
               </a:ext>
             </a:extLst>
           </p:cNvPr>
@@ -5159,7 +5159,7 @@
           <p:cNvPr id="9" name="source-3">
             <a:extLst xmlns:a="http://schemas.openxmlformats.org/drawingml/2006/main">
               <a:ext uri="{FF2B5EF4-FFF2-40B4-BE49-F238E27FC236}">
-                <a16:creationId xmlns:a16="http://schemas.microsoft.com/office/drawing/2014/main" id="{BD4F8DAF-0CB2-44F9-9B5F-A3654A64BA03}"/>
+                <a16:creationId xmlns:a16="http://schemas.microsoft.com/office/drawing/2014/main" id="{D037C506-597E-409F-AFC3-DC55F2A58179}"/>
               </a:ext>
             </a:extLst>
           </p:cNvPr>
@@ -5223,7 +5223,7 @@
           <p:cNvPr id="10" name="s13-takeaway-rule">
             <a:extLst xmlns:a="http://schemas.openxmlformats.org/drawingml/2006/main">
               <a:ext uri="{FF2B5EF4-FFF2-40B4-BE49-F238E27FC236}">
-                <a16:creationId xmlns:a16="http://schemas.microsoft.com/office/drawing/2014/main" id="{3A1786E5-1405-4F80-B205-D657D9B06140}"/>
+                <a16:creationId xmlns:a16="http://schemas.microsoft.com/office/drawing/2014/main" id="{5A20A8FB-4605-496A-9518-A2A0517D7A9B}"/>
               </a:ext>
             </a:extLst>
           </p:cNvPr>
@@ -5256,7 +5256,7 @@
           <p:cNvPr id="11" name="s13-takeaway">
             <a:extLst xmlns:a="http://schemas.openxmlformats.org/drawingml/2006/main">
               <a:ext uri="{FF2B5EF4-FFF2-40B4-BE49-F238E27FC236}">
-                <a16:creationId xmlns:a16="http://schemas.microsoft.com/office/drawing/2014/main" id="{ADF32638-F56E-48F6-B5F0-E7043EE159AC}"/>
+                <a16:creationId xmlns:a16="http://schemas.microsoft.com/office/drawing/2014/main" id="{5F145E5E-8409-4D58-8B7B-0E0314B3098C}"/>
               </a:ext>
             </a:extLst>
           </p:cNvPr>
@@ -5281,7 +5281,7 @@
         </p:spPr>
         <p:txBody>
           <a:bodyPr xmlns:a="http://schemas.openxmlformats.org/drawingml/2006/main" lIns="0" tIns="0" rIns="0" bIns="0" anchor="ctr">
-            <a:normAutofit fontScale="100000"/>
+            <a:normAutofit fontScale="95911"/>
           </a:bodyPr>
           <a:lstStyle xmlns:a="http://schemas.openxmlformats.org/drawingml/2006/main"/>
           <a:p xmlns:a="http://schemas.openxmlformats.org/drawingml/2006/main">
@@ -5304,7 +5304,7 @@
                 <a:ea typeface="PingFang SC"/>
                 <a:cs typeface="PingFang SC"/>
               </a:rPr>
-              <a:t>公开幻灯片只使用课程原创文字与原生图形；完整论证、链接和事实边界请见本节讲义。</a:t>
+              <a:t>课程精编页用于讲授主线；播放器中的“原课件”模式保留团队 PowerPoint 精选页、真实图片和可播放视频。</a:t>
             </a:r>
           </a:p>
         </p:txBody>
@@ -5312,7 +5312,7 @@
     </p:spTree>
     <p:extLst>
       <p:ext uri="{BB962C8B-B14F-4D97-AF65-F5344CB8AC3E}">
-        <p14:creationId xmlns:p14="http://schemas.microsoft.com/office/powerpoint/2010/main" val="814897046"/>
+        <p14:creationId xmlns:p14="http://schemas.microsoft.com/office/powerpoint/2010/main" val="2002023236"/>
       </p:ext>
     </p:extLst>
   </p:cSld>
@@ -5343,7 +5343,7 @@
           <p:cNvPr id="1" name="s2-rule">
             <a:extLst xmlns:a="http://schemas.openxmlformats.org/drawingml/2006/main">
               <a:ext uri="{FF2B5EF4-FFF2-40B4-BE49-F238E27FC236}">
-                <a16:creationId xmlns:a16="http://schemas.microsoft.com/office/drawing/2014/main" id="{FB83870A-3D5C-41F1-8283-26FA7BECDA6C}"/>
+                <a16:creationId xmlns:a16="http://schemas.microsoft.com/office/drawing/2014/main" id="{D7F0BE05-246D-4573-BC66-EF83B4D26618}"/>
               </a:ext>
             </a:extLst>
           </p:cNvPr>
@@ -5376,7 +5376,7 @@
           <p:cNvPr id="2" name="s2-eyebrow">
             <a:extLst xmlns:a="http://schemas.openxmlformats.org/drawingml/2006/main">
               <a:ext uri="{FF2B5EF4-FFF2-40B4-BE49-F238E27FC236}">
-                <a16:creationId xmlns:a16="http://schemas.microsoft.com/office/drawing/2014/main" id="{7BC41F74-A4E8-475A-A7C5-3DFA74CAEA16}"/>
+                <a16:creationId xmlns:a16="http://schemas.microsoft.com/office/drawing/2014/main" id="{07D1ECB1-7404-49FB-A612-D4DF67CDA45E}"/>
               </a:ext>
             </a:extLst>
           </p:cNvPr>
@@ -5434,7 +5434,7 @@
           <p:cNvPr id="3" name="s2-title">
             <a:extLst xmlns:a="http://schemas.openxmlformats.org/drawingml/2006/main">
               <a:ext uri="{FF2B5EF4-FFF2-40B4-BE49-F238E27FC236}">
-                <a16:creationId xmlns:a16="http://schemas.microsoft.com/office/drawing/2014/main" id="{5A0F5D07-622F-4C3F-9913-4481C944CF8A}"/>
+                <a16:creationId xmlns:a16="http://schemas.microsoft.com/office/drawing/2014/main" id="{D17FC233-ABCD-4A04-B349-341C4939F738}"/>
               </a:ext>
             </a:extLst>
           </p:cNvPr>
@@ -5492,7 +5492,7 @@
           <p:cNvPr id="4" name="s2-footer">
             <a:extLst xmlns:a="http://schemas.openxmlformats.org/drawingml/2006/main">
               <a:ext uri="{FF2B5EF4-FFF2-40B4-BE49-F238E27FC236}">
-                <a16:creationId xmlns:a16="http://schemas.microsoft.com/office/drawing/2014/main" id="{77CB7A1C-D2AA-47A5-BFDA-C068412CB9CE}"/>
+                <a16:creationId xmlns:a16="http://schemas.microsoft.com/office/drawing/2014/main" id="{5EA76B64-191A-49BB-870E-1160B849AD81}"/>
               </a:ext>
             </a:extLst>
           </p:cNvPr>
@@ -5523,7 +5523,7 @@
           <p:cNvPr id="5" name="s2-identity">
             <a:extLst xmlns:a="http://schemas.openxmlformats.org/drawingml/2006/main">
               <a:ext uri="{FF2B5EF4-FFF2-40B4-BE49-F238E27FC236}">
-                <a16:creationId xmlns:a16="http://schemas.microsoft.com/office/drawing/2014/main" id="{CEB954C7-7438-45FF-800A-0A4274BED562}"/>
+                <a16:creationId xmlns:a16="http://schemas.microsoft.com/office/drawing/2014/main" id="{6E1FBF79-6E86-4225-B74B-2DDEAF16264C}"/>
               </a:ext>
             </a:extLst>
           </p:cNvPr>
@@ -5581,7 +5581,7 @@
           <p:cNvPr id="6" name="objective-1">
             <a:extLst xmlns:a="http://schemas.openxmlformats.org/drawingml/2006/main">
               <a:ext uri="{FF2B5EF4-FFF2-40B4-BE49-F238E27FC236}">
-                <a16:creationId xmlns:a16="http://schemas.microsoft.com/office/drawing/2014/main" id="{D9ECEBED-ED66-4B1B-A2AD-362926406D88}"/>
+                <a16:creationId xmlns:a16="http://schemas.microsoft.com/office/drawing/2014/main" id="{DDA682AC-DFC8-4704-8058-5062E3621F81}"/>
               </a:ext>
             </a:extLst>
           </p:cNvPr>
@@ -5668,7 +5668,7 @@
           <p:cNvPr id="7" name="objective-2">
             <a:extLst xmlns:a="http://schemas.openxmlformats.org/drawingml/2006/main">
               <a:ext uri="{FF2B5EF4-FFF2-40B4-BE49-F238E27FC236}">
-                <a16:creationId xmlns:a16="http://schemas.microsoft.com/office/drawing/2014/main" id="{4D03DF19-60F6-4E9C-BCEB-51C18F522F97}"/>
+                <a16:creationId xmlns:a16="http://schemas.microsoft.com/office/drawing/2014/main" id="{69A3334A-5193-4F54-873A-22F181E49195}"/>
               </a:ext>
             </a:extLst>
           </p:cNvPr>
@@ -5755,7 +5755,7 @@
           <p:cNvPr id="8" name="objective-3">
             <a:extLst xmlns:a="http://schemas.openxmlformats.org/drawingml/2006/main">
               <a:ext uri="{FF2B5EF4-FFF2-40B4-BE49-F238E27FC236}">
-                <a16:creationId xmlns:a16="http://schemas.microsoft.com/office/drawing/2014/main" id="{E6821743-AC26-4F03-B04E-DFEDFF95C0A3}"/>
+                <a16:creationId xmlns:a16="http://schemas.microsoft.com/office/drawing/2014/main" id="{027E8A8D-CA43-4B7E-894F-E41B3B254C15}"/>
               </a:ext>
             </a:extLst>
           </p:cNvPr>
@@ -5842,7 +5842,7 @@
           <p:cNvPr id="9" name="objective-4">
             <a:extLst xmlns:a="http://schemas.openxmlformats.org/drawingml/2006/main">
               <a:ext uri="{FF2B5EF4-FFF2-40B4-BE49-F238E27FC236}">
-                <a16:creationId xmlns:a16="http://schemas.microsoft.com/office/drawing/2014/main" id="{6F901DFF-868F-4D99-B2EB-B71FAE68D908}"/>
+                <a16:creationId xmlns:a16="http://schemas.microsoft.com/office/drawing/2014/main" id="{0D316C2A-3891-47EC-B426-25EFF9B4B41F}"/>
               </a:ext>
             </a:extLst>
           </p:cNvPr>
@@ -5927,7 +5927,7 @@
     </p:spTree>
     <p:extLst>
       <p:ext uri="{BB962C8B-B14F-4D97-AF65-F5344CB8AC3E}">
-        <p14:creationId xmlns:p14="http://schemas.microsoft.com/office/powerpoint/2010/main" val="2032967450"/>
+        <p14:creationId xmlns:p14="http://schemas.microsoft.com/office/powerpoint/2010/main" val="151465043"/>
       </p:ext>
     </p:extLst>
   </p:cSld>
@@ -5958,7 +5958,7 @@
           <p:cNvPr id="1" name="s3-rule">
             <a:extLst xmlns:a="http://schemas.openxmlformats.org/drawingml/2006/main">
               <a:ext uri="{FF2B5EF4-FFF2-40B4-BE49-F238E27FC236}">
-                <a16:creationId xmlns:a16="http://schemas.microsoft.com/office/drawing/2014/main" id="{19F74C99-9073-490F-BE44-283B4FBEACFD}"/>
+                <a16:creationId xmlns:a16="http://schemas.microsoft.com/office/drawing/2014/main" id="{FF29AE29-097A-4C1E-9C40-24D13AE09954}"/>
               </a:ext>
             </a:extLst>
           </p:cNvPr>
@@ -5991,7 +5991,7 @@
           <p:cNvPr id="2" name="s3-eyebrow">
             <a:extLst xmlns:a="http://schemas.openxmlformats.org/drawingml/2006/main">
               <a:ext uri="{FF2B5EF4-FFF2-40B4-BE49-F238E27FC236}">
-                <a16:creationId xmlns:a16="http://schemas.microsoft.com/office/drawing/2014/main" id="{8A80C7F8-F579-454E-B2BB-538D7F04F674}"/>
+                <a16:creationId xmlns:a16="http://schemas.microsoft.com/office/drawing/2014/main" id="{868CBEBE-251B-438D-85E7-788C07B1F094}"/>
               </a:ext>
             </a:extLst>
           </p:cNvPr>
@@ -6049,7 +6049,7 @@
           <p:cNvPr id="3" name="s3-title">
             <a:extLst xmlns:a="http://schemas.openxmlformats.org/drawingml/2006/main">
               <a:ext uri="{FF2B5EF4-FFF2-40B4-BE49-F238E27FC236}">
-                <a16:creationId xmlns:a16="http://schemas.microsoft.com/office/drawing/2014/main" id="{C28865FC-84DD-4B4A-AF96-5F77D71AF28E}"/>
+                <a16:creationId xmlns:a16="http://schemas.microsoft.com/office/drawing/2014/main" id="{71951C2D-BACF-4D9B-92DF-53DD9DFD60F2}"/>
               </a:ext>
             </a:extLst>
           </p:cNvPr>
@@ -6107,7 +6107,7 @@
           <p:cNvPr id="4" name="s3-footer">
             <a:extLst xmlns:a="http://schemas.openxmlformats.org/drawingml/2006/main">
               <a:ext uri="{FF2B5EF4-FFF2-40B4-BE49-F238E27FC236}">
-                <a16:creationId xmlns:a16="http://schemas.microsoft.com/office/drawing/2014/main" id="{0E546E73-935E-4020-8D9E-B138AC5D9D44}"/>
+                <a16:creationId xmlns:a16="http://schemas.microsoft.com/office/drawing/2014/main" id="{951BF657-5FCA-4BB5-8E12-A18E7E37EE71}"/>
               </a:ext>
             </a:extLst>
           </p:cNvPr>
@@ -6138,7 +6138,7 @@
           <p:cNvPr id="5" name="s3-identity">
             <a:extLst xmlns:a="http://schemas.openxmlformats.org/drawingml/2006/main">
               <a:ext uri="{FF2B5EF4-FFF2-40B4-BE49-F238E27FC236}">
-                <a16:creationId xmlns:a16="http://schemas.microsoft.com/office/drawing/2014/main" id="{A1D3BEE0-1FC7-458D-A49C-29EC374BEC22}"/>
+                <a16:creationId xmlns:a16="http://schemas.microsoft.com/office/drawing/2014/main" id="{13CB2049-CA6F-431A-90D6-F922A1DCB704}"/>
               </a:ext>
             </a:extLst>
           </p:cNvPr>
@@ -6196,7 +6196,7 @@
           <p:cNvPr id="6" name="core-no-0">
             <a:extLst xmlns:a="http://schemas.openxmlformats.org/drawingml/2006/main">
               <a:ext uri="{FF2B5EF4-FFF2-40B4-BE49-F238E27FC236}">
-                <a16:creationId xmlns:a16="http://schemas.microsoft.com/office/drawing/2014/main" id="{E19942C6-31DF-482C-838C-387E68C1E6CD}"/>
+                <a16:creationId xmlns:a16="http://schemas.microsoft.com/office/drawing/2014/main" id="{091892AA-B2EF-4670-B285-1218FC32346E}"/>
               </a:ext>
             </a:extLst>
           </p:cNvPr>
@@ -6254,7 +6254,7 @@
           <p:cNvPr id="7" name="core-label-0">
             <a:extLst xmlns:a="http://schemas.openxmlformats.org/drawingml/2006/main">
               <a:ext uri="{FF2B5EF4-FFF2-40B4-BE49-F238E27FC236}">
-                <a16:creationId xmlns:a16="http://schemas.microsoft.com/office/drawing/2014/main" id="{65835A1E-9FB0-4893-9048-9EC557488142}"/>
+                <a16:creationId xmlns:a16="http://schemas.microsoft.com/office/drawing/2014/main" id="{8FA98F9C-4AE2-4612-A3E7-5622E8B9ADF1}"/>
               </a:ext>
             </a:extLst>
           </p:cNvPr>
@@ -6312,7 +6312,7 @@
           <p:cNvPr id="8" name="core-body-0">
             <a:extLst xmlns:a="http://schemas.openxmlformats.org/drawingml/2006/main">
               <a:ext uri="{FF2B5EF4-FFF2-40B4-BE49-F238E27FC236}">
-                <a16:creationId xmlns:a16="http://schemas.microsoft.com/office/drawing/2014/main" id="{4EEE25EA-39D4-4273-ACDF-4AFCEBC1BABF}"/>
+                <a16:creationId xmlns:a16="http://schemas.microsoft.com/office/drawing/2014/main" id="{C7B73D46-E487-497D-A3EB-84F0C2838166}"/>
               </a:ext>
             </a:extLst>
           </p:cNvPr>
@@ -6376,7 +6376,7 @@
           <p:cNvPr id="9" name="core-no-1">
             <a:extLst xmlns:a="http://schemas.openxmlformats.org/drawingml/2006/main">
               <a:ext uri="{FF2B5EF4-FFF2-40B4-BE49-F238E27FC236}">
-                <a16:creationId xmlns:a16="http://schemas.microsoft.com/office/drawing/2014/main" id="{8D625329-FC7B-4956-AD10-3DD8EE9E53F5}"/>
+                <a16:creationId xmlns:a16="http://schemas.microsoft.com/office/drawing/2014/main" id="{74C922D2-8937-4B7D-B1FF-6E8E18F4611E}"/>
               </a:ext>
             </a:extLst>
           </p:cNvPr>
@@ -6434,7 +6434,7 @@
           <p:cNvPr id="10" name="core-body-1">
             <a:extLst xmlns:a="http://schemas.openxmlformats.org/drawingml/2006/main">
               <a:ext uri="{FF2B5EF4-FFF2-40B4-BE49-F238E27FC236}">
-                <a16:creationId xmlns:a16="http://schemas.microsoft.com/office/drawing/2014/main" id="{AF66E008-C647-44A8-B716-6A23850D091C}"/>
+                <a16:creationId xmlns:a16="http://schemas.microsoft.com/office/drawing/2014/main" id="{EA0F3640-4F57-4D7E-AFEF-721BBA872C81}"/>
               </a:ext>
             </a:extLst>
           </p:cNvPr>
@@ -6498,7 +6498,7 @@
           <p:cNvPr id="11" name="core-no-2">
             <a:extLst xmlns:a="http://schemas.openxmlformats.org/drawingml/2006/main">
               <a:ext uri="{FF2B5EF4-FFF2-40B4-BE49-F238E27FC236}">
-                <a16:creationId xmlns:a16="http://schemas.microsoft.com/office/drawing/2014/main" id="{AD4713C8-44AD-4B6D-8EB4-49A794009AA0}"/>
+                <a16:creationId xmlns:a16="http://schemas.microsoft.com/office/drawing/2014/main" id="{04452B26-6D61-4ECE-8310-8ED2291DEF4A}"/>
               </a:ext>
             </a:extLst>
           </p:cNvPr>
@@ -6556,7 +6556,7 @@
           <p:cNvPr id="12" name="core-body-2">
             <a:extLst xmlns:a="http://schemas.openxmlformats.org/drawingml/2006/main">
               <a:ext uri="{FF2B5EF4-FFF2-40B4-BE49-F238E27FC236}">
-                <a16:creationId xmlns:a16="http://schemas.microsoft.com/office/drawing/2014/main" id="{6E3051E5-A16A-4E3F-A25E-C7CB1208CDE9}"/>
+                <a16:creationId xmlns:a16="http://schemas.microsoft.com/office/drawing/2014/main" id="{3835C3FB-EA49-426B-AFD1-E9F1E16895BC}"/>
               </a:ext>
             </a:extLst>
           </p:cNvPr>
@@ -6620,7 +6620,7 @@
           <p:cNvPr id="13" name="s3-takeaway-rule">
             <a:extLst xmlns:a="http://schemas.openxmlformats.org/drawingml/2006/main">
               <a:ext uri="{FF2B5EF4-FFF2-40B4-BE49-F238E27FC236}">
-                <a16:creationId xmlns:a16="http://schemas.microsoft.com/office/drawing/2014/main" id="{9E679DE7-99BE-49D4-838D-C310ED7A2596}"/>
+                <a16:creationId xmlns:a16="http://schemas.microsoft.com/office/drawing/2014/main" id="{888442D4-0683-4595-9A82-6E5A38AA7842}"/>
               </a:ext>
             </a:extLst>
           </p:cNvPr>
@@ -6653,7 +6653,7 @@
           <p:cNvPr id="14" name="s3-takeaway">
             <a:extLst xmlns:a="http://schemas.openxmlformats.org/drawingml/2006/main">
               <a:ext uri="{FF2B5EF4-FFF2-40B4-BE49-F238E27FC236}">
-                <a16:creationId xmlns:a16="http://schemas.microsoft.com/office/drawing/2014/main" id="{9A003ECF-FB2A-46F1-B425-D29A8D5FDB8B}"/>
+                <a16:creationId xmlns:a16="http://schemas.microsoft.com/office/drawing/2014/main" id="{4332FCF2-61D2-4FA0-9A9C-0B6D59F9C25E}"/>
               </a:ext>
             </a:extLst>
           </p:cNvPr>
@@ -6709,7 +6709,7 @@
     </p:spTree>
     <p:extLst>
       <p:ext uri="{BB962C8B-B14F-4D97-AF65-F5344CB8AC3E}">
-        <p14:creationId xmlns:p14="http://schemas.microsoft.com/office/powerpoint/2010/main" val="1351419894"/>
+        <p14:creationId xmlns:p14="http://schemas.microsoft.com/office/powerpoint/2010/main" val="1922824737"/>
       </p:ext>
     </p:extLst>
   </p:cSld>
@@ -6740,7 +6740,7 @@
           <p:cNvPr id="1" name="s4-rule">
             <a:extLst xmlns:a="http://schemas.openxmlformats.org/drawingml/2006/main">
               <a:ext uri="{FF2B5EF4-FFF2-40B4-BE49-F238E27FC236}">
-                <a16:creationId xmlns:a16="http://schemas.microsoft.com/office/drawing/2014/main" id="{E596D58A-7855-4545-BD5E-594BD1A27FB2}"/>
+                <a16:creationId xmlns:a16="http://schemas.microsoft.com/office/drawing/2014/main" id="{9320BCAB-B051-451F-97AF-D1AC35E262FD}"/>
               </a:ext>
             </a:extLst>
           </p:cNvPr>
@@ -6773,7 +6773,7 @@
           <p:cNvPr id="2" name="s4-eyebrow">
             <a:extLst xmlns:a="http://schemas.openxmlformats.org/drawingml/2006/main">
               <a:ext uri="{FF2B5EF4-FFF2-40B4-BE49-F238E27FC236}">
-                <a16:creationId xmlns:a16="http://schemas.microsoft.com/office/drawing/2014/main" id="{D4917261-A809-4192-BED2-FAC7710C8982}"/>
+                <a16:creationId xmlns:a16="http://schemas.microsoft.com/office/drawing/2014/main" id="{1CC446E2-9839-4715-B3BC-3813A6DC3CCE}"/>
               </a:ext>
             </a:extLst>
           </p:cNvPr>
@@ -6831,7 +6831,7 @@
           <p:cNvPr id="3" name="s4-title">
             <a:extLst xmlns:a="http://schemas.openxmlformats.org/drawingml/2006/main">
               <a:ext uri="{FF2B5EF4-FFF2-40B4-BE49-F238E27FC236}">
-                <a16:creationId xmlns:a16="http://schemas.microsoft.com/office/drawing/2014/main" id="{5122FBA8-016E-43AC-86A0-FCA9FCEF5DCB}"/>
+                <a16:creationId xmlns:a16="http://schemas.microsoft.com/office/drawing/2014/main" id="{89044A12-56A1-448A-8C1E-274D1F6B9046}"/>
               </a:ext>
             </a:extLst>
           </p:cNvPr>
@@ -6889,7 +6889,7 @@
           <p:cNvPr id="4" name="s4-footer">
             <a:extLst xmlns:a="http://schemas.openxmlformats.org/drawingml/2006/main">
               <a:ext uri="{FF2B5EF4-FFF2-40B4-BE49-F238E27FC236}">
-                <a16:creationId xmlns:a16="http://schemas.microsoft.com/office/drawing/2014/main" id="{91F1E9DD-906C-48FA-9869-9567C266E32B}"/>
+                <a16:creationId xmlns:a16="http://schemas.microsoft.com/office/drawing/2014/main" id="{F3F3CFA5-35BC-4703-912C-79A9E3EA7541}"/>
               </a:ext>
             </a:extLst>
           </p:cNvPr>
@@ -6920,7 +6920,7 @@
           <p:cNvPr id="5" name="s4-identity">
             <a:extLst xmlns:a="http://schemas.openxmlformats.org/drawingml/2006/main">
               <a:ext uri="{FF2B5EF4-FFF2-40B4-BE49-F238E27FC236}">
-                <a16:creationId xmlns:a16="http://schemas.microsoft.com/office/drawing/2014/main" id="{B56A98E0-2698-4FD3-8E05-2A52E0947270}"/>
+                <a16:creationId xmlns:a16="http://schemas.microsoft.com/office/drawing/2014/main" id="{30F22AFA-1032-4917-BC48-2F01978529BC}"/>
               </a:ext>
             </a:extLst>
           </p:cNvPr>
@@ -6978,7 +6978,7 @@
           <p:cNvPr id="6" name="core-no-0">
             <a:extLst xmlns:a="http://schemas.openxmlformats.org/drawingml/2006/main">
               <a:ext uri="{FF2B5EF4-FFF2-40B4-BE49-F238E27FC236}">
-                <a16:creationId xmlns:a16="http://schemas.microsoft.com/office/drawing/2014/main" id="{68094261-7758-4588-B97C-6B20F1D6203F}"/>
+                <a16:creationId xmlns:a16="http://schemas.microsoft.com/office/drawing/2014/main" id="{1EEBDDA2-20E9-43C1-8F20-13A848E1A6E8}"/>
               </a:ext>
             </a:extLst>
           </p:cNvPr>
@@ -7036,7 +7036,7 @@
           <p:cNvPr id="7" name="core-label-0">
             <a:extLst xmlns:a="http://schemas.openxmlformats.org/drawingml/2006/main">
               <a:ext uri="{FF2B5EF4-FFF2-40B4-BE49-F238E27FC236}">
-                <a16:creationId xmlns:a16="http://schemas.microsoft.com/office/drawing/2014/main" id="{5069C6CD-17CF-40DB-BD06-74FA3E46CA20}"/>
+                <a16:creationId xmlns:a16="http://schemas.microsoft.com/office/drawing/2014/main" id="{8B5AB46A-3F70-4803-9564-1CA5E7C79E4E}"/>
               </a:ext>
             </a:extLst>
           </p:cNvPr>
@@ -7094,7 +7094,7 @@
           <p:cNvPr id="8" name="core-body-0">
             <a:extLst xmlns:a="http://schemas.openxmlformats.org/drawingml/2006/main">
               <a:ext uri="{FF2B5EF4-FFF2-40B4-BE49-F238E27FC236}">
-                <a16:creationId xmlns:a16="http://schemas.microsoft.com/office/drawing/2014/main" id="{20AE46E5-7D43-4F4A-BA50-4076E930A5F5}"/>
+                <a16:creationId xmlns:a16="http://schemas.microsoft.com/office/drawing/2014/main" id="{020184D4-7994-4486-A802-E82B11B7D9EC}"/>
               </a:ext>
             </a:extLst>
           </p:cNvPr>
@@ -7158,7 +7158,7 @@
           <p:cNvPr id="9" name="core-no-1">
             <a:extLst xmlns:a="http://schemas.openxmlformats.org/drawingml/2006/main">
               <a:ext uri="{FF2B5EF4-FFF2-40B4-BE49-F238E27FC236}">
-                <a16:creationId xmlns:a16="http://schemas.microsoft.com/office/drawing/2014/main" id="{BDA565F2-AD50-4D23-A9C9-C1F3254B4DF1}"/>
+                <a16:creationId xmlns:a16="http://schemas.microsoft.com/office/drawing/2014/main" id="{9F5AD380-7623-4A34-AC0D-F9FBA21D2644}"/>
               </a:ext>
             </a:extLst>
           </p:cNvPr>
@@ -7216,7 +7216,7 @@
           <p:cNvPr id="10" name="core-body-1">
             <a:extLst xmlns:a="http://schemas.openxmlformats.org/drawingml/2006/main">
               <a:ext uri="{FF2B5EF4-FFF2-40B4-BE49-F238E27FC236}">
-                <a16:creationId xmlns:a16="http://schemas.microsoft.com/office/drawing/2014/main" id="{2D4BD1E7-F0E0-47A4-A49B-43BCD38C7C05}"/>
+                <a16:creationId xmlns:a16="http://schemas.microsoft.com/office/drawing/2014/main" id="{3C5A1179-A81F-4374-9139-248B9ED655DA}"/>
               </a:ext>
             </a:extLst>
           </p:cNvPr>
@@ -7280,7 +7280,7 @@
           <p:cNvPr id="11" name="s4-takeaway-rule">
             <a:extLst xmlns:a="http://schemas.openxmlformats.org/drawingml/2006/main">
               <a:ext uri="{FF2B5EF4-FFF2-40B4-BE49-F238E27FC236}">
-                <a16:creationId xmlns:a16="http://schemas.microsoft.com/office/drawing/2014/main" id="{5980DA1B-FE0A-4433-86A7-0943BA26CBE3}"/>
+                <a16:creationId xmlns:a16="http://schemas.microsoft.com/office/drawing/2014/main" id="{80D65F68-DAF0-4ADD-8F53-B776D524F98D}"/>
               </a:ext>
             </a:extLst>
           </p:cNvPr>
@@ -7313,7 +7313,7 @@
           <p:cNvPr id="12" name="s4-takeaway">
             <a:extLst xmlns:a="http://schemas.openxmlformats.org/drawingml/2006/main">
               <a:ext uri="{FF2B5EF4-FFF2-40B4-BE49-F238E27FC236}">
-                <a16:creationId xmlns:a16="http://schemas.microsoft.com/office/drawing/2014/main" id="{8323BA16-9606-4D88-A1E6-15EBE0756A61}"/>
+                <a16:creationId xmlns:a16="http://schemas.microsoft.com/office/drawing/2014/main" id="{ADC60021-BBDF-4285-9F58-4E7EDABE17DC}"/>
               </a:ext>
             </a:extLst>
           </p:cNvPr>
@@ -7369,7 +7369,7 @@
     </p:spTree>
     <p:extLst>
       <p:ext uri="{BB962C8B-B14F-4D97-AF65-F5344CB8AC3E}">
-        <p14:creationId xmlns:p14="http://schemas.microsoft.com/office/powerpoint/2010/main" val="148800352"/>
+        <p14:creationId xmlns:p14="http://schemas.microsoft.com/office/powerpoint/2010/main" val="688702078"/>
       </p:ext>
     </p:extLst>
   </p:cSld>
@@ -7400,7 +7400,7 @@
           <p:cNvPr id="1" name="s5-rule">
             <a:extLst xmlns:a="http://schemas.openxmlformats.org/drawingml/2006/main">
               <a:ext uri="{FF2B5EF4-FFF2-40B4-BE49-F238E27FC236}">
-                <a16:creationId xmlns:a16="http://schemas.microsoft.com/office/drawing/2014/main" id="{CEC6B62A-C971-41B0-BB36-6C77CECAA00A}"/>
+                <a16:creationId xmlns:a16="http://schemas.microsoft.com/office/drawing/2014/main" id="{D27FAEC8-7C6B-4364-9C59-CC2BE1CDBA16}"/>
               </a:ext>
             </a:extLst>
           </p:cNvPr>
@@ -7433,7 +7433,7 @@
           <p:cNvPr id="2" name="s5-eyebrow">
             <a:extLst xmlns:a="http://schemas.openxmlformats.org/drawingml/2006/main">
               <a:ext uri="{FF2B5EF4-FFF2-40B4-BE49-F238E27FC236}">
-                <a16:creationId xmlns:a16="http://schemas.microsoft.com/office/drawing/2014/main" id="{50A6A415-4B34-42AF-B6FE-E10710DBCFD6}"/>
+                <a16:creationId xmlns:a16="http://schemas.microsoft.com/office/drawing/2014/main" id="{E1046922-0058-4182-9C8A-284C0687D341}"/>
               </a:ext>
             </a:extLst>
           </p:cNvPr>
@@ -7491,7 +7491,7 @@
           <p:cNvPr id="3" name="s5-title">
             <a:extLst xmlns:a="http://schemas.openxmlformats.org/drawingml/2006/main">
               <a:ext uri="{FF2B5EF4-FFF2-40B4-BE49-F238E27FC236}">
-                <a16:creationId xmlns:a16="http://schemas.microsoft.com/office/drawing/2014/main" id="{3F16E317-F5CE-410F-93B0-EA02BD15380F}"/>
+                <a16:creationId xmlns:a16="http://schemas.microsoft.com/office/drawing/2014/main" id="{1E420686-61B2-4C3E-A6CD-91120B777B40}"/>
               </a:ext>
             </a:extLst>
           </p:cNvPr>
@@ -7549,7 +7549,7 @@
           <p:cNvPr id="4" name="s5-footer">
             <a:extLst xmlns:a="http://schemas.openxmlformats.org/drawingml/2006/main">
               <a:ext uri="{FF2B5EF4-FFF2-40B4-BE49-F238E27FC236}">
-                <a16:creationId xmlns:a16="http://schemas.microsoft.com/office/drawing/2014/main" id="{6B55950D-4A53-4E67-BE51-C13C6DD84BF2}"/>
+                <a16:creationId xmlns:a16="http://schemas.microsoft.com/office/drawing/2014/main" id="{76DED1FD-212B-43FC-BFE7-52577A7C5EC1}"/>
               </a:ext>
             </a:extLst>
           </p:cNvPr>
@@ -7580,7 +7580,7 @@
           <p:cNvPr id="5" name="s5-identity">
             <a:extLst xmlns:a="http://schemas.openxmlformats.org/drawingml/2006/main">
               <a:ext uri="{FF2B5EF4-FFF2-40B4-BE49-F238E27FC236}">
-                <a16:creationId xmlns:a16="http://schemas.microsoft.com/office/drawing/2014/main" id="{4ACBC7CD-231B-4C08-9E05-3AFD7C13D093}"/>
+                <a16:creationId xmlns:a16="http://schemas.microsoft.com/office/drawing/2014/main" id="{34283BD2-4F92-445E-9938-76817F732492}"/>
               </a:ext>
             </a:extLst>
           </p:cNvPr>
@@ -7638,7 +7638,7 @@
           <p:cNvPr id="6" name="core-no-0">
             <a:extLst xmlns:a="http://schemas.openxmlformats.org/drawingml/2006/main">
               <a:ext uri="{FF2B5EF4-FFF2-40B4-BE49-F238E27FC236}">
-                <a16:creationId xmlns:a16="http://schemas.microsoft.com/office/drawing/2014/main" id="{6C0A4ED5-3FB6-4041-B90B-54266BEED740}"/>
+                <a16:creationId xmlns:a16="http://schemas.microsoft.com/office/drawing/2014/main" id="{81374F56-AE81-4B4E-B70E-82DC89F884F2}"/>
               </a:ext>
             </a:extLst>
           </p:cNvPr>
@@ -7696,7 +7696,7 @@
           <p:cNvPr id="7" name="core-label-0">
             <a:extLst xmlns:a="http://schemas.openxmlformats.org/drawingml/2006/main">
               <a:ext uri="{FF2B5EF4-FFF2-40B4-BE49-F238E27FC236}">
-                <a16:creationId xmlns:a16="http://schemas.microsoft.com/office/drawing/2014/main" id="{6E3916B6-C29D-438B-A839-A0FA3BDB1533}"/>
+                <a16:creationId xmlns:a16="http://schemas.microsoft.com/office/drawing/2014/main" id="{88C9B54F-4041-459C-A22E-2F73DF16125A}"/>
               </a:ext>
             </a:extLst>
           </p:cNvPr>
@@ -7754,7 +7754,7 @@
           <p:cNvPr id="8" name="core-body-0">
             <a:extLst xmlns:a="http://schemas.openxmlformats.org/drawingml/2006/main">
               <a:ext uri="{FF2B5EF4-FFF2-40B4-BE49-F238E27FC236}">
-                <a16:creationId xmlns:a16="http://schemas.microsoft.com/office/drawing/2014/main" id="{6A7F5640-1D95-47BC-8C84-6E6C996B19D5}"/>
+                <a16:creationId xmlns:a16="http://schemas.microsoft.com/office/drawing/2014/main" id="{5E6F9167-E102-43F1-BADD-DAD39898ABC7}"/>
               </a:ext>
             </a:extLst>
           </p:cNvPr>
@@ -7818,7 +7818,7 @@
           <p:cNvPr id="9" name="core-no-1">
             <a:extLst xmlns:a="http://schemas.openxmlformats.org/drawingml/2006/main">
               <a:ext uri="{FF2B5EF4-FFF2-40B4-BE49-F238E27FC236}">
-                <a16:creationId xmlns:a16="http://schemas.microsoft.com/office/drawing/2014/main" id="{E1DC8B6F-68E7-4ADB-AF9D-1420A10977DA}"/>
+                <a16:creationId xmlns:a16="http://schemas.microsoft.com/office/drawing/2014/main" id="{6314C4B5-BBD5-4739-AB01-476C5EBD1659}"/>
               </a:ext>
             </a:extLst>
           </p:cNvPr>
@@ -7876,7 +7876,7 @@
           <p:cNvPr id="10" name="core-body-1">
             <a:extLst xmlns:a="http://schemas.openxmlformats.org/drawingml/2006/main">
               <a:ext uri="{FF2B5EF4-FFF2-40B4-BE49-F238E27FC236}">
-                <a16:creationId xmlns:a16="http://schemas.microsoft.com/office/drawing/2014/main" id="{116A8414-51EB-43BC-B6FB-36ED61F4C266}"/>
+                <a16:creationId xmlns:a16="http://schemas.microsoft.com/office/drawing/2014/main" id="{555782E6-322E-4286-83C2-C2C9F39883F8}"/>
               </a:ext>
             </a:extLst>
           </p:cNvPr>
@@ -7940,7 +7940,7 @@
           <p:cNvPr id="11" name="core-no-2">
             <a:extLst xmlns:a="http://schemas.openxmlformats.org/drawingml/2006/main">
               <a:ext uri="{FF2B5EF4-FFF2-40B4-BE49-F238E27FC236}">
-                <a16:creationId xmlns:a16="http://schemas.microsoft.com/office/drawing/2014/main" id="{9E47A2DC-51FD-4C7C-8932-946C3DF30F50}"/>
+                <a16:creationId xmlns:a16="http://schemas.microsoft.com/office/drawing/2014/main" id="{03F7D108-1EDC-4C30-B689-2E46A59530C7}"/>
               </a:ext>
             </a:extLst>
           </p:cNvPr>
@@ -7998,7 +7998,7 @@
           <p:cNvPr id="12" name="core-body-2">
             <a:extLst xmlns:a="http://schemas.openxmlformats.org/drawingml/2006/main">
               <a:ext uri="{FF2B5EF4-FFF2-40B4-BE49-F238E27FC236}">
-                <a16:creationId xmlns:a16="http://schemas.microsoft.com/office/drawing/2014/main" id="{74AB2009-7BCF-40CF-AAB2-1E129E57778B}"/>
+                <a16:creationId xmlns:a16="http://schemas.microsoft.com/office/drawing/2014/main" id="{BBAC0A87-FC91-4A7E-AD4E-1451437258D7}"/>
               </a:ext>
             </a:extLst>
           </p:cNvPr>
@@ -8062,7 +8062,7 @@
           <p:cNvPr id="13" name="s5-takeaway-rule">
             <a:extLst xmlns:a="http://schemas.openxmlformats.org/drawingml/2006/main">
               <a:ext uri="{FF2B5EF4-FFF2-40B4-BE49-F238E27FC236}">
-                <a16:creationId xmlns:a16="http://schemas.microsoft.com/office/drawing/2014/main" id="{F7D9F826-1E25-47E9-B6C2-D9E3920FA9B4}"/>
+                <a16:creationId xmlns:a16="http://schemas.microsoft.com/office/drawing/2014/main" id="{D86541D8-026E-44EF-8B5D-17525E1F55D5}"/>
               </a:ext>
             </a:extLst>
           </p:cNvPr>
@@ -8095,7 +8095,7 @@
           <p:cNvPr id="14" name="s5-takeaway">
             <a:extLst xmlns:a="http://schemas.openxmlformats.org/drawingml/2006/main">
               <a:ext uri="{FF2B5EF4-FFF2-40B4-BE49-F238E27FC236}">
-                <a16:creationId xmlns:a16="http://schemas.microsoft.com/office/drawing/2014/main" id="{70C3C438-3907-41C4-864D-8C1B8F479916}"/>
+                <a16:creationId xmlns:a16="http://schemas.microsoft.com/office/drawing/2014/main" id="{F8A82244-92F0-4919-8BE3-3A8CAE7DEB18}"/>
               </a:ext>
             </a:extLst>
           </p:cNvPr>
@@ -8151,7 +8151,7 @@
     </p:spTree>
     <p:extLst>
       <p:ext uri="{BB962C8B-B14F-4D97-AF65-F5344CB8AC3E}">
-        <p14:creationId xmlns:p14="http://schemas.microsoft.com/office/powerpoint/2010/main" val="1008556791"/>
+        <p14:creationId xmlns:p14="http://schemas.microsoft.com/office/powerpoint/2010/main" val="742573971"/>
       </p:ext>
     </p:extLst>
   </p:cSld>
@@ -8182,7 +8182,7 @@
           <p:cNvPr id="1" name="s6-rule">
             <a:extLst xmlns:a="http://schemas.openxmlformats.org/drawingml/2006/main">
               <a:ext uri="{FF2B5EF4-FFF2-40B4-BE49-F238E27FC236}">
-                <a16:creationId xmlns:a16="http://schemas.microsoft.com/office/drawing/2014/main" id="{5729C341-5D03-4D9B-96AE-B40CA170FC83}"/>
+                <a16:creationId xmlns:a16="http://schemas.microsoft.com/office/drawing/2014/main" id="{6B379729-331B-4318-91E5-3542DAC2A4AD}"/>
               </a:ext>
             </a:extLst>
           </p:cNvPr>
@@ -8215,7 +8215,7 @@
           <p:cNvPr id="2" name="s6-eyebrow">
             <a:extLst xmlns:a="http://schemas.openxmlformats.org/drawingml/2006/main">
               <a:ext uri="{FF2B5EF4-FFF2-40B4-BE49-F238E27FC236}">
-                <a16:creationId xmlns:a16="http://schemas.microsoft.com/office/drawing/2014/main" id="{C78E5132-A81F-4681-B060-7B39A8FB1724}"/>
+                <a16:creationId xmlns:a16="http://schemas.microsoft.com/office/drawing/2014/main" id="{156CC8ED-2341-4092-A9CD-1EE9DA177110}"/>
               </a:ext>
             </a:extLst>
           </p:cNvPr>
@@ -8273,7 +8273,7 @@
           <p:cNvPr id="3" name="s6-title">
             <a:extLst xmlns:a="http://schemas.openxmlformats.org/drawingml/2006/main">
               <a:ext uri="{FF2B5EF4-FFF2-40B4-BE49-F238E27FC236}">
-                <a16:creationId xmlns:a16="http://schemas.microsoft.com/office/drawing/2014/main" id="{FC2332DD-74CE-46EB-9B9A-F9EA9111675D}"/>
+                <a16:creationId xmlns:a16="http://schemas.microsoft.com/office/drawing/2014/main" id="{69511169-D33F-4EA4-BC77-F9BA31F0675B}"/>
               </a:ext>
             </a:extLst>
           </p:cNvPr>
@@ -8331,7 +8331,7 @@
           <p:cNvPr id="4" name="s6-footer">
             <a:extLst xmlns:a="http://schemas.openxmlformats.org/drawingml/2006/main">
               <a:ext uri="{FF2B5EF4-FFF2-40B4-BE49-F238E27FC236}">
-                <a16:creationId xmlns:a16="http://schemas.microsoft.com/office/drawing/2014/main" id="{F8617FD4-9BBF-4A18-BC51-B837B47CF4ED}"/>
+                <a16:creationId xmlns:a16="http://schemas.microsoft.com/office/drawing/2014/main" id="{AD886997-ECA8-4E44-B96C-F2651A18AD24}"/>
               </a:ext>
             </a:extLst>
           </p:cNvPr>
@@ -8362,7 +8362,7 @@
           <p:cNvPr id="5" name="s6-identity">
             <a:extLst xmlns:a="http://schemas.openxmlformats.org/drawingml/2006/main">
               <a:ext uri="{FF2B5EF4-FFF2-40B4-BE49-F238E27FC236}">
-                <a16:creationId xmlns:a16="http://schemas.microsoft.com/office/drawing/2014/main" id="{73ABFE86-B61E-4F33-BB1B-70E64DBE3463}"/>
+                <a16:creationId xmlns:a16="http://schemas.microsoft.com/office/drawing/2014/main" id="{DE014F7D-D0D8-4BB0-8F57-7F9BF2CA1640}"/>
               </a:ext>
             </a:extLst>
           </p:cNvPr>
@@ -8420,7 +8420,7 @@
           <p:cNvPr id="6" name="core-no-0">
             <a:extLst xmlns:a="http://schemas.openxmlformats.org/drawingml/2006/main">
               <a:ext uri="{FF2B5EF4-FFF2-40B4-BE49-F238E27FC236}">
-                <a16:creationId xmlns:a16="http://schemas.microsoft.com/office/drawing/2014/main" id="{0C9AE244-6810-4883-A101-78D050617B94}"/>
+                <a16:creationId xmlns:a16="http://schemas.microsoft.com/office/drawing/2014/main" id="{2A8F7AC8-C5CA-4275-8087-29BA4D8FF2D8}"/>
               </a:ext>
             </a:extLst>
           </p:cNvPr>
@@ -8478,7 +8478,7 @@
           <p:cNvPr id="7" name="core-label-0">
             <a:extLst xmlns:a="http://schemas.openxmlformats.org/drawingml/2006/main">
               <a:ext uri="{FF2B5EF4-FFF2-40B4-BE49-F238E27FC236}">
-                <a16:creationId xmlns:a16="http://schemas.microsoft.com/office/drawing/2014/main" id="{240CFC56-AC94-4B60-A2D9-87CC92A490CF}"/>
+                <a16:creationId xmlns:a16="http://schemas.microsoft.com/office/drawing/2014/main" id="{206176F1-1543-4FC3-98A4-C33148995FB1}"/>
               </a:ext>
             </a:extLst>
           </p:cNvPr>
@@ -8536,7 +8536,7 @@
           <p:cNvPr id="8" name="core-body-0">
             <a:extLst xmlns:a="http://schemas.openxmlformats.org/drawingml/2006/main">
               <a:ext uri="{FF2B5EF4-FFF2-40B4-BE49-F238E27FC236}">
-                <a16:creationId xmlns:a16="http://schemas.microsoft.com/office/drawing/2014/main" id="{30514369-2CC3-4285-92A1-9E64C36D983C}"/>
+                <a16:creationId xmlns:a16="http://schemas.microsoft.com/office/drawing/2014/main" id="{B4135712-D798-4C2D-976F-874411514B1D}"/>
               </a:ext>
             </a:extLst>
           </p:cNvPr>
@@ -8600,7 +8600,7 @@
           <p:cNvPr id="9" name="core-no-1">
             <a:extLst xmlns:a="http://schemas.openxmlformats.org/drawingml/2006/main">
               <a:ext uri="{FF2B5EF4-FFF2-40B4-BE49-F238E27FC236}">
-                <a16:creationId xmlns:a16="http://schemas.microsoft.com/office/drawing/2014/main" id="{FC652317-F42D-4C6A-A872-708BDDEF710A}"/>
+                <a16:creationId xmlns:a16="http://schemas.microsoft.com/office/drawing/2014/main" id="{E431132C-C51B-4B58-9D4C-0AAF80A076B3}"/>
               </a:ext>
             </a:extLst>
           </p:cNvPr>
@@ -8658,7 +8658,7 @@
           <p:cNvPr id="10" name="core-body-1">
             <a:extLst xmlns:a="http://schemas.openxmlformats.org/drawingml/2006/main">
               <a:ext uri="{FF2B5EF4-FFF2-40B4-BE49-F238E27FC236}">
-                <a16:creationId xmlns:a16="http://schemas.microsoft.com/office/drawing/2014/main" id="{A9F8286A-E7AE-4F1C-88EA-C2E1464464D8}"/>
+                <a16:creationId xmlns:a16="http://schemas.microsoft.com/office/drawing/2014/main" id="{CC795A2B-9FB3-452E-B367-107FB1C12CBD}"/>
               </a:ext>
             </a:extLst>
           </p:cNvPr>
@@ -8722,7 +8722,7 @@
           <p:cNvPr id="11" name="s6-takeaway-rule">
             <a:extLst xmlns:a="http://schemas.openxmlformats.org/drawingml/2006/main">
               <a:ext uri="{FF2B5EF4-FFF2-40B4-BE49-F238E27FC236}">
-                <a16:creationId xmlns:a16="http://schemas.microsoft.com/office/drawing/2014/main" id="{85C9AE2B-C09B-430E-9688-9FBFE7DD9A04}"/>
+                <a16:creationId xmlns:a16="http://schemas.microsoft.com/office/drawing/2014/main" id="{82C30259-1B13-4C7B-8E07-486FC2BAE81A}"/>
               </a:ext>
             </a:extLst>
           </p:cNvPr>
@@ -8755,7 +8755,7 @@
           <p:cNvPr id="12" name="s6-takeaway">
             <a:extLst xmlns:a="http://schemas.openxmlformats.org/drawingml/2006/main">
               <a:ext uri="{FF2B5EF4-FFF2-40B4-BE49-F238E27FC236}">
-                <a16:creationId xmlns:a16="http://schemas.microsoft.com/office/drawing/2014/main" id="{A5D181C1-7E4B-491C-9CCB-DF3CBF6909FE}"/>
+                <a16:creationId xmlns:a16="http://schemas.microsoft.com/office/drawing/2014/main" id="{199D63F3-9F28-4195-B842-9CCFC0FBFCE0}"/>
               </a:ext>
             </a:extLst>
           </p:cNvPr>
@@ -8811,7 +8811,7 @@
     </p:spTree>
     <p:extLst>
       <p:ext uri="{BB962C8B-B14F-4D97-AF65-F5344CB8AC3E}">
-        <p14:creationId xmlns:p14="http://schemas.microsoft.com/office/powerpoint/2010/main" val="2108936842"/>
+        <p14:creationId xmlns:p14="http://schemas.microsoft.com/office/powerpoint/2010/main" val="270460888"/>
       </p:ext>
     </p:extLst>
   </p:cSld>
@@ -8842,7 +8842,7 @@
           <p:cNvPr id="1" name="s7-rule">
             <a:extLst xmlns:a="http://schemas.openxmlformats.org/drawingml/2006/main">
               <a:ext uri="{FF2B5EF4-FFF2-40B4-BE49-F238E27FC236}">
-                <a16:creationId xmlns:a16="http://schemas.microsoft.com/office/drawing/2014/main" id="{0C5BFF56-39A5-42E4-8C7C-811A8BD1C444}"/>
+                <a16:creationId xmlns:a16="http://schemas.microsoft.com/office/drawing/2014/main" id="{0E5728F4-A53F-4012-A15B-24970C4DD087}"/>
               </a:ext>
             </a:extLst>
           </p:cNvPr>
@@ -8875,7 +8875,7 @@
           <p:cNvPr id="2" name="s7-eyebrow">
             <a:extLst xmlns:a="http://schemas.openxmlformats.org/drawingml/2006/main">
               <a:ext uri="{FF2B5EF4-FFF2-40B4-BE49-F238E27FC236}">
-                <a16:creationId xmlns:a16="http://schemas.microsoft.com/office/drawing/2014/main" id="{C0457159-5E75-40A6-B744-4CAA7254BB5E}"/>
+                <a16:creationId xmlns:a16="http://schemas.microsoft.com/office/drawing/2014/main" id="{28773110-499A-4A74-8C62-78A001116F5F}"/>
               </a:ext>
             </a:extLst>
           </p:cNvPr>
@@ -8933,7 +8933,7 @@
           <p:cNvPr id="3" name="s7-title">
             <a:extLst xmlns:a="http://schemas.openxmlformats.org/drawingml/2006/main">
               <a:ext uri="{FF2B5EF4-FFF2-40B4-BE49-F238E27FC236}">
-                <a16:creationId xmlns:a16="http://schemas.microsoft.com/office/drawing/2014/main" id="{A4072C93-23B8-4BB2-8A34-C2F47BF0A41A}"/>
+                <a16:creationId xmlns:a16="http://schemas.microsoft.com/office/drawing/2014/main" id="{3DCD7732-965F-4782-AEFB-943206310B38}"/>
               </a:ext>
             </a:extLst>
           </p:cNvPr>
@@ -8991,7 +8991,7 @@
           <p:cNvPr id="4" name="s7-footer">
             <a:extLst xmlns:a="http://schemas.openxmlformats.org/drawingml/2006/main">
               <a:ext uri="{FF2B5EF4-FFF2-40B4-BE49-F238E27FC236}">
-                <a16:creationId xmlns:a16="http://schemas.microsoft.com/office/drawing/2014/main" id="{DCEE30B4-775D-40AE-AD14-B6266BBECBCC}"/>
+                <a16:creationId xmlns:a16="http://schemas.microsoft.com/office/drawing/2014/main" id="{C449B7AB-0748-44F5-A4DC-4DCD0BF3A72D}"/>
               </a:ext>
             </a:extLst>
           </p:cNvPr>
@@ -9022,7 +9022,7 @@
           <p:cNvPr id="5" name="s7-identity">
             <a:extLst xmlns:a="http://schemas.openxmlformats.org/drawingml/2006/main">
               <a:ext uri="{FF2B5EF4-FFF2-40B4-BE49-F238E27FC236}">
-                <a16:creationId xmlns:a16="http://schemas.microsoft.com/office/drawing/2014/main" id="{8B480999-4DE2-4BDC-9631-DD3F26ABEB7E}"/>
+                <a16:creationId xmlns:a16="http://schemas.microsoft.com/office/drawing/2014/main" id="{3CB07ECC-AD92-4625-A67D-DA974312793B}"/>
               </a:ext>
             </a:extLst>
           </p:cNvPr>
@@ -9080,7 +9080,7 @@
           <p:cNvPr id="6" name="core-no-0">
             <a:extLst xmlns:a="http://schemas.openxmlformats.org/drawingml/2006/main">
               <a:ext uri="{FF2B5EF4-FFF2-40B4-BE49-F238E27FC236}">
-                <a16:creationId xmlns:a16="http://schemas.microsoft.com/office/drawing/2014/main" id="{D92561E0-AB18-4B74-9235-37E1479F22CA}"/>
+                <a16:creationId xmlns:a16="http://schemas.microsoft.com/office/drawing/2014/main" id="{CF674971-8496-4523-B4B7-60D9059C9E1B}"/>
               </a:ext>
             </a:extLst>
           </p:cNvPr>
@@ -9138,7 +9138,7 @@
           <p:cNvPr id="7" name="core-label-0">
             <a:extLst xmlns:a="http://schemas.openxmlformats.org/drawingml/2006/main">
               <a:ext uri="{FF2B5EF4-FFF2-40B4-BE49-F238E27FC236}">
-                <a16:creationId xmlns:a16="http://schemas.microsoft.com/office/drawing/2014/main" id="{2FF356DE-7987-4870-A156-ADB78D5828C3}"/>
+                <a16:creationId xmlns:a16="http://schemas.microsoft.com/office/drawing/2014/main" id="{E93496DA-B9FB-4814-8A54-CBD12CC613B1}"/>
               </a:ext>
             </a:extLst>
           </p:cNvPr>
@@ -9196,7 +9196,7 @@
           <p:cNvPr id="8" name="core-body-0">
             <a:extLst xmlns:a="http://schemas.openxmlformats.org/drawingml/2006/main">
               <a:ext uri="{FF2B5EF4-FFF2-40B4-BE49-F238E27FC236}">
-                <a16:creationId xmlns:a16="http://schemas.microsoft.com/office/drawing/2014/main" id="{748D5AD7-2745-491B-AF37-C05EA42C6DE9}"/>
+                <a16:creationId xmlns:a16="http://schemas.microsoft.com/office/drawing/2014/main" id="{49C58A3F-CADF-4ACF-A480-984492C131DC}"/>
               </a:ext>
             </a:extLst>
           </p:cNvPr>
@@ -9260,7 +9260,7 @@
           <p:cNvPr id="9" name="core-no-1">
             <a:extLst xmlns:a="http://schemas.openxmlformats.org/drawingml/2006/main">
               <a:ext uri="{FF2B5EF4-FFF2-40B4-BE49-F238E27FC236}">
-                <a16:creationId xmlns:a16="http://schemas.microsoft.com/office/drawing/2014/main" id="{3F0C7C71-B260-4CDB-84CF-3970A6617382}"/>
+                <a16:creationId xmlns:a16="http://schemas.microsoft.com/office/drawing/2014/main" id="{3D569ED1-FC62-4D7F-91D0-C34E396B4C78}"/>
               </a:ext>
             </a:extLst>
           </p:cNvPr>
@@ -9318,7 +9318,7 @@
           <p:cNvPr id="10" name="core-body-1">
             <a:extLst xmlns:a="http://schemas.openxmlformats.org/drawingml/2006/main">
               <a:ext uri="{FF2B5EF4-FFF2-40B4-BE49-F238E27FC236}">
-                <a16:creationId xmlns:a16="http://schemas.microsoft.com/office/drawing/2014/main" id="{56516B46-006B-4834-A8F6-307CBDD7CA0F}"/>
+                <a16:creationId xmlns:a16="http://schemas.microsoft.com/office/drawing/2014/main" id="{EEA134AB-D4B2-47A3-AE01-D644B647EDEF}"/>
               </a:ext>
             </a:extLst>
           </p:cNvPr>
@@ -9382,7 +9382,7 @@
           <p:cNvPr id="11" name="core-no-2">
             <a:extLst xmlns:a="http://schemas.openxmlformats.org/drawingml/2006/main">
               <a:ext uri="{FF2B5EF4-FFF2-40B4-BE49-F238E27FC236}">
-                <a16:creationId xmlns:a16="http://schemas.microsoft.com/office/drawing/2014/main" id="{CEE0A134-FD0F-40BA-AB21-B55244200BD3}"/>
+                <a16:creationId xmlns:a16="http://schemas.microsoft.com/office/drawing/2014/main" id="{75B40751-8662-407C-9D81-B31830BCB27B}"/>
               </a:ext>
             </a:extLst>
           </p:cNvPr>
@@ -9440,7 +9440,7 @@
           <p:cNvPr id="12" name="core-body-2">
             <a:extLst xmlns:a="http://schemas.openxmlformats.org/drawingml/2006/main">
               <a:ext uri="{FF2B5EF4-FFF2-40B4-BE49-F238E27FC236}">
-                <a16:creationId xmlns:a16="http://schemas.microsoft.com/office/drawing/2014/main" id="{CCF22DBE-6216-4B7E-8F4B-7C3A65A2721C}"/>
+                <a16:creationId xmlns:a16="http://schemas.microsoft.com/office/drawing/2014/main" id="{4F1D1B6C-494A-4F15-BECC-3B5B16B1B6A0}"/>
               </a:ext>
             </a:extLst>
           </p:cNvPr>
@@ -9504,7 +9504,7 @@
           <p:cNvPr id="13" name="s7-takeaway-rule">
             <a:extLst xmlns:a="http://schemas.openxmlformats.org/drawingml/2006/main">
               <a:ext uri="{FF2B5EF4-FFF2-40B4-BE49-F238E27FC236}">
-                <a16:creationId xmlns:a16="http://schemas.microsoft.com/office/drawing/2014/main" id="{FD47A27E-4953-4375-A073-BB2CBBD6335E}"/>
+                <a16:creationId xmlns:a16="http://schemas.microsoft.com/office/drawing/2014/main" id="{B0A9326C-DAEE-4493-B7E4-E82BBC669B00}"/>
               </a:ext>
             </a:extLst>
           </p:cNvPr>
@@ -9537,7 +9537,7 @@
           <p:cNvPr id="14" name="s7-takeaway">
             <a:extLst xmlns:a="http://schemas.openxmlformats.org/drawingml/2006/main">
               <a:ext uri="{FF2B5EF4-FFF2-40B4-BE49-F238E27FC236}">
-                <a16:creationId xmlns:a16="http://schemas.microsoft.com/office/drawing/2014/main" id="{6E4936BD-D9EA-40AB-B42D-88F8D6EACF38}"/>
+                <a16:creationId xmlns:a16="http://schemas.microsoft.com/office/drawing/2014/main" id="{6CBC0AC2-57DD-4ADC-BACA-915F3EF6C4DC}"/>
               </a:ext>
             </a:extLst>
           </p:cNvPr>
@@ -9593,7 +9593,7 @@
     </p:spTree>
     <p:extLst>
       <p:ext uri="{BB962C8B-B14F-4D97-AF65-F5344CB8AC3E}">
-        <p14:creationId xmlns:p14="http://schemas.microsoft.com/office/powerpoint/2010/main" val="618051266"/>
+        <p14:creationId xmlns:p14="http://schemas.microsoft.com/office/powerpoint/2010/main" val="299268963"/>
       </p:ext>
     </p:extLst>
   </p:cSld>
@@ -9624,7 +9624,7 @@
           <p:cNvPr id="1" name="s8-rule">
             <a:extLst xmlns:a="http://schemas.openxmlformats.org/drawingml/2006/main">
               <a:ext uri="{FF2B5EF4-FFF2-40B4-BE49-F238E27FC236}">
-                <a16:creationId xmlns:a16="http://schemas.microsoft.com/office/drawing/2014/main" id="{0048D017-08F3-46DB-918A-0EF9244CA90D}"/>
+                <a16:creationId xmlns:a16="http://schemas.microsoft.com/office/drawing/2014/main" id="{9E2C9D00-796D-4897-8152-A8313E561092}"/>
               </a:ext>
             </a:extLst>
           </p:cNvPr>
@@ -9657,7 +9657,7 @@
           <p:cNvPr id="2" name="s8-eyebrow">
             <a:extLst xmlns:a="http://schemas.openxmlformats.org/drawingml/2006/main">
               <a:ext uri="{FF2B5EF4-FFF2-40B4-BE49-F238E27FC236}">
-                <a16:creationId xmlns:a16="http://schemas.microsoft.com/office/drawing/2014/main" id="{A983EADB-A3AF-4104-8735-F6B9A41D1600}"/>
+                <a16:creationId xmlns:a16="http://schemas.microsoft.com/office/drawing/2014/main" id="{29CCC438-84DB-47C4-AA9F-A7FA6AD2C739}"/>
               </a:ext>
             </a:extLst>
           </p:cNvPr>
@@ -9715,7 +9715,7 @@
           <p:cNvPr id="3" name="s8-title">
             <a:extLst xmlns:a="http://schemas.openxmlformats.org/drawingml/2006/main">
               <a:ext uri="{FF2B5EF4-FFF2-40B4-BE49-F238E27FC236}">
-                <a16:creationId xmlns:a16="http://schemas.microsoft.com/office/drawing/2014/main" id="{5DB52E53-8F60-4611-98D9-8D753E57F58C}"/>
+                <a16:creationId xmlns:a16="http://schemas.microsoft.com/office/drawing/2014/main" id="{B3D9F0E9-FD4E-451D-86F8-30DAE15D5CD5}"/>
               </a:ext>
             </a:extLst>
           </p:cNvPr>
@@ -9773,7 +9773,7 @@
           <p:cNvPr id="4" name="s8-footer">
             <a:extLst xmlns:a="http://schemas.openxmlformats.org/drawingml/2006/main">
               <a:ext uri="{FF2B5EF4-FFF2-40B4-BE49-F238E27FC236}">
-                <a16:creationId xmlns:a16="http://schemas.microsoft.com/office/drawing/2014/main" id="{41F9D108-75A7-4B1B-A4D7-9F565FAE9BC5}"/>
+                <a16:creationId xmlns:a16="http://schemas.microsoft.com/office/drawing/2014/main" id="{49AC63D4-24F3-43D4-8431-5FB895091F10}"/>
               </a:ext>
             </a:extLst>
           </p:cNvPr>
@@ -9804,7 +9804,7 @@
           <p:cNvPr id="5" name="s8-identity">
             <a:extLst xmlns:a="http://schemas.openxmlformats.org/drawingml/2006/main">
               <a:ext uri="{FF2B5EF4-FFF2-40B4-BE49-F238E27FC236}">
-                <a16:creationId xmlns:a16="http://schemas.microsoft.com/office/drawing/2014/main" id="{FCCA7941-9433-48F3-AE17-2EDEDD94B77E}"/>
+                <a16:creationId xmlns:a16="http://schemas.microsoft.com/office/drawing/2014/main" id="{9FB45E5C-171E-46AB-87C4-D18FBD4498F4}"/>
               </a:ext>
             </a:extLst>
           </p:cNvPr>
@@ -9862,7 +9862,7 @@
           <p:cNvPr id="6" name="core-no-0">
             <a:extLst xmlns:a="http://schemas.openxmlformats.org/drawingml/2006/main">
               <a:ext uri="{FF2B5EF4-FFF2-40B4-BE49-F238E27FC236}">
-                <a16:creationId xmlns:a16="http://schemas.microsoft.com/office/drawing/2014/main" id="{8E2B9972-228A-41E1-9B17-FE66A7923F2E}"/>
+                <a16:creationId xmlns:a16="http://schemas.microsoft.com/office/drawing/2014/main" id="{038AD931-2E71-456A-A0F7-52A8293510AB}"/>
               </a:ext>
             </a:extLst>
           </p:cNvPr>
@@ -9920,7 +9920,7 @@
           <p:cNvPr id="7" name="core-label-0">
             <a:extLst xmlns:a="http://schemas.openxmlformats.org/drawingml/2006/main">
               <a:ext uri="{FF2B5EF4-FFF2-40B4-BE49-F238E27FC236}">
-                <a16:creationId xmlns:a16="http://schemas.microsoft.com/office/drawing/2014/main" id="{97258BD7-BE89-4455-AB59-E5EEA93454FE}"/>
+                <a16:creationId xmlns:a16="http://schemas.microsoft.com/office/drawing/2014/main" id="{508A2AA2-EEB5-4F72-8A1F-E1E40732952A}"/>
               </a:ext>
             </a:extLst>
           </p:cNvPr>
@@ -9978,7 +9978,7 @@
           <p:cNvPr id="8" name="core-body-0">
             <a:extLst xmlns:a="http://schemas.openxmlformats.org/drawingml/2006/main">
               <a:ext uri="{FF2B5EF4-FFF2-40B4-BE49-F238E27FC236}">
-                <a16:creationId xmlns:a16="http://schemas.microsoft.com/office/drawing/2014/main" id="{62AC601A-EFC2-48E8-B059-CAAD15446250}"/>
+                <a16:creationId xmlns:a16="http://schemas.microsoft.com/office/drawing/2014/main" id="{E8BE56A3-6946-4738-AB56-5F9880FF4CB9}"/>
               </a:ext>
             </a:extLst>
           </p:cNvPr>
@@ -10042,7 +10042,7 @@
           <p:cNvPr id="9" name="core-no-1">
             <a:extLst xmlns:a="http://schemas.openxmlformats.org/drawingml/2006/main">
               <a:ext uri="{FF2B5EF4-FFF2-40B4-BE49-F238E27FC236}">
-                <a16:creationId xmlns:a16="http://schemas.microsoft.com/office/drawing/2014/main" id="{94AD5CE2-BFA4-43EE-B912-8548C5070709}"/>
+                <a16:creationId xmlns:a16="http://schemas.microsoft.com/office/drawing/2014/main" id="{2D8671BD-9865-4249-B6D4-76C847C3643B}"/>
               </a:ext>
             </a:extLst>
           </p:cNvPr>
@@ -10100,7 +10100,7 @@
           <p:cNvPr id="10" name="core-body-1">
             <a:extLst xmlns:a="http://schemas.openxmlformats.org/drawingml/2006/main">
               <a:ext uri="{FF2B5EF4-FFF2-40B4-BE49-F238E27FC236}">
-                <a16:creationId xmlns:a16="http://schemas.microsoft.com/office/drawing/2014/main" id="{ABE64C86-712F-4285-A40E-12F80DD56D8C}"/>
+                <a16:creationId xmlns:a16="http://schemas.microsoft.com/office/drawing/2014/main" id="{70B657B1-E709-4A8A-914F-98D2345DA3F4}"/>
               </a:ext>
             </a:extLst>
           </p:cNvPr>
@@ -10164,7 +10164,7 @@
           <p:cNvPr id="11" name="s8-takeaway-rule">
             <a:extLst xmlns:a="http://schemas.openxmlformats.org/drawingml/2006/main">
               <a:ext uri="{FF2B5EF4-FFF2-40B4-BE49-F238E27FC236}">
-                <a16:creationId xmlns:a16="http://schemas.microsoft.com/office/drawing/2014/main" id="{5962ADAC-AA31-4D1D-A819-AA4988D43155}"/>
+                <a16:creationId xmlns:a16="http://schemas.microsoft.com/office/drawing/2014/main" id="{FED8D696-BC42-4EA3-B2A9-39CF5D90DECF}"/>
               </a:ext>
             </a:extLst>
           </p:cNvPr>
@@ -10197,7 +10197,7 @@
           <p:cNvPr id="12" name="s8-takeaway">
             <a:extLst xmlns:a="http://schemas.openxmlformats.org/drawingml/2006/main">
               <a:ext uri="{FF2B5EF4-FFF2-40B4-BE49-F238E27FC236}">
-                <a16:creationId xmlns:a16="http://schemas.microsoft.com/office/drawing/2014/main" id="{770AB4D8-3B58-4464-B188-1910DC284FEC}"/>
+                <a16:creationId xmlns:a16="http://schemas.microsoft.com/office/drawing/2014/main" id="{93C2D3FD-225E-4A9C-9FA3-E9FE02697BCB}"/>
               </a:ext>
             </a:extLst>
           </p:cNvPr>
@@ -10253,7 +10253,7 @@
     </p:spTree>
     <p:extLst>
       <p:ext uri="{BB962C8B-B14F-4D97-AF65-F5344CB8AC3E}">
-        <p14:creationId xmlns:p14="http://schemas.microsoft.com/office/powerpoint/2010/main" val="1231606340"/>
+        <p14:creationId xmlns:p14="http://schemas.microsoft.com/office/powerpoint/2010/main" val="601375043"/>
       </p:ext>
     </p:extLst>
   </p:cSld>
@@ -10284,7 +10284,7 @@
           <p:cNvPr id="1" name="s9-rule">
             <a:extLst xmlns:a="http://schemas.openxmlformats.org/drawingml/2006/main">
               <a:ext uri="{FF2B5EF4-FFF2-40B4-BE49-F238E27FC236}">
-                <a16:creationId xmlns:a16="http://schemas.microsoft.com/office/drawing/2014/main" id="{61B14E39-E83F-46C1-A068-EF1794BFBFFA}"/>
+                <a16:creationId xmlns:a16="http://schemas.microsoft.com/office/drawing/2014/main" id="{425AD5ED-0E01-4757-8D06-4C204AB38E0A}"/>
               </a:ext>
             </a:extLst>
           </p:cNvPr>
@@ -10317,7 +10317,7 @@
           <p:cNvPr id="2" name="s9-eyebrow">
             <a:extLst xmlns:a="http://schemas.openxmlformats.org/drawingml/2006/main">
               <a:ext uri="{FF2B5EF4-FFF2-40B4-BE49-F238E27FC236}">
-                <a16:creationId xmlns:a16="http://schemas.microsoft.com/office/drawing/2014/main" id="{1CE6359D-5EDA-4F13-9194-806F9A8FE026}"/>
+                <a16:creationId xmlns:a16="http://schemas.microsoft.com/office/drawing/2014/main" id="{58176AD3-527E-4CA5-A82A-246E77BDCB1E}"/>
               </a:ext>
             </a:extLst>
           </p:cNvPr>
@@ -10375,7 +10375,7 @@
           <p:cNvPr id="3" name="s9-title">
             <a:extLst xmlns:a="http://schemas.openxmlformats.org/drawingml/2006/main">
               <a:ext uri="{FF2B5EF4-FFF2-40B4-BE49-F238E27FC236}">
-                <a16:creationId xmlns:a16="http://schemas.microsoft.com/office/drawing/2014/main" id="{B3A76B93-ED2D-4D91-8BD7-98345A81CE2B}"/>
+                <a16:creationId xmlns:a16="http://schemas.microsoft.com/office/drawing/2014/main" id="{4AF58B6D-23CF-45C3-A6E3-9D55B00972F1}"/>
               </a:ext>
             </a:extLst>
           </p:cNvPr>
@@ -10433,7 +10433,7 @@
           <p:cNvPr id="4" name="s9-footer">
             <a:extLst xmlns:a="http://schemas.openxmlformats.org/drawingml/2006/main">
               <a:ext uri="{FF2B5EF4-FFF2-40B4-BE49-F238E27FC236}">
-                <a16:creationId xmlns:a16="http://schemas.microsoft.com/office/drawing/2014/main" id="{1855806C-C52B-4DC5-A7F4-A061B375B060}"/>
+                <a16:creationId xmlns:a16="http://schemas.microsoft.com/office/drawing/2014/main" id="{DA7117DC-8907-40B0-A5F1-9BCB977743C5}"/>
               </a:ext>
             </a:extLst>
           </p:cNvPr>
@@ -10464,7 +10464,7 @@
           <p:cNvPr id="5" name="s9-identity">
             <a:extLst xmlns:a="http://schemas.openxmlformats.org/drawingml/2006/main">
               <a:ext uri="{FF2B5EF4-FFF2-40B4-BE49-F238E27FC236}">
-                <a16:creationId xmlns:a16="http://schemas.microsoft.com/office/drawing/2014/main" id="{F435687E-22EA-4A6D-9352-89F78AE65830}"/>
+                <a16:creationId xmlns:a16="http://schemas.microsoft.com/office/drawing/2014/main" id="{7E16E21B-6804-450A-AEE1-9CD9AA483815}"/>
               </a:ext>
             </a:extLst>
           </p:cNvPr>
@@ -10522,7 +10522,7 @@
           <p:cNvPr id="6" name="case-title">
             <a:extLst xmlns:a="http://schemas.openxmlformats.org/drawingml/2006/main">
               <a:ext uri="{FF2B5EF4-FFF2-40B4-BE49-F238E27FC236}">
-                <a16:creationId xmlns:a16="http://schemas.microsoft.com/office/drawing/2014/main" id="{53888B83-6EF9-4BA9-B8FB-274935259123}"/>
+                <a16:creationId xmlns:a16="http://schemas.microsoft.com/office/drawing/2014/main" id="{D9560E9A-BAA8-4F6F-98E7-8DC4D19BB17A}"/>
               </a:ext>
             </a:extLst>
           </p:cNvPr>
@@ -10586,7 +10586,7 @@
           <p:cNvPr id="7" name="case-row-0">
             <a:extLst xmlns:a="http://schemas.openxmlformats.org/drawingml/2006/main">
               <a:ext uri="{FF2B5EF4-FFF2-40B4-BE49-F238E27FC236}">
-                <a16:creationId xmlns:a16="http://schemas.microsoft.com/office/drawing/2014/main" id="{CB9E9E6C-E124-4C10-A654-7C8B719C30A4}"/>
+                <a16:creationId xmlns:a16="http://schemas.microsoft.com/office/drawing/2014/main" id="{17C674A0-FE91-4E49-B05F-FFDC59CDC7C0}"/>
               </a:ext>
             </a:extLst>
           </p:cNvPr>
@@ -10650,7 +10650,7 @@
           <p:cNvPr id="8" name="case-row-1">
             <a:extLst xmlns:a="http://schemas.openxmlformats.org/drawingml/2006/main">
               <a:ext uri="{FF2B5EF4-FFF2-40B4-BE49-F238E27FC236}">
-                <a16:creationId xmlns:a16="http://schemas.microsoft.com/office/drawing/2014/main" id="{ECA267DB-9C78-4DE8-8848-5BD42BB1F520}"/>
+                <a16:creationId xmlns:a16="http://schemas.microsoft.com/office/drawing/2014/main" id="{42246968-C79E-41E0-8FC1-1F198B736701}"/>
               </a:ext>
             </a:extLst>
           </p:cNvPr>
@@ -10714,7 +10714,7 @@
           <p:cNvPr id="9" name="case-row-2">
             <a:extLst xmlns:a="http://schemas.openxmlformats.org/drawingml/2006/main">
               <a:ext uri="{FF2B5EF4-FFF2-40B4-BE49-F238E27FC236}">
-                <a16:creationId xmlns:a16="http://schemas.microsoft.com/office/drawing/2014/main" id="{0EE10FE9-1BAF-4A8E-8011-6D0807999A58}"/>
+                <a16:creationId xmlns:a16="http://schemas.microsoft.com/office/drawing/2014/main" id="{8B787D37-5B48-41F7-BEDD-5652E153FC11}"/>
               </a:ext>
             </a:extLst>
           </p:cNvPr>
@@ -10778,7 +10778,7 @@
           <p:cNvPr id="10" name="case-row-3">
             <a:extLst xmlns:a="http://schemas.openxmlformats.org/drawingml/2006/main">
               <a:ext uri="{FF2B5EF4-FFF2-40B4-BE49-F238E27FC236}">
-                <a16:creationId xmlns:a16="http://schemas.microsoft.com/office/drawing/2014/main" id="{437C5D69-761E-4CFE-93D1-2F4E72D0EE5B}"/>
+                <a16:creationId xmlns:a16="http://schemas.microsoft.com/office/drawing/2014/main" id="{D4CCC32A-210F-4781-9406-FA12A9977818}"/>
               </a:ext>
             </a:extLst>
           </p:cNvPr>
@@ -10842,7 +10842,7 @@
           <p:cNvPr id="11" name="s9-takeaway-rule">
             <a:extLst xmlns:a="http://schemas.openxmlformats.org/drawingml/2006/main">
               <a:ext uri="{FF2B5EF4-FFF2-40B4-BE49-F238E27FC236}">
-                <a16:creationId xmlns:a16="http://schemas.microsoft.com/office/drawing/2014/main" id="{950C16D5-95AB-4C10-98B3-CFABA2AF5671}"/>
+                <a16:creationId xmlns:a16="http://schemas.microsoft.com/office/drawing/2014/main" id="{B15C1274-BF19-4650-944D-19F7F2C7F461}"/>
               </a:ext>
             </a:extLst>
           </p:cNvPr>
@@ -10875,7 +10875,7 @@
           <p:cNvPr id="12" name="s9-takeaway">
             <a:extLst xmlns:a="http://schemas.openxmlformats.org/drawingml/2006/main">
               <a:ext uri="{FF2B5EF4-FFF2-40B4-BE49-F238E27FC236}">
-                <a16:creationId xmlns:a16="http://schemas.microsoft.com/office/drawing/2014/main" id="{BE0C22B0-6CFB-4CF7-92CE-2A86613D2B58}"/>
+                <a16:creationId xmlns:a16="http://schemas.microsoft.com/office/drawing/2014/main" id="{977C42D7-80D6-4D90-81CC-EFB2B295493C}"/>
               </a:ext>
             </a:extLst>
           </p:cNvPr>
@@ -10931,7 +10931,7 @@
     </p:spTree>
     <p:extLst>
       <p:ext uri="{BB962C8B-B14F-4D97-AF65-F5344CB8AC3E}">
-        <p14:creationId xmlns:p14="http://schemas.microsoft.com/office/powerpoint/2010/main" val="196161225"/>
+        <p14:creationId xmlns:p14="http://schemas.microsoft.com/office/powerpoint/2010/main" val="614439340"/>
       </p:ext>
     </p:extLst>
   </p:cSld>

--- a/docs/public/course-assets/course-pptx/in-006.pptx
+++ b/docs/public/course-assets/course-pptx/in-006.pptx
@@ -2,25 +2,25 @@
 <file path=ppt/presentation.xml><?xml version="1.0" encoding="utf-8"?>
 <p:presentation xmlns:p="http://schemas.openxmlformats.org/presentationml/2006/main">
   <p:sldMasterIdLst>
-    <p:sldMasterId xmlns:r="http://schemas.openxmlformats.org/officeDocument/2006/relationships" id="2147483648" r:id="R1b9131e241394d11"/>
+    <p:sldMasterId xmlns:r="http://schemas.openxmlformats.org/officeDocument/2006/relationships" id="2147483648" r:id="Ra0b3cb6083ca4750"/>
   </p:sldMasterIdLst>
   <p:notesMasterIdLst>
-    <p:notesMasterId xmlns:r="http://schemas.openxmlformats.org/officeDocument/2006/relationships" r:id="R9edecd2d0e5c4634"/>
+    <p:notesMasterId xmlns:r="http://schemas.openxmlformats.org/officeDocument/2006/relationships" r:id="Red78e92ce0994fb6"/>
   </p:notesMasterIdLst>
   <p:sldIdLst>
-    <p:sldId xmlns:r="http://schemas.openxmlformats.org/officeDocument/2006/relationships" id="256" r:id="R5a0fdf60aebd4e2c"/>
-    <p:sldId xmlns:r="http://schemas.openxmlformats.org/officeDocument/2006/relationships" id="257" r:id="R51c2bac42ad94338"/>
-    <p:sldId xmlns:r="http://schemas.openxmlformats.org/officeDocument/2006/relationships" id="258" r:id="R0539a66426cf4445"/>
-    <p:sldId xmlns:r="http://schemas.openxmlformats.org/officeDocument/2006/relationships" id="259" r:id="R9335822de3e34214"/>
-    <p:sldId xmlns:r="http://schemas.openxmlformats.org/officeDocument/2006/relationships" id="260" r:id="R8d6639f90ef5459a"/>
-    <p:sldId xmlns:r="http://schemas.openxmlformats.org/officeDocument/2006/relationships" id="261" r:id="R169915af83c44883"/>
-    <p:sldId xmlns:r="http://schemas.openxmlformats.org/officeDocument/2006/relationships" id="262" r:id="Ra8fe2e26dcd84d80"/>
-    <p:sldId xmlns:r="http://schemas.openxmlformats.org/officeDocument/2006/relationships" id="263" r:id="R0fcf2ee172c647f5"/>
-    <p:sldId xmlns:r="http://schemas.openxmlformats.org/officeDocument/2006/relationships" id="264" r:id="R8a8f42faedbe4c8a"/>
-    <p:sldId xmlns:r="http://schemas.openxmlformats.org/officeDocument/2006/relationships" id="265" r:id="R8c712f1d63054581"/>
-    <p:sldId xmlns:r="http://schemas.openxmlformats.org/officeDocument/2006/relationships" id="266" r:id="R4a79271009bc4a4c"/>
-    <p:sldId xmlns:r="http://schemas.openxmlformats.org/officeDocument/2006/relationships" id="267" r:id="R965d1d576285447d"/>
-    <p:sldId xmlns:r="http://schemas.openxmlformats.org/officeDocument/2006/relationships" id="268" r:id="R86d9d77a087644b1"/>
+    <p:sldId xmlns:r="http://schemas.openxmlformats.org/officeDocument/2006/relationships" id="256" r:id="Radfa610322604e2f"/>
+    <p:sldId xmlns:r="http://schemas.openxmlformats.org/officeDocument/2006/relationships" id="257" r:id="Rdfa4270275cd4a91"/>
+    <p:sldId xmlns:r="http://schemas.openxmlformats.org/officeDocument/2006/relationships" id="258" r:id="R3cf23fbb78aa4618"/>
+    <p:sldId xmlns:r="http://schemas.openxmlformats.org/officeDocument/2006/relationships" id="259" r:id="Rc713a5754dd14b62"/>
+    <p:sldId xmlns:r="http://schemas.openxmlformats.org/officeDocument/2006/relationships" id="260" r:id="Rea895e6e9d834455"/>
+    <p:sldId xmlns:r="http://schemas.openxmlformats.org/officeDocument/2006/relationships" id="261" r:id="Rfd0f41b9d579406c"/>
+    <p:sldId xmlns:r="http://schemas.openxmlformats.org/officeDocument/2006/relationships" id="262" r:id="Rcab876f95632472c"/>
+    <p:sldId xmlns:r="http://schemas.openxmlformats.org/officeDocument/2006/relationships" id="263" r:id="R55310caa92b04357"/>
+    <p:sldId xmlns:r="http://schemas.openxmlformats.org/officeDocument/2006/relationships" id="264" r:id="R7433557b806b4b1e"/>
+    <p:sldId xmlns:r="http://schemas.openxmlformats.org/officeDocument/2006/relationships" id="265" r:id="R50809d95862445f5"/>
+    <p:sldId xmlns:r="http://schemas.openxmlformats.org/officeDocument/2006/relationships" id="266" r:id="R3c7752eae6e847d2"/>
+    <p:sldId xmlns:r="http://schemas.openxmlformats.org/officeDocument/2006/relationships" id="267" r:id="R95e2e3189cb84ab3"/>
+    <p:sldId xmlns:r="http://schemas.openxmlformats.org/officeDocument/2006/relationships" id="268" r:id="R45eaf1251fe746e8"/>
   </p:sldIdLst>
   <p:sldSz cx="12192000" cy="6858000"/>
   <p:notesSz cx="6858000" cy="9144000"/>
@@ -1405,7 +1405,7 @@
   </p:cSld>
   <p:clrMap bg1="lt1" tx1="dk1" bg2="lt2" tx2="dk2" accent1="accent1" accent2="accent2" accent3="accent3" accent4="accent4" accent5="accent5" accent6="accent6" hlink="hlink" folHlink="folHlink"/>
   <p:sldLayoutIdLst>
-    <p:sldLayoutId xmlns:r="http://schemas.openxmlformats.org/officeDocument/2006/relationships" id="2147483649" r:id="Re3c48aa722984e96"/>
+    <p:sldLayoutId xmlns:r="http://schemas.openxmlformats.org/officeDocument/2006/relationships" id="2147483649" r:id="R51bbd0de9a754e34"/>
   </p:sldLayoutIdLst>
   <p:txStyles>
     <p:titleStyle>
@@ -1956,7 +1956,7 @@
           <p:cNvPr id="1" name="cover-rule">
             <a:extLst xmlns:a="http://schemas.openxmlformats.org/drawingml/2006/main">
               <a:ext uri="{FF2B5EF4-FFF2-40B4-BE49-F238E27FC236}">
-                <a16:creationId xmlns:a16="http://schemas.microsoft.com/office/drawing/2014/main" id="{F1B1CB71-B682-4F77-961D-F3FE4DCCB355}"/>
+                <a16:creationId xmlns:a16="http://schemas.microsoft.com/office/drawing/2014/main" id="{33AD1D86-B42D-4333-9156-CC1337505BB0}"/>
               </a:ext>
             </a:extLst>
           </p:cNvPr>
@@ -1989,7 +1989,7 @@
           <p:cNvPr id="2" name="cover-ring-1">
             <a:extLst xmlns:a="http://schemas.openxmlformats.org/drawingml/2006/main">
               <a:ext uri="{FF2B5EF4-FFF2-40B4-BE49-F238E27FC236}">
-                <a16:creationId xmlns:a16="http://schemas.microsoft.com/office/drawing/2014/main" id="{22F0AF25-65F0-4834-A34D-68424DF56F53}"/>
+                <a16:creationId xmlns:a16="http://schemas.microsoft.com/office/drawing/2014/main" id="{B1C134B6-FCCD-4248-B32D-40A523F9AB97}"/>
               </a:ext>
             </a:extLst>
           </p:cNvPr>
@@ -2020,7 +2020,7 @@
           <p:cNvPr id="3" name="cover-ring-2">
             <a:extLst xmlns:a="http://schemas.openxmlformats.org/drawingml/2006/main">
               <a:ext uri="{FF2B5EF4-FFF2-40B4-BE49-F238E27FC236}">
-                <a16:creationId xmlns:a16="http://schemas.microsoft.com/office/drawing/2014/main" id="{6CE8EEDE-B553-4445-B2FE-E366C288C0F8}"/>
+                <a16:creationId xmlns:a16="http://schemas.microsoft.com/office/drawing/2014/main" id="{27B4B70F-F3E6-4D48-81DC-204C14B6A5CF}"/>
               </a:ext>
             </a:extLst>
           </p:cNvPr>
@@ -2051,7 +2051,7 @@
           <p:cNvPr id="4" name="cover-core">
             <a:extLst xmlns:a="http://schemas.openxmlformats.org/drawingml/2006/main">
               <a:ext uri="{FF2B5EF4-FFF2-40B4-BE49-F238E27FC236}">
-                <a16:creationId xmlns:a16="http://schemas.microsoft.com/office/drawing/2014/main" id="{2AE8187E-C071-4D5B-8053-5AAFFDBAEEAC}"/>
+                <a16:creationId xmlns:a16="http://schemas.microsoft.com/office/drawing/2014/main" id="{A8E00618-3F5C-4B3E-B91C-356A01330141}"/>
               </a:ext>
             </a:extLst>
           </p:cNvPr>
@@ -2084,7 +2084,7 @@
           <p:cNvPr id="5" name="cover-line-1">
             <a:extLst xmlns:a="http://schemas.openxmlformats.org/drawingml/2006/main">
               <a:ext uri="{FF2B5EF4-FFF2-40B4-BE49-F238E27FC236}">
-                <a16:creationId xmlns:a16="http://schemas.microsoft.com/office/drawing/2014/main" id="{4D462971-FA6B-40A5-9963-3AE0BA295ECC}"/>
+                <a16:creationId xmlns:a16="http://schemas.microsoft.com/office/drawing/2014/main" id="{719677ED-4291-4492-8FE0-C10E93DC6627}"/>
               </a:ext>
             </a:extLst>
           </p:cNvPr>
@@ -2115,7 +2115,7 @@
           <p:cNvPr id="6" name="cover-line-2">
             <a:extLst xmlns:a="http://schemas.openxmlformats.org/drawingml/2006/main">
               <a:ext uri="{FF2B5EF4-FFF2-40B4-BE49-F238E27FC236}">
-                <a16:creationId xmlns:a16="http://schemas.microsoft.com/office/drawing/2014/main" id="{0C0A3E4B-9A52-481A-951E-93F70111AAA5}"/>
+                <a16:creationId xmlns:a16="http://schemas.microsoft.com/office/drawing/2014/main" id="{CBF182AF-BADD-46D6-A7A9-31DC343FBED2}"/>
               </a:ext>
             </a:extLst>
           </p:cNvPr>
@@ -2146,7 +2146,7 @@
           <p:cNvPr id="7" name="cover-eyebrow">
             <a:extLst xmlns:a="http://schemas.openxmlformats.org/drawingml/2006/main">
               <a:ext uri="{FF2B5EF4-FFF2-40B4-BE49-F238E27FC236}">
-                <a16:creationId xmlns:a16="http://schemas.microsoft.com/office/drawing/2014/main" id="{6121ACE5-35E1-499B-A705-8219AD59372C}"/>
+                <a16:creationId xmlns:a16="http://schemas.microsoft.com/office/drawing/2014/main" id="{E26ED4E8-4774-4083-8936-342524E471E6}"/>
               </a:ext>
             </a:extLst>
           </p:cNvPr>
@@ -2204,7 +2204,7 @@
           <p:cNvPr id="8" name="cover-title">
             <a:extLst xmlns:a="http://schemas.openxmlformats.org/drawingml/2006/main">
               <a:ext uri="{FF2B5EF4-FFF2-40B4-BE49-F238E27FC236}">
-                <a16:creationId xmlns:a16="http://schemas.microsoft.com/office/drawing/2014/main" id="{3215006B-28A3-48B2-8650-17F0F90B3945}"/>
+                <a16:creationId xmlns:a16="http://schemas.microsoft.com/office/drawing/2014/main" id="{AA862469-AFE0-479D-A469-4EADFDABC0FD}"/>
               </a:ext>
             </a:extLst>
           </p:cNvPr>
@@ -2262,7 +2262,7 @@
           <p:cNvPr id="9" name="cover-subtitle">
             <a:extLst xmlns:a="http://schemas.openxmlformats.org/drawingml/2006/main">
               <a:ext uri="{FF2B5EF4-FFF2-40B4-BE49-F238E27FC236}">
-                <a16:creationId xmlns:a16="http://schemas.microsoft.com/office/drawing/2014/main" id="{03A1B38F-E842-44A6-B97B-BD748EB87B56}"/>
+                <a16:creationId xmlns:a16="http://schemas.microsoft.com/office/drawing/2014/main" id="{38292780-C2F9-4298-AF25-179D888C906A}"/>
               </a:ext>
             </a:extLst>
           </p:cNvPr>
@@ -2324,7 +2324,7 @@
           <p:cNvPr id="10" name="cover-lead">
             <a:extLst xmlns:a="http://schemas.openxmlformats.org/drawingml/2006/main">
               <a:ext uri="{FF2B5EF4-FFF2-40B4-BE49-F238E27FC236}">
-                <a16:creationId xmlns:a16="http://schemas.microsoft.com/office/drawing/2014/main" id="{9F9A10EC-BFCD-4979-924F-C8DE8F04863D}"/>
+                <a16:creationId xmlns:a16="http://schemas.microsoft.com/office/drawing/2014/main" id="{46D0A045-4265-40B8-9AE2-F88F747DC18A}"/>
               </a:ext>
             </a:extLst>
           </p:cNvPr>
@@ -2382,7 +2382,7 @@
           <p:cNvPr id="11" name="cover-course">
             <a:extLst xmlns:a="http://schemas.openxmlformats.org/drawingml/2006/main">
               <a:ext uri="{FF2B5EF4-FFF2-40B4-BE49-F238E27FC236}">
-                <a16:creationId xmlns:a16="http://schemas.microsoft.com/office/drawing/2014/main" id="{7AD46D7A-BD4C-4367-8BB8-D911B2289CB4}"/>
+                <a16:creationId xmlns:a16="http://schemas.microsoft.com/office/drawing/2014/main" id="{992FBDD6-0F25-4EF0-9FF4-AA5334C9C03A}"/>
               </a:ext>
             </a:extLst>
           </p:cNvPr>
@@ -2440,7 +2440,7 @@
           <p:cNvPr id="12" name="cover-id">
             <a:extLst xmlns:a="http://schemas.openxmlformats.org/drawingml/2006/main">
               <a:ext uri="{FF2B5EF4-FFF2-40B4-BE49-F238E27FC236}">
-                <a16:creationId xmlns:a16="http://schemas.microsoft.com/office/drawing/2014/main" id="{598F3062-B2E2-4967-BEED-A17CCD6CDDD1}"/>
+                <a16:creationId xmlns:a16="http://schemas.microsoft.com/office/drawing/2014/main" id="{6615179E-8FF1-4D4A-827A-20006C037193}"/>
               </a:ext>
             </a:extLst>
           </p:cNvPr>
@@ -2496,7 +2496,7 @@
     </p:spTree>
     <p:extLst>
       <p:ext uri="{BB962C8B-B14F-4D97-AF65-F5344CB8AC3E}">
-        <p14:creationId xmlns:p14="http://schemas.microsoft.com/office/powerpoint/2010/main" val="689596403"/>
+        <p14:creationId xmlns:p14="http://schemas.microsoft.com/office/powerpoint/2010/main" val="1531489331"/>
       </p:ext>
     </p:extLst>
   </p:cSld>
@@ -2527,7 +2527,7 @@
           <p:cNvPr id="1" name="s10-rule">
             <a:extLst xmlns:a="http://schemas.openxmlformats.org/drawingml/2006/main">
               <a:ext uri="{FF2B5EF4-FFF2-40B4-BE49-F238E27FC236}">
-                <a16:creationId xmlns:a16="http://schemas.microsoft.com/office/drawing/2014/main" id="{9750A47E-84A0-47AB-AF8C-9B572A4C1DE9}"/>
+                <a16:creationId xmlns:a16="http://schemas.microsoft.com/office/drawing/2014/main" id="{3CF2563F-B424-4B24-B8F8-52E736B6897B}"/>
               </a:ext>
             </a:extLst>
           </p:cNvPr>
@@ -2560,7 +2560,7 @@
           <p:cNvPr id="2" name="s10-eyebrow">
             <a:extLst xmlns:a="http://schemas.openxmlformats.org/drawingml/2006/main">
               <a:ext uri="{FF2B5EF4-FFF2-40B4-BE49-F238E27FC236}">
-                <a16:creationId xmlns:a16="http://schemas.microsoft.com/office/drawing/2014/main" id="{44E3E5FE-9464-4523-B210-ADAB0D5A4356}"/>
+                <a16:creationId xmlns:a16="http://schemas.microsoft.com/office/drawing/2014/main" id="{5C474882-897D-4861-9C4A-765153439CFE}"/>
               </a:ext>
             </a:extLst>
           </p:cNvPr>
@@ -2618,7 +2618,7 @@
           <p:cNvPr id="3" name="s10-title">
             <a:extLst xmlns:a="http://schemas.openxmlformats.org/drawingml/2006/main">
               <a:ext uri="{FF2B5EF4-FFF2-40B4-BE49-F238E27FC236}">
-                <a16:creationId xmlns:a16="http://schemas.microsoft.com/office/drawing/2014/main" id="{2B812C94-07AC-434B-BF55-F7DEACEEE6B1}"/>
+                <a16:creationId xmlns:a16="http://schemas.microsoft.com/office/drawing/2014/main" id="{AB573CA4-CA8D-4F1F-A1E3-8B3707DC8FE1}"/>
               </a:ext>
             </a:extLst>
           </p:cNvPr>
@@ -2676,7 +2676,7 @@
           <p:cNvPr id="4" name="s10-footer">
             <a:extLst xmlns:a="http://schemas.openxmlformats.org/drawingml/2006/main">
               <a:ext uri="{FF2B5EF4-FFF2-40B4-BE49-F238E27FC236}">
-                <a16:creationId xmlns:a16="http://schemas.microsoft.com/office/drawing/2014/main" id="{0BD0E964-ECCB-4497-B73A-EC9185E95F95}"/>
+                <a16:creationId xmlns:a16="http://schemas.microsoft.com/office/drawing/2014/main" id="{9DDAC958-AF16-400D-A978-C954C0F19DE2}"/>
               </a:ext>
             </a:extLst>
           </p:cNvPr>
@@ -2707,7 +2707,7 @@
           <p:cNvPr id="5" name="s10-identity">
             <a:extLst xmlns:a="http://schemas.openxmlformats.org/drawingml/2006/main">
               <a:ext uri="{FF2B5EF4-FFF2-40B4-BE49-F238E27FC236}">
-                <a16:creationId xmlns:a16="http://schemas.microsoft.com/office/drawing/2014/main" id="{17EC7FB6-281A-45C7-AA6C-CBADB68D1219}"/>
+                <a16:creationId xmlns:a16="http://schemas.microsoft.com/office/drawing/2014/main" id="{74437F87-8923-49A9-82ED-1C4FD10D7E12}"/>
               </a:ext>
             </a:extLst>
           </p:cNvPr>
@@ -2765,7 +2765,7 @@
           <p:cNvPr id="6" name="case-title">
             <a:extLst xmlns:a="http://schemas.openxmlformats.org/drawingml/2006/main">
               <a:ext uri="{FF2B5EF4-FFF2-40B4-BE49-F238E27FC236}">
-                <a16:creationId xmlns:a16="http://schemas.microsoft.com/office/drawing/2014/main" id="{25A26337-9208-43D4-A3C0-8CEFD5174A8E}"/>
+                <a16:creationId xmlns:a16="http://schemas.microsoft.com/office/drawing/2014/main" id="{C4F4920F-3068-4423-8D64-460A70FC956D}"/>
               </a:ext>
             </a:extLst>
           </p:cNvPr>
@@ -2829,7 +2829,7 @@
           <p:cNvPr id="7" name="case-row-0">
             <a:extLst xmlns:a="http://schemas.openxmlformats.org/drawingml/2006/main">
               <a:ext uri="{FF2B5EF4-FFF2-40B4-BE49-F238E27FC236}">
-                <a16:creationId xmlns:a16="http://schemas.microsoft.com/office/drawing/2014/main" id="{E19BD01A-DA30-4F90-824D-A65C119F4E2D}"/>
+                <a16:creationId xmlns:a16="http://schemas.microsoft.com/office/drawing/2014/main" id="{DBCCB425-BEEC-4957-A2E8-F9E1ED42103D}"/>
               </a:ext>
             </a:extLst>
           </p:cNvPr>
@@ -2893,7 +2893,7 @@
           <p:cNvPr id="8" name="case-row-1">
             <a:extLst xmlns:a="http://schemas.openxmlformats.org/drawingml/2006/main">
               <a:ext uri="{FF2B5EF4-FFF2-40B4-BE49-F238E27FC236}">
-                <a16:creationId xmlns:a16="http://schemas.microsoft.com/office/drawing/2014/main" id="{E6B85A21-2461-48CC-B399-B9955E863B2B}"/>
+                <a16:creationId xmlns:a16="http://schemas.microsoft.com/office/drawing/2014/main" id="{3A34E254-118A-4DC4-9177-55607B81EC65}"/>
               </a:ext>
             </a:extLst>
           </p:cNvPr>
@@ -2957,7 +2957,7 @@
           <p:cNvPr id="9" name="case-row-2">
             <a:extLst xmlns:a="http://schemas.openxmlformats.org/drawingml/2006/main">
               <a:ext uri="{FF2B5EF4-FFF2-40B4-BE49-F238E27FC236}">
-                <a16:creationId xmlns:a16="http://schemas.microsoft.com/office/drawing/2014/main" id="{3AC181D3-B477-4772-BB55-10363ECD7AEF}"/>
+                <a16:creationId xmlns:a16="http://schemas.microsoft.com/office/drawing/2014/main" id="{DD18E0CD-CFEB-4395-BF1E-EBF534C9FF99}"/>
               </a:ext>
             </a:extLst>
           </p:cNvPr>
@@ -3021,7 +3021,7 @@
           <p:cNvPr id="10" name="s10-takeaway-rule">
             <a:extLst xmlns:a="http://schemas.openxmlformats.org/drawingml/2006/main">
               <a:ext uri="{FF2B5EF4-FFF2-40B4-BE49-F238E27FC236}">
-                <a16:creationId xmlns:a16="http://schemas.microsoft.com/office/drawing/2014/main" id="{65380A53-DC4D-440C-BA19-57BC6795E9E5}"/>
+                <a16:creationId xmlns:a16="http://schemas.microsoft.com/office/drawing/2014/main" id="{168F40A7-A0CA-4C79-9875-02448AF839F8}"/>
               </a:ext>
             </a:extLst>
           </p:cNvPr>
@@ -3054,7 +3054,7 @@
           <p:cNvPr id="11" name="s10-takeaway">
             <a:extLst xmlns:a="http://schemas.openxmlformats.org/drawingml/2006/main">
               <a:ext uri="{FF2B5EF4-FFF2-40B4-BE49-F238E27FC236}">
-                <a16:creationId xmlns:a16="http://schemas.microsoft.com/office/drawing/2014/main" id="{8C5160A8-FF42-4596-8741-E536FDA8988E}"/>
+                <a16:creationId xmlns:a16="http://schemas.microsoft.com/office/drawing/2014/main" id="{BA935225-6210-4CBB-A5C9-CDECAEA6B93F}"/>
               </a:ext>
             </a:extLst>
           </p:cNvPr>
@@ -3110,7 +3110,7 @@
     </p:spTree>
     <p:extLst>
       <p:ext uri="{BB962C8B-B14F-4D97-AF65-F5344CB8AC3E}">
-        <p14:creationId xmlns:p14="http://schemas.microsoft.com/office/powerpoint/2010/main" val="672971089"/>
+        <p14:creationId xmlns:p14="http://schemas.microsoft.com/office/powerpoint/2010/main" val="1692528911"/>
       </p:ext>
     </p:extLst>
   </p:cSld>
@@ -3141,7 +3141,7 @@
           <p:cNvPr id="1" name="s11-rule">
             <a:extLst xmlns:a="http://schemas.openxmlformats.org/drawingml/2006/main">
               <a:ext uri="{FF2B5EF4-FFF2-40B4-BE49-F238E27FC236}">
-                <a16:creationId xmlns:a16="http://schemas.microsoft.com/office/drawing/2014/main" id="{86E68EC0-4CB5-4607-9A37-C6988E6AEE48}"/>
+                <a16:creationId xmlns:a16="http://schemas.microsoft.com/office/drawing/2014/main" id="{ADD42E91-6334-4EA2-9323-20D2AD5E210F}"/>
               </a:ext>
             </a:extLst>
           </p:cNvPr>
@@ -3174,7 +3174,7 @@
           <p:cNvPr id="2" name="s11-eyebrow">
             <a:extLst xmlns:a="http://schemas.openxmlformats.org/drawingml/2006/main">
               <a:ext uri="{FF2B5EF4-FFF2-40B4-BE49-F238E27FC236}">
-                <a16:creationId xmlns:a16="http://schemas.microsoft.com/office/drawing/2014/main" id="{5E0E36F8-110B-4FD8-A9B8-84015C354094}"/>
+                <a16:creationId xmlns:a16="http://schemas.microsoft.com/office/drawing/2014/main" id="{B16A81B5-2C57-41D7-A481-AD4D2D927438}"/>
               </a:ext>
             </a:extLst>
           </p:cNvPr>
@@ -3232,7 +3232,7 @@
           <p:cNvPr id="3" name="s11-title">
             <a:extLst xmlns:a="http://schemas.openxmlformats.org/drawingml/2006/main">
               <a:ext uri="{FF2B5EF4-FFF2-40B4-BE49-F238E27FC236}">
-                <a16:creationId xmlns:a16="http://schemas.microsoft.com/office/drawing/2014/main" id="{D4D70EE7-BFDF-4938-9535-B322FB9CF868}"/>
+                <a16:creationId xmlns:a16="http://schemas.microsoft.com/office/drawing/2014/main" id="{850FC3BF-D068-4A21-8727-84F868EECF44}"/>
               </a:ext>
             </a:extLst>
           </p:cNvPr>
@@ -3290,7 +3290,7 @@
           <p:cNvPr id="4" name="s11-footer">
             <a:extLst xmlns:a="http://schemas.openxmlformats.org/drawingml/2006/main">
               <a:ext uri="{FF2B5EF4-FFF2-40B4-BE49-F238E27FC236}">
-                <a16:creationId xmlns:a16="http://schemas.microsoft.com/office/drawing/2014/main" id="{5D0CF7CF-167B-4A81-A5E1-496CB8348946}"/>
+                <a16:creationId xmlns:a16="http://schemas.microsoft.com/office/drawing/2014/main" id="{C0F92E4F-041F-4B9C-B900-CFDC89F3305F}"/>
               </a:ext>
             </a:extLst>
           </p:cNvPr>
@@ -3321,7 +3321,7 @@
           <p:cNvPr id="5" name="s11-identity">
             <a:extLst xmlns:a="http://schemas.openxmlformats.org/drawingml/2006/main">
               <a:ext uri="{FF2B5EF4-FFF2-40B4-BE49-F238E27FC236}">
-                <a16:creationId xmlns:a16="http://schemas.microsoft.com/office/drawing/2014/main" id="{0C44754E-4763-435E-810B-071B03C74906}"/>
+                <a16:creationId xmlns:a16="http://schemas.microsoft.com/office/drawing/2014/main" id="{984CABFF-ADBE-4BAB-8E62-8E668DA065CE}"/>
               </a:ext>
             </a:extLst>
           </p:cNvPr>
@@ -3379,7 +3379,7 @@
           <p:cNvPr id="6" name="practice-circle-0">
             <a:extLst xmlns:a="http://schemas.openxmlformats.org/drawingml/2006/main">
               <a:ext uri="{FF2B5EF4-FFF2-40B4-BE49-F238E27FC236}">
-                <a16:creationId xmlns:a16="http://schemas.microsoft.com/office/drawing/2014/main" id="{841BAB7E-4500-40D0-9365-3DDA7DA0EEB8}"/>
+                <a16:creationId xmlns:a16="http://schemas.microsoft.com/office/drawing/2014/main" id="{36814848-FED9-4DF8-9F40-815B666D37B9}"/>
               </a:ext>
             </a:extLst>
           </p:cNvPr>
@@ -3412,7 +3412,7 @@
           <p:cNvPr id="7" name="practice-number-0">
             <a:extLst xmlns:a="http://schemas.openxmlformats.org/drawingml/2006/main">
               <a:ext uri="{FF2B5EF4-FFF2-40B4-BE49-F238E27FC236}">
-                <a16:creationId xmlns:a16="http://schemas.microsoft.com/office/drawing/2014/main" id="{29656366-5390-4BCE-A660-3A0AE58F75AF}"/>
+                <a16:creationId xmlns:a16="http://schemas.microsoft.com/office/drawing/2014/main" id="{30FD4E6E-D457-4E72-8E0A-88ED4F73A716}"/>
               </a:ext>
             </a:extLst>
           </p:cNvPr>
@@ -3470,7 +3470,7 @@
           <p:cNvPr id="8" name="practice-item-0">
             <a:extLst xmlns:a="http://schemas.openxmlformats.org/drawingml/2006/main">
               <a:ext uri="{FF2B5EF4-FFF2-40B4-BE49-F238E27FC236}">
-                <a16:creationId xmlns:a16="http://schemas.microsoft.com/office/drawing/2014/main" id="{11721469-E687-43D6-BE01-0A0CCDEB9FFB}"/>
+                <a16:creationId xmlns:a16="http://schemas.microsoft.com/office/drawing/2014/main" id="{88A33C5D-881F-4608-81DB-8294C800418B}"/>
               </a:ext>
             </a:extLst>
           </p:cNvPr>
@@ -3534,7 +3534,7 @@
           <p:cNvPr id="9" name="practice-connector-0">
             <a:extLst xmlns:a="http://schemas.openxmlformats.org/drawingml/2006/main">
               <a:ext uri="{FF2B5EF4-FFF2-40B4-BE49-F238E27FC236}">
-                <a16:creationId xmlns:a16="http://schemas.microsoft.com/office/drawing/2014/main" id="{A5BE8F39-6AC4-476E-9B81-6BD89B0F656E}"/>
+                <a16:creationId xmlns:a16="http://schemas.microsoft.com/office/drawing/2014/main" id="{26ECB019-16D2-4896-B20D-CE6831CF8CD1}"/>
               </a:ext>
             </a:extLst>
           </p:cNvPr>
@@ -3565,7 +3565,7 @@
           <p:cNvPr id="10" name="practice-circle-1">
             <a:extLst xmlns:a="http://schemas.openxmlformats.org/drawingml/2006/main">
               <a:ext uri="{FF2B5EF4-FFF2-40B4-BE49-F238E27FC236}">
-                <a16:creationId xmlns:a16="http://schemas.microsoft.com/office/drawing/2014/main" id="{03319074-7A9A-4CE8-A007-B555532D943C}"/>
+                <a16:creationId xmlns:a16="http://schemas.microsoft.com/office/drawing/2014/main" id="{835A81CB-AB6B-412E-994D-9864A1644AAE}"/>
               </a:ext>
             </a:extLst>
           </p:cNvPr>
@@ -3598,7 +3598,7 @@
           <p:cNvPr id="11" name="practice-number-1">
             <a:extLst xmlns:a="http://schemas.openxmlformats.org/drawingml/2006/main">
               <a:ext uri="{FF2B5EF4-FFF2-40B4-BE49-F238E27FC236}">
-                <a16:creationId xmlns:a16="http://schemas.microsoft.com/office/drawing/2014/main" id="{BEBA5B97-752A-4C96-8F31-1C95B774B841}"/>
+                <a16:creationId xmlns:a16="http://schemas.microsoft.com/office/drawing/2014/main" id="{CEDF16AA-F0D1-45C7-9D2F-28801FC42576}"/>
               </a:ext>
             </a:extLst>
           </p:cNvPr>
@@ -3656,7 +3656,7 @@
           <p:cNvPr id="12" name="practice-item-1">
             <a:extLst xmlns:a="http://schemas.openxmlformats.org/drawingml/2006/main">
               <a:ext uri="{FF2B5EF4-FFF2-40B4-BE49-F238E27FC236}">
-                <a16:creationId xmlns:a16="http://schemas.microsoft.com/office/drawing/2014/main" id="{7F298CD0-A412-4E25-96AC-5914FD34105E}"/>
+                <a16:creationId xmlns:a16="http://schemas.microsoft.com/office/drawing/2014/main" id="{EA0C269B-A93B-4106-B46A-2184BAA351CA}"/>
               </a:ext>
             </a:extLst>
           </p:cNvPr>
@@ -3720,7 +3720,7 @@
           <p:cNvPr id="13" name="practice-connector-1">
             <a:extLst xmlns:a="http://schemas.openxmlformats.org/drawingml/2006/main">
               <a:ext uri="{FF2B5EF4-FFF2-40B4-BE49-F238E27FC236}">
-                <a16:creationId xmlns:a16="http://schemas.microsoft.com/office/drawing/2014/main" id="{FB2D2001-056E-4FF5-BA59-3362656D9AC6}"/>
+                <a16:creationId xmlns:a16="http://schemas.microsoft.com/office/drawing/2014/main" id="{ADDB8F53-BE92-4EA9-99E2-7363880164CF}"/>
               </a:ext>
             </a:extLst>
           </p:cNvPr>
@@ -3751,7 +3751,7 @@
           <p:cNvPr id="14" name="practice-circle-2">
             <a:extLst xmlns:a="http://schemas.openxmlformats.org/drawingml/2006/main">
               <a:ext uri="{FF2B5EF4-FFF2-40B4-BE49-F238E27FC236}">
-                <a16:creationId xmlns:a16="http://schemas.microsoft.com/office/drawing/2014/main" id="{D193140F-F0F0-46F7-8218-5BC18C3D2727}"/>
+                <a16:creationId xmlns:a16="http://schemas.microsoft.com/office/drawing/2014/main" id="{D776D7B9-7A22-4610-9600-14905BAA3BE8}"/>
               </a:ext>
             </a:extLst>
           </p:cNvPr>
@@ -3784,7 +3784,7 @@
           <p:cNvPr id="15" name="practice-number-2">
             <a:extLst xmlns:a="http://schemas.openxmlformats.org/drawingml/2006/main">
               <a:ext uri="{FF2B5EF4-FFF2-40B4-BE49-F238E27FC236}">
-                <a16:creationId xmlns:a16="http://schemas.microsoft.com/office/drawing/2014/main" id="{CC2628B4-5F10-493A-BCDB-8BF69A5A1AFF}"/>
+                <a16:creationId xmlns:a16="http://schemas.microsoft.com/office/drawing/2014/main" id="{393C1016-A86A-46FD-8601-538B64EEFFE6}"/>
               </a:ext>
             </a:extLst>
           </p:cNvPr>
@@ -3842,7 +3842,7 @@
           <p:cNvPr id="16" name="practice-item-2">
             <a:extLst xmlns:a="http://schemas.openxmlformats.org/drawingml/2006/main">
               <a:ext uri="{FF2B5EF4-FFF2-40B4-BE49-F238E27FC236}">
-                <a16:creationId xmlns:a16="http://schemas.microsoft.com/office/drawing/2014/main" id="{EF2ADF84-CE05-42A9-975D-7A7080991CAE}"/>
+                <a16:creationId xmlns:a16="http://schemas.microsoft.com/office/drawing/2014/main" id="{BA74CD09-ABC6-459C-88DC-F62B3B6D9243}"/>
               </a:ext>
             </a:extLst>
           </p:cNvPr>
@@ -3904,7 +3904,7 @@
     </p:spTree>
     <p:extLst>
       <p:ext uri="{BB962C8B-B14F-4D97-AF65-F5344CB8AC3E}">
-        <p14:creationId xmlns:p14="http://schemas.microsoft.com/office/powerpoint/2010/main" val="424212148"/>
+        <p14:creationId xmlns:p14="http://schemas.microsoft.com/office/powerpoint/2010/main" val="1910588595"/>
       </p:ext>
     </p:extLst>
   </p:cSld>
@@ -3935,7 +3935,7 @@
           <p:cNvPr id="1" name="s12-rule">
             <a:extLst xmlns:a="http://schemas.openxmlformats.org/drawingml/2006/main">
               <a:ext uri="{FF2B5EF4-FFF2-40B4-BE49-F238E27FC236}">
-                <a16:creationId xmlns:a16="http://schemas.microsoft.com/office/drawing/2014/main" id="{27792E20-7BC9-417A-A17B-6C32626542A5}"/>
+                <a16:creationId xmlns:a16="http://schemas.microsoft.com/office/drawing/2014/main" id="{E5AE422F-AE33-4138-B294-A60E5751086B}"/>
               </a:ext>
             </a:extLst>
           </p:cNvPr>
@@ -3968,7 +3968,7 @@
           <p:cNvPr id="2" name="s12-eyebrow">
             <a:extLst xmlns:a="http://schemas.openxmlformats.org/drawingml/2006/main">
               <a:ext uri="{FF2B5EF4-FFF2-40B4-BE49-F238E27FC236}">
-                <a16:creationId xmlns:a16="http://schemas.microsoft.com/office/drawing/2014/main" id="{A08E69E0-49AD-4F0C-92D6-0090226A8514}"/>
+                <a16:creationId xmlns:a16="http://schemas.microsoft.com/office/drawing/2014/main" id="{C9C72957-A584-402C-958B-309F2DB60638}"/>
               </a:ext>
             </a:extLst>
           </p:cNvPr>
@@ -4026,7 +4026,7 @@
           <p:cNvPr id="3" name="s12-title">
             <a:extLst xmlns:a="http://schemas.openxmlformats.org/drawingml/2006/main">
               <a:ext uri="{FF2B5EF4-FFF2-40B4-BE49-F238E27FC236}">
-                <a16:creationId xmlns:a16="http://schemas.microsoft.com/office/drawing/2014/main" id="{8F16346D-76CD-48A3-A366-63AC2FE3600A}"/>
+                <a16:creationId xmlns:a16="http://schemas.microsoft.com/office/drawing/2014/main" id="{9B05E6F6-FC65-495A-8B99-5D4EA2C5A281}"/>
               </a:ext>
             </a:extLst>
           </p:cNvPr>
@@ -4084,7 +4084,7 @@
           <p:cNvPr id="4" name="s12-footer">
             <a:extLst xmlns:a="http://schemas.openxmlformats.org/drawingml/2006/main">
               <a:ext uri="{FF2B5EF4-FFF2-40B4-BE49-F238E27FC236}">
-                <a16:creationId xmlns:a16="http://schemas.microsoft.com/office/drawing/2014/main" id="{A627B716-DC71-43C5-AA67-F7B475751D80}"/>
+                <a16:creationId xmlns:a16="http://schemas.microsoft.com/office/drawing/2014/main" id="{1223B220-41D3-4D39-B6AF-672EF2FC43AB}"/>
               </a:ext>
             </a:extLst>
           </p:cNvPr>
@@ -4115,7 +4115,7 @@
           <p:cNvPr id="5" name="s12-identity">
             <a:extLst xmlns:a="http://schemas.openxmlformats.org/drawingml/2006/main">
               <a:ext uri="{FF2B5EF4-FFF2-40B4-BE49-F238E27FC236}">
-                <a16:creationId xmlns:a16="http://schemas.microsoft.com/office/drawing/2014/main" id="{452E2BAB-A456-4F54-B07A-547F7F192C5C}"/>
+                <a16:creationId xmlns:a16="http://schemas.microsoft.com/office/drawing/2014/main" id="{DBF886C5-A4CE-4479-9543-30B74DB7F502}"/>
               </a:ext>
             </a:extLst>
           </p:cNvPr>
@@ -4173,7 +4173,7 @@
           <p:cNvPr id="6" name="recap-circle-0">
             <a:extLst xmlns:a="http://schemas.openxmlformats.org/drawingml/2006/main">
               <a:ext uri="{FF2B5EF4-FFF2-40B4-BE49-F238E27FC236}">
-                <a16:creationId xmlns:a16="http://schemas.microsoft.com/office/drawing/2014/main" id="{7C7E889B-4333-40B9-A0A8-841F916844CD}"/>
+                <a16:creationId xmlns:a16="http://schemas.microsoft.com/office/drawing/2014/main" id="{3F1E341E-EA3A-497B-9D6E-1A8F07779BA8}"/>
               </a:ext>
             </a:extLst>
           </p:cNvPr>
@@ -4206,7 +4206,7 @@
           <p:cNvPr id="7" name="recap-number-0">
             <a:extLst xmlns:a="http://schemas.openxmlformats.org/drawingml/2006/main">
               <a:ext uri="{FF2B5EF4-FFF2-40B4-BE49-F238E27FC236}">
-                <a16:creationId xmlns:a16="http://schemas.microsoft.com/office/drawing/2014/main" id="{CEA6D75C-D3DD-4D97-B91B-7D73558960A7}"/>
+                <a16:creationId xmlns:a16="http://schemas.microsoft.com/office/drawing/2014/main" id="{0D48ACE1-0371-4FD3-9BDA-301D8B30326E}"/>
               </a:ext>
             </a:extLst>
           </p:cNvPr>
@@ -4264,7 +4264,7 @@
           <p:cNvPr id="8" name="recap-item-0">
             <a:extLst xmlns:a="http://schemas.openxmlformats.org/drawingml/2006/main">
               <a:ext uri="{FF2B5EF4-FFF2-40B4-BE49-F238E27FC236}">
-                <a16:creationId xmlns:a16="http://schemas.microsoft.com/office/drawing/2014/main" id="{A22B0E6F-390D-40F3-9AA6-F216DE8FF027}"/>
+                <a16:creationId xmlns:a16="http://schemas.microsoft.com/office/drawing/2014/main" id="{AD45AADE-8419-4E31-A85C-D665457DA0C4}"/>
               </a:ext>
             </a:extLst>
           </p:cNvPr>
@@ -4328,7 +4328,7 @@
           <p:cNvPr id="9" name="recap-connector-0">
             <a:extLst xmlns:a="http://schemas.openxmlformats.org/drawingml/2006/main">
               <a:ext uri="{FF2B5EF4-FFF2-40B4-BE49-F238E27FC236}">
-                <a16:creationId xmlns:a16="http://schemas.microsoft.com/office/drawing/2014/main" id="{AF63747F-3F69-49A3-889E-C97AB8AE8207}"/>
+                <a16:creationId xmlns:a16="http://schemas.microsoft.com/office/drawing/2014/main" id="{93618940-50DC-46D9-9797-8220DC99B2C1}"/>
               </a:ext>
             </a:extLst>
           </p:cNvPr>
@@ -4359,7 +4359,7 @@
           <p:cNvPr id="10" name="recap-circle-1">
             <a:extLst xmlns:a="http://schemas.openxmlformats.org/drawingml/2006/main">
               <a:ext uri="{FF2B5EF4-FFF2-40B4-BE49-F238E27FC236}">
-                <a16:creationId xmlns:a16="http://schemas.microsoft.com/office/drawing/2014/main" id="{6B127904-42A5-4E37-8C94-8DEE8469E198}"/>
+                <a16:creationId xmlns:a16="http://schemas.microsoft.com/office/drawing/2014/main" id="{5877ADB3-F008-4B2A-A0AD-E34BF24DE790}"/>
               </a:ext>
             </a:extLst>
           </p:cNvPr>
@@ -4392,7 +4392,7 @@
           <p:cNvPr id="11" name="recap-number-1">
             <a:extLst xmlns:a="http://schemas.openxmlformats.org/drawingml/2006/main">
               <a:ext uri="{FF2B5EF4-FFF2-40B4-BE49-F238E27FC236}">
-                <a16:creationId xmlns:a16="http://schemas.microsoft.com/office/drawing/2014/main" id="{8506588B-7FD5-4282-9519-AF95AC62577A}"/>
+                <a16:creationId xmlns:a16="http://schemas.microsoft.com/office/drawing/2014/main" id="{2A136E84-EDD9-4C32-A881-923CC40D5F02}"/>
               </a:ext>
             </a:extLst>
           </p:cNvPr>
@@ -4450,7 +4450,7 @@
           <p:cNvPr id="12" name="recap-item-1">
             <a:extLst xmlns:a="http://schemas.openxmlformats.org/drawingml/2006/main">
               <a:ext uri="{FF2B5EF4-FFF2-40B4-BE49-F238E27FC236}">
-                <a16:creationId xmlns:a16="http://schemas.microsoft.com/office/drawing/2014/main" id="{D43742B5-2020-4185-9C29-F5A830CF1907}"/>
+                <a16:creationId xmlns:a16="http://schemas.microsoft.com/office/drawing/2014/main" id="{9D1A5711-B869-4B0B-ACBB-641831909A6B}"/>
               </a:ext>
             </a:extLst>
           </p:cNvPr>
@@ -4514,7 +4514,7 @@
           <p:cNvPr id="13" name="recap-connector-1">
             <a:extLst xmlns:a="http://schemas.openxmlformats.org/drawingml/2006/main">
               <a:ext uri="{FF2B5EF4-FFF2-40B4-BE49-F238E27FC236}">
-                <a16:creationId xmlns:a16="http://schemas.microsoft.com/office/drawing/2014/main" id="{37A281EE-1E07-440E-BEBA-704EAA29D328}"/>
+                <a16:creationId xmlns:a16="http://schemas.microsoft.com/office/drawing/2014/main" id="{6266B61A-247C-44E4-BF69-C3145531903D}"/>
               </a:ext>
             </a:extLst>
           </p:cNvPr>
@@ -4545,7 +4545,7 @@
           <p:cNvPr id="14" name="recap-circle-2">
             <a:extLst xmlns:a="http://schemas.openxmlformats.org/drawingml/2006/main">
               <a:ext uri="{FF2B5EF4-FFF2-40B4-BE49-F238E27FC236}">
-                <a16:creationId xmlns:a16="http://schemas.microsoft.com/office/drawing/2014/main" id="{B6AB8450-6729-478E-B34D-5C4CC95C04F4}"/>
+                <a16:creationId xmlns:a16="http://schemas.microsoft.com/office/drawing/2014/main" id="{66DF80EE-F3C2-4F26-A29B-8AB2F5ECA6A8}"/>
               </a:ext>
             </a:extLst>
           </p:cNvPr>
@@ -4578,7 +4578,7 @@
           <p:cNvPr id="15" name="recap-number-2">
             <a:extLst xmlns:a="http://schemas.openxmlformats.org/drawingml/2006/main">
               <a:ext uri="{FF2B5EF4-FFF2-40B4-BE49-F238E27FC236}">
-                <a16:creationId xmlns:a16="http://schemas.microsoft.com/office/drawing/2014/main" id="{87C40B26-4585-4FFB-976C-BE7DF2AB0111}"/>
+                <a16:creationId xmlns:a16="http://schemas.microsoft.com/office/drawing/2014/main" id="{63E5310D-5DA5-45EC-97C5-A63BADFEF22D}"/>
               </a:ext>
             </a:extLst>
           </p:cNvPr>
@@ -4636,7 +4636,7 @@
           <p:cNvPr id="16" name="recap-item-2">
             <a:extLst xmlns:a="http://schemas.openxmlformats.org/drawingml/2006/main">
               <a:ext uri="{FF2B5EF4-FFF2-40B4-BE49-F238E27FC236}">
-                <a16:creationId xmlns:a16="http://schemas.microsoft.com/office/drawing/2014/main" id="{425E925C-EB34-4137-86E0-BB443D39893A}"/>
+                <a16:creationId xmlns:a16="http://schemas.microsoft.com/office/drawing/2014/main" id="{497B2069-8DE3-4DDB-863C-75380F947631}"/>
               </a:ext>
             </a:extLst>
           </p:cNvPr>
@@ -4698,7 +4698,7 @@
     </p:spTree>
     <p:extLst>
       <p:ext uri="{BB962C8B-B14F-4D97-AF65-F5344CB8AC3E}">
-        <p14:creationId xmlns:p14="http://schemas.microsoft.com/office/powerpoint/2010/main" val="1794097666"/>
+        <p14:creationId xmlns:p14="http://schemas.microsoft.com/office/powerpoint/2010/main" val="1669713226"/>
       </p:ext>
     </p:extLst>
   </p:cSld>
@@ -4729,7 +4729,7 @@
           <p:cNvPr id="1" name="s13-rule">
             <a:extLst xmlns:a="http://schemas.openxmlformats.org/drawingml/2006/main">
               <a:ext uri="{FF2B5EF4-FFF2-40B4-BE49-F238E27FC236}">
-                <a16:creationId xmlns:a16="http://schemas.microsoft.com/office/drawing/2014/main" id="{6C2886D7-1189-42F9-8884-2DB7F128EBC0}"/>
+                <a16:creationId xmlns:a16="http://schemas.microsoft.com/office/drawing/2014/main" id="{29997D73-4CBA-405B-B722-E091B839495C}"/>
               </a:ext>
             </a:extLst>
           </p:cNvPr>
@@ -4762,7 +4762,7 @@
           <p:cNvPr id="2" name="s13-eyebrow">
             <a:extLst xmlns:a="http://schemas.openxmlformats.org/drawingml/2006/main">
               <a:ext uri="{FF2B5EF4-FFF2-40B4-BE49-F238E27FC236}">
-                <a16:creationId xmlns:a16="http://schemas.microsoft.com/office/drawing/2014/main" id="{F94690EB-4EBE-4681-AEF6-EC93560BC127}"/>
+                <a16:creationId xmlns:a16="http://schemas.microsoft.com/office/drawing/2014/main" id="{3990BC71-E57E-4306-9B13-89B8319B7B49}"/>
               </a:ext>
             </a:extLst>
           </p:cNvPr>
@@ -4820,7 +4820,7 @@
           <p:cNvPr id="3" name="s13-title">
             <a:extLst xmlns:a="http://schemas.openxmlformats.org/drawingml/2006/main">
               <a:ext uri="{FF2B5EF4-FFF2-40B4-BE49-F238E27FC236}">
-                <a16:creationId xmlns:a16="http://schemas.microsoft.com/office/drawing/2014/main" id="{128C7CA8-CB36-4B21-BB87-25409AFC86A2}"/>
+                <a16:creationId xmlns:a16="http://schemas.microsoft.com/office/drawing/2014/main" id="{B1FBCF93-B0E2-4053-9832-F6B0EDDF1BB3}"/>
               </a:ext>
             </a:extLst>
           </p:cNvPr>
@@ -4878,7 +4878,7 @@
           <p:cNvPr id="4" name="s13-footer">
             <a:extLst xmlns:a="http://schemas.openxmlformats.org/drawingml/2006/main">
               <a:ext uri="{FF2B5EF4-FFF2-40B4-BE49-F238E27FC236}">
-                <a16:creationId xmlns:a16="http://schemas.microsoft.com/office/drawing/2014/main" id="{9C14B9D2-76EE-4552-8E11-645591B573E6}"/>
+                <a16:creationId xmlns:a16="http://schemas.microsoft.com/office/drawing/2014/main" id="{173A7887-C487-4F1F-8AAB-C102E200060F}"/>
               </a:ext>
             </a:extLst>
           </p:cNvPr>
@@ -4909,7 +4909,7 @@
           <p:cNvPr id="5" name="s13-identity">
             <a:extLst xmlns:a="http://schemas.openxmlformats.org/drawingml/2006/main">
               <a:ext uri="{FF2B5EF4-FFF2-40B4-BE49-F238E27FC236}">
-                <a16:creationId xmlns:a16="http://schemas.microsoft.com/office/drawing/2014/main" id="{59C18636-F5D1-43EA-82F3-8620DB7655E0}"/>
+                <a16:creationId xmlns:a16="http://schemas.microsoft.com/office/drawing/2014/main" id="{736E99E3-22D0-49BD-B90C-7EFB6D1645C6}"/>
               </a:ext>
             </a:extLst>
           </p:cNvPr>
@@ -4967,7 +4967,7 @@
           <p:cNvPr id="6" name="source-0">
             <a:extLst xmlns:a="http://schemas.openxmlformats.org/drawingml/2006/main">
               <a:ext uri="{FF2B5EF4-FFF2-40B4-BE49-F238E27FC236}">
-                <a16:creationId xmlns:a16="http://schemas.microsoft.com/office/drawing/2014/main" id="{94E20F4B-EFEE-45F2-94D9-41F08805DA6B}"/>
+                <a16:creationId xmlns:a16="http://schemas.microsoft.com/office/drawing/2014/main" id="{F8DFB575-A0EC-42A7-B0F8-3D2865696A14}"/>
               </a:ext>
             </a:extLst>
           </p:cNvPr>
@@ -5031,7 +5031,7 @@
           <p:cNvPr id="7" name="source-1">
             <a:extLst xmlns:a="http://schemas.openxmlformats.org/drawingml/2006/main">
               <a:ext uri="{FF2B5EF4-FFF2-40B4-BE49-F238E27FC236}">
-                <a16:creationId xmlns:a16="http://schemas.microsoft.com/office/drawing/2014/main" id="{73F52420-D2EE-4B4E-8045-1A27E92DF533}"/>
+                <a16:creationId xmlns:a16="http://schemas.microsoft.com/office/drawing/2014/main" id="{EC95C49F-3744-4AD8-8EFA-5730A2DD20AB}"/>
               </a:ext>
             </a:extLst>
           </p:cNvPr>
@@ -5095,7 +5095,7 @@
           <p:cNvPr id="8" name="source-2">
             <a:extLst xmlns:a="http://schemas.openxmlformats.org/drawingml/2006/main">
               <a:ext uri="{FF2B5EF4-FFF2-40B4-BE49-F238E27FC236}">
-                <a16:creationId xmlns:a16="http://schemas.microsoft.com/office/drawing/2014/main" id="{315F84EE-CE14-438B-9ECA-16E079DA75D7}"/>
+                <a16:creationId xmlns:a16="http://schemas.microsoft.com/office/drawing/2014/main" id="{1C262149-FD66-4D0B-B2A2-1C94DC4FF42F}"/>
               </a:ext>
             </a:extLst>
           </p:cNvPr>
@@ -5159,7 +5159,7 @@
           <p:cNvPr id="9" name="source-3">
             <a:extLst xmlns:a="http://schemas.openxmlformats.org/drawingml/2006/main">
               <a:ext uri="{FF2B5EF4-FFF2-40B4-BE49-F238E27FC236}">
-                <a16:creationId xmlns:a16="http://schemas.microsoft.com/office/drawing/2014/main" id="{D037C506-597E-409F-AFC3-DC55F2A58179}"/>
+                <a16:creationId xmlns:a16="http://schemas.microsoft.com/office/drawing/2014/main" id="{01CC5488-0EE7-4EAE-8138-2D38DB32A12B}"/>
               </a:ext>
             </a:extLst>
           </p:cNvPr>
@@ -5223,7 +5223,7 @@
           <p:cNvPr id="10" name="s13-takeaway-rule">
             <a:extLst xmlns:a="http://schemas.openxmlformats.org/drawingml/2006/main">
               <a:ext uri="{FF2B5EF4-FFF2-40B4-BE49-F238E27FC236}">
-                <a16:creationId xmlns:a16="http://schemas.microsoft.com/office/drawing/2014/main" id="{5A20A8FB-4605-496A-9518-A2A0517D7A9B}"/>
+                <a16:creationId xmlns:a16="http://schemas.microsoft.com/office/drawing/2014/main" id="{0D523D6F-C826-450F-8EA1-900DCA943D50}"/>
               </a:ext>
             </a:extLst>
           </p:cNvPr>
@@ -5256,7 +5256,7 @@
           <p:cNvPr id="11" name="s13-takeaway">
             <a:extLst xmlns:a="http://schemas.openxmlformats.org/drawingml/2006/main">
               <a:ext uri="{FF2B5EF4-FFF2-40B4-BE49-F238E27FC236}">
-                <a16:creationId xmlns:a16="http://schemas.microsoft.com/office/drawing/2014/main" id="{5F145E5E-8409-4D58-8B7B-0E0314B3098C}"/>
+                <a16:creationId xmlns:a16="http://schemas.microsoft.com/office/drawing/2014/main" id="{5B595AC3-3D0E-4EDC-8338-B2853A8600A7}"/>
               </a:ext>
             </a:extLst>
           </p:cNvPr>
@@ -5281,7 +5281,7 @@
         </p:spPr>
         <p:txBody>
           <a:bodyPr xmlns:a="http://schemas.openxmlformats.org/drawingml/2006/main" lIns="0" tIns="0" rIns="0" bIns="0" anchor="ctr">
-            <a:normAutofit fontScale="95911"/>
+            <a:normAutofit fontScale="100000"/>
           </a:bodyPr>
           <a:lstStyle xmlns:a="http://schemas.openxmlformats.org/drawingml/2006/main"/>
           <a:p xmlns:a="http://schemas.openxmlformats.org/drawingml/2006/main">
@@ -5304,7 +5304,7 @@
                 <a:ea typeface="PingFang SC"/>
                 <a:cs typeface="PingFang SC"/>
               </a:rPr>
-              <a:t>课程精编页用于讲授主线；播放器中的“原课件”模式保留团队 PowerPoint 精选页、真实图片和可播放视频。</a:t>
+              <a:t>课程正文与幻灯片共享同一知识主线，图片和视频用于帮助理解本节概念与案例。</a:t>
             </a:r>
           </a:p>
         </p:txBody>
@@ -5312,7 +5312,7 @@
     </p:spTree>
     <p:extLst>
       <p:ext uri="{BB962C8B-B14F-4D97-AF65-F5344CB8AC3E}">
-        <p14:creationId xmlns:p14="http://schemas.microsoft.com/office/powerpoint/2010/main" val="2002023236"/>
+        <p14:creationId xmlns:p14="http://schemas.microsoft.com/office/powerpoint/2010/main" val="924770786"/>
       </p:ext>
     </p:extLst>
   </p:cSld>
@@ -5343,7 +5343,7 @@
           <p:cNvPr id="1" name="s2-rule">
             <a:extLst xmlns:a="http://schemas.openxmlformats.org/drawingml/2006/main">
               <a:ext uri="{FF2B5EF4-FFF2-40B4-BE49-F238E27FC236}">
-                <a16:creationId xmlns:a16="http://schemas.microsoft.com/office/drawing/2014/main" id="{D7F0BE05-246D-4573-BC66-EF83B4D26618}"/>
+                <a16:creationId xmlns:a16="http://schemas.microsoft.com/office/drawing/2014/main" id="{6AE28F22-CF7B-45AA-9B91-043DED75E28E}"/>
               </a:ext>
             </a:extLst>
           </p:cNvPr>
@@ -5376,7 +5376,7 @@
           <p:cNvPr id="2" name="s2-eyebrow">
             <a:extLst xmlns:a="http://schemas.openxmlformats.org/drawingml/2006/main">
               <a:ext uri="{FF2B5EF4-FFF2-40B4-BE49-F238E27FC236}">
-                <a16:creationId xmlns:a16="http://schemas.microsoft.com/office/drawing/2014/main" id="{07D1ECB1-7404-49FB-A612-D4DF67CDA45E}"/>
+                <a16:creationId xmlns:a16="http://schemas.microsoft.com/office/drawing/2014/main" id="{80A43E21-7D22-427D-9FEA-94DA54305BAB}"/>
               </a:ext>
             </a:extLst>
           </p:cNvPr>
@@ -5434,7 +5434,7 @@
           <p:cNvPr id="3" name="s2-title">
             <a:extLst xmlns:a="http://schemas.openxmlformats.org/drawingml/2006/main">
               <a:ext uri="{FF2B5EF4-FFF2-40B4-BE49-F238E27FC236}">
-                <a16:creationId xmlns:a16="http://schemas.microsoft.com/office/drawing/2014/main" id="{D17FC233-ABCD-4A04-B349-341C4939F738}"/>
+                <a16:creationId xmlns:a16="http://schemas.microsoft.com/office/drawing/2014/main" id="{82A77DF3-CDAF-42BB-922B-CCFF19D0E474}"/>
               </a:ext>
             </a:extLst>
           </p:cNvPr>
@@ -5492,7 +5492,7 @@
           <p:cNvPr id="4" name="s2-footer">
             <a:extLst xmlns:a="http://schemas.openxmlformats.org/drawingml/2006/main">
               <a:ext uri="{FF2B5EF4-FFF2-40B4-BE49-F238E27FC236}">
-                <a16:creationId xmlns:a16="http://schemas.microsoft.com/office/drawing/2014/main" id="{5EA76B64-191A-49BB-870E-1160B849AD81}"/>
+                <a16:creationId xmlns:a16="http://schemas.microsoft.com/office/drawing/2014/main" id="{5DEEB92F-7417-4A1D-B68D-49CDE262A5D7}"/>
               </a:ext>
             </a:extLst>
           </p:cNvPr>
@@ -5523,7 +5523,7 @@
           <p:cNvPr id="5" name="s2-identity">
             <a:extLst xmlns:a="http://schemas.openxmlformats.org/drawingml/2006/main">
               <a:ext uri="{FF2B5EF4-FFF2-40B4-BE49-F238E27FC236}">
-                <a16:creationId xmlns:a16="http://schemas.microsoft.com/office/drawing/2014/main" id="{6E1FBF79-6E86-4225-B74B-2DDEAF16264C}"/>
+                <a16:creationId xmlns:a16="http://schemas.microsoft.com/office/drawing/2014/main" id="{5224DB64-F3E6-4C36-B413-6CEF118A5B0C}"/>
               </a:ext>
             </a:extLst>
           </p:cNvPr>
@@ -5581,7 +5581,7 @@
           <p:cNvPr id="6" name="objective-1">
             <a:extLst xmlns:a="http://schemas.openxmlformats.org/drawingml/2006/main">
               <a:ext uri="{FF2B5EF4-FFF2-40B4-BE49-F238E27FC236}">
-                <a16:creationId xmlns:a16="http://schemas.microsoft.com/office/drawing/2014/main" id="{DDA682AC-DFC8-4704-8058-5062E3621F81}"/>
+                <a16:creationId xmlns:a16="http://schemas.microsoft.com/office/drawing/2014/main" id="{2406255B-AA8D-4BFE-A9F2-B675ED2A9688}"/>
               </a:ext>
             </a:extLst>
           </p:cNvPr>
@@ -5668,7 +5668,7 @@
           <p:cNvPr id="7" name="objective-2">
             <a:extLst xmlns:a="http://schemas.openxmlformats.org/drawingml/2006/main">
               <a:ext uri="{FF2B5EF4-FFF2-40B4-BE49-F238E27FC236}">
-                <a16:creationId xmlns:a16="http://schemas.microsoft.com/office/drawing/2014/main" id="{69A3334A-5193-4F54-873A-22F181E49195}"/>
+                <a16:creationId xmlns:a16="http://schemas.microsoft.com/office/drawing/2014/main" id="{8CB9F1A4-0BCF-416E-9738-3142F56A88ED}"/>
               </a:ext>
             </a:extLst>
           </p:cNvPr>
@@ -5755,7 +5755,7 @@
           <p:cNvPr id="8" name="objective-3">
             <a:extLst xmlns:a="http://schemas.openxmlformats.org/drawingml/2006/main">
               <a:ext uri="{FF2B5EF4-FFF2-40B4-BE49-F238E27FC236}">
-                <a16:creationId xmlns:a16="http://schemas.microsoft.com/office/drawing/2014/main" id="{027E8A8D-CA43-4B7E-894F-E41B3B254C15}"/>
+                <a16:creationId xmlns:a16="http://schemas.microsoft.com/office/drawing/2014/main" id="{43AC6996-C864-4D3F-A109-0953CC757258}"/>
               </a:ext>
             </a:extLst>
           </p:cNvPr>
@@ -5842,7 +5842,7 @@
           <p:cNvPr id="9" name="objective-4">
             <a:extLst xmlns:a="http://schemas.openxmlformats.org/drawingml/2006/main">
               <a:ext uri="{FF2B5EF4-FFF2-40B4-BE49-F238E27FC236}">
-                <a16:creationId xmlns:a16="http://schemas.microsoft.com/office/drawing/2014/main" id="{0D316C2A-3891-47EC-B426-25EFF9B4B41F}"/>
+                <a16:creationId xmlns:a16="http://schemas.microsoft.com/office/drawing/2014/main" id="{87CA84E8-3EC9-427F-B435-8BDDCF84F79A}"/>
               </a:ext>
             </a:extLst>
           </p:cNvPr>
@@ -5927,7 +5927,7 @@
     </p:spTree>
     <p:extLst>
       <p:ext uri="{BB962C8B-B14F-4D97-AF65-F5344CB8AC3E}">
-        <p14:creationId xmlns:p14="http://schemas.microsoft.com/office/powerpoint/2010/main" val="151465043"/>
+        <p14:creationId xmlns:p14="http://schemas.microsoft.com/office/powerpoint/2010/main" val="418060278"/>
       </p:ext>
     </p:extLst>
   </p:cSld>
@@ -5958,7 +5958,7 @@
           <p:cNvPr id="1" name="s3-rule">
             <a:extLst xmlns:a="http://schemas.openxmlformats.org/drawingml/2006/main">
               <a:ext uri="{FF2B5EF4-FFF2-40B4-BE49-F238E27FC236}">
-                <a16:creationId xmlns:a16="http://schemas.microsoft.com/office/drawing/2014/main" id="{FF29AE29-097A-4C1E-9C40-24D13AE09954}"/>
+                <a16:creationId xmlns:a16="http://schemas.microsoft.com/office/drawing/2014/main" id="{3B25A709-D945-48EB-9BE7-F34CDCF2A944}"/>
               </a:ext>
             </a:extLst>
           </p:cNvPr>
@@ -5991,7 +5991,7 @@
           <p:cNvPr id="2" name="s3-eyebrow">
             <a:extLst xmlns:a="http://schemas.openxmlformats.org/drawingml/2006/main">
               <a:ext uri="{FF2B5EF4-FFF2-40B4-BE49-F238E27FC236}">
-                <a16:creationId xmlns:a16="http://schemas.microsoft.com/office/drawing/2014/main" id="{868CBEBE-251B-438D-85E7-788C07B1F094}"/>
+                <a16:creationId xmlns:a16="http://schemas.microsoft.com/office/drawing/2014/main" id="{54CD92AD-7591-40B1-994E-0CC3914DA987}"/>
               </a:ext>
             </a:extLst>
           </p:cNvPr>
@@ -6049,7 +6049,7 @@
           <p:cNvPr id="3" name="s3-title">
             <a:extLst xmlns:a="http://schemas.openxmlformats.org/drawingml/2006/main">
               <a:ext uri="{FF2B5EF4-FFF2-40B4-BE49-F238E27FC236}">
-                <a16:creationId xmlns:a16="http://schemas.microsoft.com/office/drawing/2014/main" id="{71951C2D-BACF-4D9B-92DF-53DD9DFD60F2}"/>
+                <a16:creationId xmlns:a16="http://schemas.microsoft.com/office/drawing/2014/main" id="{3A024B44-DEB8-4EA2-993C-F31C8ABB320A}"/>
               </a:ext>
             </a:extLst>
           </p:cNvPr>
@@ -6107,7 +6107,7 @@
           <p:cNvPr id="4" name="s3-footer">
             <a:extLst xmlns:a="http://schemas.openxmlformats.org/drawingml/2006/main">
               <a:ext uri="{FF2B5EF4-FFF2-40B4-BE49-F238E27FC236}">
-                <a16:creationId xmlns:a16="http://schemas.microsoft.com/office/drawing/2014/main" id="{951BF657-5FCA-4BB5-8E12-A18E7E37EE71}"/>
+                <a16:creationId xmlns:a16="http://schemas.microsoft.com/office/drawing/2014/main" id="{F6BB9273-D948-4F9A-AF2A-208F1B7B7CBA}"/>
               </a:ext>
             </a:extLst>
           </p:cNvPr>
@@ -6138,7 +6138,7 @@
           <p:cNvPr id="5" name="s3-identity">
             <a:extLst xmlns:a="http://schemas.openxmlformats.org/drawingml/2006/main">
               <a:ext uri="{FF2B5EF4-FFF2-40B4-BE49-F238E27FC236}">
-                <a16:creationId xmlns:a16="http://schemas.microsoft.com/office/drawing/2014/main" id="{13CB2049-CA6F-431A-90D6-F922A1DCB704}"/>
+                <a16:creationId xmlns:a16="http://schemas.microsoft.com/office/drawing/2014/main" id="{F09482E1-A957-4ED1-9E6B-8BEB10DC0ED1}"/>
               </a:ext>
             </a:extLst>
           </p:cNvPr>
@@ -6196,7 +6196,7 @@
           <p:cNvPr id="6" name="core-no-0">
             <a:extLst xmlns:a="http://schemas.openxmlformats.org/drawingml/2006/main">
               <a:ext uri="{FF2B5EF4-FFF2-40B4-BE49-F238E27FC236}">
-                <a16:creationId xmlns:a16="http://schemas.microsoft.com/office/drawing/2014/main" id="{091892AA-B2EF-4670-B285-1218FC32346E}"/>
+                <a16:creationId xmlns:a16="http://schemas.microsoft.com/office/drawing/2014/main" id="{0675DD04-D6B1-4BBD-9703-2AD1966B8EEF}"/>
               </a:ext>
             </a:extLst>
           </p:cNvPr>
@@ -6254,7 +6254,7 @@
           <p:cNvPr id="7" name="core-label-0">
             <a:extLst xmlns:a="http://schemas.openxmlformats.org/drawingml/2006/main">
               <a:ext uri="{FF2B5EF4-FFF2-40B4-BE49-F238E27FC236}">
-                <a16:creationId xmlns:a16="http://schemas.microsoft.com/office/drawing/2014/main" id="{8FA98F9C-4AE2-4612-A3E7-5622E8B9ADF1}"/>
+                <a16:creationId xmlns:a16="http://schemas.microsoft.com/office/drawing/2014/main" id="{440A5A0D-3D92-4ABE-93A2-9A985A90E73A}"/>
               </a:ext>
             </a:extLst>
           </p:cNvPr>
@@ -6312,7 +6312,7 @@
           <p:cNvPr id="8" name="core-body-0">
             <a:extLst xmlns:a="http://schemas.openxmlformats.org/drawingml/2006/main">
               <a:ext uri="{FF2B5EF4-FFF2-40B4-BE49-F238E27FC236}">
-                <a16:creationId xmlns:a16="http://schemas.microsoft.com/office/drawing/2014/main" id="{C7B73D46-E487-497D-A3EB-84F0C2838166}"/>
+                <a16:creationId xmlns:a16="http://schemas.microsoft.com/office/drawing/2014/main" id="{03439E8C-57F9-4F35-8857-45DBAF50BC89}"/>
               </a:ext>
             </a:extLst>
           </p:cNvPr>
@@ -6376,7 +6376,7 @@
           <p:cNvPr id="9" name="core-no-1">
             <a:extLst xmlns:a="http://schemas.openxmlformats.org/drawingml/2006/main">
               <a:ext uri="{FF2B5EF4-FFF2-40B4-BE49-F238E27FC236}">
-                <a16:creationId xmlns:a16="http://schemas.microsoft.com/office/drawing/2014/main" id="{74C922D2-8937-4B7D-B1FF-6E8E18F4611E}"/>
+                <a16:creationId xmlns:a16="http://schemas.microsoft.com/office/drawing/2014/main" id="{63837CFE-7804-46D4-B577-495A4C603C69}"/>
               </a:ext>
             </a:extLst>
           </p:cNvPr>
@@ -6434,7 +6434,7 @@
           <p:cNvPr id="10" name="core-body-1">
             <a:extLst xmlns:a="http://schemas.openxmlformats.org/drawingml/2006/main">
               <a:ext uri="{FF2B5EF4-FFF2-40B4-BE49-F238E27FC236}">
-                <a16:creationId xmlns:a16="http://schemas.microsoft.com/office/drawing/2014/main" id="{EA0F3640-4F57-4D7E-AFEF-721BBA872C81}"/>
+                <a16:creationId xmlns:a16="http://schemas.microsoft.com/office/drawing/2014/main" id="{E1861262-BBFE-4726-9A07-F4B896A91EC8}"/>
               </a:ext>
             </a:extLst>
           </p:cNvPr>
@@ -6498,7 +6498,7 @@
           <p:cNvPr id="11" name="core-no-2">
             <a:extLst xmlns:a="http://schemas.openxmlformats.org/drawingml/2006/main">
               <a:ext uri="{FF2B5EF4-FFF2-40B4-BE49-F238E27FC236}">
-                <a16:creationId xmlns:a16="http://schemas.microsoft.com/office/drawing/2014/main" id="{04452B26-6D61-4ECE-8310-8ED2291DEF4A}"/>
+                <a16:creationId xmlns:a16="http://schemas.microsoft.com/office/drawing/2014/main" id="{DB06DF75-CDB3-4F86-B93C-2BDB6241FCF4}"/>
               </a:ext>
             </a:extLst>
           </p:cNvPr>
@@ -6556,7 +6556,7 @@
           <p:cNvPr id="12" name="core-body-2">
             <a:extLst xmlns:a="http://schemas.openxmlformats.org/drawingml/2006/main">
               <a:ext uri="{FF2B5EF4-FFF2-40B4-BE49-F238E27FC236}">
-                <a16:creationId xmlns:a16="http://schemas.microsoft.com/office/drawing/2014/main" id="{3835C3FB-EA49-426B-AFD1-E9F1E16895BC}"/>
+                <a16:creationId xmlns:a16="http://schemas.microsoft.com/office/drawing/2014/main" id="{7629347C-D1D3-499D-A775-40337D2C7F73}"/>
               </a:ext>
             </a:extLst>
           </p:cNvPr>
@@ -6620,7 +6620,7 @@
           <p:cNvPr id="13" name="s3-takeaway-rule">
             <a:extLst xmlns:a="http://schemas.openxmlformats.org/drawingml/2006/main">
               <a:ext uri="{FF2B5EF4-FFF2-40B4-BE49-F238E27FC236}">
-                <a16:creationId xmlns:a16="http://schemas.microsoft.com/office/drawing/2014/main" id="{888442D4-0683-4595-9A82-6E5A38AA7842}"/>
+                <a16:creationId xmlns:a16="http://schemas.microsoft.com/office/drawing/2014/main" id="{9550BE84-1605-4C02-A63B-7A82F3D3377D}"/>
               </a:ext>
             </a:extLst>
           </p:cNvPr>
@@ -6653,7 +6653,7 @@
           <p:cNvPr id="14" name="s3-takeaway">
             <a:extLst xmlns:a="http://schemas.openxmlformats.org/drawingml/2006/main">
               <a:ext uri="{FF2B5EF4-FFF2-40B4-BE49-F238E27FC236}">
-                <a16:creationId xmlns:a16="http://schemas.microsoft.com/office/drawing/2014/main" id="{4332FCF2-61D2-4FA0-9A9C-0B6D59F9C25E}"/>
+                <a16:creationId xmlns:a16="http://schemas.microsoft.com/office/drawing/2014/main" id="{6B0B4FF6-077F-4451-82BA-01E907F8119E}"/>
               </a:ext>
             </a:extLst>
           </p:cNvPr>
@@ -6709,7 +6709,7 @@
     </p:spTree>
     <p:extLst>
       <p:ext uri="{BB962C8B-B14F-4D97-AF65-F5344CB8AC3E}">
-        <p14:creationId xmlns:p14="http://schemas.microsoft.com/office/powerpoint/2010/main" val="1922824737"/>
+        <p14:creationId xmlns:p14="http://schemas.microsoft.com/office/powerpoint/2010/main" val="83272085"/>
       </p:ext>
     </p:extLst>
   </p:cSld>
@@ -6740,7 +6740,7 @@
           <p:cNvPr id="1" name="s4-rule">
             <a:extLst xmlns:a="http://schemas.openxmlformats.org/drawingml/2006/main">
               <a:ext uri="{FF2B5EF4-FFF2-40B4-BE49-F238E27FC236}">
-                <a16:creationId xmlns:a16="http://schemas.microsoft.com/office/drawing/2014/main" id="{9320BCAB-B051-451F-97AF-D1AC35E262FD}"/>
+                <a16:creationId xmlns:a16="http://schemas.microsoft.com/office/drawing/2014/main" id="{EBFF5394-B9E9-4DF9-B6E3-B9676FB19481}"/>
               </a:ext>
             </a:extLst>
           </p:cNvPr>
@@ -6773,7 +6773,7 @@
           <p:cNvPr id="2" name="s4-eyebrow">
             <a:extLst xmlns:a="http://schemas.openxmlformats.org/drawingml/2006/main">
               <a:ext uri="{FF2B5EF4-FFF2-40B4-BE49-F238E27FC236}">
-                <a16:creationId xmlns:a16="http://schemas.microsoft.com/office/drawing/2014/main" id="{1CC446E2-9839-4715-B3BC-3813A6DC3CCE}"/>
+                <a16:creationId xmlns:a16="http://schemas.microsoft.com/office/drawing/2014/main" id="{FD9D57D3-4C28-4AB3-AA22-1150443FA2FD}"/>
               </a:ext>
             </a:extLst>
           </p:cNvPr>
@@ -6831,7 +6831,7 @@
           <p:cNvPr id="3" name="s4-title">
             <a:extLst xmlns:a="http://schemas.openxmlformats.org/drawingml/2006/main">
               <a:ext uri="{FF2B5EF4-FFF2-40B4-BE49-F238E27FC236}">
-                <a16:creationId xmlns:a16="http://schemas.microsoft.com/office/drawing/2014/main" id="{89044A12-56A1-448A-8C1E-274D1F6B9046}"/>
+                <a16:creationId xmlns:a16="http://schemas.microsoft.com/office/drawing/2014/main" id="{E59150C1-6E82-4745-95CC-534FDAFF9B47}"/>
               </a:ext>
             </a:extLst>
           </p:cNvPr>
@@ -6889,7 +6889,7 @@
           <p:cNvPr id="4" name="s4-footer">
             <a:extLst xmlns:a="http://schemas.openxmlformats.org/drawingml/2006/main">
               <a:ext uri="{FF2B5EF4-FFF2-40B4-BE49-F238E27FC236}">
-                <a16:creationId xmlns:a16="http://schemas.microsoft.com/office/drawing/2014/main" id="{F3F3CFA5-35BC-4703-912C-79A9E3EA7541}"/>
+                <a16:creationId xmlns:a16="http://schemas.microsoft.com/office/drawing/2014/main" id="{449B744C-F58E-4C03-A66F-EE7B15FC0776}"/>
               </a:ext>
             </a:extLst>
           </p:cNvPr>
@@ -6920,7 +6920,7 @@
           <p:cNvPr id="5" name="s4-identity">
             <a:extLst xmlns:a="http://schemas.openxmlformats.org/drawingml/2006/main">
               <a:ext uri="{FF2B5EF4-FFF2-40B4-BE49-F238E27FC236}">
-                <a16:creationId xmlns:a16="http://schemas.microsoft.com/office/drawing/2014/main" id="{30F22AFA-1032-4917-BC48-2F01978529BC}"/>
+                <a16:creationId xmlns:a16="http://schemas.microsoft.com/office/drawing/2014/main" id="{F3217799-AE03-4137-AF33-25F9D4147339}"/>
               </a:ext>
             </a:extLst>
           </p:cNvPr>
@@ -6978,7 +6978,7 @@
           <p:cNvPr id="6" name="core-no-0">
             <a:extLst xmlns:a="http://schemas.openxmlformats.org/drawingml/2006/main">
               <a:ext uri="{FF2B5EF4-FFF2-40B4-BE49-F238E27FC236}">
-                <a16:creationId xmlns:a16="http://schemas.microsoft.com/office/drawing/2014/main" id="{1EEBDDA2-20E9-43C1-8F20-13A848E1A6E8}"/>
+                <a16:creationId xmlns:a16="http://schemas.microsoft.com/office/drawing/2014/main" id="{495FFB71-9D3E-42F3-8CEE-252B396C18F8}"/>
               </a:ext>
             </a:extLst>
           </p:cNvPr>
@@ -7036,7 +7036,7 @@
           <p:cNvPr id="7" name="core-label-0">
             <a:extLst xmlns:a="http://schemas.openxmlformats.org/drawingml/2006/main">
               <a:ext uri="{FF2B5EF4-FFF2-40B4-BE49-F238E27FC236}">
-                <a16:creationId xmlns:a16="http://schemas.microsoft.com/office/drawing/2014/main" id="{8B5AB46A-3F70-4803-9564-1CA5E7C79E4E}"/>
+                <a16:creationId xmlns:a16="http://schemas.microsoft.com/office/drawing/2014/main" id="{00CC04E9-A42F-47FF-9ADE-1107F9EECAAF}"/>
               </a:ext>
             </a:extLst>
           </p:cNvPr>
@@ -7094,7 +7094,7 @@
           <p:cNvPr id="8" name="core-body-0">
             <a:extLst xmlns:a="http://schemas.openxmlformats.org/drawingml/2006/main">
               <a:ext uri="{FF2B5EF4-FFF2-40B4-BE49-F238E27FC236}">
-                <a16:creationId xmlns:a16="http://schemas.microsoft.com/office/drawing/2014/main" id="{020184D4-7994-4486-A802-E82B11B7D9EC}"/>
+                <a16:creationId xmlns:a16="http://schemas.microsoft.com/office/drawing/2014/main" id="{EA6D1BF9-3798-44EF-8D0F-B2D526B252F5}"/>
               </a:ext>
             </a:extLst>
           </p:cNvPr>
@@ -7158,7 +7158,7 @@
           <p:cNvPr id="9" name="core-no-1">
             <a:extLst xmlns:a="http://schemas.openxmlformats.org/drawingml/2006/main">
               <a:ext uri="{FF2B5EF4-FFF2-40B4-BE49-F238E27FC236}">
-                <a16:creationId xmlns:a16="http://schemas.microsoft.com/office/drawing/2014/main" id="{9F5AD380-7623-4A34-AC0D-F9FBA21D2644}"/>
+                <a16:creationId xmlns:a16="http://schemas.microsoft.com/office/drawing/2014/main" id="{5A8F6A5E-5E2B-4BC5-A7C1-6350D09840DA}"/>
               </a:ext>
             </a:extLst>
           </p:cNvPr>
@@ -7216,7 +7216,7 @@
           <p:cNvPr id="10" name="core-body-1">
             <a:extLst xmlns:a="http://schemas.openxmlformats.org/drawingml/2006/main">
               <a:ext uri="{FF2B5EF4-FFF2-40B4-BE49-F238E27FC236}">
-                <a16:creationId xmlns:a16="http://schemas.microsoft.com/office/drawing/2014/main" id="{3C5A1179-A81F-4374-9139-248B9ED655DA}"/>
+                <a16:creationId xmlns:a16="http://schemas.microsoft.com/office/drawing/2014/main" id="{CDD1DF1C-F9C4-48E5-9E31-A34DA3362668}"/>
               </a:ext>
             </a:extLst>
           </p:cNvPr>
@@ -7280,7 +7280,7 @@
           <p:cNvPr id="11" name="s4-takeaway-rule">
             <a:extLst xmlns:a="http://schemas.openxmlformats.org/drawingml/2006/main">
               <a:ext uri="{FF2B5EF4-FFF2-40B4-BE49-F238E27FC236}">
-                <a16:creationId xmlns:a16="http://schemas.microsoft.com/office/drawing/2014/main" id="{80D65F68-DAF0-4ADD-8F53-B776D524F98D}"/>
+                <a16:creationId xmlns:a16="http://schemas.microsoft.com/office/drawing/2014/main" id="{F927F404-58C7-49ED-8E61-C2BBF78CBD33}"/>
               </a:ext>
             </a:extLst>
           </p:cNvPr>
@@ -7313,7 +7313,7 @@
           <p:cNvPr id="12" name="s4-takeaway">
             <a:extLst xmlns:a="http://schemas.openxmlformats.org/drawingml/2006/main">
               <a:ext uri="{FF2B5EF4-FFF2-40B4-BE49-F238E27FC236}">
-                <a16:creationId xmlns:a16="http://schemas.microsoft.com/office/drawing/2014/main" id="{ADC60021-BBDF-4285-9F58-4E7EDABE17DC}"/>
+                <a16:creationId xmlns:a16="http://schemas.microsoft.com/office/drawing/2014/main" id="{A5C0E903-7508-4930-B2C3-1063D5A39FF9}"/>
               </a:ext>
             </a:extLst>
           </p:cNvPr>
@@ -7369,7 +7369,7 @@
     </p:spTree>
     <p:extLst>
       <p:ext uri="{BB962C8B-B14F-4D97-AF65-F5344CB8AC3E}">
-        <p14:creationId xmlns:p14="http://schemas.microsoft.com/office/powerpoint/2010/main" val="688702078"/>
+        <p14:creationId xmlns:p14="http://schemas.microsoft.com/office/powerpoint/2010/main" val="635308972"/>
       </p:ext>
     </p:extLst>
   </p:cSld>
@@ -7400,7 +7400,7 @@
           <p:cNvPr id="1" name="s5-rule">
             <a:extLst xmlns:a="http://schemas.openxmlformats.org/drawingml/2006/main">
               <a:ext uri="{FF2B5EF4-FFF2-40B4-BE49-F238E27FC236}">
-                <a16:creationId xmlns:a16="http://schemas.microsoft.com/office/drawing/2014/main" id="{D27FAEC8-7C6B-4364-9C59-CC2BE1CDBA16}"/>
+                <a16:creationId xmlns:a16="http://schemas.microsoft.com/office/drawing/2014/main" id="{0BD5ECE2-1EB4-46FD-A2FE-8AC62A507783}"/>
               </a:ext>
             </a:extLst>
           </p:cNvPr>
@@ -7433,7 +7433,7 @@
           <p:cNvPr id="2" name="s5-eyebrow">
             <a:extLst xmlns:a="http://schemas.openxmlformats.org/drawingml/2006/main">
               <a:ext uri="{FF2B5EF4-FFF2-40B4-BE49-F238E27FC236}">
-                <a16:creationId xmlns:a16="http://schemas.microsoft.com/office/drawing/2014/main" id="{E1046922-0058-4182-9C8A-284C0687D341}"/>
+                <a16:creationId xmlns:a16="http://schemas.microsoft.com/office/drawing/2014/main" id="{33B46056-1812-41C7-A417-EEDD01C501BF}"/>
               </a:ext>
             </a:extLst>
           </p:cNvPr>
@@ -7491,7 +7491,7 @@
           <p:cNvPr id="3" name="s5-title">
             <a:extLst xmlns:a="http://schemas.openxmlformats.org/drawingml/2006/main">
               <a:ext uri="{FF2B5EF4-FFF2-40B4-BE49-F238E27FC236}">
-                <a16:creationId xmlns:a16="http://schemas.microsoft.com/office/drawing/2014/main" id="{1E420686-61B2-4C3E-A6CD-91120B777B40}"/>
+                <a16:creationId xmlns:a16="http://schemas.microsoft.com/office/drawing/2014/main" id="{A4DFFE1D-6853-4393-A176-D132013A0DA8}"/>
               </a:ext>
             </a:extLst>
           </p:cNvPr>
@@ -7549,7 +7549,7 @@
           <p:cNvPr id="4" name="s5-footer">
             <a:extLst xmlns:a="http://schemas.openxmlformats.org/drawingml/2006/main">
               <a:ext uri="{FF2B5EF4-FFF2-40B4-BE49-F238E27FC236}">
-                <a16:creationId xmlns:a16="http://schemas.microsoft.com/office/drawing/2014/main" id="{76DED1FD-212B-43FC-BFE7-52577A7C5EC1}"/>
+                <a16:creationId xmlns:a16="http://schemas.microsoft.com/office/drawing/2014/main" id="{10954496-7AD5-4379-9181-19F1EE34ADE7}"/>
               </a:ext>
             </a:extLst>
           </p:cNvPr>
@@ -7580,7 +7580,7 @@
           <p:cNvPr id="5" name="s5-identity">
             <a:extLst xmlns:a="http://schemas.openxmlformats.org/drawingml/2006/main">
               <a:ext uri="{FF2B5EF4-FFF2-40B4-BE49-F238E27FC236}">
-                <a16:creationId xmlns:a16="http://schemas.microsoft.com/office/drawing/2014/main" id="{34283BD2-4F92-445E-9938-76817F732492}"/>
+                <a16:creationId xmlns:a16="http://schemas.microsoft.com/office/drawing/2014/main" id="{4A461539-4754-4487-BB23-AC5A05AA3076}"/>
               </a:ext>
             </a:extLst>
           </p:cNvPr>
@@ -7638,7 +7638,7 @@
           <p:cNvPr id="6" name="core-no-0">
             <a:extLst xmlns:a="http://schemas.openxmlformats.org/drawingml/2006/main">
               <a:ext uri="{FF2B5EF4-FFF2-40B4-BE49-F238E27FC236}">
-                <a16:creationId xmlns:a16="http://schemas.microsoft.com/office/drawing/2014/main" id="{81374F56-AE81-4B4E-B70E-82DC89F884F2}"/>
+                <a16:creationId xmlns:a16="http://schemas.microsoft.com/office/drawing/2014/main" id="{3286A3AC-F2ED-4A34-9429-F047B8F58AA5}"/>
               </a:ext>
             </a:extLst>
           </p:cNvPr>
@@ -7696,7 +7696,7 @@
           <p:cNvPr id="7" name="core-label-0">
             <a:extLst xmlns:a="http://schemas.openxmlformats.org/drawingml/2006/main">
               <a:ext uri="{FF2B5EF4-FFF2-40B4-BE49-F238E27FC236}">
-                <a16:creationId xmlns:a16="http://schemas.microsoft.com/office/drawing/2014/main" id="{88C9B54F-4041-459C-A22E-2F73DF16125A}"/>
+                <a16:creationId xmlns:a16="http://schemas.microsoft.com/office/drawing/2014/main" id="{2C54C7E8-DF42-4CFF-B1DE-77F5B788BF64}"/>
               </a:ext>
             </a:extLst>
           </p:cNvPr>
@@ -7754,7 +7754,7 @@
           <p:cNvPr id="8" name="core-body-0">
             <a:extLst xmlns:a="http://schemas.openxmlformats.org/drawingml/2006/main">
               <a:ext uri="{FF2B5EF4-FFF2-40B4-BE49-F238E27FC236}">
-                <a16:creationId xmlns:a16="http://schemas.microsoft.com/office/drawing/2014/main" id="{5E6F9167-E102-43F1-BADD-DAD39898ABC7}"/>
+                <a16:creationId xmlns:a16="http://schemas.microsoft.com/office/drawing/2014/main" id="{41889893-2A44-4A82-BC05-D4EA5F0A291C}"/>
               </a:ext>
             </a:extLst>
           </p:cNvPr>
@@ -7818,7 +7818,7 @@
           <p:cNvPr id="9" name="core-no-1">
             <a:extLst xmlns:a="http://schemas.openxmlformats.org/drawingml/2006/main">
               <a:ext uri="{FF2B5EF4-FFF2-40B4-BE49-F238E27FC236}">
-                <a16:creationId xmlns:a16="http://schemas.microsoft.com/office/drawing/2014/main" id="{6314C4B5-BBD5-4739-AB01-476C5EBD1659}"/>
+                <a16:creationId xmlns:a16="http://schemas.microsoft.com/office/drawing/2014/main" id="{60DD9B6B-6A02-491E-81E3-FE24A8ECC509}"/>
               </a:ext>
             </a:extLst>
           </p:cNvPr>
@@ -7876,7 +7876,7 @@
           <p:cNvPr id="10" name="core-body-1">
             <a:extLst xmlns:a="http://schemas.openxmlformats.org/drawingml/2006/main">
               <a:ext uri="{FF2B5EF4-FFF2-40B4-BE49-F238E27FC236}">
-                <a16:creationId xmlns:a16="http://schemas.microsoft.com/office/drawing/2014/main" id="{555782E6-322E-4286-83C2-C2C9F39883F8}"/>
+                <a16:creationId xmlns:a16="http://schemas.microsoft.com/office/drawing/2014/main" id="{B5D75349-F5F3-40EA-B8AB-D26BA86A3D81}"/>
               </a:ext>
             </a:extLst>
           </p:cNvPr>
@@ -7940,7 +7940,7 @@
           <p:cNvPr id="11" name="core-no-2">
             <a:extLst xmlns:a="http://schemas.openxmlformats.org/drawingml/2006/main">
               <a:ext uri="{FF2B5EF4-FFF2-40B4-BE49-F238E27FC236}">
-                <a16:creationId xmlns:a16="http://schemas.microsoft.com/office/drawing/2014/main" id="{03F7D108-1EDC-4C30-B689-2E46A59530C7}"/>
+                <a16:creationId xmlns:a16="http://schemas.microsoft.com/office/drawing/2014/main" id="{107A62FE-033C-4599-9310-037926A25C23}"/>
               </a:ext>
             </a:extLst>
           </p:cNvPr>
@@ -7998,7 +7998,7 @@
           <p:cNvPr id="12" name="core-body-2">
             <a:extLst xmlns:a="http://schemas.openxmlformats.org/drawingml/2006/main">
               <a:ext uri="{FF2B5EF4-FFF2-40B4-BE49-F238E27FC236}">
-                <a16:creationId xmlns:a16="http://schemas.microsoft.com/office/drawing/2014/main" id="{BBAC0A87-FC91-4A7E-AD4E-1451437258D7}"/>
+                <a16:creationId xmlns:a16="http://schemas.microsoft.com/office/drawing/2014/main" id="{1D2F1732-B3CD-49EE-8783-9E3CAA1D94AF}"/>
               </a:ext>
             </a:extLst>
           </p:cNvPr>
@@ -8062,7 +8062,7 @@
           <p:cNvPr id="13" name="s5-takeaway-rule">
             <a:extLst xmlns:a="http://schemas.openxmlformats.org/drawingml/2006/main">
               <a:ext uri="{FF2B5EF4-FFF2-40B4-BE49-F238E27FC236}">
-                <a16:creationId xmlns:a16="http://schemas.microsoft.com/office/drawing/2014/main" id="{D86541D8-026E-44EF-8B5D-17525E1F55D5}"/>
+                <a16:creationId xmlns:a16="http://schemas.microsoft.com/office/drawing/2014/main" id="{917F7D49-30DE-4F63-932A-25BCA366ECC8}"/>
               </a:ext>
             </a:extLst>
           </p:cNvPr>
@@ -8095,7 +8095,7 @@
           <p:cNvPr id="14" name="s5-takeaway">
             <a:extLst xmlns:a="http://schemas.openxmlformats.org/drawingml/2006/main">
               <a:ext uri="{FF2B5EF4-FFF2-40B4-BE49-F238E27FC236}">
-                <a16:creationId xmlns:a16="http://schemas.microsoft.com/office/drawing/2014/main" id="{F8A82244-92F0-4919-8BE3-3A8CAE7DEB18}"/>
+                <a16:creationId xmlns:a16="http://schemas.microsoft.com/office/drawing/2014/main" id="{B984655B-6A61-4F27-BD5C-CA30AF04E93E}"/>
               </a:ext>
             </a:extLst>
           </p:cNvPr>
@@ -8151,7 +8151,7 @@
     </p:spTree>
     <p:extLst>
       <p:ext uri="{BB962C8B-B14F-4D97-AF65-F5344CB8AC3E}">
-        <p14:creationId xmlns:p14="http://schemas.microsoft.com/office/powerpoint/2010/main" val="742573971"/>
+        <p14:creationId xmlns:p14="http://schemas.microsoft.com/office/powerpoint/2010/main" val="953077487"/>
       </p:ext>
     </p:extLst>
   </p:cSld>
@@ -8182,7 +8182,7 @@
           <p:cNvPr id="1" name="s6-rule">
             <a:extLst xmlns:a="http://schemas.openxmlformats.org/drawingml/2006/main">
               <a:ext uri="{FF2B5EF4-FFF2-40B4-BE49-F238E27FC236}">
-                <a16:creationId xmlns:a16="http://schemas.microsoft.com/office/drawing/2014/main" id="{6B379729-331B-4318-91E5-3542DAC2A4AD}"/>
+                <a16:creationId xmlns:a16="http://schemas.microsoft.com/office/drawing/2014/main" id="{0E9166BA-B304-49EA-AE6A-D45CBAD6C9ED}"/>
               </a:ext>
             </a:extLst>
           </p:cNvPr>
@@ -8215,7 +8215,7 @@
           <p:cNvPr id="2" name="s6-eyebrow">
             <a:extLst xmlns:a="http://schemas.openxmlformats.org/drawingml/2006/main">
               <a:ext uri="{FF2B5EF4-FFF2-40B4-BE49-F238E27FC236}">
-                <a16:creationId xmlns:a16="http://schemas.microsoft.com/office/drawing/2014/main" id="{156CC8ED-2341-4092-A9CD-1EE9DA177110}"/>
+                <a16:creationId xmlns:a16="http://schemas.microsoft.com/office/drawing/2014/main" id="{6952AF75-DD97-42B1-9D28-09B63A15FFE6}"/>
               </a:ext>
             </a:extLst>
           </p:cNvPr>
@@ -8273,7 +8273,7 @@
           <p:cNvPr id="3" name="s6-title">
             <a:extLst xmlns:a="http://schemas.openxmlformats.org/drawingml/2006/main">
               <a:ext uri="{FF2B5EF4-FFF2-40B4-BE49-F238E27FC236}">
-                <a16:creationId xmlns:a16="http://schemas.microsoft.com/office/drawing/2014/main" id="{69511169-D33F-4EA4-BC77-F9BA31F0675B}"/>
+                <a16:creationId xmlns:a16="http://schemas.microsoft.com/office/drawing/2014/main" id="{884B6266-D67F-4FAC-9777-9194EF189CAF}"/>
               </a:ext>
             </a:extLst>
           </p:cNvPr>
@@ -8331,7 +8331,7 @@
           <p:cNvPr id="4" name="s6-footer">
             <a:extLst xmlns:a="http://schemas.openxmlformats.org/drawingml/2006/main">
               <a:ext uri="{FF2B5EF4-FFF2-40B4-BE49-F238E27FC236}">
-                <a16:creationId xmlns:a16="http://schemas.microsoft.com/office/drawing/2014/main" id="{AD886997-ECA8-4E44-B96C-F2651A18AD24}"/>
+                <a16:creationId xmlns:a16="http://schemas.microsoft.com/office/drawing/2014/main" id="{B0B3F759-9278-47A1-AD30-0685989A4481}"/>
               </a:ext>
             </a:extLst>
           </p:cNvPr>
@@ -8362,7 +8362,7 @@
           <p:cNvPr id="5" name="s6-identity">
             <a:extLst xmlns:a="http://schemas.openxmlformats.org/drawingml/2006/main">
               <a:ext uri="{FF2B5EF4-FFF2-40B4-BE49-F238E27FC236}">
-                <a16:creationId xmlns:a16="http://schemas.microsoft.com/office/drawing/2014/main" id="{DE014F7D-D0D8-4BB0-8F57-7F9BF2CA1640}"/>
+                <a16:creationId xmlns:a16="http://schemas.microsoft.com/office/drawing/2014/main" id="{2C28CF21-3764-4C76-9EB4-3BB2394FCBF6}"/>
               </a:ext>
             </a:extLst>
           </p:cNvPr>
@@ -8420,7 +8420,7 @@
           <p:cNvPr id="6" name="core-no-0">
             <a:extLst xmlns:a="http://schemas.openxmlformats.org/drawingml/2006/main">
               <a:ext uri="{FF2B5EF4-FFF2-40B4-BE49-F238E27FC236}">
-                <a16:creationId xmlns:a16="http://schemas.microsoft.com/office/drawing/2014/main" id="{2A8F7AC8-C5CA-4275-8087-29BA4D8FF2D8}"/>
+                <a16:creationId xmlns:a16="http://schemas.microsoft.com/office/drawing/2014/main" id="{9B96380E-E254-4766-BC94-D94D06DBF0D8}"/>
               </a:ext>
             </a:extLst>
           </p:cNvPr>
@@ -8478,7 +8478,7 @@
           <p:cNvPr id="7" name="core-label-0">
             <a:extLst xmlns:a="http://schemas.openxmlformats.org/drawingml/2006/main">
               <a:ext uri="{FF2B5EF4-FFF2-40B4-BE49-F238E27FC236}">
-                <a16:creationId xmlns:a16="http://schemas.microsoft.com/office/drawing/2014/main" id="{206176F1-1543-4FC3-98A4-C33148995FB1}"/>
+                <a16:creationId xmlns:a16="http://schemas.microsoft.com/office/drawing/2014/main" id="{34AF918E-59BA-47A8-ABDE-2BB8FD39B06C}"/>
               </a:ext>
             </a:extLst>
           </p:cNvPr>
@@ -8536,7 +8536,7 @@
           <p:cNvPr id="8" name="core-body-0">
             <a:extLst xmlns:a="http://schemas.openxmlformats.org/drawingml/2006/main">
               <a:ext uri="{FF2B5EF4-FFF2-40B4-BE49-F238E27FC236}">
-                <a16:creationId xmlns:a16="http://schemas.microsoft.com/office/drawing/2014/main" id="{B4135712-D798-4C2D-976F-874411514B1D}"/>
+                <a16:creationId xmlns:a16="http://schemas.microsoft.com/office/drawing/2014/main" id="{8A90741E-2899-4FD5-BF98-BF46CE11DEDD}"/>
               </a:ext>
             </a:extLst>
           </p:cNvPr>
@@ -8600,7 +8600,7 @@
           <p:cNvPr id="9" name="core-no-1">
             <a:extLst xmlns:a="http://schemas.openxmlformats.org/drawingml/2006/main">
               <a:ext uri="{FF2B5EF4-FFF2-40B4-BE49-F238E27FC236}">
-                <a16:creationId xmlns:a16="http://schemas.microsoft.com/office/drawing/2014/main" id="{E431132C-C51B-4B58-9D4C-0AAF80A076B3}"/>
+                <a16:creationId xmlns:a16="http://schemas.microsoft.com/office/drawing/2014/main" id="{6176EE29-D1F8-4373-8158-E985ACA3C693}"/>
               </a:ext>
             </a:extLst>
           </p:cNvPr>
@@ -8658,7 +8658,7 @@
           <p:cNvPr id="10" name="core-body-1">
             <a:extLst xmlns:a="http://schemas.openxmlformats.org/drawingml/2006/main">
               <a:ext uri="{FF2B5EF4-FFF2-40B4-BE49-F238E27FC236}">
-                <a16:creationId xmlns:a16="http://schemas.microsoft.com/office/drawing/2014/main" id="{CC795A2B-9FB3-452E-B367-107FB1C12CBD}"/>
+                <a16:creationId xmlns:a16="http://schemas.microsoft.com/office/drawing/2014/main" id="{B1752E84-675F-4B93-999B-F4D01D4F6A00}"/>
               </a:ext>
             </a:extLst>
           </p:cNvPr>
@@ -8722,7 +8722,7 @@
           <p:cNvPr id="11" name="s6-takeaway-rule">
             <a:extLst xmlns:a="http://schemas.openxmlformats.org/drawingml/2006/main">
               <a:ext uri="{FF2B5EF4-FFF2-40B4-BE49-F238E27FC236}">
-                <a16:creationId xmlns:a16="http://schemas.microsoft.com/office/drawing/2014/main" id="{82C30259-1B13-4C7B-8E07-486FC2BAE81A}"/>
+                <a16:creationId xmlns:a16="http://schemas.microsoft.com/office/drawing/2014/main" id="{75EBA89C-A0DC-44D0-A4F2-C93F8871845B}"/>
               </a:ext>
             </a:extLst>
           </p:cNvPr>
@@ -8755,7 +8755,7 @@
           <p:cNvPr id="12" name="s6-takeaway">
             <a:extLst xmlns:a="http://schemas.openxmlformats.org/drawingml/2006/main">
               <a:ext uri="{FF2B5EF4-FFF2-40B4-BE49-F238E27FC236}">
-                <a16:creationId xmlns:a16="http://schemas.microsoft.com/office/drawing/2014/main" id="{199D63F3-9F28-4195-B842-9CCFC0FBFCE0}"/>
+                <a16:creationId xmlns:a16="http://schemas.microsoft.com/office/drawing/2014/main" id="{5C86007D-4B70-4A80-9F2A-873F9BEBE91E}"/>
               </a:ext>
             </a:extLst>
           </p:cNvPr>
@@ -8811,7 +8811,7 @@
     </p:spTree>
     <p:extLst>
       <p:ext uri="{BB962C8B-B14F-4D97-AF65-F5344CB8AC3E}">
-        <p14:creationId xmlns:p14="http://schemas.microsoft.com/office/powerpoint/2010/main" val="270460888"/>
+        <p14:creationId xmlns:p14="http://schemas.microsoft.com/office/powerpoint/2010/main" val="939192153"/>
       </p:ext>
     </p:extLst>
   </p:cSld>
@@ -8842,7 +8842,7 @@
           <p:cNvPr id="1" name="s7-rule">
             <a:extLst xmlns:a="http://schemas.openxmlformats.org/drawingml/2006/main">
               <a:ext uri="{FF2B5EF4-FFF2-40B4-BE49-F238E27FC236}">
-                <a16:creationId xmlns:a16="http://schemas.microsoft.com/office/drawing/2014/main" id="{0E5728F4-A53F-4012-A15B-24970C4DD087}"/>
+                <a16:creationId xmlns:a16="http://schemas.microsoft.com/office/drawing/2014/main" id="{1832DF74-AD92-4097-9D51-A06D1DE280D9}"/>
               </a:ext>
             </a:extLst>
           </p:cNvPr>
@@ -8875,7 +8875,7 @@
           <p:cNvPr id="2" name="s7-eyebrow">
             <a:extLst xmlns:a="http://schemas.openxmlformats.org/drawingml/2006/main">
               <a:ext uri="{FF2B5EF4-FFF2-40B4-BE49-F238E27FC236}">
-                <a16:creationId xmlns:a16="http://schemas.microsoft.com/office/drawing/2014/main" id="{28773110-499A-4A74-8C62-78A001116F5F}"/>
+                <a16:creationId xmlns:a16="http://schemas.microsoft.com/office/drawing/2014/main" id="{CD188DCE-8A66-4CB6-A6DF-31405C16E59F}"/>
               </a:ext>
             </a:extLst>
           </p:cNvPr>
@@ -8933,7 +8933,7 @@
           <p:cNvPr id="3" name="s7-title">
             <a:extLst xmlns:a="http://schemas.openxmlformats.org/drawingml/2006/main">
               <a:ext uri="{FF2B5EF4-FFF2-40B4-BE49-F238E27FC236}">
-                <a16:creationId xmlns:a16="http://schemas.microsoft.com/office/drawing/2014/main" id="{3DCD7732-965F-4782-AEFB-943206310B38}"/>
+                <a16:creationId xmlns:a16="http://schemas.microsoft.com/office/drawing/2014/main" id="{652D8D33-4DC1-4A96-80DE-77C4C46AAEC0}"/>
               </a:ext>
             </a:extLst>
           </p:cNvPr>
@@ -8991,7 +8991,7 @@
           <p:cNvPr id="4" name="s7-footer">
             <a:extLst xmlns:a="http://schemas.openxmlformats.org/drawingml/2006/main">
               <a:ext uri="{FF2B5EF4-FFF2-40B4-BE49-F238E27FC236}">
-                <a16:creationId xmlns:a16="http://schemas.microsoft.com/office/drawing/2014/main" id="{C449B7AB-0748-44F5-A4DC-4DCD0BF3A72D}"/>
+                <a16:creationId xmlns:a16="http://schemas.microsoft.com/office/drawing/2014/main" id="{2BC3BF3B-24D8-4846-8882-693F1EB80E5C}"/>
               </a:ext>
             </a:extLst>
           </p:cNvPr>
@@ -9022,7 +9022,7 @@
           <p:cNvPr id="5" name="s7-identity">
             <a:extLst xmlns:a="http://schemas.openxmlformats.org/drawingml/2006/main">
               <a:ext uri="{FF2B5EF4-FFF2-40B4-BE49-F238E27FC236}">
-                <a16:creationId xmlns:a16="http://schemas.microsoft.com/office/drawing/2014/main" id="{3CB07ECC-AD92-4625-A67D-DA974312793B}"/>
+                <a16:creationId xmlns:a16="http://schemas.microsoft.com/office/drawing/2014/main" id="{FB5FF962-A8E1-45E7-8B3A-55AB61782FFD}"/>
               </a:ext>
             </a:extLst>
           </p:cNvPr>
@@ -9080,7 +9080,7 @@
           <p:cNvPr id="6" name="core-no-0">
             <a:extLst xmlns:a="http://schemas.openxmlformats.org/drawingml/2006/main">
               <a:ext uri="{FF2B5EF4-FFF2-40B4-BE49-F238E27FC236}">
-                <a16:creationId xmlns:a16="http://schemas.microsoft.com/office/drawing/2014/main" id="{CF674971-8496-4523-B4B7-60D9059C9E1B}"/>
+                <a16:creationId xmlns:a16="http://schemas.microsoft.com/office/drawing/2014/main" id="{E5AFD9D6-5439-4135-9F78-B25874F89EC1}"/>
               </a:ext>
             </a:extLst>
           </p:cNvPr>
@@ -9138,7 +9138,7 @@
           <p:cNvPr id="7" name="core-label-0">
             <a:extLst xmlns:a="http://schemas.openxmlformats.org/drawingml/2006/main">
               <a:ext uri="{FF2B5EF4-FFF2-40B4-BE49-F238E27FC236}">
-                <a16:creationId xmlns:a16="http://schemas.microsoft.com/office/drawing/2014/main" id="{E93496DA-B9FB-4814-8A54-CBD12CC613B1}"/>
+                <a16:creationId xmlns:a16="http://schemas.microsoft.com/office/drawing/2014/main" id="{A40A05BD-32F5-4A7C-83FB-3BAA6899E1FD}"/>
               </a:ext>
             </a:extLst>
           </p:cNvPr>
@@ -9196,7 +9196,7 @@
           <p:cNvPr id="8" name="core-body-0">
             <a:extLst xmlns:a="http://schemas.openxmlformats.org/drawingml/2006/main">
               <a:ext uri="{FF2B5EF4-FFF2-40B4-BE49-F238E27FC236}">
-                <a16:creationId xmlns:a16="http://schemas.microsoft.com/office/drawing/2014/main" id="{49C58A3F-CADF-4ACF-A480-984492C131DC}"/>
+                <a16:creationId xmlns:a16="http://schemas.microsoft.com/office/drawing/2014/main" id="{56E1A9C4-EB92-4194-882D-77A46D95D5C2}"/>
               </a:ext>
             </a:extLst>
           </p:cNvPr>
@@ -9260,7 +9260,7 @@
           <p:cNvPr id="9" name="core-no-1">
             <a:extLst xmlns:a="http://schemas.openxmlformats.org/drawingml/2006/main">
               <a:ext uri="{FF2B5EF4-FFF2-40B4-BE49-F238E27FC236}">
-                <a16:creationId xmlns:a16="http://schemas.microsoft.com/office/drawing/2014/main" id="{3D569ED1-FC62-4D7F-91D0-C34E396B4C78}"/>
+                <a16:creationId xmlns:a16="http://schemas.microsoft.com/office/drawing/2014/main" id="{081DC070-36EA-4890-BC4A-4639E65F1D88}"/>
               </a:ext>
             </a:extLst>
           </p:cNvPr>
@@ -9318,7 +9318,7 @@
           <p:cNvPr id="10" name="core-body-1">
             <a:extLst xmlns:a="http://schemas.openxmlformats.org/drawingml/2006/main">
               <a:ext uri="{FF2B5EF4-FFF2-40B4-BE49-F238E27FC236}">
-                <a16:creationId xmlns:a16="http://schemas.microsoft.com/office/drawing/2014/main" id="{EEA134AB-D4B2-47A3-AE01-D644B647EDEF}"/>
+                <a16:creationId xmlns:a16="http://schemas.microsoft.com/office/drawing/2014/main" id="{38688E73-ACB4-4FA5-824C-0A78972E77B1}"/>
               </a:ext>
             </a:extLst>
           </p:cNvPr>
@@ -9382,7 +9382,7 @@
           <p:cNvPr id="11" name="core-no-2">
             <a:extLst xmlns:a="http://schemas.openxmlformats.org/drawingml/2006/main">
               <a:ext uri="{FF2B5EF4-FFF2-40B4-BE49-F238E27FC236}">
-                <a16:creationId xmlns:a16="http://schemas.microsoft.com/office/drawing/2014/main" id="{75B40751-8662-407C-9D81-B31830BCB27B}"/>
+                <a16:creationId xmlns:a16="http://schemas.microsoft.com/office/drawing/2014/main" id="{F2CC0793-3CBD-4969-A714-0F5765B138C2}"/>
               </a:ext>
             </a:extLst>
           </p:cNvPr>
@@ -9440,7 +9440,7 @@
           <p:cNvPr id="12" name="core-body-2">
             <a:extLst xmlns:a="http://schemas.openxmlformats.org/drawingml/2006/main">
               <a:ext uri="{FF2B5EF4-FFF2-40B4-BE49-F238E27FC236}">
-                <a16:creationId xmlns:a16="http://schemas.microsoft.com/office/drawing/2014/main" id="{4F1D1B6C-494A-4F15-BECC-3B5B16B1B6A0}"/>
+                <a16:creationId xmlns:a16="http://schemas.microsoft.com/office/drawing/2014/main" id="{0612D16B-F754-4DA9-BFB8-C01FAE694B58}"/>
               </a:ext>
             </a:extLst>
           </p:cNvPr>
@@ -9504,7 +9504,7 @@
           <p:cNvPr id="13" name="s7-takeaway-rule">
             <a:extLst xmlns:a="http://schemas.openxmlformats.org/drawingml/2006/main">
               <a:ext uri="{FF2B5EF4-FFF2-40B4-BE49-F238E27FC236}">
-                <a16:creationId xmlns:a16="http://schemas.microsoft.com/office/drawing/2014/main" id="{B0A9326C-DAEE-4493-B7E4-E82BBC669B00}"/>
+                <a16:creationId xmlns:a16="http://schemas.microsoft.com/office/drawing/2014/main" id="{F10F5135-4127-41A1-868D-FB7D11931270}"/>
               </a:ext>
             </a:extLst>
           </p:cNvPr>
@@ -9537,7 +9537,7 @@
           <p:cNvPr id="14" name="s7-takeaway">
             <a:extLst xmlns:a="http://schemas.openxmlformats.org/drawingml/2006/main">
               <a:ext uri="{FF2B5EF4-FFF2-40B4-BE49-F238E27FC236}">
-                <a16:creationId xmlns:a16="http://schemas.microsoft.com/office/drawing/2014/main" id="{6CBC0AC2-57DD-4ADC-BACA-915F3EF6C4DC}"/>
+                <a16:creationId xmlns:a16="http://schemas.microsoft.com/office/drawing/2014/main" id="{27BB6A62-88E8-4260-8767-8FD70F19DAAA}"/>
               </a:ext>
             </a:extLst>
           </p:cNvPr>
@@ -9593,7 +9593,7 @@
     </p:spTree>
     <p:extLst>
       <p:ext uri="{BB962C8B-B14F-4D97-AF65-F5344CB8AC3E}">
-        <p14:creationId xmlns:p14="http://schemas.microsoft.com/office/powerpoint/2010/main" val="299268963"/>
+        <p14:creationId xmlns:p14="http://schemas.microsoft.com/office/powerpoint/2010/main" val="1311691681"/>
       </p:ext>
     </p:extLst>
   </p:cSld>
@@ -9624,7 +9624,7 @@
           <p:cNvPr id="1" name="s8-rule">
             <a:extLst xmlns:a="http://schemas.openxmlformats.org/drawingml/2006/main">
               <a:ext uri="{FF2B5EF4-FFF2-40B4-BE49-F238E27FC236}">
-                <a16:creationId xmlns:a16="http://schemas.microsoft.com/office/drawing/2014/main" id="{9E2C9D00-796D-4897-8152-A8313E561092}"/>
+                <a16:creationId xmlns:a16="http://schemas.microsoft.com/office/drawing/2014/main" id="{7892678B-CEA5-42F4-9F88-D65B3D02CD9A}"/>
               </a:ext>
             </a:extLst>
           </p:cNvPr>
@@ -9657,7 +9657,7 @@
           <p:cNvPr id="2" name="s8-eyebrow">
             <a:extLst xmlns:a="http://schemas.openxmlformats.org/drawingml/2006/main">
               <a:ext uri="{FF2B5EF4-FFF2-40B4-BE49-F238E27FC236}">
-                <a16:creationId xmlns:a16="http://schemas.microsoft.com/office/drawing/2014/main" id="{29CCC438-84DB-47C4-AA9F-A7FA6AD2C739}"/>
+                <a16:creationId xmlns:a16="http://schemas.microsoft.com/office/drawing/2014/main" id="{2E16128B-85BC-4654-B277-1A7839C63B84}"/>
               </a:ext>
             </a:extLst>
           </p:cNvPr>
@@ -9715,7 +9715,7 @@
           <p:cNvPr id="3" name="s8-title">
             <a:extLst xmlns:a="http://schemas.openxmlformats.org/drawingml/2006/main">
               <a:ext uri="{FF2B5EF4-FFF2-40B4-BE49-F238E27FC236}">
-                <a16:creationId xmlns:a16="http://schemas.microsoft.com/office/drawing/2014/main" id="{B3D9F0E9-FD4E-451D-86F8-30DAE15D5CD5}"/>
+                <a16:creationId xmlns:a16="http://schemas.microsoft.com/office/drawing/2014/main" id="{EBE58CEF-5008-47BB-90DF-5AD8E3B9979B}"/>
               </a:ext>
             </a:extLst>
           </p:cNvPr>
@@ -9773,7 +9773,7 @@
           <p:cNvPr id="4" name="s8-footer">
             <a:extLst xmlns:a="http://schemas.openxmlformats.org/drawingml/2006/main">
               <a:ext uri="{FF2B5EF4-FFF2-40B4-BE49-F238E27FC236}">
-                <a16:creationId xmlns:a16="http://schemas.microsoft.com/office/drawing/2014/main" id="{49AC63D4-24F3-43D4-8431-5FB895091F10}"/>
+                <a16:creationId xmlns:a16="http://schemas.microsoft.com/office/drawing/2014/main" id="{755D5448-62C3-48DF-A901-42C69FDAAAE5}"/>
               </a:ext>
             </a:extLst>
           </p:cNvPr>
@@ -9804,7 +9804,7 @@
           <p:cNvPr id="5" name="s8-identity">
             <a:extLst xmlns:a="http://schemas.openxmlformats.org/drawingml/2006/main">
               <a:ext uri="{FF2B5EF4-FFF2-40B4-BE49-F238E27FC236}">
-                <a16:creationId xmlns:a16="http://schemas.microsoft.com/office/drawing/2014/main" id="{9FB45E5C-171E-46AB-87C4-D18FBD4498F4}"/>
+                <a16:creationId xmlns:a16="http://schemas.microsoft.com/office/drawing/2014/main" id="{DC60F5A0-3C11-4323-B58E-E8CE4E8DB73C}"/>
               </a:ext>
             </a:extLst>
           </p:cNvPr>
@@ -9862,7 +9862,7 @@
           <p:cNvPr id="6" name="core-no-0">
             <a:extLst xmlns:a="http://schemas.openxmlformats.org/drawingml/2006/main">
               <a:ext uri="{FF2B5EF4-FFF2-40B4-BE49-F238E27FC236}">
-                <a16:creationId xmlns:a16="http://schemas.microsoft.com/office/drawing/2014/main" id="{038AD931-2E71-456A-A0F7-52A8293510AB}"/>
+                <a16:creationId xmlns:a16="http://schemas.microsoft.com/office/drawing/2014/main" id="{EC1D455D-ECE6-486B-8487-F043FAE2CBBB}"/>
               </a:ext>
             </a:extLst>
           </p:cNvPr>
@@ -9920,7 +9920,7 @@
           <p:cNvPr id="7" name="core-label-0">
             <a:extLst xmlns:a="http://schemas.openxmlformats.org/drawingml/2006/main">
               <a:ext uri="{FF2B5EF4-FFF2-40B4-BE49-F238E27FC236}">
-                <a16:creationId xmlns:a16="http://schemas.microsoft.com/office/drawing/2014/main" id="{508A2AA2-EEB5-4F72-8A1F-E1E40732952A}"/>
+                <a16:creationId xmlns:a16="http://schemas.microsoft.com/office/drawing/2014/main" id="{9B5F4D84-62BE-43C5-820F-4263C914C153}"/>
               </a:ext>
             </a:extLst>
           </p:cNvPr>
@@ -9978,7 +9978,7 @@
           <p:cNvPr id="8" name="core-body-0">
             <a:extLst xmlns:a="http://schemas.openxmlformats.org/drawingml/2006/main">
               <a:ext uri="{FF2B5EF4-FFF2-40B4-BE49-F238E27FC236}">
-                <a16:creationId xmlns:a16="http://schemas.microsoft.com/office/drawing/2014/main" id="{E8BE56A3-6946-4738-AB56-5F9880FF4CB9}"/>
+                <a16:creationId xmlns:a16="http://schemas.microsoft.com/office/drawing/2014/main" id="{15C4E423-7633-43A4-A378-A6E214456709}"/>
               </a:ext>
             </a:extLst>
           </p:cNvPr>
@@ -10042,7 +10042,7 @@
           <p:cNvPr id="9" name="core-no-1">
             <a:extLst xmlns:a="http://schemas.openxmlformats.org/drawingml/2006/main">
               <a:ext uri="{FF2B5EF4-FFF2-40B4-BE49-F238E27FC236}">
-                <a16:creationId xmlns:a16="http://schemas.microsoft.com/office/drawing/2014/main" id="{2D8671BD-9865-4249-B6D4-76C847C3643B}"/>
+                <a16:creationId xmlns:a16="http://schemas.microsoft.com/office/drawing/2014/main" id="{AE03337C-2FC4-4FFF-9F21-CEC684382829}"/>
               </a:ext>
             </a:extLst>
           </p:cNvPr>
@@ -10100,7 +10100,7 @@
           <p:cNvPr id="10" name="core-body-1">
             <a:extLst xmlns:a="http://schemas.openxmlformats.org/drawingml/2006/main">
               <a:ext uri="{FF2B5EF4-FFF2-40B4-BE49-F238E27FC236}">
-                <a16:creationId xmlns:a16="http://schemas.microsoft.com/office/drawing/2014/main" id="{70B657B1-E709-4A8A-914F-98D2345DA3F4}"/>
+                <a16:creationId xmlns:a16="http://schemas.microsoft.com/office/drawing/2014/main" id="{B224D068-2ED9-43EF-9404-1FC26B238F7D}"/>
               </a:ext>
             </a:extLst>
           </p:cNvPr>
@@ -10164,7 +10164,7 @@
           <p:cNvPr id="11" name="s8-takeaway-rule">
             <a:extLst xmlns:a="http://schemas.openxmlformats.org/drawingml/2006/main">
               <a:ext uri="{FF2B5EF4-FFF2-40B4-BE49-F238E27FC236}">
-                <a16:creationId xmlns:a16="http://schemas.microsoft.com/office/drawing/2014/main" id="{FED8D696-BC42-4EA3-B2A9-39CF5D90DECF}"/>
+                <a16:creationId xmlns:a16="http://schemas.microsoft.com/office/drawing/2014/main" id="{85D46248-FAAD-404E-922B-F9FB57B06BF4}"/>
               </a:ext>
             </a:extLst>
           </p:cNvPr>
@@ -10197,7 +10197,7 @@
           <p:cNvPr id="12" name="s8-takeaway">
             <a:extLst xmlns:a="http://schemas.openxmlformats.org/drawingml/2006/main">
               <a:ext uri="{FF2B5EF4-FFF2-40B4-BE49-F238E27FC236}">
-                <a16:creationId xmlns:a16="http://schemas.microsoft.com/office/drawing/2014/main" id="{93C2D3FD-225E-4A9C-9FA3-E9FE02697BCB}"/>
+                <a16:creationId xmlns:a16="http://schemas.microsoft.com/office/drawing/2014/main" id="{DD6358C1-E286-4057-ACF5-801D3743D300}"/>
               </a:ext>
             </a:extLst>
           </p:cNvPr>
@@ -10253,7 +10253,7 @@
     </p:spTree>
     <p:extLst>
       <p:ext uri="{BB962C8B-B14F-4D97-AF65-F5344CB8AC3E}">
-        <p14:creationId xmlns:p14="http://schemas.microsoft.com/office/powerpoint/2010/main" val="601375043"/>
+        <p14:creationId xmlns:p14="http://schemas.microsoft.com/office/powerpoint/2010/main" val="603978731"/>
       </p:ext>
     </p:extLst>
   </p:cSld>
@@ -10284,7 +10284,7 @@
           <p:cNvPr id="1" name="s9-rule">
             <a:extLst xmlns:a="http://schemas.openxmlformats.org/drawingml/2006/main">
               <a:ext uri="{FF2B5EF4-FFF2-40B4-BE49-F238E27FC236}">
-                <a16:creationId xmlns:a16="http://schemas.microsoft.com/office/drawing/2014/main" id="{425AD5ED-0E01-4757-8D06-4C204AB38E0A}"/>
+                <a16:creationId xmlns:a16="http://schemas.microsoft.com/office/drawing/2014/main" id="{D2370B2A-B0B8-4229-883D-9D54DA3E356E}"/>
               </a:ext>
             </a:extLst>
           </p:cNvPr>
@@ -10317,7 +10317,7 @@
           <p:cNvPr id="2" name="s9-eyebrow">
             <a:extLst xmlns:a="http://schemas.openxmlformats.org/drawingml/2006/main">
               <a:ext uri="{FF2B5EF4-FFF2-40B4-BE49-F238E27FC236}">
-                <a16:creationId xmlns:a16="http://schemas.microsoft.com/office/drawing/2014/main" id="{58176AD3-527E-4CA5-A82A-246E77BDCB1E}"/>
+                <a16:creationId xmlns:a16="http://schemas.microsoft.com/office/drawing/2014/main" id="{22A3C4C1-2805-4D24-9F31-FF6043CBD6A8}"/>
               </a:ext>
             </a:extLst>
           </p:cNvPr>
@@ -10375,7 +10375,7 @@
           <p:cNvPr id="3" name="s9-title">
             <a:extLst xmlns:a="http://schemas.openxmlformats.org/drawingml/2006/main">
               <a:ext uri="{FF2B5EF4-FFF2-40B4-BE49-F238E27FC236}">
-                <a16:creationId xmlns:a16="http://schemas.microsoft.com/office/drawing/2014/main" id="{4AF58B6D-23CF-45C3-A6E3-9D55B00972F1}"/>
+                <a16:creationId xmlns:a16="http://schemas.microsoft.com/office/drawing/2014/main" id="{DC3D8614-3EAD-4C37-8482-0D331FCEB8FB}"/>
               </a:ext>
             </a:extLst>
           </p:cNvPr>
@@ -10433,7 +10433,7 @@
           <p:cNvPr id="4" name="s9-footer">
             <a:extLst xmlns:a="http://schemas.openxmlformats.org/drawingml/2006/main">
               <a:ext uri="{FF2B5EF4-FFF2-40B4-BE49-F238E27FC236}">
-                <a16:creationId xmlns:a16="http://schemas.microsoft.com/office/drawing/2014/main" id="{DA7117DC-8907-40B0-A5F1-9BCB977743C5}"/>
+                <a16:creationId xmlns:a16="http://schemas.microsoft.com/office/drawing/2014/main" id="{CF2D5D1B-C578-41E5-9972-F1052DC1ABEA}"/>
               </a:ext>
             </a:extLst>
           </p:cNvPr>
@@ -10464,7 +10464,7 @@
           <p:cNvPr id="5" name="s9-identity">
             <a:extLst xmlns:a="http://schemas.openxmlformats.org/drawingml/2006/main">
               <a:ext uri="{FF2B5EF4-FFF2-40B4-BE49-F238E27FC236}">
-                <a16:creationId xmlns:a16="http://schemas.microsoft.com/office/drawing/2014/main" id="{7E16E21B-6804-450A-AEE1-9CD9AA483815}"/>
+                <a16:creationId xmlns:a16="http://schemas.microsoft.com/office/drawing/2014/main" id="{8D62EB7C-46B6-49F3-B88F-9D2829DBF000}"/>
               </a:ext>
             </a:extLst>
           </p:cNvPr>
@@ -10522,7 +10522,7 @@
           <p:cNvPr id="6" name="case-title">
             <a:extLst xmlns:a="http://schemas.openxmlformats.org/drawingml/2006/main">
               <a:ext uri="{FF2B5EF4-FFF2-40B4-BE49-F238E27FC236}">
-                <a16:creationId xmlns:a16="http://schemas.microsoft.com/office/drawing/2014/main" id="{D9560E9A-BAA8-4F6F-98E7-8DC4D19BB17A}"/>
+                <a16:creationId xmlns:a16="http://schemas.microsoft.com/office/drawing/2014/main" id="{BAB8E891-1B71-422F-94A0-20F3511F7578}"/>
               </a:ext>
             </a:extLst>
           </p:cNvPr>
@@ -10586,7 +10586,7 @@
           <p:cNvPr id="7" name="case-row-0">
             <a:extLst xmlns:a="http://schemas.openxmlformats.org/drawingml/2006/main">
               <a:ext uri="{FF2B5EF4-FFF2-40B4-BE49-F238E27FC236}">
-                <a16:creationId xmlns:a16="http://schemas.microsoft.com/office/drawing/2014/main" id="{17C674A0-FE91-4E49-B05F-FFDC59CDC7C0}"/>
+                <a16:creationId xmlns:a16="http://schemas.microsoft.com/office/drawing/2014/main" id="{69308CC4-868F-4FCE-9251-1B2D618F5A1F}"/>
               </a:ext>
             </a:extLst>
           </p:cNvPr>
@@ -10650,7 +10650,7 @@
           <p:cNvPr id="8" name="case-row-1">
             <a:extLst xmlns:a="http://schemas.openxmlformats.org/drawingml/2006/main">
               <a:ext uri="{FF2B5EF4-FFF2-40B4-BE49-F238E27FC236}">
-                <a16:creationId xmlns:a16="http://schemas.microsoft.com/office/drawing/2014/main" id="{42246968-C79E-41E0-8FC1-1F198B736701}"/>
+                <a16:creationId xmlns:a16="http://schemas.microsoft.com/office/drawing/2014/main" id="{F3EBE7D3-FD1C-4480-BA7A-AAE05F5C39F9}"/>
               </a:ext>
             </a:extLst>
           </p:cNvPr>
@@ -10714,7 +10714,7 @@
           <p:cNvPr id="9" name="case-row-2">
             <a:extLst xmlns:a="http://schemas.openxmlformats.org/drawingml/2006/main">
               <a:ext uri="{FF2B5EF4-FFF2-40B4-BE49-F238E27FC236}">
-                <a16:creationId xmlns:a16="http://schemas.microsoft.com/office/drawing/2014/main" id="{8B787D37-5B48-41F7-BEDD-5652E153FC11}"/>
+                <a16:creationId xmlns:a16="http://schemas.microsoft.com/office/drawing/2014/main" id="{DA896EBA-563F-492A-837A-7EF4834FC8F2}"/>
               </a:ext>
             </a:extLst>
           </p:cNvPr>
@@ -10778,7 +10778,7 @@
           <p:cNvPr id="10" name="case-row-3">
             <a:extLst xmlns:a="http://schemas.openxmlformats.org/drawingml/2006/main">
               <a:ext uri="{FF2B5EF4-FFF2-40B4-BE49-F238E27FC236}">
-                <a16:creationId xmlns:a16="http://schemas.microsoft.com/office/drawing/2014/main" id="{D4CCC32A-210F-4781-9406-FA12A9977818}"/>
+                <a16:creationId xmlns:a16="http://schemas.microsoft.com/office/drawing/2014/main" id="{338F237D-9106-47B3-8470-D88AD2A68856}"/>
               </a:ext>
             </a:extLst>
           </p:cNvPr>
@@ -10842,7 +10842,7 @@
           <p:cNvPr id="11" name="s9-takeaway-rule">
             <a:extLst xmlns:a="http://schemas.openxmlformats.org/drawingml/2006/main">
               <a:ext uri="{FF2B5EF4-FFF2-40B4-BE49-F238E27FC236}">
-                <a16:creationId xmlns:a16="http://schemas.microsoft.com/office/drawing/2014/main" id="{B15C1274-BF19-4650-944D-19F7F2C7F461}"/>
+                <a16:creationId xmlns:a16="http://schemas.microsoft.com/office/drawing/2014/main" id="{17EC3C24-4DD9-4EE7-8752-EDB6969A0BC5}"/>
               </a:ext>
             </a:extLst>
           </p:cNvPr>
@@ -10875,7 +10875,7 @@
           <p:cNvPr id="12" name="s9-takeaway">
             <a:extLst xmlns:a="http://schemas.openxmlformats.org/drawingml/2006/main">
               <a:ext uri="{FF2B5EF4-FFF2-40B4-BE49-F238E27FC236}">
-                <a16:creationId xmlns:a16="http://schemas.microsoft.com/office/drawing/2014/main" id="{977C42D7-80D6-4D90-81CC-EFB2B295493C}"/>
+                <a16:creationId xmlns:a16="http://schemas.microsoft.com/office/drawing/2014/main" id="{D2844488-A4A3-4BE7-8363-5FF393304FB5}"/>
               </a:ext>
             </a:extLst>
           </p:cNvPr>
@@ -10931,7 +10931,7 @@
     </p:spTree>
     <p:extLst>
       <p:ext uri="{BB962C8B-B14F-4D97-AF65-F5344CB8AC3E}">
-        <p14:creationId xmlns:p14="http://schemas.microsoft.com/office/powerpoint/2010/main" val="614439340"/>
+        <p14:creationId xmlns:p14="http://schemas.microsoft.com/office/powerpoint/2010/main" val="287692921"/>
       </p:ext>
     </p:extLst>
   </p:cSld>
